--- a/Documentations/presentation V1.pptx
+++ b/Documentations/presentation V1.pptx
@@ -30,7 +30,7 @@
   <p:notesSz cx="6858000" cy="9144000"/>
   <p:embeddedFontLst>
     <p:embeddedFont>
-      <p:font typeface="DM Sans" panose="020B0604020202020204" charset="0"/>
+      <p:font typeface="DM Sans" pitchFamily="2" charset="0"/>
       <p:regular r:id="rId23"/>
       <p:bold r:id="rId24"/>
       <p:italic r:id="rId25"/>
@@ -939,6 +939,62 @@
           </a:bodyPr>
           <a:lstStyle/>
           <a:p>
+            <a:r>
+              <a:rPr lang="en-US" b="1" dirty="0"/>
+              <a:t>Unique Constraints:</a:t>
+            </a:r>
+            <a:r>
+              <a:rPr lang="en-US" dirty="0"/>
+              <a:t> We cannot simply use European software because Egypt has unique "Hard Constraints".</a:t>
+            </a:r>
+          </a:p>
+          <a:p>
+            <a:r>
+              <a:rPr lang="en-US" b="1" dirty="0"/>
+              <a:t>Security Approvals:</a:t>
+            </a:r>
+            <a:r>
+              <a:rPr lang="en-US" dirty="0"/>
+              <a:t> Unlike most leagues, match venues and dates here are subject to security clearance, often requiring last-minute changes or neutral venues.</a:t>
+            </a:r>
+          </a:p>
+          <a:p>
+            <a:r>
+              <a:rPr lang="en-US" b="1" dirty="0"/>
+              <a:t>Stadium Sharing:</a:t>
+            </a:r>
+            <a:r>
+              <a:rPr lang="en-US" dirty="0"/>
+              <a:t> This is a critical bottleneck. We have multiple teams (like Al Ahly, Zamalek, and others) selecting </a:t>
+            </a:r>
+            <a:r>
+              <a:rPr lang="en-US" b="1" dirty="0"/>
+              <a:t>Cairo International Stadium</a:t>
+            </a:r>
+            <a:r>
+              <a:rPr lang="en-US" dirty="0"/>
+              <a:t> or </a:t>
+            </a:r>
+            <a:r>
+              <a:rPr lang="en-US" b="1" dirty="0"/>
+              <a:t>Borg Al-Arab</a:t>
+            </a:r>
+            <a:r>
+              <a:rPr lang="en-US" dirty="0"/>
+              <a:t> as their home. This creates a conflict that doesn't exist in leagues where every club owns its stadium.</a:t>
+            </a:r>
+          </a:p>
+          <a:p>
+            <a:r>
+              <a:rPr lang="en-US" b="1" dirty="0"/>
+              <a:t>CAF Uncertainty:</a:t>
+            </a:r>
+            <a:r>
+              <a:rPr lang="en-US" dirty="0"/>
+              <a:t> The scheduling of Al Ahly and Zamalek in African competitions is fluid, often forcing indefinite postponements that break the standard mathematical "patterns" we discussed earlier</a:t>
+            </a:r>
+          </a:p>
+          <a:p>
             <a:pPr marL="0" lvl="0" indent="0" algn="l" rtl="0">
               <a:spcBef>
                 <a:spcPts val="0"/>
@@ -948,7 +1004,7 @@
               </a:spcAft>
               <a:buNone/>
             </a:pPr>
-            <a:endParaRPr/>
+            <a:endParaRPr dirty="0"/>
           </a:p>
         </p:txBody>
       </p:sp>
@@ -1193,6 +1249,68 @@
           </a:bodyPr>
           <a:lstStyle/>
           <a:p>
+            <a:r>
+              <a:rPr lang="en-US" b="1" dirty="0"/>
+              <a:t>Methodology:</a:t>
+            </a:r>
+            <a:r>
+              <a:rPr lang="en-US" dirty="0"/>
+              <a:t> To build this system, we needed accurate data. We used </a:t>
+            </a:r>
+            <a:r>
+              <a:rPr lang="en-US" b="1" dirty="0"/>
+              <a:t>Python-based web scraping scripts</a:t>
+            </a:r>
+            <a:r>
+              <a:rPr lang="en-US" dirty="0"/>
+              <a:t> to extract structured information from sources like "</a:t>
+            </a:r>
+            <a:r>
+              <a:rPr lang="en-US" dirty="0" err="1"/>
+              <a:t>Yallakora</a:t>
+            </a:r>
+            <a:r>
+              <a:rPr lang="en-US" dirty="0"/>
+              <a:t>" and "</a:t>
+            </a:r>
+            <a:r>
+              <a:rPr lang="en-US" dirty="0" err="1"/>
+              <a:t>Transfermarkt</a:t>
+            </a:r>
+            <a:r>
+              <a:rPr lang="en-US" dirty="0"/>
+              <a:t>".</a:t>
+            </a:r>
+          </a:p>
+          <a:p>
+            <a:r>
+              <a:rPr lang="en-US" b="1" dirty="0"/>
+              <a:t>Why Automation?</a:t>
+            </a:r>
+            <a:r>
+              <a:rPr lang="en-US" dirty="0"/>
+              <a:t> This reduced manual data entry errors and ensured our inputs were consistent with officially published schedules.</a:t>
+            </a:r>
+          </a:p>
+          <a:p>
+            <a:r>
+              <a:rPr lang="en-US" b="1" dirty="0"/>
+              <a:t>Benchmarking:</a:t>
+            </a:r>
+            <a:r>
+              <a:rPr lang="en-US" dirty="0"/>
+              <a:t> Crucially, we also collected </a:t>
+            </a:r>
+            <a:r>
+              <a:rPr lang="en-US" b="1" dirty="0"/>
+              <a:t>Historical Schedule Data</a:t>
+            </a:r>
+            <a:r>
+              <a:rPr lang="en-US" dirty="0"/>
+              <a:t> from previous seasons. This acts as our "Benchmark," allowing us to mathematically compare our new optimized schedule against the actual manual schedules of the past to measure real improvements.</a:t>
+            </a:r>
+          </a:p>
+          <a:p>
             <a:pPr marL="0" lvl="0" indent="0" algn="l" rtl="0">
               <a:spcBef>
                 <a:spcPts val="0"/>
@@ -1202,7 +1320,7 @@
               </a:spcAft>
               <a:buNone/>
             </a:pPr>
-            <a:endParaRPr/>
+            <a:endParaRPr dirty="0"/>
           </a:p>
         </p:txBody>
       </p:sp>
@@ -1302,6 +1420,66 @@
           </a:bodyPr>
           <a:lstStyle/>
           <a:p>
+            <a:r>
+              <a:rPr lang="en-US" b="1" dirty="0"/>
+              <a:t>Teams:</a:t>
+            </a:r>
+            <a:r>
+              <a:rPr lang="en-US" dirty="0"/>
+              <a:t> We cataloged administrative details, including Home Stadiums and "Continental Flags" for teams playing in Africa.</a:t>
+            </a:r>
+          </a:p>
+          <a:p>
+            <a:r>
+              <a:rPr lang="en-US" b="1" dirty="0"/>
+              <a:t>Stadiums:</a:t>
+            </a:r>
+            <a:r>
+              <a:rPr lang="en-US" dirty="0"/>
+              <a:t> We mapped venue locations, capacities, and floodlight availability (for evening matches).</a:t>
+            </a:r>
+          </a:p>
+          <a:p>
+            <a:r>
+              <a:rPr lang="en-US" b="1" dirty="0"/>
+              <a:t>Calendar:</a:t>
+            </a:r>
+            <a:r>
+              <a:rPr lang="en-US" dirty="0"/>
+              <a:t> We created a time horizon listing every possible "slot" (Date + Time) for the season.</a:t>
+            </a:r>
+          </a:p>
+          <a:p>
+            <a:r>
+              <a:rPr lang="en-US" b="1" dirty="0"/>
+              <a:t>Security Matrix:</a:t>
+            </a:r>
+            <a:r>
+              <a:rPr lang="en-US" dirty="0"/>
+              <a:t> This is unique to our model. It is a specific table listing prohibited matchups and forced neutral venues.</a:t>
+            </a:r>
+          </a:p>
+          <a:p>
+            <a:r>
+              <a:rPr lang="en-US" b="1" dirty="0"/>
+              <a:t>Continental Blockers:</a:t>
+            </a:r>
+            <a:r>
+              <a:rPr lang="en-US" dirty="0"/>
+              <a:t> A schedule of CAF competition dates to ensure we don't book conflicting domestic matches.</a:t>
+            </a:r>
+          </a:p>
+          <a:p>
+            <a:r>
+              <a:rPr lang="en-US" b="1" dirty="0"/>
+              <a:t>Distance Matrix:</a:t>
+            </a:r>
+            <a:r>
+              <a:rPr lang="en-US" dirty="0"/>
+              <a:t> A calculation of the driving distance in Kilometers between every stadium to quantify travel fatigue.</a:t>
+            </a:r>
+          </a:p>
+          <a:p>
             <a:pPr marL="0" lvl="0" indent="0" algn="l" rtl="0">
               <a:spcBef>
                 <a:spcPts val="0"/>
@@ -1311,7 +1489,7 @@
               </a:spcAft>
               <a:buNone/>
             </a:pPr>
-            <a:endParaRPr/>
+            <a:endParaRPr dirty="0"/>
           </a:p>
         </p:txBody>
       </p:sp>
@@ -1428,6 +1606,52 @@
             <a:noAutofit/>
           </a:bodyPr>
           <a:lstStyle/>
+          <a:p>
+            <a:r>
+              <a:rPr lang="en-US" b="1" dirty="0"/>
+              <a:t>Infrastructure Model:</a:t>
+            </a:r>
+            <a:r>
+              <a:rPr lang="en-US" dirty="0"/>
+              <a:t> We established a relational database where every Team is linked to a Stadium, and every Stadium is linked to the Distance Matrix.</a:t>
+            </a:r>
+          </a:p>
+          <a:p>
+            <a:r>
+              <a:rPr lang="en-US" b="1" dirty="0"/>
+              <a:t>Temporal Model (Star Schema):</a:t>
+            </a:r>
+            <a:r>
+              <a:rPr lang="en-US" dirty="0"/>
+              <a:t> We created a "Star Schema" around the Calendar. By linking FIFA Days and CAF Dates to the master "</a:t>
+            </a:r>
+            <a:r>
+              <a:rPr lang="en-US" dirty="0" err="1"/>
+              <a:t>Day_ID</a:t>
+            </a:r>
+            <a:r>
+              <a:rPr lang="en-US" dirty="0"/>
+              <a:t>," the system can </a:t>
+            </a:r>
+            <a:r>
+              <a:rPr lang="en-US" b="1" dirty="0"/>
+              <a:t>automatically flag specific time slots as 'Blocked'</a:t>
+            </a:r>
+            <a:r>
+              <a:rPr lang="en-US" dirty="0"/>
+              <a:t>.</a:t>
+            </a:r>
+          </a:p>
+          <a:p>
+            <a:r>
+              <a:rPr lang="en-US" b="1" dirty="0"/>
+              <a:t>Impact:</a:t>
+            </a:r>
+            <a:r>
+              <a:rPr lang="en-US" dirty="0"/>
+              <a:t> This means the model knows—without us telling it every time—that no domestic match can be scheduled during a confirmed international window</a:t>
+            </a:r>
+          </a:p>
           <a:p>
             <a:pPr marL="0" lvl="0" indent="0" algn="l" rtl="0">
               <a:spcBef>
@@ -1555,6 +1779,44 @@
             <a:noAutofit/>
           </a:bodyPr>
           <a:lstStyle/>
+          <a:p>
+            <a:r>
+              <a:rPr lang="en-US" b="1" dirty="0"/>
+              <a:t>Standardization:</a:t>
+            </a:r>
+            <a:r>
+              <a:rPr lang="en-US" dirty="0"/>
+              <a:t> The raw data had inconsistent date formats. We converted everything to a standard MM/DD/YYYY format for mathematical compatibility.</a:t>
+            </a:r>
+          </a:p>
+          <a:p>
+            <a:r>
+              <a:rPr lang="en-US" b="1" dirty="0"/>
+              <a:t>Unification:</a:t>
+            </a:r>
+            <a:r>
+              <a:rPr lang="en-US" dirty="0"/>
+              <a:t> We fixed team naming inconsistencies (e.g., "Al-Ahly" vs "Al Ahly SC") by assigning a unique </a:t>
+            </a:r>
+            <a:r>
+              <a:rPr lang="en-US" b="1" dirty="0"/>
+              <a:t>Team ID</a:t>
+            </a:r>
+            <a:r>
+              <a:rPr lang="en-US" dirty="0"/>
+              <a:t> (like "AHL") that works across all our files.</a:t>
+            </a:r>
+          </a:p>
+          <a:p>
+            <a:r>
+              <a:rPr lang="en-US" b="1" dirty="0"/>
+              <a:t>Linking:</a:t>
+            </a:r>
+            <a:r>
+              <a:rPr lang="en-US" dirty="0"/>
+              <a:t> We transformed flat Excel sheets into a connected schema to ensure referential integrity—making sure every team is correctly mathematically linked to its home ground and constraints</a:t>
+            </a:r>
+          </a:p>
           <a:p>
             <a:pPr marL="0" lvl="0" indent="0" algn="l" rtl="0">
               <a:spcBef>
@@ -2010,6 +2272,56 @@
           </a:bodyPr>
           <a:lstStyle/>
           <a:p>
+            <a:r>
+              <a:rPr lang="en-US" sz="3200" b="1" dirty="0"/>
+              <a:t>Problem Context:</a:t>
+            </a:r>
+            <a:r>
+              <a:rPr lang="en-US" sz="3200" dirty="0"/>
+              <a:t> Although the scheduling process considers factors like competition calendars and security, it suffers from structural issues affecting quality and fairness.</a:t>
+            </a:r>
+          </a:p>
+          <a:p>
+            <a:r>
+              <a:rPr lang="en-US" sz="3200" b="1" dirty="0"/>
+              <a:t>Historical Root:</a:t>
+            </a:r>
+            <a:r>
+              <a:rPr lang="en-US" sz="3200" dirty="0"/>
+              <a:t> The chronic instability traces back to the 2018/2019 season when Egypt was selected as the emergency host for the African Cup of Nations (AFCON), replacing Cameroon.</a:t>
+            </a:r>
+          </a:p>
+          <a:p>
+            <a:r>
+              <a:rPr lang="en-US" sz="3200" b="1" dirty="0"/>
+              <a:t>The Disruption:</a:t>
+            </a:r>
+            <a:r>
+              <a:rPr lang="en-US" sz="3200" dirty="0"/>
+              <a:t> The league faced a severe hiatus for stadium preparations, immediately followed by the COVID-19 pandemic which suspended activities for four months in 2020.</a:t>
+            </a:r>
+          </a:p>
+          <a:p>
+            <a:r>
+              <a:rPr lang="en-US" sz="3200" b="1" dirty="0"/>
+              <a:t>The "Domino Effect":</a:t>
+            </a:r>
+            <a:r>
+              <a:rPr lang="en-US" sz="3200" dirty="0"/>
+              <a:t> These consecutive shocks created a "domino effect" of delayed start dates and congested fixtures that the league has yet to fully recover from.</a:t>
+            </a:r>
+          </a:p>
+          <a:p>
+            <a:r>
+              <a:rPr lang="en-US" sz="3200" b="1" dirty="0"/>
+              <a:t>Current State:</a:t>
+            </a:r>
+            <a:r>
+              <a:rPr lang="en-US" sz="3200" dirty="0"/>
+              <a:t> The absence of a unified optimization framework forces organizers into "exceptional arrangements" that reduce competitive balance.</a:t>
+            </a:r>
+          </a:p>
+          <a:p>
             <a:pPr marL="0" lvl="0" indent="0" algn="l" rtl="0">
               <a:spcBef>
                 <a:spcPts val="0"/>
@@ -2019,7 +2331,7 @@
               </a:spcAft>
               <a:buNone/>
             </a:pPr>
-            <a:endParaRPr/>
+            <a:endParaRPr dirty="0"/>
           </a:p>
         </p:txBody>
       </p:sp>
@@ -2137,6 +2449,56 @@
           </a:bodyPr>
           <a:lstStyle/>
           <a:p>
+            <a:r>
+              <a:rPr lang="en-US" sz="1600" b="1" dirty="0"/>
+              <a:t>Primary Aim:</a:t>
+            </a:r>
+            <a:r>
+              <a:rPr lang="en-US" sz="1600" dirty="0"/>
+              <a:t> To demonstrate the effectiveness of mathematical optimization techniques in professional football league scheduling, showing that a standard format can be maintained.</a:t>
+            </a:r>
+          </a:p>
+          <a:p>
+            <a:r>
+              <a:rPr lang="en-US" sz="1600" b="1" dirty="0"/>
+              <a:t>Model Framework:</a:t>
+            </a:r>
+            <a:r>
+              <a:rPr lang="en-US" sz="1600" dirty="0"/>
+              <a:t> To model the scheduling problem using Integer Linear Programming (ILP).</a:t>
+            </a:r>
+          </a:p>
+          <a:p>
+            <a:r>
+              <a:rPr lang="en-US" sz="1600" b="1" dirty="0"/>
+              <a:t>Time Management:</a:t>
+            </a:r>
+            <a:r>
+              <a:rPr lang="en-US" sz="1600" dirty="0"/>
+              <a:t> To generate a complete 18-team double round-robin schedule that fits strictly within the August to May timeframe.</a:t>
+            </a:r>
+          </a:p>
+          <a:p>
+            <a:r>
+              <a:rPr lang="en-US" sz="1600" b="1" dirty="0"/>
+              <a:t>Constraint Satisfaction:</a:t>
+            </a:r>
+            <a:r>
+              <a:rPr lang="en-US" sz="1600" dirty="0"/>
+              <a:t> To respect continental competitions (CAF), domestic cups, international breaks, and avoid stadium/security conflicts.</a:t>
+            </a:r>
+          </a:p>
+          <a:p>
+            <a:r>
+              <a:rPr lang="en-US" sz="1600" b="1" dirty="0"/>
+              <a:t>Fairness Objectives:</a:t>
+            </a:r>
+            <a:r>
+              <a:rPr lang="en-US" sz="1600" dirty="0"/>
+              <a:t> To improve fairness by balancing home/away matches, managing rest periods, and reducing excessive travel demands.</a:t>
+            </a:r>
+          </a:p>
+          <a:p>
             <a:pPr marL="0" lvl="0" indent="0" algn="l" rtl="0">
               <a:spcBef>
                 <a:spcPts val="0"/>
@@ -2146,7 +2508,7 @@
               </a:spcAft>
               <a:buNone/>
             </a:pPr>
-            <a:endParaRPr/>
+            <a:endParaRPr lang="en-US" sz="1500" dirty="0"/>
           </a:p>
         </p:txBody>
       </p:sp>
@@ -2246,6 +2608,66 @@
           </a:bodyPr>
           <a:lstStyle/>
           <a:p>
+            <a:r>
+              <a:rPr lang="en-US" b="1" dirty="0"/>
+              <a:t>System Type:</a:t>
+            </a:r>
+            <a:r>
+              <a:rPr lang="en-US" dirty="0"/>
+              <a:t> An optimization-based scheduling system using Integer Linear Programming (ILP) designed to enhance, not replace, current practices.</a:t>
+            </a:r>
+          </a:p>
+          <a:p>
+            <a:r>
+              <a:rPr lang="en-US" b="1" dirty="0"/>
+              <a:t>Mathematical Framework:</a:t>
+            </a:r>
+            <a:r>
+              <a:rPr lang="en-US" dirty="0"/>
+              <a:t> The system formalizes scheduling by evaluating all constraints and objectives simultaneously.</a:t>
+            </a:r>
+          </a:p>
+          <a:p>
+            <a:r>
+              <a:rPr lang="en-US" b="1" dirty="0"/>
+              <a:t>Input Data:</a:t>
+            </a:r>
+            <a:r>
+              <a:rPr lang="en-US" dirty="0"/>
+              <a:t> The model uses structured data including teams, stadiums, calendar slots, security restrictions, and continental commitments.</a:t>
+            </a:r>
+          </a:p>
+          <a:p>
+            <a:r>
+              <a:rPr lang="en-US" b="1" dirty="0"/>
+              <a:t>Decision Variables:</a:t>
+            </a:r>
+            <a:r>
+              <a:rPr lang="en-US" dirty="0"/>
+              <a:t> The season is represented as decision variables determining if a specific match is assigned to a particular time slot and venue.</a:t>
+            </a:r>
+          </a:p>
+          <a:p>
+            <a:r>
+              <a:rPr lang="en-US" b="1" dirty="0"/>
+              <a:t>Output:</a:t>
+            </a:r>
+            <a:r>
+              <a:rPr lang="en-US" dirty="0"/>
+              <a:t> The final output is a complete season schedule with performance statistics to evaluate quality.</a:t>
+            </a:r>
+          </a:p>
+          <a:p>
+            <a:r>
+              <a:rPr lang="en-US" b="1" dirty="0"/>
+              <a:t>Adaptability:</a:t>
+            </a:r>
+            <a:r>
+              <a:rPr lang="en-US" dirty="0"/>
+              <a:t> A key feature is adaptability; if external conditions change (e.g., stadium availability), the system can be re-run to produce a revised schedule quickly</a:t>
+            </a:r>
+          </a:p>
+          <a:p>
             <a:pPr marL="0" lvl="0" indent="0" algn="l" rtl="0">
               <a:spcBef>
                 <a:spcPts val="0"/>
@@ -2255,7 +2677,7 @@
               </a:spcAft>
               <a:buNone/>
             </a:pPr>
-            <a:endParaRPr/>
+            <a:endParaRPr dirty="0"/>
           </a:p>
         </p:txBody>
       </p:sp>
@@ -2481,6 +2903,146 @@
             <a:noAutofit/>
           </a:bodyPr>
           <a:lstStyle/>
+          <a:p>
+            <a:r>
+              <a:rPr lang="en-US" sz="1100" b="1" i="0" u="none" strike="noStrike" cap="none" dirty="0">
+                <a:solidFill>
+                  <a:srgbClr val="000000"/>
+                </a:solidFill>
+                <a:effectLst/>
+                <a:latin typeface="Arial"/>
+                <a:ea typeface="Arial"/>
+                <a:cs typeface="Arial"/>
+                <a:sym typeface="Arial"/>
+              </a:rPr>
+              <a:t>Classification:</a:t>
+            </a:r>
+            <a:r>
+              <a:rPr lang="en-US" sz="1100" b="0" i="0" u="none" strike="noStrike" cap="none" dirty="0">
+                <a:solidFill>
+                  <a:srgbClr val="000000"/>
+                </a:solidFill>
+                <a:effectLst/>
+                <a:latin typeface="Arial"/>
+                <a:ea typeface="Arial"/>
+                <a:cs typeface="Arial"/>
+                <a:sym typeface="Arial"/>
+              </a:rPr>
+              <a:t> Sports scheduling is a domain within Operations Research and Combinatorial Optimization, classified mathematically as an NP-hard problem.</a:t>
+            </a:r>
+          </a:p>
+          <a:p>
+            <a:r>
+              <a:rPr lang="en-US" sz="1100" b="1" i="0" u="none" strike="noStrike" cap="none" dirty="0">
+                <a:solidFill>
+                  <a:srgbClr val="000000"/>
+                </a:solidFill>
+                <a:effectLst/>
+                <a:latin typeface="Arial"/>
+                <a:ea typeface="Arial"/>
+                <a:cs typeface="Arial"/>
+                <a:sym typeface="Arial"/>
+              </a:rPr>
+              <a:t>Complexity:</a:t>
+            </a:r>
+            <a:r>
+              <a:rPr lang="en-US" sz="1100" b="0" i="0" u="none" strike="noStrike" cap="none" dirty="0">
+                <a:solidFill>
+                  <a:srgbClr val="000000"/>
+                </a:solidFill>
+                <a:effectLst/>
+                <a:latin typeface="Arial"/>
+                <a:ea typeface="Arial"/>
+                <a:cs typeface="Arial"/>
+                <a:sym typeface="Arial"/>
+              </a:rPr>
+              <a:t> The computational complexity increases exponentially with the number of teams and constraints.</a:t>
+            </a:r>
+          </a:p>
+          <a:p>
+            <a:r>
+              <a:rPr lang="en-US" sz="1100" b="1" i="0" u="none" strike="noStrike" cap="none" dirty="0">
+                <a:solidFill>
+                  <a:srgbClr val="000000"/>
+                </a:solidFill>
+                <a:effectLst/>
+                <a:latin typeface="Arial"/>
+                <a:ea typeface="Arial"/>
+                <a:cs typeface="Arial"/>
+                <a:sym typeface="Arial"/>
+              </a:rPr>
+              <a:t>League Structure:</a:t>
+            </a:r>
+            <a:r>
+              <a:rPr lang="en-US" sz="1100" b="0" i="0" u="none" strike="noStrike" cap="none" dirty="0">
+                <a:solidFill>
+                  <a:srgbClr val="000000"/>
+                </a:solidFill>
+                <a:effectLst/>
+                <a:latin typeface="Arial"/>
+                <a:ea typeface="Arial"/>
+                <a:cs typeface="Arial"/>
+                <a:sym typeface="Arial"/>
+              </a:rPr>
+              <a:t> The Egyptian Premier League follows a Double Round Robin (DRR) format where every team plays every other team twice.</a:t>
+            </a:r>
+          </a:p>
+          <a:p>
+            <a:r>
+              <a:rPr lang="en-US" sz="1100" b="1" i="0" u="none" strike="noStrike" cap="none" dirty="0">
+                <a:solidFill>
+                  <a:srgbClr val="000000"/>
+                </a:solidFill>
+                <a:effectLst/>
+                <a:latin typeface="Arial"/>
+                <a:ea typeface="Arial"/>
+                <a:cs typeface="Arial"/>
+                <a:sym typeface="Arial"/>
+              </a:rPr>
+              <a:t>Match Volume:</a:t>
+            </a:r>
+            <a:r>
+              <a:rPr lang="en-US" sz="1100" b="0" i="0" u="none" strike="noStrike" cap="none" dirty="0">
+                <a:solidFill>
+                  <a:srgbClr val="000000"/>
+                </a:solidFill>
+                <a:effectLst/>
+                <a:latin typeface="Arial"/>
+                <a:ea typeface="Arial"/>
+                <a:cs typeface="Arial"/>
+                <a:sym typeface="Arial"/>
+              </a:rPr>
+              <a:t> For an 18-team league ($n=18$), the total number of matches is calculated as $n(n-1)$, equating to 306 matches over 34 rounds.</a:t>
+            </a:r>
+          </a:p>
+          <a:p>
+            <a:r>
+              <a:rPr lang="en-US" sz="1100" b="1" i="0" u="none" strike="noStrike" cap="none">
+                <a:solidFill>
+                  <a:srgbClr val="000000"/>
+                </a:solidFill>
+                <a:effectLst/>
+                <a:latin typeface="Arial"/>
+                <a:ea typeface="Arial"/>
+                <a:cs typeface="Arial"/>
+                <a:sym typeface="Arial"/>
+              </a:rPr>
+              <a:t>The Core Task:</a:t>
+            </a:r>
+            <a:r>
+              <a:rPr lang="en-US" sz="1100" b="0" i="0" u="none" strike="noStrike" cap="none">
+                <a:solidFill>
+                  <a:srgbClr val="000000"/>
+                </a:solidFill>
+                <a:effectLst/>
+                <a:latin typeface="Arial"/>
+                <a:ea typeface="Arial"/>
+                <a:cs typeface="Arial"/>
+                <a:sym typeface="Arial"/>
+              </a:rPr>
+              <a:t> The goal is not just finding any schedule, but finding an optimal one that satisfies rigorous constraints while optimizing specific objectives.</a:t>
+            </a:r>
+          </a:p>
           <a:p>
             <a:pPr marL="0" lvl="0" indent="0" algn="l" rtl="0">
               <a:spcBef>
@@ -2609,6 +3171,54 @@
           </a:bodyPr>
           <a:lstStyle/>
           <a:p>
+            <a:r>
+              <a:rPr lang="en-US" b="1" dirty="0"/>
+              <a:t>Patterns &amp; Breaks:</a:t>
+            </a:r>
+            <a:r>
+              <a:rPr lang="en-US" dirty="0"/>
+              <a:t> In optimization terms, a "Pattern" is the sequence of Home (H) and Away (A) games. A "Break" occurs when a team plays two consecutive matches at the same venue (like H-H or A-A).</a:t>
+            </a:r>
+          </a:p>
+          <a:p>
+            <a:r>
+              <a:rPr lang="en-US" b="1" dirty="0"/>
+              <a:t>Away Breaks</a:t>
+            </a:r>
+            <a:r>
+              <a:rPr lang="en-US" dirty="0"/>
+              <a:t> are particularly unfair because they cause travel fatigue and lack of revenue continuity.</a:t>
+            </a:r>
+          </a:p>
+          <a:p>
+            <a:r>
+              <a:rPr lang="en-US" sz="1100" b="0" i="0" u="none" strike="noStrike" cap="none" baseline="0" dirty="0">
+                <a:solidFill>
+                  <a:srgbClr val="000000"/>
+                </a:solidFill>
+                <a:latin typeface="Arial"/>
+                <a:ea typeface="Arial"/>
+                <a:cs typeface="Arial"/>
+                <a:sym typeface="Arial"/>
+              </a:rPr>
+              <a:t>In their survey of 25 European leagues, Goossens and Spokesman (2012) found that minimizing breaks is a universal objective. However, they noted that perfect alternation (H-A-H-A) is mathematically impossible for all teams simultaneously in standard league formats, necessitating optimization models to distribute these breaks fairly </a:t>
+            </a:r>
+            <a:r>
+              <a:rPr lang="en-US" b="1" dirty="0"/>
+              <a:t>Traveling Tournament Problem (TTP):</a:t>
+            </a:r>
+            <a:r>
+              <a:rPr lang="en-US" dirty="0"/>
+              <a:t> This is a classic problem in our field. It aims to minimize the total distance traveled by all teams.</a:t>
+            </a:r>
+          </a:p>
+          <a:p>
+            <a:r>
+              <a:rPr lang="en-US" dirty="0"/>
+              <a:t>While Egypt's teams are concentrated around Cairo, travel to Upper Egypt or canal cities still presents a logistical cost that affects performance</a:t>
+            </a:r>
+          </a:p>
+          <a:p>
             <a:pPr marL="0" lvl="0" indent="0" algn="l" rtl="0">
               <a:spcBef>
                 <a:spcPts val="0"/>
@@ -2718,6 +3328,44 @@
           </a:bodyPr>
           <a:lstStyle/>
           <a:p>
+            <a:r>
+              <a:rPr lang="en-US" b="1" dirty="0"/>
+              <a:t>The Gold Standard:</a:t>
+            </a:r>
+            <a:r>
+              <a:rPr lang="en-US" dirty="0"/>
+              <a:t> We looked at the Chilean First Division for inspiration. In 2005, they replaced their manual system (which used random draws) with an Integer Linear Programming model—exactly what we are proposing.</a:t>
+            </a:r>
+          </a:p>
+          <a:p>
+            <a:r>
+              <a:rPr lang="en-US" b="1" dirty="0"/>
+              <a:t>The Problem:</a:t>
+            </a:r>
+            <a:r>
+              <a:rPr lang="en-US" dirty="0"/>
+              <a:t> Their old system caused high travel costs and unfair sequences where small teams faced "giants" consecutively.</a:t>
+            </a:r>
+          </a:p>
+          <a:p>
+            <a:r>
+              <a:rPr lang="en-US" b="1" dirty="0"/>
+              <a:t>The Result:</a:t>
+            </a:r>
+            <a:r>
+              <a:rPr lang="en-US" dirty="0"/>
+              <a:t> After implementing optimization, they saw a </a:t>
+            </a:r>
+            <a:r>
+              <a:rPr lang="en-US" b="1" dirty="0"/>
+              <a:t>32-39% increase in average attendance</a:t>
+            </a:r>
+            <a:r>
+              <a:rPr lang="en-US" dirty="0"/>
+              <a:t> and a near-doubling of ticket revenue. This proved that better scheduling directly impacts the financial and commercial success of the league</a:t>
+            </a:r>
+          </a:p>
+          <a:p>
             <a:pPr marL="0" lvl="0" indent="0" algn="l" rtl="0">
               <a:spcBef>
                 <a:spcPts val="0"/>
@@ -2727,7 +3375,7 @@
               </a:spcAft>
               <a:buNone/>
             </a:pPr>
-            <a:endParaRPr/>
+            <a:endParaRPr dirty="0"/>
           </a:p>
         </p:txBody>
       </p:sp>
@@ -32172,14 +32820,6 @@
 </file>
 
 <file path=customXml/item1.xml><?xml version="1.0" encoding="utf-8"?>
-<p:properties xmlns:p="http://schemas.microsoft.com/office/2006/metadata/properties" xmlns:xsi="http://www.w3.org/2001/XMLSchema-instance" xmlns:pc="http://schemas.microsoft.com/office/infopath/2007/PartnerControls">
-  <documentManagement>
-    <_activity xmlns="9427ba3f-bf6b-4e36-982f-401b240078b5" xsi:nil="true"/>
-  </documentManagement>
-</p:properties>
-</file>
-
-<file path=customXml/item2.xml><?xml version="1.0" encoding="utf-8"?>
 <ct:contentTypeSchema xmlns:ct="http://schemas.microsoft.com/office/2006/metadata/contentType" xmlns:ma="http://schemas.microsoft.com/office/2006/metadata/properties/metaAttributes" ct:_="" ma:_="" ma:contentTypeName="Document" ma:contentTypeID="0x01010058EF0F6A95660A4A8A96CF00B1CF5037" ma:contentTypeVersion="8" ma:contentTypeDescription="Create a new document." ma:contentTypeScope="" ma:versionID="07112cf381e643d660836564ada6a4e4">
   <xsd:schema xmlns:xsd="http://www.w3.org/2001/XMLSchema" xmlns:xs="http://www.w3.org/2001/XMLSchema" xmlns:p="http://schemas.microsoft.com/office/2006/metadata/properties" xmlns:ns3="9427ba3f-bf6b-4e36-982f-401b240078b5" xmlns:ns4="ed82aeb9-b910-4c50-992f-22dbdd50696f" targetNamespace="http://schemas.microsoft.com/office/2006/metadata/properties" ma:root="true" ma:fieldsID="f4d5d8ac3f0c1f50cdcd6f42d32044d8" ns3:_="" ns4:_="">
     <xsd:import namespace="9427ba3f-bf6b-4e36-982f-401b240078b5"/>
@@ -32368,6 +33008,14 @@
 </ct:contentTypeSchema>
 </file>
 
+<file path=customXml/item2.xml><?xml version="1.0" encoding="utf-8"?>
+<p:properties xmlns:p="http://schemas.microsoft.com/office/2006/metadata/properties" xmlns:xsi="http://www.w3.org/2001/XMLSchema-instance" xmlns:pc="http://schemas.microsoft.com/office/infopath/2007/PartnerControls">
+  <documentManagement>
+    <_activity xmlns="9427ba3f-bf6b-4e36-982f-401b240078b5" xsi:nil="true"/>
+  </documentManagement>
+</p:properties>
+</file>
+
 <file path=customXml/item3.xml><?xml version="1.0" encoding="utf-8"?>
 <?mso-contentType ?>
 <FormTemplates xmlns="http://schemas.microsoft.com/sharepoint/v3/contenttype/forms">
@@ -32378,23 +33026,6 @@
 </file>
 
 <file path=customXml/itemProps1.xml><?xml version="1.0" encoding="utf-8"?>
-<ds:datastoreItem xmlns:ds="http://schemas.openxmlformats.org/officeDocument/2006/customXml" ds:itemID="{672E6D98-677C-41B8-8A0A-E214B4F1B9ED}">
-  <ds:schemaRefs>
-    <ds:schemaRef ds:uri="http://schemas.openxmlformats.org/package/2006/metadata/core-properties"/>
-    <ds:schemaRef ds:uri="http://purl.org/dc/dcmitype/"/>
-    <ds:schemaRef ds:uri="http://schemas.microsoft.com/office/2006/metadata/properties"/>
-    <ds:schemaRef ds:uri="http://purl.org/dc/elements/1.1/"/>
-    <ds:schemaRef ds:uri="9427ba3f-bf6b-4e36-982f-401b240078b5"/>
-    <ds:schemaRef ds:uri="http://schemas.microsoft.com/office/2006/documentManagement/types"/>
-    <ds:schemaRef ds:uri="ed82aeb9-b910-4c50-992f-22dbdd50696f"/>
-    <ds:schemaRef ds:uri="http://www.w3.org/XML/1998/namespace"/>
-    <ds:schemaRef ds:uri="http://schemas.microsoft.com/office/infopath/2007/PartnerControls"/>
-    <ds:schemaRef ds:uri="http://purl.org/dc/terms/"/>
-  </ds:schemaRefs>
-</ds:datastoreItem>
-</file>
-
-<file path=customXml/itemProps2.xml><?xml version="1.0" encoding="utf-8"?>
 <ds:datastoreItem xmlns:ds="http://schemas.openxmlformats.org/officeDocument/2006/customXml" ds:itemID="{97686E73-217C-4C92-91A5-4D2E68FA7146}">
   <ds:schemaRefs>
     <ds:schemaRef ds:uri="http://schemas.microsoft.com/office/2006/metadata/contentType"/>
@@ -32413,6 +33044,23 @@
 </ds:datastoreItem>
 </file>
 
+<file path=customXml/itemProps2.xml><?xml version="1.0" encoding="utf-8"?>
+<ds:datastoreItem xmlns:ds="http://schemas.openxmlformats.org/officeDocument/2006/customXml" ds:itemID="{672E6D98-677C-41B8-8A0A-E214B4F1B9ED}">
+  <ds:schemaRefs>
+    <ds:schemaRef ds:uri="http://schemas.openxmlformats.org/package/2006/metadata/core-properties"/>
+    <ds:schemaRef ds:uri="http://purl.org/dc/dcmitype/"/>
+    <ds:schemaRef ds:uri="http://schemas.microsoft.com/office/2006/metadata/properties"/>
+    <ds:schemaRef ds:uri="http://purl.org/dc/elements/1.1/"/>
+    <ds:schemaRef ds:uri="9427ba3f-bf6b-4e36-982f-401b240078b5"/>
+    <ds:schemaRef ds:uri="http://schemas.microsoft.com/office/2006/documentManagement/types"/>
+    <ds:schemaRef ds:uri="ed82aeb9-b910-4c50-992f-22dbdd50696f"/>
+    <ds:schemaRef ds:uri="http://www.w3.org/XML/1998/namespace"/>
+    <ds:schemaRef ds:uri="http://schemas.microsoft.com/office/infopath/2007/PartnerControls"/>
+    <ds:schemaRef ds:uri="http://purl.org/dc/terms/"/>
+  </ds:schemaRefs>
+</ds:datastoreItem>
+</file>
+
 <file path=customXml/itemProps3.xml><?xml version="1.0" encoding="utf-8"?>
 <ds:datastoreItem xmlns:ds="http://schemas.openxmlformats.org/officeDocument/2006/customXml" ds:itemID="{4309E11F-D857-4267-A6D9-2945B8F42689}">
   <ds:schemaRefs>

--- a/Documentations/presentation V1.pptx
+++ b/Documentations/presentation V1.pptx
@@ -18940,7 +18940,7 @@
         </p:nvSpPr>
         <p:spPr bwMode="auto">
           <a:xfrm>
-            <a:off x="720000" y="863591"/>
+            <a:off x="720000" y="1017725"/>
             <a:ext cx="8050620" cy="3416320"/>
           </a:xfrm>
           <a:prstGeom prst="rect">
@@ -19166,7 +19166,7 @@
         </p:nvSpPr>
         <p:spPr>
           <a:xfrm>
-            <a:off x="3296777" y="1947448"/>
+            <a:off x="2991688" y="1933883"/>
             <a:ext cx="2100000" cy="624000"/>
           </a:xfrm>
           <a:prstGeom prst="rect">
@@ -19200,7 +19200,7 @@
         </p:nvSpPr>
         <p:spPr>
           <a:xfrm>
-            <a:off x="5920708" y="1958110"/>
+            <a:off x="5689060" y="1976183"/>
             <a:ext cx="2100000" cy="624000"/>
           </a:xfrm>
           <a:prstGeom prst="rect">
@@ -19302,7 +19302,7 @@
         </p:nvSpPr>
         <p:spPr>
           <a:xfrm>
-            <a:off x="534357" y="3356525"/>
+            <a:off x="534357" y="3373550"/>
             <a:ext cx="2100000" cy="624000"/>
           </a:xfrm>
           <a:prstGeom prst="rect">
@@ -24571,7 +24571,7 @@
         </p:nvGrpSpPr>
         <p:grpSpPr>
           <a:xfrm>
-            <a:off x="4492726" y="352800"/>
+            <a:off x="4749191" y="1230596"/>
             <a:ext cx="1332074" cy="1170045"/>
             <a:chOff x="5800165" y="1707786"/>
             <a:chExt cx="1013011" cy="1246865"/>
@@ -24792,10 +24792,10 @@
         </p:nvGrpSpPr>
         <p:grpSpPr>
           <a:xfrm>
-            <a:off x="7658771" y="3918757"/>
-            <a:ext cx="1425354" cy="1128445"/>
-            <a:chOff x="5800165" y="1805494"/>
-            <a:chExt cx="1013011" cy="1203641"/>
+            <a:off x="7551843" y="2919106"/>
+            <a:ext cx="1425354" cy="1105444"/>
+            <a:chOff x="5800165" y="1830028"/>
+            <a:chExt cx="1013011" cy="1179107"/>
           </a:xfrm>
         </p:grpSpPr>
         <p:sp>
@@ -24812,7 +24812,7 @@
           </p:nvSpPr>
           <p:spPr>
             <a:xfrm>
-              <a:off x="5800165" y="1805494"/>
+              <a:off x="5800165" y="1830028"/>
               <a:ext cx="1013011" cy="230592"/>
             </a:xfrm>
             <a:prstGeom prst="rect">
@@ -25011,10 +25011,10 @@
         </p:nvGrpSpPr>
         <p:grpSpPr>
           <a:xfrm>
-            <a:off x="4572001" y="3816000"/>
-            <a:ext cx="1425354" cy="1185445"/>
+            <a:off x="4978090" y="3327881"/>
+            <a:ext cx="1465430" cy="1185445"/>
             <a:chOff x="5800165" y="1512117"/>
-            <a:chExt cx="1079837" cy="2157515"/>
+            <a:chExt cx="1013012" cy="2157515"/>
           </a:xfrm>
         </p:grpSpPr>
         <p:sp>
@@ -25031,8 +25031,8 @@
           </p:nvSpPr>
           <p:spPr>
             <a:xfrm>
-              <a:off x="5800165" y="1512117"/>
-              <a:ext cx="1079837" cy="523969"/>
+              <a:off x="5800166" y="1512117"/>
+              <a:ext cx="1013011" cy="523968"/>
             </a:xfrm>
             <a:prstGeom prst="rect">
               <a:avLst/>
@@ -25230,7 +25230,7 @@
         </p:nvGrpSpPr>
         <p:grpSpPr>
           <a:xfrm>
-            <a:off x="6235057" y="1522845"/>
+            <a:off x="6605274" y="333493"/>
             <a:ext cx="1423714" cy="1842215"/>
             <a:chOff x="5697178" y="1864332"/>
             <a:chExt cx="1116000" cy="940820"/>
@@ -25502,6 +25502,398 @@
           </p:txBody>
         </p:sp>
       </p:grpSp>
+      <p:cxnSp>
+        <p:nvCxnSpPr>
+          <p:cNvPr id="4" name="Connector: Elbow 3">
+            <a:extLst>
+              <a:ext uri="{FF2B5EF4-FFF2-40B4-BE49-F238E27FC236}">
+                <a16:creationId xmlns:a16="http://schemas.microsoft.com/office/drawing/2014/main" id="{40AE51A0-5F22-300F-E0D1-32E21354C006}"/>
+              </a:ext>
+            </a:extLst>
+          </p:cNvPr>
+          <p:cNvCxnSpPr>
+            <a:cxnSpLocks/>
+          </p:cNvCxnSpPr>
+          <p:nvPr/>
+        </p:nvCxnSpPr>
+        <p:spPr>
+          <a:xfrm flipV="1">
+            <a:off x="6081268" y="1472615"/>
+            <a:ext cx="550057" cy="126462"/>
+          </a:xfrm>
+          <a:prstGeom prst="bentConnector3">
+            <a:avLst>
+              <a:gd name="adj1" fmla="val 50000"/>
+            </a:avLst>
+          </a:prstGeom>
+        </p:spPr>
+        <p:style>
+          <a:lnRef idx="1">
+            <a:schemeClr val="accent1"/>
+          </a:lnRef>
+          <a:fillRef idx="0">
+            <a:schemeClr val="accent1"/>
+          </a:fillRef>
+          <a:effectRef idx="0">
+            <a:schemeClr val="accent1"/>
+          </a:effectRef>
+          <a:fontRef idx="minor">
+            <a:schemeClr val="tx1"/>
+          </a:fontRef>
+        </p:style>
+      </p:cxnSp>
+      <p:cxnSp>
+        <p:nvCxnSpPr>
+          <p:cNvPr id="13" name="Connector: Elbow 12">
+            <a:extLst>
+              <a:ext uri="{FF2B5EF4-FFF2-40B4-BE49-F238E27FC236}">
+                <a16:creationId xmlns:a16="http://schemas.microsoft.com/office/drawing/2014/main" id="{911B09FD-70B7-B517-49EA-CE66D8C616EB}"/>
+              </a:ext>
+            </a:extLst>
+          </p:cNvPr>
+          <p:cNvCxnSpPr>
+            <a:stCxn id="48" idx="3"/>
+            <a:endCxn id="42" idx="1"/>
+          </p:cNvCxnSpPr>
+          <p:nvPr/>
+        </p:nvCxnSpPr>
+        <p:spPr>
+          <a:xfrm flipH="1">
+            <a:off x="7551843" y="1408286"/>
+            <a:ext cx="477142" cy="2181562"/>
+          </a:xfrm>
+          <a:prstGeom prst="bentConnector5">
+            <a:avLst>
+              <a:gd name="adj1" fmla="val -47910"/>
+              <a:gd name="adj2" fmla="val 57626"/>
+              <a:gd name="adj3" fmla="val 147910"/>
+            </a:avLst>
+          </a:prstGeom>
+        </p:spPr>
+        <p:style>
+          <a:lnRef idx="1">
+            <a:schemeClr val="accent1"/>
+          </a:lnRef>
+          <a:fillRef idx="0">
+            <a:schemeClr val="accent1"/>
+          </a:fillRef>
+          <a:effectRef idx="0">
+            <a:schemeClr val="accent1"/>
+          </a:effectRef>
+          <a:fontRef idx="minor">
+            <a:schemeClr val="tx1"/>
+          </a:fontRef>
+        </p:style>
+      </p:cxnSp>
+      <p:cxnSp>
+        <p:nvCxnSpPr>
+          <p:cNvPr id="15" name="Connector: Elbow 14">
+            <a:extLst>
+              <a:ext uri="{FF2B5EF4-FFF2-40B4-BE49-F238E27FC236}">
+                <a16:creationId xmlns:a16="http://schemas.microsoft.com/office/drawing/2014/main" id="{9FD51FC9-5273-54E7-75B1-AFA3D09373AD}"/>
+              </a:ext>
+            </a:extLst>
+          </p:cNvPr>
+          <p:cNvCxnSpPr>
+            <a:stCxn id="44" idx="0"/>
+            <a:endCxn id="10" idx="2"/>
+          </p:cNvCxnSpPr>
+          <p:nvPr/>
+        </p:nvCxnSpPr>
+        <p:spPr>
+          <a:xfrm rot="16200000" flipV="1">
+            <a:off x="5099397" y="2716472"/>
+            <a:ext cx="927240" cy="295578"/>
+          </a:xfrm>
+          <a:prstGeom prst="bentConnector3">
+            <a:avLst/>
+          </a:prstGeom>
+        </p:spPr>
+        <p:style>
+          <a:lnRef idx="1">
+            <a:schemeClr val="accent1"/>
+          </a:lnRef>
+          <a:fillRef idx="0">
+            <a:schemeClr val="accent1"/>
+          </a:fillRef>
+          <a:effectRef idx="0">
+            <a:schemeClr val="accent1"/>
+          </a:effectRef>
+          <a:fontRef idx="minor">
+            <a:schemeClr val="tx1"/>
+          </a:fontRef>
+        </p:style>
+      </p:cxnSp>
+      <p:sp>
+        <p:nvSpPr>
+          <p:cNvPr id="19" name="TextBox 18">
+            <a:extLst>
+              <a:ext uri="{FF2B5EF4-FFF2-40B4-BE49-F238E27FC236}">
+                <a16:creationId xmlns:a16="http://schemas.microsoft.com/office/drawing/2014/main" id="{BE7F63FB-1965-70CA-5424-79382749FEC0}"/>
+              </a:ext>
+            </a:extLst>
+          </p:cNvPr>
+          <p:cNvSpPr txBox="1"/>
+          <p:nvPr/>
+        </p:nvSpPr>
+        <p:spPr>
+          <a:xfrm>
+            <a:off x="5423202" y="2369346"/>
+            <a:ext cx="99060" cy="215444"/>
+          </a:xfrm>
+          <a:prstGeom prst="rect">
+            <a:avLst/>
+          </a:prstGeom>
+          <a:noFill/>
+        </p:spPr>
+        <p:txBody>
+          <a:bodyPr wrap="square" rtlCol="0">
+            <a:spAutoFit/>
+          </a:bodyPr>
+          <a:lstStyle/>
+          <a:p>
+            <a:pPr algn="ctr"/>
+            <a:r>
+              <a:rPr lang="en-US" sz="800" dirty="0">
+                <a:solidFill>
+                  <a:schemeClr val="tx1"/>
+                </a:solidFill>
+              </a:rPr>
+              <a:t>1</a:t>
+            </a:r>
+            <a:endParaRPr lang="en-US" dirty="0">
+              <a:solidFill>
+                <a:schemeClr val="tx1"/>
+              </a:solidFill>
+            </a:endParaRPr>
+          </a:p>
+        </p:txBody>
+      </p:sp>
+      <p:sp>
+        <p:nvSpPr>
+          <p:cNvPr id="20" name="TextBox 19">
+            <a:extLst>
+              <a:ext uri="{FF2B5EF4-FFF2-40B4-BE49-F238E27FC236}">
+                <a16:creationId xmlns:a16="http://schemas.microsoft.com/office/drawing/2014/main" id="{A49348AF-D88C-82BA-A20E-1B1019BA1AA2}"/>
+              </a:ext>
+            </a:extLst>
+          </p:cNvPr>
+          <p:cNvSpPr txBox="1"/>
+          <p:nvPr/>
+        </p:nvSpPr>
+        <p:spPr>
+          <a:xfrm>
+            <a:off x="5710804" y="3155145"/>
+            <a:ext cx="99060" cy="215444"/>
+          </a:xfrm>
+          <a:prstGeom prst="rect">
+            <a:avLst/>
+          </a:prstGeom>
+          <a:noFill/>
+        </p:spPr>
+        <p:txBody>
+          <a:bodyPr wrap="square" rtlCol="0">
+            <a:spAutoFit/>
+          </a:bodyPr>
+          <a:lstStyle/>
+          <a:p>
+            <a:pPr algn="ctr"/>
+            <a:r>
+              <a:rPr lang="en-US" sz="800" dirty="0">
+                <a:solidFill>
+                  <a:schemeClr val="tx1"/>
+                </a:solidFill>
+              </a:rPr>
+              <a:t>*</a:t>
+            </a:r>
+            <a:endParaRPr lang="en-US" dirty="0">
+              <a:solidFill>
+                <a:schemeClr val="tx1"/>
+              </a:solidFill>
+            </a:endParaRPr>
+          </a:p>
+        </p:txBody>
+      </p:sp>
+      <p:sp>
+        <p:nvSpPr>
+          <p:cNvPr id="21" name="TextBox 20">
+            <a:extLst>
+              <a:ext uri="{FF2B5EF4-FFF2-40B4-BE49-F238E27FC236}">
+                <a16:creationId xmlns:a16="http://schemas.microsoft.com/office/drawing/2014/main" id="{ED212BD6-70E4-76D0-0609-E6C5C2519518}"/>
+              </a:ext>
+            </a:extLst>
+          </p:cNvPr>
+          <p:cNvSpPr txBox="1"/>
+          <p:nvPr/>
+        </p:nvSpPr>
+        <p:spPr>
+          <a:xfrm>
+            <a:off x="6081265" y="1428124"/>
+            <a:ext cx="99060" cy="215444"/>
+          </a:xfrm>
+          <a:prstGeom prst="rect">
+            <a:avLst/>
+          </a:prstGeom>
+          <a:noFill/>
+        </p:spPr>
+        <p:txBody>
+          <a:bodyPr wrap="square" rtlCol="0">
+            <a:spAutoFit/>
+          </a:bodyPr>
+          <a:lstStyle/>
+          <a:p>
+            <a:pPr algn="ctr"/>
+            <a:r>
+              <a:rPr lang="en-US" sz="800" dirty="0">
+                <a:solidFill>
+                  <a:schemeClr val="tx1"/>
+                </a:solidFill>
+              </a:rPr>
+              <a:t>1</a:t>
+            </a:r>
+            <a:endParaRPr lang="en-US" dirty="0">
+              <a:solidFill>
+                <a:schemeClr val="tx1"/>
+              </a:solidFill>
+            </a:endParaRPr>
+          </a:p>
+        </p:txBody>
+      </p:sp>
+      <p:sp>
+        <p:nvSpPr>
+          <p:cNvPr id="22" name="TextBox 21">
+            <a:extLst>
+              <a:ext uri="{FF2B5EF4-FFF2-40B4-BE49-F238E27FC236}">
+                <a16:creationId xmlns:a16="http://schemas.microsoft.com/office/drawing/2014/main" id="{AB102AE6-7DAB-B8DF-56BD-2418F5A6A2DD}"/>
+              </a:ext>
+            </a:extLst>
+          </p:cNvPr>
+          <p:cNvSpPr txBox="1"/>
+          <p:nvPr/>
+        </p:nvSpPr>
+        <p:spPr>
+          <a:xfrm>
+            <a:off x="6517745" y="1342648"/>
+            <a:ext cx="75252" cy="215444"/>
+          </a:xfrm>
+          <a:prstGeom prst="rect">
+            <a:avLst/>
+          </a:prstGeom>
+          <a:noFill/>
+        </p:spPr>
+        <p:txBody>
+          <a:bodyPr wrap="square" rtlCol="0">
+            <a:spAutoFit/>
+          </a:bodyPr>
+          <a:lstStyle/>
+          <a:p>
+            <a:pPr algn="ctr"/>
+            <a:r>
+              <a:rPr lang="en-US" sz="800" dirty="0">
+                <a:solidFill>
+                  <a:schemeClr val="tx1"/>
+                </a:solidFill>
+              </a:rPr>
+              <a:t>*</a:t>
+            </a:r>
+            <a:endParaRPr lang="en-US" dirty="0">
+              <a:solidFill>
+                <a:schemeClr val="tx1"/>
+              </a:solidFill>
+            </a:endParaRPr>
+          </a:p>
+        </p:txBody>
+      </p:sp>
+      <p:sp>
+        <p:nvSpPr>
+          <p:cNvPr id="23" name="TextBox 22">
+            <a:extLst>
+              <a:ext uri="{FF2B5EF4-FFF2-40B4-BE49-F238E27FC236}">
+                <a16:creationId xmlns:a16="http://schemas.microsoft.com/office/drawing/2014/main" id="{14A535C8-1E4B-885F-F401-E811B0C09507}"/>
+              </a:ext>
+            </a:extLst>
+          </p:cNvPr>
+          <p:cNvSpPr txBox="1"/>
+          <p:nvPr/>
+        </p:nvSpPr>
+        <p:spPr>
+          <a:xfrm>
+            <a:off x="8063575" y="1230596"/>
+            <a:ext cx="99060" cy="215444"/>
+          </a:xfrm>
+          <a:prstGeom prst="rect">
+            <a:avLst/>
+          </a:prstGeom>
+          <a:noFill/>
+        </p:spPr>
+        <p:txBody>
+          <a:bodyPr wrap="square" rtlCol="0">
+            <a:spAutoFit/>
+          </a:bodyPr>
+          <a:lstStyle/>
+          <a:p>
+            <a:pPr algn="ctr"/>
+            <a:r>
+              <a:rPr lang="en-US" sz="800" dirty="0">
+                <a:solidFill>
+                  <a:schemeClr val="tx1"/>
+                </a:solidFill>
+              </a:rPr>
+              <a:t>1</a:t>
+            </a:r>
+            <a:endParaRPr lang="en-US" dirty="0">
+              <a:solidFill>
+                <a:schemeClr val="tx1"/>
+              </a:solidFill>
+            </a:endParaRPr>
+          </a:p>
+        </p:txBody>
+      </p:sp>
+      <p:sp>
+        <p:nvSpPr>
+          <p:cNvPr id="24" name="TextBox 23">
+            <a:extLst>
+              <a:ext uri="{FF2B5EF4-FFF2-40B4-BE49-F238E27FC236}">
+                <a16:creationId xmlns:a16="http://schemas.microsoft.com/office/drawing/2014/main" id="{5137AE75-5751-0D16-8232-EE2172FD35C0}"/>
+              </a:ext>
+            </a:extLst>
+          </p:cNvPr>
+          <p:cNvSpPr txBox="1"/>
+          <p:nvPr/>
+        </p:nvSpPr>
+        <p:spPr>
+          <a:xfrm>
+            <a:off x="7452782" y="3433330"/>
+            <a:ext cx="99060" cy="215444"/>
+          </a:xfrm>
+          <a:prstGeom prst="rect">
+            <a:avLst/>
+          </a:prstGeom>
+          <a:noFill/>
+        </p:spPr>
+        <p:txBody>
+          <a:bodyPr wrap="square" rtlCol="0">
+            <a:spAutoFit/>
+          </a:bodyPr>
+          <a:lstStyle/>
+          <a:p>
+            <a:pPr algn="ctr"/>
+            <a:r>
+              <a:rPr lang="en-US" sz="800" dirty="0">
+                <a:solidFill>
+                  <a:schemeClr val="tx1"/>
+                </a:solidFill>
+              </a:rPr>
+              <a:t>*</a:t>
+            </a:r>
+            <a:endParaRPr lang="en-US" dirty="0">
+              <a:solidFill>
+                <a:schemeClr val="tx1"/>
+              </a:solidFill>
+            </a:endParaRPr>
+          </a:p>
+        </p:txBody>
+      </p:sp>
     </p:spTree>
     <p:extLst>
       <p:ext uri="{BB962C8B-B14F-4D97-AF65-F5344CB8AC3E}">
@@ -25595,8 +25987,8 @@
         </p:nvSpPr>
         <p:spPr>
           <a:xfrm>
-            <a:off x="326868" y="1670400"/>
-            <a:ext cx="4437862" cy="3700800"/>
+            <a:off x="-139390" y="1670400"/>
+            <a:ext cx="4711390" cy="3700800"/>
           </a:xfrm>
           <a:prstGeom prst="rect">
             <a:avLst/>
@@ -25616,11 +26008,11 @@
               <a:buChar char="•"/>
             </a:pPr>
             <a:r>
-              <a:rPr lang="en-US" sz="1600" b="1" dirty="0"/>
+              <a:rPr lang="en-US" sz="1500" b="1" dirty="0"/>
               <a:t>Purpose: </a:t>
             </a:r>
             <a:r>
-              <a:rPr lang="en-US" sz="1600" dirty="0"/>
+              <a:rPr lang="en-US" sz="1500" dirty="0"/>
               <a:t>A "Star Schema" centered around the main Calendar.</a:t>
             </a:r>
           </a:p>
@@ -25633,15 +26025,15 @@
               <a:buChar char="•"/>
             </a:pPr>
             <a:r>
-              <a:rPr lang="en-US" sz="1600" b="1" dirty="0"/>
+              <a:rPr lang="en-US" sz="1500" b="1" dirty="0"/>
               <a:t>How it Works: </a:t>
             </a:r>
             <a:r>
-              <a:rPr lang="en-US" sz="1600" dirty="0"/>
+              <a:rPr lang="en-US" sz="1500" dirty="0"/>
               <a:t>Connects the master calendar to FIFA and CAF lists</a:t>
             </a:r>
             <a:r>
-              <a:rPr lang="en-US" sz="1600" b="1" dirty="0"/>
+              <a:rPr lang="en-US" sz="1500" b="1" dirty="0"/>
               <a:t>.</a:t>
             </a:r>
           </a:p>
@@ -25654,11 +26046,11 @@
               <a:buChar char="•"/>
             </a:pPr>
             <a:r>
-              <a:rPr lang="en-US" sz="1600" b="1" dirty="0"/>
+              <a:rPr lang="en-US" sz="1500" b="1" dirty="0"/>
               <a:t>Smart Blocking: </a:t>
             </a:r>
             <a:r>
-              <a:rPr lang="en-US" sz="1600" dirty="0"/>
+              <a:rPr lang="en-US" sz="1500" dirty="0"/>
               <a:t>Automatically "blocks" league matches during international or continental dates.</a:t>
             </a:r>
           </a:p>
@@ -25682,7 +26074,7 @@
         </p:nvSpPr>
         <p:spPr>
           <a:xfrm>
-            <a:off x="902203" y="1318200"/>
+            <a:off x="651873" y="1334727"/>
             <a:ext cx="3920127" cy="430800"/>
           </a:xfrm>
           <a:prstGeom prst="rect">
@@ -25701,6 +26093,871 @@
               <a:t>Temporal Model</a:t>
             </a:r>
             <a:endParaRPr dirty="0"/>
+          </a:p>
+        </p:txBody>
+      </p:sp>
+      <p:grpSp>
+        <p:nvGrpSpPr>
+          <p:cNvPr id="2" name="Group 1">
+            <a:extLst>
+              <a:ext uri="{FF2B5EF4-FFF2-40B4-BE49-F238E27FC236}">
+                <a16:creationId xmlns:a16="http://schemas.microsoft.com/office/drawing/2014/main" id="{80455FB2-32A9-825E-E0E1-B2B4BD18D932}"/>
+              </a:ext>
+            </a:extLst>
+          </p:cNvPr>
+          <p:cNvGrpSpPr/>
+          <p:nvPr/>
+        </p:nvGrpSpPr>
+        <p:grpSpPr>
+          <a:xfrm>
+            <a:off x="6897679" y="1749000"/>
+            <a:ext cx="2017369" cy="1238283"/>
+            <a:chOff x="5800165" y="1707786"/>
+            <a:chExt cx="1013011" cy="1319583"/>
+          </a:xfrm>
+        </p:grpSpPr>
+        <p:sp>
+          <p:nvSpPr>
+            <p:cNvPr id="3" name="Rectangle 2">
+              <a:extLst>
+                <a:ext uri="{FF2B5EF4-FFF2-40B4-BE49-F238E27FC236}">
+                  <a16:creationId xmlns:a16="http://schemas.microsoft.com/office/drawing/2014/main" id="{68DA0852-9D5A-57DC-3FA8-888E4A21A3E9}"/>
+                </a:ext>
+              </a:extLst>
+            </p:cNvPr>
+            <p:cNvSpPr/>
+            <p:nvPr/>
+          </p:nvSpPr>
+          <p:spPr>
+            <a:xfrm>
+              <a:off x="5800165" y="1707786"/>
+              <a:ext cx="1013011" cy="328299"/>
+            </a:xfrm>
+            <a:prstGeom prst="rect">
+              <a:avLst/>
+            </a:prstGeom>
+            <a:solidFill>
+              <a:schemeClr val="bg2">
+                <a:lumMod val="75000"/>
+              </a:schemeClr>
+            </a:solidFill>
+          </p:spPr>
+          <p:style>
+            <a:lnRef idx="2">
+              <a:schemeClr val="accent1">
+                <a:shade val="50000"/>
+              </a:schemeClr>
+            </a:lnRef>
+            <a:fillRef idx="1">
+              <a:schemeClr val="accent1"/>
+            </a:fillRef>
+            <a:effectRef idx="0">
+              <a:schemeClr val="accent1"/>
+            </a:effectRef>
+            <a:fontRef idx="minor">
+              <a:schemeClr val="lt1"/>
+            </a:fontRef>
+          </p:style>
+          <p:txBody>
+            <a:bodyPr rtlCol="0" anchor="ctr"/>
+            <a:lstStyle/>
+            <a:p>
+              <a:pPr algn="ctr"/>
+              <a:r>
+                <a:rPr lang="en-US" dirty="0" err="1">
+                  <a:solidFill>
+                    <a:schemeClr val="tx1"/>
+                  </a:solidFill>
+                </a:rPr>
+                <a:t>expanded_calender</a:t>
+              </a:r>
+              <a:endParaRPr lang="en-US" dirty="0">
+                <a:solidFill>
+                  <a:schemeClr val="tx1"/>
+                </a:solidFill>
+              </a:endParaRPr>
+            </a:p>
+          </p:txBody>
+        </p:sp>
+        <p:sp>
+          <p:nvSpPr>
+            <p:cNvPr id="4" name="Rectangle 3">
+              <a:extLst>
+                <a:ext uri="{FF2B5EF4-FFF2-40B4-BE49-F238E27FC236}">
+                  <a16:creationId xmlns:a16="http://schemas.microsoft.com/office/drawing/2014/main" id="{32D704BB-B6D2-A4F7-DE40-6C30B9FC6885}"/>
+                </a:ext>
+              </a:extLst>
+            </p:cNvPr>
+            <p:cNvSpPr/>
+            <p:nvPr/>
+          </p:nvSpPr>
+          <p:spPr>
+            <a:xfrm>
+              <a:off x="5800165" y="2021304"/>
+              <a:ext cx="1013011" cy="1006065"/>
+            </a:xfrm>
+            <a:prstGeom prst="rect">
+              <a:avLst/>
+            </a:prstGeom>
+            <a:ln>
+              <a:solidFill>
+                <a:schemeClr val="tx1">
+                  <a:lumMod val="65000"/>
+                </a:schemeClr>
+              </a:solidFill>
+            </a:ln>
+          </p:spPr>
+          <p:style>
+            <a:lnRef idx="2">
+              <a:schemeClr val="accent1">
+                <a:shade val="50000"/>
+              </a:schemeClr>
+            </a:lnRef>
+            <a:fillRef idx="1">
+              <a:schemeClr val="accent1"/>
+            </a:fillRef>
+            <a:effectRef idx="0">
+              <a:schemeClr val="accent1"/>
+            </a:effectRef>
+            <a:fontRef idx="minor">
+              <a:schemeClr val="lt1"/>
+            </a:fontRef>
+          </p:style>
+          <p:txBody>
+            <a:bodyPr rtlCol="0" anchor="ctr"/>
+            <a:lstStyle/>
+            <a:p>
+              <a:pPr algn="ctr"/>
+              <a:r>
+                <a:rPr lang="en-US" sz="1100" dirty="0" err="1">
+                  <a:solidFill>
+                    <a:schemeClr val="accent5">
+                      <a:lumMod val="50000"/>
+                    </a:schemeClr>
+                  </a:solidFill>
+                </a:rPr>
+                <a:t>Day_ID</a:t>
+              </a:r>
+              <a:endParaRPr lang="en-US" sz="1100" dirty="0">
+                <a:solidFill>
+                  <a:schemeClr val="accent5">
+                    <a:lumMod val="50000"/>
+                  </a:schemeClr>
+                </a:solidFill>
+              </a:endParaRPr>
+            </a:p>
+            <a:p>
+              <a:pPr algn="ctr"/>
+              <a:r>
+                <a:rPr lang="en-US" sz="1100" dirty="0">
+                  <a:solidFill>
+                    <a:schemeClr val="accent5">
+                      <a:lumMod val="50000"/>
+                    </a:schemeClr>
+                  </a:solidFill>
+                </a:rPr>
+                <a:t>Date</a:t>
+              </a:r>
+            </a:p>
+            <a:p>
+              <a:pPr algn="ctr"/>
+              <a:r>
+                <a:rPr lang="en-US" sz="1100" dirty="0">
+                  <a:solidFill>
+                    <a:schemeClr val="accent5">
+                      <a:lumMod val="50000"/>
+                    </a:schemeClr>
+                  </a:solidFill>
+                </a:rPr>
+                <a:t>Date time</a:t>
+              </a:r>
+            </a:p>
+            <a:p>
+              <a:pPr algn="ctr"/>
+              <a:r>
+                <a:rPr lang="en-US" sz="1100" dirty="0" err="1">
+                  <a:solidFill>
+                    <a:schemeClr val="accent5">
+                      <a:lumMod val="50000"/>
+                    </a:schemeClr>
+                  </a:solidFill>
+                </a:rPr>
+                <a:t>Week_num</a:t>
+              </a:r>
+              <a:endParaRPr lang="en-US" sz="1100" dirty="0">
+                <a:solidFill>
+                  <a:schemeClr val="accent5">
+                    <a:lumMod val="50000"/>
+                  </a:schemeClr>
+                </a:solidFill>
+              </a:endParaRPr>
+            </a:p>
+            <a:p>
+              <a:pPr algn="ctr"/>
+              <a:r>
+                <a:rPr lang="en-US" sz="1100" dirty="0">
+                  <a:solidFill>
+                    <a:schemeClr val="accent5">
+                      <a:lumMod val="50000"/>
+                    </a:schemeClr>
+                  </a:solidFill>
+                </a:rPr>
+                <a:t>day</a:t>
+              </a:r>
+            </a:p>
+          </p:txBody>
+        </p:sp>
+      </p:grpSp>
+      <p:grpSp>
+        <p:nvGrpSpPr>
+          <p:cNvPr id="5" name="Group 4">
+            <a:extLst>
+              <a:ext uri="{FF2B5EF4-FFF2-40B4-BE49-F238E27FC236}">
+                <a16:creationId xmlns:a16="http://schemas.microsoft.com/office/drawing/2014/main" id="{1918C3C9-C171-AF5D-D46D-18ED22C28229}"/>
+              </a:ext>
+            </a:extLst>
+          </p:cNvPr>
+          <p:cNvGrpSpPr/>
+          <p:nvPr/>
+        </p:nvGrpSpPr>
+        <p:grpSpPr>
+          <a:xfrm>
+            <a:off x="4477380" y="2984744"/>
+            <a:ext cx="1935799" cy="1428549"/>
+            <a:chOff x="5800165" y="1830028"/>
+            <a:chExt cx="1013011" cy="1179107"/>
+          </a:xfrm>
+        </p:grpSpPr>
+        <p:sp>
+          <p:nvSpPr>
+            <p:cNvPr id="6" name="Rectangle 5">
+              <a:extLst>
+                <a:ext uri="{FF2B5EF4-FFF2-40B4-BE49-F238E27FC236}">
+                  <a16:creationId xmlns:a16="http://schemas.microsoft.com/office/drawing/2014/main" id="{F2E7E9FB-CA41-0A39-3C27-CADAB4CB20FB}"/>
+                </a:ext>
+              </a:extLst>
+            </p:cNvPr>
+            <p:cNvSpPr/>
+            <p:nvPr/>
+          </p:nvSpPr>
+          <p:spPr>
+            <a:xfrm>
+              <a:off x="5800165" y="1830028"/>
+              <a:ext cx="1013011" cy="230592"/>
+            </a:xfrm>
+            <a:prstGeom prst="rect">
+              <a:avLst/>
+            </a:prstGeom>
+            <a:solidFill>
+              <a:schemeClr val="bg2">
+                <a:lumMod val="75000"/>
+              </a:schemeClr>
+            </a:solidFill>
+          </p:spPr>
+          <p:style>
+            <a:lnRef idx="2">
+              <a:schemeClr val="accent1">
+                <a:shade val="50000"/>
+              </a:schemeClr>
+            </a:lnRef>
+            <a:fillRef idx="1">
+              <a:schemeClr val="accent1"/>
+            </a:fillRef>
+            <a:effectRef idx="0">
+              <a:schemeClr val="accent1"/>
+            </a:effectRef>
+            <a:fontRef idx="minor">
+              <a:schemeClr val="lt1"/>
+            </a:fontRef>
+          </p:style>
+          <p:txBody>
+            <a:bodyPr rtlCol="0" anchor="ctr"/>
+            <a:lstStyle/>
+            <a:p>
+              <a:pPr algn="ctr"/>
+              <a:r>
+                <a:rPr lang="en-US" dirty="0" err="1">
+                  <a:solidFill>
+                    <a:schemeClr val="tx1"/>
+                  </a:solidFill>
+                </a:rPr>
+                <a:t>unique_CAF_dates</a:t>
+              </a:r>
+              <a:endParaRPr lang="en-US" dirty="0">
+                <a:solidFill>
+                  <a:schemeClr val="tx1"/>
+                </a:solidFill>
+              </a:endParaRPr>
+            </a:p>
+          </p:txBody>
+        </p:sp>
+        <p:sp>
+          <p:nvSpPr>
+            <p:cNvPr id="7" name="Rectangle 6">
+              <a:extLst>
+                <a:ext uri="{FF2B5EF4-FFF2-40B4-BE49-F238E27FC236}">
+                  <a16:creationId xmlns:a16="http://schemas.microsoft.com/office/drawing/2014/main" id="{15C652C8-F1F6-67C0-9766-BBA59246FAD0}"/>
+                </a:ext>
+              </a:extLst>
+            </p:cNvPr>
+            <p:cNvSpPr/>
+            <p:nvPr/>
+          </p:nvSpPr>
+          <p:spPr>
+            <a:xfrm>
+              <a:off x="5800165" y="2081796"/>
+              <a:ext cx="1013011" cy="927339"/>
+            </a:xfrm>
+            <a:prstGeom prst="rect">
+              <a:avLst/>
+            </a:prstGeom>
+            <a:ln>
+              <a:solidFill>
+                <a:schemeClr val="tx1">
+                  <a:lumMod val="65000"/>
+                </a:schemeClr>
+              </a:solidFill>
+            </a:ln>
+          </p:spPr>
+          <p:style>
+            <a:lnRef idx="2">
+              <a:schemeClr val="accent1">
+                <a:shade val="50000"/>
+              </a:schemeClr>
+            </a:lnRef>
+            <a:fillRef idx="1">
+              <a:schemeClr val="accent1"/>
+            </a:fillRef>
+            <a:effectRef idx="0">
+              <a:schemeClr val="accent1"/>
+            </a:effectRef>
+            <a:fontRef idx="minor">
+              <a:schemeClr val="lt1"/>
+            </a:fontRef>
+          </p:style>
+          <p:txBody>
+            <a:bodyPr rtlCol="0" anchor="ctr"/>
+            <a:lstStyle/>
+            <a:p>
+              <a:pPr algn="ctr"/>
+              <a:r>
+                <a:rPr lang="en-US" sz="1100" dirty="0" err="1">
+                  <a:solidFill>
+                    <a:schemeClr val="accent5">
+                      <a:lumMod val="50000"/>
+                    </a:schemeClr>
+                  </a:solidFill>
+                </a:rPr>
+                <a:t>date_id</a:t>
+              </a:r>
+              <a:endParaRPr lang="en-US" sz="1100" dirty="0">
+                <a:solidFill>
+                  <a:schemeClr val="accent5">
+                    <a:lumMod val="50000"/>
+                  </a:schemeClr>
+                </a:solidFill>
+              </a:endParaRPr>
+            </a:p>
+            <a:p>
+              <a:pPr algn="ctr"/>
+              <a:r>
+                <a:rPr lang="en-US" sz="1100" dirty="0" err="1">
+                  <a:solidFill>
+                    <a:schemeClr val="accent5">
+                      <a:lumMod val="50000"/>
+                    </a:schemeClr>
+                  </a:solidFill>
+                </a:rPr>
+                <a:t>competition_name</a:t>
+              </a:r>
+              <a:endParaRPr lang="en-US" sz="1100" dirty="0">
+                <a:solidFill>
+                  <a:schemeClr val="accent5">
+                    <a:lumMod val="50000"/>
+                  </a:schemeClr>
+                </a:solidFill>
+              </a:endParaRPr>
+            </a:p>
+            <a:p>
+              <a:pPr algn="ctr"/>
+              <a:r>
+                <a:rPr lang="en-US" sz="1100" dirty="0" err="1">
+                  <a:solidFill>
+                    <a:schemeClr val="accent5">
+                      <a:lumMod val="50000"/>
+                    </a:schemeClr>
+                  </a:solidFill>
+                </a:rPr>
+                <a:t>caf_date</a:t>
+              </a:r>
+              <a:endParaRPr lang="en-US" sz="1100" dirty="0">
+                <a:solidFill>
+                  <a:schemeClr val="accent5">
+                    <a:lumMod val="50000"/>
+                  </a:schemeClr>
+                </a:solidFill>
+              </a:endParaRPr>
+            </a:p>
+            <a:p>
+              <a:pPr algn="ctr"/>
+              <a:r>
+                <a:rPr lang="en-US" sz="1100" dirty="0">
+                  <a:solidFill>
+                    <a:schemeClr val="accent5">
+                      <a:lumMod val="50000"/>
+                    </a:schemeClr>
+                  </a:solidFill>
+                </a:rPr>
+                <a:t>Round</a:t>
+              </a:r>
+            </a:p>
+            <a:p>
+              <a:pPr algn="ctr"/>
+              <a:r>
+                <a:rPr lang="en-US" sz="1100" dirty="0" err="1">
+                  <a:solidFill>
+                    <a:schemeClr val="accent5">
+                      <a:lumMod val="50000"/>
+                    </a:schemeClr>
+                  </a:solidFill>
+                </a:rPr>
+                <a:t>team_id</a:t>
+              </a:r>
+              <a:endParaRPr lang="en-US" sz="1100" dirty="0">
+                <a:solidFill>
+                  <a:schemeClr val="accent5">
+                    <a:lumMod val="50000"/>
+                  </a:schemeClr>
+                </a:solidFill>
+              </a:endParaRPr>
+            </a:p>
+            <a:p>
+              <a:pPr algn="ctr"/>
+              <a:r>
+                <a:rPr lang="en-US" sz="1100" dirty="0">
+                  <a:solidFill>
+                    <a:schemeClr val="accent5">
+                      <a:lumMod val="50000"/>
+                    </a:schemeClr>
+                  </a:solidFill>
+                </a:rPr>
+                <a:t>location</a:t>
+              </a:r>
+            </a:p>
+          </p:txBody>
+        </p:sp>
+      </p:grpSp>
+      <p:grpSp>
+        <p:nvGrpSpPr>
+          <p:cNvPr id="8" name="Group 7">
+            <a:extLst>
+              <a:ext uri="{FF2B5EF4-FFF2-40B4-BE49-F238E27FC236}">
+                <a16:creationId xmlns:a16="http://schemas.microsoft.com/office/drawing/2014/main" id="{88FA4860-4C9F-535B-1DE3-C603A4823B71}"/>
+              </a:ext>
+            </a:extLst>
+          </p:cNvPr>
+          <p:cNvGrpSpPr/>
+          <p:nvPr/>
+        </p:nvGrpSpPr>
+        <p:grpSpPr>
+          <a:xfrm>
+            <a:off x="4986484" y="642279"/>
+            <a:ext cx="1332074" cy="802203"/>
+            <a:chOff x="5800165" y="1512117"/>
+            <a:chExt cx="1013012" cy="1458850"/>
+          </a:xfrm>
+        </p:grpSpPr>
+        <p:sp>
+          <p:nvSpPr>
+            <p:cNvPr id="9" name="Rectangle 8">
+              <a:extLst>
+                <a:ext uri="{FF2B5EF4-FFF2-40B4-BE49-F238E27FC236}">
+                  <a16:creationId xmlns:a16="http://schemas.microsoft.com/office/drawing/2014/main" id="{50647B1A-568B-0358-C54E-9A26C4680CD8}"/>
+                </a:ext>
+              </a:extLst>
+            </p:cNvPr>
+            <p:cNvSpPr/>
+            <p:nvPr/>
+          </p:nvSpPr>
+          <p:spPr>
+            <a:xfrm>
+              <a:off x="5800166" y="1512117"/>
+              <a:ext cx="1013011" cy="523968"/>
+            </a:xfrm>
+            <a:prstGeom prst="rect">
+              <a:avLst/>
+            </a:prstGeom>
+            <a:solidFill>
+              <a:schemeClr val="bg2">
+                <a:lumMod val="75000"/>
+              </a:schemeClr>
+            </a:solidFill>
+          </p:spPr>
+          <p:style>
+            <a:lnRef idx="2">
+              <a:schemeClr val="accent1">
+                <a:shade val="50000"/>
+              </a:schemeClr>
+            </a:lnRef>
+            <a:fillRef idx="1">
+              <a:schemeClr val="accent1"/>
+            </a:fillRef>
+            <a:effectRef idx="0">
+              <a:schemeClr val="accent1"/>
+            </a:effectRef>
+            <a:fontRef idx="minor">
+              <a:schemeClr val="lt1"/>
+            </a:fontRef>
+          </p:style>
+          <p:txBody>
+            <a:bodyPr rtlCol="0" anchor="ctr"/>
+            <a:lstStyle/>
+            <a:p>
+              <a:pPr algn="ctr"/>
+              <a:r>
+                <a:rPr lang="en-US" dirty="0">
+                  <a:solidFill>
+                    <a:schemeClr val="tx1"/>
+                  </a:solidFill>
+                </a:rPr>
+                <a:t>FIFA_DAYS</a:t>
+              </a:r>
+            </a:p>
+          </p:txBody>
+        </p:sp>
+        <p:sp>
+          <p:nvSpPr>
+            <p:cNvPr id="10" name="Rectangle 9">
+              <a:extLst>
+                <a:ext uri="{FF2B5EF4-FFF2-40B4-BE49-F238E27FC236}">
+                  <a16:creationId xmlns:a16="http://schemas.microsoft.com/office/drawing/2014/main" id="{F66AB1DF-4F47-FD2B-512D-DE49F6F5DF93}"/>
+                </a:ext>
+              </a:extLst>
+            </p:cNvPr>
+            <p:cNvSpPr/>
+            <p:nvPr/>
+          </p:nvSpPr>
+          <p:spPr>
+            <a:xfrm>
+              <a:off x="5800165" y="2021305"/>
+              <a:ext cx="1013011" cy="949662"/>
+            </a:xfrm>
+            <a:prstGeom prst="rect">
+              <a:avLst/>
+            </a:prstGeom>
+            <a:ln>
+              <a:solidFill>
+                <a:schemeClr val="tx1">
+                  <a:lumMod val="65000"/>
+                </a:schemeClr>
+              </a:solidFill>
+            </a:ln>
+          </p:spPr>
+          <p:style>
+            <a:lnRef idx="2">
+              <a:schemeClr val="accent1">
+                <a:shade val="50000"/>
+              </a:schemeClr>
+            </a:lnRef>
+            <a:fillRef idx="1">
+              <a:schemeClr val="accent1"/>
+            </a:fillRef>
+            <a:effectRef idx="0">
+              <a:schemeClr val="accent1"/>
+            </a:effectRef>
+            <a:fontRef idx="minor">
+              <a:schemeClr val="lt1"/>
+            </a:fontRef>
+          </p:style>
+          <p:txBody>
+            <a:bodyPr rtlCol="0" anchor="ctr"/>
+            <a:lstStyle/>
+            <a:p>
+              <a:pPr algn="ctr"/>
+              <a:r>
+                <a:rPr lang="en-US" sz="1100" dirty="0">
+                  <a:solidFill>
+                    <a:schemeClr val="accent5">
+                      <a:lumMod val="50000"/>
+                    </a:schemeClr>
+                  </a:solidFill>
+                </a:rPr>
+                <a:t>Round Name</a:t>
+              </a:r>
+            </a:p>
+            <a:p>
+              <a:pPr algn="ctr"/>
+              <a:r>
+                <a:rPr lang="en-US" sz="1100" dirty="0">
+                  <a:solidFill>
+                    <a:schemeClr val="accent5">
+                      <a:lumMod val="50000"/>
+                    </a:schemeClr>
+                  </a:solidFill>
+                </a:rPr>
+                <a:t>Date </a:t>
+              </a:r>
+            </a:p>
+          </p:txBody>
+        </p:sp>
+      </p:grpSp>
+      <p:cxnSp>
+        <p:nvCxnSpPr>
+          <p:cNvPr id="19" name="Connector: Elbow 18">
+            <a:extLst>
+              <a:ext uri="{FF2B5EF4-FFF2-40B4-BE49-F238E27FC236}">
+                <a16:creationId xmlns:a16="http://schemas.microsoft.com/office/drawing/2014/main" id="{E46A03E9-790D-0086-BE79-BA4FAE8B3920}"/>
+              </a:ext>
+            </a:extLst>
+          </p:cNvPr>
+          <p:cNvCxnSpPr>
+            <a:cxnSpLocks/>
+          </p:cNvCxnSpPr>
+          <p:nvPr/>
+        </p:nvCxnSpPr>
+        <p:spPr>
+          <a:xfrm>
+            <a:off x="6318558" y="1311927"/>
+            <a:ext cx="579121" cy="1057156"/>
+          </a:xfrm>
+          <a:prstGeom prst="bentConnector3">
+            <a:avLst/>
+          </a:prstGeom>
+        </p:spPr>
+        <p:style>
+          <a:lnRef idx="1">
+            <a:schemeClr val="accent1"/>
+          </a:lnRef>
+          <a:fillRef idx="0">
+            <a:schemeClr val="accent1"/>
+          </a:fillRef>
+          <a:effectRef idx="0">
+            <a:schemeClr val="accent1"/>
+          </a:effectRef>
+          <a:fontRef idx="minor">
+            <a:schemeClr val="tx1"/>
+          </a:fontRef>
+        </p:style>
+      </p:cxnSp>
+      <p:cxnSp>
+        <p:nvCxnSpPr>
+          <p:cNvPr id="23" name="Connector: Elbow 22">
+            <a:extLst>
+              <a:ext uri="{FF2B5EF4-FFF2-40B4-BE49-F238E27FC236}">
+                <a16:creationId xmlns:a16="http://schemas.microsoft.com/office/drawing/2014/main" id="{5F663BBF-EE38-C578-3005-49EF4E851811}"/>
+              </a:ext>
+            </a:extLst>
+          </p:cNvPr>
+          <p:cNvCxnSpPr>
+            <a:cxnSpLocks/>
+            <a:stCxn id="4" idx="1"/>
+            <a:endCxn id="7" idx="3"/>
+          </p:cNvCxnSpPr>
+          <p:nvPr/>
+        </p:nvCxnSpPr>
+        <p:spPr>
+          <a:xfrm rot="10800000" flipV="1">
+            <a:off x="6413179" y="2515242"/>
+            <a:ext cx="484500" cy="1336291"/>
+          </a:xfrm>
+          <a:prstGeom prst="bentConnector3">
+            <a:avLst>
+              <a:gd name="adj1" fmla="val 50000"/>
+            </a:avLst>
+          </a:prstGeom>
+        </p:spPr>
+        <p:style>
+          <a:lnRef idx="1">
+            <a:schemeClr val="accent1"/>
+          </a:lnRef>
+          <a:fillRef idx="0">
+            <a:schemeClr val="accent1"/>
+          </a:fillRef>
+          <a:effectRef idx="0">
+            <a:schemeClr val="accent1"/>
+          </a:effectRef>
+          <a:fontRef idx="minor">
+            <a:schemeClr val="tx1"/>
+          </a:fontRef>
+        </p:style>
+      </p:cxnSp>
+      <p:sp>
+        <p:nvSpPr>
+          <p:cNvPr id="25" name="TextBox 24">
+            <a:extLst>
+              <a:ext uri="{FF2B5EF4-FFF2-40B4-BE49-F238E27FC236}">
+                <a16:creationId xmlns:a16="http://schemas.microsoft.com/office/drawing/2014/main" id="{45533AEC-4085-AFB2-AC8A-3A113643EA15}"/>
+              </a:ext>
+            </a:extLst>
+          </p:cNvPr>
+          <p:cNvSpPr txBox="1"/>
+          <p:nvPr/>
+        </p:nvSpPr>
+        <p:spPr>
+          <a:xfrm>
+            <a:off x="6413178" y="1119283"/>
+            <a:ext cx="99060" cy="215444"/>
+          </a:xfrm>
+          <a:prstGeom prst="rect">
+            <a:avLst/>
+          </a:prstGeom>
+          <a:noFill/>
+        </p:spPr>
+        <p:txBody>
+          <a:bodyPr wrap="square" rtlCol="0">
+            <a:spAutoFit/>
+          </a:bodyPr>
+          <a:lstStyle/>
+          <a:p>
+            <a:pPr algn="ctr"/>
+            <a:r>
+              <a:rPr lang="en-US" sz="800" dirty="0">
+                <a:solidFill>
+                  <a:schemeClr val="tx1"/>
+                </a:solidFill>
+              </a:rPr>
+              <a:t>1</a:t>
+            </a:r>
+            <a:endParaRPr lang="en-US" dirty="0">
+              <a:solidFill>
+                <a:schemeClr val="tx1"/>
+              </a:solidFill>
+            </a:endParaRPr>
+          </a:p>
+        </p:txBody>
+      </p:sp>
+      <p:sp>
+        <p:nvSpPr>
+          <p:cNvPr id="26" name="TextBox 25">
+            <a:extLst>
+              <a:ext uri="{FF2B5EF4-FFF2-40B4-BE49-F238E27FC236}">
+                <a16:creationId xmlns:a16="http://schemas.microsoft.com/office/drawing/2014/main" id="{B372F1EC-867E-CEF3-B155-8286DC81B593}"/>
+              </a:ext>
+            </a:extLst>
+          </p:cNvPr>
+          <p:cNvSpPr txBox="1"/>
+          <p:nvPr/>
+        </p:nvSpPr>
+        <p:spPr>
+          <a:xfrm>
+            <a:off x="6798619" y="2226719"/>
+            <a:ext cx="99060" cy="215444"/>
+          </a:xfrm>
+          <a:prstGeom prst="rect">
+            <a:avLst/>
+          </a:prstGeom>
+          <a:noFill/>
+        </p:spPr>
+        <p:txBody>
+          <a:bodyPr wrap="square" rtlCol="0">
+            <a:spAutoFit/>
+          </a:bodyPr>
+          <a:lstStyle/>
+          <a:p>
+            <a:pPr algn="ctr"/>
+            <a:r>
+              <a:rPr lang="en-US" sz="800" dirty="0">
+                <a:solidFill>
+                  <a:schemeClr val="tx1"/>
+                </a:solidFill>
+              </a:rPr>
+              <a:t>*</a:t>
+            </a:r>
+            <a:endParaRPr lang="en-US" dirty="0">
+              <a:solidFill>
+                <a:schemeClr val="tx1"/>
+              </a:solidFill>
+            </a:endParaRPr>
+          </a:p>
+        </p:txBody>
+      </p:sp>
+      <p:sp>
+        <p:nvSpPr>
+          <p:cNvPr id="27" name="TextBox 26">
+            <a:extLst>
+              <a:ext uri="{FF2B5EF4-FFF2-40B4-BE49-F238E27FC236}">
+                <a16:creationId xmlns:a16="http://schemas.microsoft.com/office/drawing/2014/main" id="{7BE6321A-4799-83F6-A2C6-154FDA9EB854}"/>
+              </a:ext>
+            </a:extLst>
+          </p:cNvPr>
+          <p:cNvSpPr txBox="1"/>
+          <p:nvPr/>
+        </p:nvSpPr>
+        <p:spPr>
+          <a:xfrm>
+            <a:off x="6798619" y="2386423"/>
+            <a:ext cx="99060" cy="215444"/>
+          </a:xfrm>
+          <a:prstGeom prst="rect">
+            <a:avLst/>
+          </a:prstGeom>
+          <a:noFill/>
+        </p:spPr>
+        <p:txBody>
+          <a:bodyPr wrap="square" rtlCol="0">
+            <a:spAutoFit/>
+          </a:bodyPr>
+          <a:lstStyle/>
+          <a:p>
+            <a:pPr algn="ctr"/>
+            <a:r>
+              <a:rPr lang="en-US" sz="800" dirty="0">
+                <a:solidFill>
+                  <a:schemeClr val="tx1"/>
+                </a:solidFill>
+              </a:rPr>
+              <a:t>*</a:t>
+            </a:r>
+            <a:endParaRPr lang="en-US" dirty="0">
+              <a:solidFill>
+                <a:schemeClr val="tx1"/>
+              </a:solidFill>
+            </a:endParaRPr>
+          </a:p>
+        </p:txBody>
+      </p:sp>
+      <p:sp>
+        <p:nvSpPr>
+          <p:cNvPr id="28" name="TextBox 27">
+            <a:extLst>
+              <a:ext uri="{FF2B5EF4-FFF2-40B4-BE49-F238E27FC236}">
+                <a16:creationId xmlns:a16="http://schemas.microsoft.com/office/drawing/2014/main" id="{A97FC0E6-834B-31B8-212D-35315393C7E9}"/>
+              </a:ext>
+            </a:extLst>
+          </p:cNvPr>
+          <p:cNvSpPr txBox="1"/>
+          <p:nvPr/>
+        </p:nvSpPr>
+        <p:spPr>
+          <a:xfrm>
+            <a:off x="6462708" y="3643894"/>
+            <a:ext cx="99060" cy="215444"/>
+          </a:xfrm>
+          <a:prstGeom prst="rect">
+            <a:avLst/>
+          </a:prstGeom>
+          <a:noFill/>
+        </p:spPr>
+        <p:txBody>
+          <a:bodyPr wrap="square" rtlCol="0">
+            <a:spAutoFit/>
+          </a:bodyPr>
+          <a:lstStyle/>
+          <a:p>
+            <a:pPr algn="ctr"/>
+            <a:r>
+              <a:rPr lang="en-US" sz="800" dirty="0">
+                <a:solidFill>
+                  <a:schemeClr val="tx1"/>
+                </a:solidFill>
+              </a:rPr>
+              <a:t>1</a:t>
+            </a:r>
+            <a:endParaRPr lang="en-US" dirty="0">
+              <a:solidFill>
+                <a:schemeClr val="tx1"/>
+              </a:solidFill>
+            </a:endParaRPr>
           </a:p>
         </p:txBody>
       </p:sp>
@@ -29725,10 +30982,10 @@
       </p:sp>
       <p:pic>
         <p:nvPicPr>
-          <p:cNvPr id="2052" name="Picture 4">
+          <p:cNvPr id="1026" name="Picture 2">
             <a:extLst>
               <a:ext uri="{FF2B5EF4-FFF2-40B4-BE49-F238E27FC236}">
-                <a16:creationId xmlns:a16="http://schemas.microsoft.com/office/drawing/2014/main" id="{BA78F359-0916-40E5-9A19-60706A959FF4}"/>
+                <a16:creationId xmlns:a16="http://schemas.microsoft.com/office/drawing/2014/main" id="{C218D982-FE51-46EA-A7E3-255BCADF2202}"/>
               </a:ext>
             </a:extLst>
           </p:cNvPr>
@@ -29752,8 +31009,8 @@
         </p:blipFill>
         <p:spPr bwMode="auto">
           <a:xfrm>
-            <a:off x="520508" y="1109887"/>
-            <a:ext cx="5005942" cy="2700254"/>
+            <a:off x="499701" y="1224870"/>
+            <a:ext cx="4993900" cy="2693759"/>
           </a:xfrm>
           <a:prstGeom prst="rect">
             <a:avLst/>

--- a/Documentations/presentation V1.pptx
+++ b/Documentations/presentation V1.pptx
@@ -5,7 +5,7 @@
     <p:sldMasterId id="2147483674" r:id="rId4"/>
   </p:sldMasterIdLst>
   <p:notesMasterIdLst>
-    <p:notesMasterId r:id="rId25"/>
+    <p:notesMasterId r:id="rId26"/>
   </p:notesMasterIdLst>
   <p:sldIdLst>
     <p:sldId id="256" r:id="rId5"/>
@@ -28,35 +28,36 @@
     <p:sldId id="310" r:id="rId22"/>
     <p:sldId id="311" r:id="rId23"/>
     <p:sldId id="257" r:id="rId24"/>
+    <p:sldId id="314" r:id="rId25"/>
   </p:sldIdLst>
   <p:sldSz cx="9144000" cy="5143500" type="screen16x9"/>
   <p:notesSz cx="6858000" cy="9144000"/>
   <p:embeddedFontLst>
     <p:embeddedFont>
       <p:font typeface="DM Sans" panose="020B0604020202020204" charset="0"/>
-      <p:regular r:id="rId26"/>
-      <p:bold r:id="rId27"/>
-      <p:italic r:id="rId28"/>
-      <p:boldItalic r:id="rId29"/>
+      <p:regular r:id="rId27"/>
+      <p:bold r:id="rId28"/>
+      <p:italic r:id="rId29"/>
+      <p:boldItalic r:id="rId30"/>
     </p:embeddedFont>
     <p:embeddedFont>
       <p:font typeface="Lato" panose="020F0502020204030203" pitchFamily="34" charset="0"/>
-      <p:regular r:id="rId30"/>
-      <p:bold r:id="rId31"/>
-      <p:italic r:id="rId32"/>
-      <p:boldItalic r:id="rId33"/>
+      <p:regular r:id="rId31"/>
+      <p:bold r:id="rId32"/>
+      <p:italic r:id="rId33"/>
+      <p:boldItalic r:id="rId34"/>
     </p:embeddedFont>
     <p:embeddedFont>
       <p:font typeface="Montserrat" panose="00000500000000000000" pitchFamily="2" charset="0"/>
-      <p:regular r:id="rId34"/>
-      <p:bold r:id="rId35"/>
-      <p:italic r:id="rId36"/>
-      <p:boldItalic r:id="rId37"/>
+      <p:regular r:id="rId35"/>
+      <p:bold r:id="rId36"/>
+      <p:italic r:id="rId37"/>
+      <p:boldItalic r:id="rId38"/>
     </p:embeddedFont>
     <p:embeddedFont>
       <p:font typeface="Montserrat ExtraBold" panose="00000900000000000000" pitchFamily="2" charset="0"/>
-      <p:bold r:id="rId38"/>
-      <p:boldItalic r:id="rId39"/>
+      <p:bold r:id="rId39"/>
+      <p:boldItalic r:id="rId40"/>
     </p:embeddedFont>
   </p:embeddedFontLst>
   <p:defaultTextStyle>
@@ -2284,6 +2285,115 @@
     <p:extLst>
       <p:ext uri="{BB962C8B-B14F-4D97-AF65-F5344CB8AC3E}">
         <p14:creationId xmlns:p14="http://schemas.microsoft.com/office/powerpoint/2010/main" val="2073866190"/>
+      </p:ext>
+    </p:extLst>
+  </p:cSld>
+  <p:clrMapOvr>
+    <a:masterClrMapping/>
+  </p:clrMapOvr>
+</p:notes>
+</file>
+
+<file path=ppt/notesSlides/notesSlide21.xml><?xml version="1.0" encoding="utf-8"?>
+<p:notes xmlns:a="http://schemas.openxmlformats.org/drawingml/2006/main" xmlns:r="http://schemas.openxmlformats.org/officeDocument/2006/relationships" xmlns:p="http://schemas.openxmlformats.org/presentationml/2006/main" showMasterSp="0" showMasterPhAnim="0">
+  <p:cSld>
+    <p:spTree>
+      <p:nvGrpSpPr>
+        <p:cNvPr id="1" name="Shape 277"/>
+        <p:cNvGrpSpPr/>
+        <p:nvPr/>
+      </p:nvGrpSpPr>
+      <p:grpSpPr>
+        <a:xfrm>
+          <a:off x="0" y="0"/>
+          <a:ext cx="0" cy="0"/>
+          <a:chOff x="0" y="0"/>
+          <a:chExt cx="0" cy="0"/>
+        </a:xfrm>
+      </p:grpSpPr>
+      <p:sp>
+        <p:nvSpPr>
+          <p:cNvPr id="278" name="Google Shape;278;gd431007ba2_0_208:notes"/>
+          <p:cNvSpPr>
+            <a:spLocks noGrp="1" noRot="1" noChangeAspect="1"/>
+          </p:cNvSpPr>
+          <p:nvPr>
+            <p:ph type="sldImg" idx="2"/>
+          </p:nvPr>
+        </p:nvSpPr>
+        <p:spPr>
+          <a:xfrm>
+            <a:off x="381000" y="685800"/>
+            <a:ext cx="6096000" cy="3429000"/>
+          </a:xfrm>
+          <a:custGeom>
+            <a:avLst/>
+            <a:gdLst/>
+            <a:ahLst/>
+            <a:cxnLst/>
+            <a:rect l="l" t="t" r="r" b="b"/>
+            <a:pathLst>
+              <a:path w="120000" h="120000" extrusionOk="0">
+                <a:moveTo>
+                  <a:pt x="0" y="0"/>
+                </a:moveTo>
+                <a:lnTo>
+                  <a:pt x="120000" y="0"/>
+                </a:lnTo>
+                <a:lnTo>
+                  <a:pt x="120000" y="120000"/>
+                </a:lnTo>
+                <a:lnTo>
+                  <a:pt x="0" y="120000"/>
+                </a:lnTo>
+                <a:close/>
+              </a:path>
+            </a:pathLst>
+          </a:custGeom>
+        </p:spPr>
+      </p:sp>
+      <p:sp>
+        <p:nvSpPr>
+          <p:cNvPr id="279" name="Google Shape;279;gd431007ba2_0_208:notes"/>
+          <p:cNvSpPr txBox="1">
+            <a:spLocks noGrp="1"/>
+          </p:cNvSpPr>
+          <p:nvPr>
+            <p:ph type="body" idx="1"/>
+          </p:nvPr>
+        </p:nvSpPr>
+        <p:spPr>
+          <a:xfrm>
+            <a:off x="685800" y="4343400"/>
+            <a:ext cx="5486400" cy="4114800"/>
+          </a:xfrm>
+          <a:prstGeom prst="rect">
+            <a:avLst/>
+          </a:prstGeom>
+        </p:spPr>
+        <p:txBody>
+          <a:bodyPr spcFirstLastPara="1" wrap="square" lIns="91425" tIns="91425" rIns="91425" bIns="91425" anchor="t" anchorCtr="0">
+            <a:noAutofit/>
+          </a:bodyPr>
+          <a:lstStyle/>
+          <a:p>
+            <a:pPr marL="0" lvl="0" indent="0" algn="l" rtl="0">
+              <a:spcBef>
+                <a:spcPts val="0"/>
+              </a:spcBef>
+              <a:spcAft>
+                <a:spcPts val="0"/>
+              </a:spcAft>
+              <a:buNone/>
+            </a:pPr>
+            <a:endParaRPr dirty="0"/>
+          </a:p>
+        </p:txBody>
+      </p:sp>
+    </p:spTree>
+    <p:extLst>
+      <p:ext uri="{BB962C8B-B14F-4D97-AF65-F5344CB8AC3E}">
+        <p14:creationId xmlns:p14="http://schemas.microsoft.com/office/powerpoint/2010/main" val="699154361"/>
       </p:ext>
     </p:extLst>
   </p:cSld>
@@ -29870,6 +29980,150 @@
 </p:sld>
 </file>
 
+<file path=ppt/slides/slide21.xml><?xml version="1.0" encoding="utf-8"?>
+<p:sld xmlns:a="http://schemas.openxmlformats.org/drawingml/2006/main" xmlns:r="http://schemas.openxmlformats.org/officeDocument/2006/relationships" xmlns:p="http://schemas.openxmlformats.org/presentationml/2006/main">
+  <p:cSld>
+    <p:bg>
+      <p:bgPr>
+        <a:solidFill>
+          <a:srgbClr val="075C2F"/>
+        </a:solidFill>
+        <a:effectLst/>
+      </p:bgPr>
+    </p:bg>
+    <p:spTree>
+      <p:nvGrpSpPr>
+        <p:cNvPr id="1" name="Shape 280"/>
+        <p:cNvGrpSpPr/>
+        <p:nvPr/>
+      </p:nvGrpSpPr>
+      <p:grpSpPr>
+        <a:xfrm>
+          <a:off x="0" y="0"/>
+          <a:ext cx="0" cy="0"/>
+          <a:chOff x="0" y="0"/>
+          <a:chExt cx="0" cy="0"/>
+        </a:xfrm>
+      </p:grpSpPr>
+      <p:sp>
+        <p:nvSpPr>
+          <p:cNvPr id="281" name="Google Shape;281;p29"/>
+          <p:cNvSpPr txBox="1">
+            <a:spLocks noGrp="1"/>
+          </p:cNvSpPr>
+          <p:nvPr>
+            <p:ph type="ctrTitle"/>
+          </p:nvPr>
+        </p:nvSpPr>
+        <p:spPr>
+          <a:xfrm>
+            <a:off x="2052825" y="672445"/>
+            <a:ext cx="6860355" cy="2481980"/>
+          </a:xfrm>
+          <a:prstGeom prst="rect">
+            <a:avLst/>
+          </a:prstGeom>
+        </p:spPr>
+        <p:txBody>
+          <a:bodyPr spcFirstLastPara="1" wrap="square" lIns="91425" tIns="91425" rIns="91425" bIns="91425" anchor="ctr" anchorCtr="0">
+            <a:noAutofit/>
+          </a:bodyPr>
+          <a:lstStyle/>
+          <a:p>
+            <a:pPr lvl="0">
+              <a:spcAft>
+                <a:spcPts val="200"/>
+              </a:spcAft>
+            </a:pPr>
+            <a:r>
+              <a:rPr lang="en-US" dirty="0">
+                <a:solidFill>
+                  <a:schemeClr val="tx1"/>
+                </a:solidFill>
+              </a:rPr>
+              <a:t>Thank You</a:t>
+            </a:r>
+            <a:endParaRPr dirty="0">
+              <a:solidFill>
+                <a:schemeClr val="tx1"/>
+              </a:solidFill>
+            </a:endParaRPr>
+          </a:p>
+        </p:txBody>
+      </p:sp>
+      <p:cxnSp>
+        <p:nvCxnSpPr>
+          <p:cNvPr id="283" name="Google Shape;283;p29"/>
+          <p:cNvCxnSpPr/>
+          <p:nvPr/>
+        </p:nvCxnSpPr>
+        <p:spPr>
+          <a:xfrm rot="10800000">
+            <a:off x="2510700" y="2388345"/>
+            <a:ext cx="4122600" cy="0"/>
+          </a:xfrm>
+          <a:prstGeom prst="straightConnector1">
+            <a:avLst/>
+          </a:prstGeom>
+          <a:noFill/>
+          <a:ln w="38100" cap="flat" cmpd="sng">
+            <a:solidFill>
+              <a:schemeClr val="dk1"/>
+            </a:solidFill>
+            <a:prstDash val="solid"/>
+            <a:round/>
+            <a:headEnd type="none" w="med" len="med"/>
+            <a:tailEnd type="none" w="med" len="med"/>
+          </a:ln>
+        </p:spPr>
+      </p:cxnSp>
+      <p:pic>
+        <p:nvPicPr>
+          <p:cNvPr id="6" name="Google Shape;689;p55">
+            <a:extLst>
+              <a:ext uri="{FF2B5EF4-FFF2-40B4-BE49-F238E27FC236}">
+                <a16:creationId xmlns:a16="http://schemas.microsoft.com/office/drawing/2014/main" id="{6FBFCD4E-F247-4D7F-BBD5-2DA6CC1F3558}"/>
+              </a:ext>
+            </a:extLst>
+          </p:cNvPr>
+          <p:cNvPicPr preferRelativeResize="0"/>
+          <p:nvPr/>
+        </p:nvPicPr>
+        <p:blipFill>
+          <a:blip r:embed="rId3">
+            <a:alphaModFix/>
+          </a:blip>
+          <a:stretch>
+            <a:fillRect/>
+          </a:stretch>
+        </p:blipFill>
+        <p:spPr>
+          <a:xfrm>
+            <a:off x="447225" y="3757035"/>
+            <a:ext cx="1782250" cy="1282324"/>
+          </a:xfrm>
+          <a:prstGeom prst="rect">
+            <a:avLst/>
+          </a:prstGeom>
+          <a:noFill/>
+          <a:ln>
+            <a:noFill/>
+          </a:ln>
+        </p:spPr>
+      </p:pic>
+    </p:spTree>
+    <p:extLst>
+      <p:ext uri="{BB962C8B-B14F-4D97-AF65-F5344CB8AC3E}">
+        <p14:creationId xmlns:p14="http://schemas.microsoft.com/office/powerpoint/2010/main" val="3400889307"/>
+      </p:ext>
+    </p:extLst>
+  </p:cSld>
+  <p:clrMapOvr>
+    <a:masterClrMapping/>
+  </p:clrMapOvr>
+</p:sld>
+</file>
+
 <file path=ppt/slides/slide3.xml><?xml version="1.0" encoding="utf-8"?>
 <p:sld xmlns:a="http://schemas.openxmlformats.org/drawingml/2006/main" xmlns:r="http://schemas.openxmlformats.org/officeDocument/2006/relationships" xmlns:p="http://schemas.openxmlformats.org/presentationml/2006/main">
   <p:cSld>
@@ -30758,7 +31012,20 @@
                 <a:effectLst/>
                 <a:latin typeface="DM Sans" pitchFamily="2" charset="0"/>
               </a:rPr>
-              <a:t>Bottom 9: Compete to avoid relegation.</a:t>
+              <a:t>Bottom 9: </a:t>
+            </a:r>
+            <a:r>
+              <a:rPr kumimoji="0" lang="en-US" altLang="en-US" sz="1500" i="0" u="none" strike="noStrike" cap="none" normalizeH="0" baseline="0" dirty="0">
+                <a:ln>
+                  <a:noFill/>
+                </a:ln>
+                <a:solidFill>
+                  <a:schemeClr val="tx1"/>
+                </a:solidFill>
+                <a:effectLst/>
+                <a:latin typeface="DM Sans" pitchFamily="2" charset="0"/>
+              </a:rPr>
+              <a:t>Compete to avoid relegation.</a:t>
             </a:r>
           </a:p>
           <a:p>
@@ -30967,7 +31234,7 @@
             <a:r>
               <a:rPr lang="en-US" sz="1600" b="1" i="0" dirty="0">
                 <a:solidFill>
-                  <a:srgbClr val="E3E3E3"/>
+                  <a:schemeClr val="tx1"/>
                 </a:solidFill>
                 <a:effectLst/>
                 <a:latin typeface="DM Sans" panose="020B0604020202020204" charset="0"/>
@@ -30975,6 +31242,9 @@
               <a:t>This chart illustrates the 2020/2021 crisis peak, comparing the disparity in matches played by five teams at the same point in the season.</a:t>
             </a:r>
             <a:endParaRPr lang="en-US" sz="1600" b="1" dirty="0">
+              <a:solidFill>
+                <a:schemeClr val="tx1"/>
+              </a:solidFill>
               <a:latin typeface="DM Sans" panose="020B0604020202020204" charset="0"/>
             </a:endParaRPr>
           </a:p>
@@ -36144,15 +36414,6 @@
 </file>
 
 <file path=customXml/item1.xml><?xml version="1.0" encoding="utf-8"?>
-<?mso-contentType ?>
-<FormTemplates xmlns="http://schemas.microsoft.com/sharepoint/v3/contenttype/forms">
-  <Display>DocumentLibraryForm</Display>
-  <Edit>DocumentLibraryForm</Edit>
-  <New>DocumentLibraryForm</New>
-</FormTemplates>
-</file>
-
-<file path=customXml/item2.xml><?xml version="1.0" encoding="utf-8"?>
 <ct:contentTypeSchema xmlns:ct="http://schemas.microsoft.com/office/2006/metadata/contentType" xmlns:ma="http://schemas.microsoft.com/office/2006/metadata/properties/metaAttributes" ct:_="" ma:_="" ma:contentTypeName="Document" ma:contentTypeID="0x01010058EF0F6A95660A4A8A96CF00B1CF5037" ma:contentTypeVersion="8" ma:contentTypeDescription="Create a new document." ma:contentTypeScope="" ma:versionID="07112cf381e643d660836564ada6a4e4">
   <xsd:schema xmlns:xsd="http://www.w3.org/2001/XMLSchema" xmlns:xs="http://www.w3.org/2001/XMLSchema" xmlns:p="http://schemas.microsoft.com/office/2006/metadata/properties" xmlns:ns3="9427ba3f-bf6b-4e36-982f-401b240078b5" xmlns:ns4="ed82aeb9-b910-4c50-992f-22dbdd50696f" targetNamespace="http://schemas.microsoft.com/office/2006/metadata/properties" ma:root="true" ma:fieldsID="f4d5d8ac3f0c1f50cdcd6f42d32044d8" ns3:_="" ns4:_="">
     <xsd:import namespace="9427ba3f-bf6b-4e36-982f-401b240078b5"/>
@@ -36341,6 +36602,15 @@
 </ct:contentTypeSchema>
 </file>
 
+<file path=customXml/item2.xml><?xml version="1.0" encoding="utf-8"?>
+<?mso-contentType ?>
+<FormTemplates xmlns="http://schemas.microsoft.com/sharepoint/v3/contenttype/forms">
+  <Display>DocumentLibraryForm</Display>
+  <Edit>DocumentLibraryForm</Edit>
+  <New>DocumentLibraryForm</New>
+</FormTemplates>
+</file>
+
 <file path=customXml/item3.xml><?xml version="1.0" encoding="utf-8"?>
 <p:properties xmlns:p="http://schemas.microsoft.com/office/2006/metadata/properties" xmlns:xsi="http://www.w3.org/2001/XMLSchema-instance" xmlns:pc="http://schemas.microsoft.com/office/infopath/2007/PartnerControls">
   <documentManagement>
@@ -36350,14 +36620,6 @@
 </file>
 
 <file path=customXml/itemProps1.xml><?xml version="1.0" encoding="utf-8"?>
-<ds:datastoreItem xmlns:ds="http://schemas.openxmlformats.org/officeDocument/2006/customXml" ds:itemID="{4309E11F-D857-4267-A6D9-2945B8F42689}">
-  <ds:schemaRefs>
-    <ds:schemaRef ds:uri="http://schemas.microsoft.com/sharepoint/v3/contenttype/forms"/>
-  </ds:schemaRefs>
-</ds:datastoreItem>
-</file>
-
-<file path=customXml/itemProps2.xml><?xml version="1.0" encoding="utf-8"?>
 <ds:datastoreItem xmlns:ds="http://schemas.openxmlformats.org/officeDocument/2006/customXml" ds:itemID="{97686E73-217C-4C92-91A5-4D2E68FA7146}">
   <ds:schemaRefs>
     <ds:schemaRef ds:uri="http://schemas.microsoft.com/office/2006/metadata/contentType"/>
@@ -36372,6 +36634,14 @@
     <ds:schemaRef ds:uri="http://purl.org/dc/elements/1.1/"/>
     <ds:schemaRef ds:uri="http://purl.org/dc/terms/"/>
     <ds:schemaRef ds:uri="http://schemas.microsoft.com/internal/obd"/>
+  </ds:schemaRefs>
+</ds:datastoreItem>
+</file>
+
+<file path=customXml/itemProps2.xml><?xml version="1.0" encoding="utf-8"?>
+<ds:datastoreItem xmlns:ds="http://schemas.openxmlformats.org/officeDocument/2006/customXml" ds:itemID="{4309E11F-D857-4267-A6D9-2945B8F42689}">
+  <ds:schemaRefs>
+    <ds:schemaRef ds:uri="http://schemas.microsoft.com/sharepoint/v3/contenttype/forms"/>
   </ds:schemaRefs>
 </ds:datastoreItem>
 </file>

--- a/Documentations/presentation V1.pptx
+++ b/Documentations/presentation V1.pptx
@@ -5,59 +5,60 @@
     <p:sldMasterId id="2147483674" r:id="rId4"/>
   </p:sldMasterIdLst>
   <p:notesMasterIdLst>
-    <p:notesMasterId r:id="rId26"/>
+    <p:notesMasterId r:id="rId27"/>
   </p:notesMasterIdLst>
   <p:sldIdLst>
     <p:sldId id="256" r:id="rId5"/>
     <p:sldId id="261" r:id="rId6"/>
     <p:sldId id="259" r:id="rId7"/>
-    <p:sldId id="312" r:id="rId8"/>
-    <p:sldId id="273" r:id="rId9"/>
-    <p:sldId id="302" r:id="rId10"/>
-    <p:sldId id="262" r:id="rId11"/>
-    <p:sldId id="303" r:id="rId12"/>
-    <p:sldId id="263" r:id="rId13"/>
-    <p:sldId id="305" r:id="rId14"/>
-    <p:sldId id="268" r:id="rId15"/>
-    <p:sldId id="304" r:id="rId16"/>
-    <p:sldId id="306" r:id="rId17"/>
-    <p:sldId id="307" r:id="rId18"/>
-    <p:sldId id="265" r:id="rId19"/>
-    <p:sldId id="309" r:id="rId20"/>
-    <p:sldId id="313" r:id="rId21"/>
-    <p:sldId id="310" r:id="rId22"/>
-    <p:sldId id="311" r:id="rId23"/>
-    <p:sldId id="257" r:id="rId24"/>
-    <p:sldId id="314" r:id="rId25"/>
+    <p:sldId id="315" r:id="rId8"/>
+    <p:sldId id="316" r:id="rId9"/>
+    <p:sldId id="317" r:id="rId10"/>
+    <p:sldId id="302" r:id="rId11"/>
+    <p:sldId id="262" r:id="rId12"/>
+    <p:sldId id="303" r:id="rId13"/>
+    <p:sldId id="263" r:id="rId14"/>
+    <p:sldId id="305" r:id="rId15"/>
+    <p:sldId id="268" r:id="rId16"/>
+    <p:sldId id="304" r:id="rId17"/>
+    <p:sldId id="306" r:id="rId18"/>
+    <p:sldId id="307" r:id="rId19"/>
+    <p:sldId id="265" r:id="rId20"/>
+    <p:sldId id="309" r:id="rId21"/>
+    <p:sldId id="313" r:id="rId22"/>
+    <p:sldId id="310" r:id="rId23"/>
+    <p:sldId id="311" r:id="rId24"/>
+    <p:sldId id="257" r:id="rId25"/>
+    <p:sldId id="314" r:id="rId26"/>
   </p:sldIdLst>
   <p:sldSz cx="9144000" cy="5143500" type="screen16x9"/>
   <p:notesSz cx="6858000" cy="9144000"/>
   <p:embeddedFontLst>
     <p:embeddedFont>
       <p:font typeface="DM Sans" panose="020B0604020202020204" charset="0"/>
-      <p:regular r:id="rId27"/>
-      <p:bold r:id="rId28"/>
-      <p:italic r:id="rId29"/>
-      <p:boldItalic r:id="rId30"/>
+      <p:regular r:id="rId28"/>
+      <p:bold r:id="rId29"/>
+      <p:italic r:id="rId30"/>
+      <p:boldItalic r:id="rId31"/>
     </p:embeddedFont>
     <p:embeddedFont>
       <p:font typeface="Lato" panose="020F0502020204030203" pitchFamily="34" charset="0"/>
-      <p:regular r:id="rId31"/>
-      <p:bold r:id="rId32"/>
-      <p:italic r:id="rId33"/>
-      <p:boldItalic r:id="rId34"/>
+      <p:regular r:id="rId32"/>
+      <p:bold r:id="rId33"/>
+      <p:italic r:id="rId34"/>
+      <p:boldItalic r:id="rId35"/>
     </p:embeddedFont>
     <p:embeddedFont>
       <p:font typeface="Montserrat" panose="00000500000000000000" pitchFamily="2" charset="0"/>
-      <p:regular r:id="rId35"/>
-      <p:bold r:id="rId36"/>
-      <p:italic r:id="rId37"/>
-      <p:boldItalic r:id="rId38"/>
+      <p:regular r:id="rId36"/>
+      <p:bold r:id="rId37"/>
+      <p:italic r:id="rId38"/>
+      <p:boldItalic r:id="rId39"/>
     </p:embeddedFont>
     <p:embeddedFont>
       <p:font typeface="Montserrat ExtraBold" panose="00000900000000000000" pitchFamily="2" charset="0"/>
-      <p:bold r:id="rId39"/>
-      <p:boldItalic r:id="rId40"/>
+      <p:bold r:id="rId40"/>
+      <p:boldItalic r:id="rId41"/>
     </p:embeddedFont>
   </p:embeddedFontLst>
   <p:defaultTextStyle>
@@ -865,6 +866,115 @@
   <p:cSld>
     <p:spTree>
       <p:nvGrpSpPr>
+        <p:cNvPr id="1" name="Shape 359"/>
+        <p:cNvGrpSpPr/>
+        <p:nvPr/>
+      </p:nvGrpSpPr>
+      <p:grpSpPr>
+        <a:xfrm>
+          <a:off x="0" y="0"/>
+          <a:ext cx="0" cy="0"/>
+          <a:chOff x="0" y="0"/>
+          <a:chExt cx="0" cy="0"/>
+        </a:xfrm>
+      </p:grpSpPr>
+      <p:sp>
+        <p:nvSpPr>
+          <p:cNvPr id="360" name="Google Shape;360;g54dda1946d_6_344:notes"/>
+          <p:cNvSpPr>
+            <a:spLocks noGrp="1" noRot="1" noChangeAspect="1"/>
+          </p:cNvSpPr>
+          <p:nvPr>
+            <p:ph type="sldImg" idx="2"/>
+          </p:nvPr>
+        </p:nvSpPr>
+        <p:spPr>
+          <a:xfrm>
+            <a:off x="381000" y="685800"/>
+            <a:ext cx="6096000" cy="3429000"/>
+          </a:xfrm>
+          <a:custGeom>
+            <a:avLst/>
+            <a:gdLst/>
+            <a:ahLst/>
+            <a:cxnLst/>
+            <a:rect l="l" t="t" r="r" b="b"/>
+            <a:pathLst>
+              <a:path w="120000" h="120000" extrusionOk="0">
+                <a:moveTo>
+                  <a:pt x="0" y="0"/>
+                </a:moveTo>
+                <a:lnTo>
+                  <a:pt x="120000" y="0"/>
+                </a:lnTo>
+                <a:lnTo>
+                  <a:pt x="120000" y="120000"/>
+                </a:lnTo>
+                <a:lnTo>
+                  <a:pt x="0" y="120000"/>
+                </a:lnTo>
+                <a:close/>
+              </a:path>
+            </a:pathLst>
+          </a:custGeom>
+        </p:spPr>
+      </p:sp>
+      <p:sp>
+        <p:nvSpPr>
+          <p:cNvPr id="361" name="Google Shape;361;g54dda1946d_6_344:notes"/>
+          <p:cNvSpPr txBox="1">
+            <a:spLocks noGrp="1"/>
+          </p:cNvSpPr>
+          <p:nvPr>
+            <p:ph type="body" idx="1"/>
+          </p:nvPr>
+        </p:nvSpPr>
+        <p:spPr>
+          <a:xfrm>
+            <a:off x="685800" y="4343400"/>
+            <a:ext cx="5486400" cy="4114800"/>
+          </a:xfrm>
+          <a:prstGeom prst="rect">
+            <a:avLst/>
+          </a:prstGeom>
+        </p:spPr>
+        <p:txBody>
+          <a:bodyPr spcFirstLastPara="1" wrap="square" lIns="91425" tIns="91425" rIns="91425" bIns="91425" anchor="t" anchorCtr="0">
+            <a:noAutofit/>
+          </a:bodyPr>
+          <a:lstStyle/>
+          <a:p>
+            <a:pPr marL="0" lvl="0" indent="0" algn="l" rtl="0">
+              <a:spcBef>
+                <a:spcPts val="0"/>
+              </a:spcBef>
+              <a:spcAft>
+                <a:spcPts val="0"/>
+              </a:spcAft>
+              <a:buNone/>
+            </a:pPr>
+            <a:endParaRPr dirty="0"/>
+          </a:p>
+        </p:txBody>
+      </p:sp>
+    </p:spTree>
+    <p:extLst>
+      <p:ext uri="{BB962C8B-B14F-4D97-AF65-F5344CB8AC3E}">
+        <p14:creationId xmlns:p14="http://schemas.microsoft.com/office/powerpoint/2010/main" val="4204641393"/>
+      </p:ext>
+    </p:extLst>
+  </p:cSld>
+  <p:clrMapOvr>
+    <a:masterClrMapping/>
+  </p:clrMapOvr>
+</p:notes>
+</file>
+
+<file path=ppt/notesSlides/notesSlide11.xml><?xml version="1.0" encoding="utf-8"?>
+<p:notes xmlns:a="http://schemas.openxmlformats.org/drawingml/2006/main" xmlns:r="http://schemas.openxmlformats.org/officeDocument/2006/relationships" xmlns:p="http://schemas.openxmlformats.org/presentationml/2006/main" showMasterSp="0" showMasterPhAnim="0">
+  <p:cSld>
+    <p:spTree>
+      <p:nvGrpSpPr>
         <p:cNvPr id="1" name="Shape 359">
           <a:extLst>
             <a:ext uri="{FF2B5EF4-FFF2-40B4-BE49-F238E27FC236}">
@@ -987,7 +1097,7 @@
 </p:notes>
 </file>
 
-<file path=ppt/notesSlides/notesSlide11.xml><?xml version="1.0" encoding="utf-8"?>
+<file path=ppt/notesSlides/notesSlide12.xml><?xml version="1.0" encoding="utf-8"?>
 <p:notes xmlns:a="http://schemas.openxmlformats.org/drawingml/2006/main" xmlns:r="http://schemas.openxmlformats.org/officeDocument/2006/relationships" xmlns:p="http://schemas.openxmlformats.org/presentationml/2006/main" showMasterSp="0" showMasterPhAnim="0">
   <p:cSld>
     <p:spTree>
@@ -1096,7 +1206,7 @@
 </p:notes>
 </file>
 
-<file path=ppt/notesSlides/notesSlide12.xml><?xml version="1.0" encoding="utf-8"?>
+<file path=ppt/notesSlides/notesSlide13.xml><?xml version="1.0" encoding="utf-8"?>
 <p:notes xmlns:a="http://schemas.openxmlformats.org/drawingml/2006/main" xmlns:r="http://schemas.openxmlformats.org/officeDocument/2006/relationships" xmlns:p="http://schemas.openxmlformats.org/presentationml/2006/main" showMasterSp="0" showMasterPhAnim="0">
   <p:cSld>
     <p:spTree>
@@ -1205,7 +1315,7 @@
 </p:notes>
 </file>
 
-<file path=ppt/notesSlides/notesSlide13.xml><?xml version="1.0" encoding="utf-8"?>
+<file path=ppt/notesSlides/notesSlide14.xml><?xml version="1.0" encoding="utf-8"?>
 <p:notes xmlns:a="http://schemas.openxmlformats.org/drawingml/2006/main" xmlns:r="http://schemas.openxmlformats.org/officeDocument/2006/relationships" xmlns:p="http://schemas.openxmlformats.org/presentationml/2006/main" showMasterSp="0" showMasterPhAnim="0">
   <p:cSld>
     <p:spTree>
@@ -1332,7 +1442,7 @@
 </p:notes>
 </file>
 
-<file path=ppt/notesSlides/notesSlide14.xml><?xml version="1.0" encoding="utf-8"?>
+<file path=ppt/notesSlides/notesSlide15.xml><?xml version="1.0" encoding="utf-8"?>
 <p:notes xmlns:a="http://schemas.openxmlformats.org/drawingml/2006/main" xmlns:r="http://schemas.openxmlformats.org/officeDocument/2006/relationships" xmlns:p="http://schemas.openxmlformats.org/presentationml/2006/main" showMasterSp="0" showMasterPhAnim="0">
   <p:cSld>
     <p:spTree>
@@ -1459,7 +1569,7 @@
 </p:notes>
 </file>
 
-<file path=ppt/notesSlides/notesSlide15.xml><?xml version="1.0" encoding="utf-8"?>
+<file path=ppt/notesSlides/notesSlide16.xml><?xml version="1.0" encoding="utf-8"?>
 <p:notes xmlns:a="http://schemas.openxmlformats.org/drawingml/2006/main" xmlns:r="http://schemas.openxmlformats.org/officeDocument/2006/relationships" xmlns:p="http://schemas.openxmlformats.org/presentationml/2006/main" showMasterSp="0" showMasterPhAnim="0">
   <p:cSld>
     <p:spTree>
@@ -1559,133 +1669,6 @@
     <p:extLst>
       <p:ext uri="{BB962C8B-B14F-4D97-AF65-F5344CB8AC3E}">
         <p14:creationId xmlns:p14="http://schemas.microsoft.com/office/powerpoint/2010/main" val="1406364281"/>
-      </p:ext>
-    </p:extLst>
-  </p:cSld>
-  <p:clrMapOvr>
-    <a:masterClrMapping/>
-  </p:clrMapOvr>
-</p:notes>
-</file>
-
-<file path=ppt/notesSlides/notesSlide16.xml><?xml version="1.0" encoding="utf-8"?>
-<p:notes xmlns:a="http://schemas.openxmlformats.org/drawingml/2006/main" xmlns:r="http://schemas.openxmlformats.org/officeDocument/2006/relationships" xmlns:p="http://schemas.openxmlformats.org/presentationml/2006/main" showMasterSp="0" showMasterPhAnim="0">
-  <p:cSld>
-    <p:spTree>
-      <p:nvGrpSpPr>
-        <p:cNvPr id="1" name="Shape 359">
-          <a:extLst>
-            <a:ext uri="{FF2B5EF4-FFF2-40B4-BE49-F238E27FC236}">
-              <a16:creationId xmlns:a16="http://schemas.microsoft.com/office/drawing/2014/main" id="{624C3F03-36AB-C97E-1048-5D42219C0611}"/>
-            </a:ext>
-          </a:extLst>
-        </p:cNvPr>
-        <p:cNvGrpSpPr/>
-        <p:nvPr/>
-      </p:nvGrpSpPr>
-      <p:grpSpPr>
-        <a:xfrm>
-          <a:off x="0" y="0"/>
-          <a:ext cx="0" cy="0"/>
-          <a:chOff x="0" y="0"/>
-          <a:chExt cx="0" cy="0"/>
-        </a:xfrm>
-      </p:grpSpPr>
-      <p:sp>
-        <p:nvSpPr>
-          <p:cNvPr id="360" name="Google Shape;360;g54dda1946d_6_344:notes">
-            <a:extLst>
-              <a:ext uri="{FF2B5EF4-FFF2-40B4-BE49-F238E27FC236}">
-                <a16:creationId xmlns:a16="http://schemas.microsoft.com/office/drawing/2014/main" id="{177F7CC8-EA16-21CC-42DB-E32F17CD716A}"/>
-              </a:ext>
-            </a:extLst>
-          </p:cNvPr>
-          <p:cNvSpPr>
-            <a:spLocks noGrp="1" noRot="1" noChangeAspect="1"/>
-          </p:cNvSpPr>
-          <p:nvPr>
-            <p:ph type="sldImg" idx="2"/>
-          </p:nvPr>
-        </p:nvSpPr>
-        <p:spPr>
-          <a:xfrm>
-            <a:off x="381000" y="685800"/>
-            <a:ext cx="6096000" cy="3429000"/>
-          </a:xfrm>
-          <a:custGeom>
-            <a:avLst/>
-            <a:gdLst/>
-            <a:ahLst/>
-            <a:cxnLst/>
-            <a:rect l="l" t="t" r="r" b="b"/>
-            <a:pathLst>
-              <a:path w="120000" h="120000" extrusionOk="0">
-                <a:moveTo>
-                  <a:pt x="0" y="0"/>
-                </a:moveTo>
-                <a:lnTo>
-                  <a:pt x="120000" y="0"/>
-                </a:lnTo>
-                <a:lnTo>
-                  <a:pt x="120000" y="120000"/>
-                </a:lnTo>
-                <a:lnTo>
-                  <a:pt x="0" y="120000"/>
-                </a:lnTo>
-                <a:close/>
-              </a:path>
-            </a:pathLst>
-          </a:custGeom>
-        </p:spPr>
-      </p:sp>
-      <p:sp>
-        <p:nvSpPr>
-          <p:cNvPr id="361" name="Google Shape;361;g54dda1946d_6_344:notes">
-            <a:extLst>
-              <a:ext uri="{FF2B5EF4-FFF2-40B4-BE49-F238E27FC236}">
-                <a16:creationId xmlns:a16="http://schemas.microsoft.com/office/drawing/2014/main" id="{CB770621-6680-3EF9-F0B1-D51E4FC55BA6}"/>
-              </a:ext>
-            </a:extLst>
-          </p:cNvPr>
-          <p:cNvSpPr txBox="1">
-            <a:spLocks noGrp="1"/>
-          </p:cNvSpPr>
-          <p:nvPr>
-            <p:ph type="body" idx="1"/>
-          </p:nvPr>
-        </p:nvSpPr>
-        <p:spPr>
-          <a:xfrm>
-            <a:off x="685800" y="4343400"/>
-            <a:ext cx="5486400" cy="4114800"/>
-          </a:xfrm>
-          <a:prstGeom prst="rect">
-            <a:avLst/>
-          </a:prstGeom>
-        </p:spPr>
-        <p:txBody>
-          <a:bodyPr spcFirstLastPara="1" wrap="square" lIns="91425" tIns="91425" rIns="91425" bIns="91425" anchor="t" anchorCtr="0">
-            <a:noAutofit/>
-          </a:bodyPr>
-          <a:lstStyle/>
-          <a:p>
-            <a:pPr marL="0" lvl="0" indent="0" algn="l" rtl="0">
-              <a:spcBef>
-                <a:spcPts val="0"/>
-              </a:spcBef>
-              <a:spcAft>
-                <a:spcPts val="0"/>
-              </a:spcAft>
-              <a:buNone/>
-            </a:pPr>
-            <a:endParaRPr dirty="0"/>
-          </a:p>
-        </p:txBody>
-      </p:sp>
-    </p:spTree>
-    <p:extLst>
-      <p:ext uri="{BB962C8B-B14F-4D97-AF65-F5344CB8AC3E}">
-        <p14:creationId xmlns:p14="http://schemas.microsoft.com/office/powerpoint/2010/main" val="275952195"/>
       </p:ext>
     </p:extLst>
   </p:cSld>
@@ -1812,6 +1795,133 @@
     </p:spTree>
     <p:extLst>
       <p:ext uri="{BB962C8B-B14F-4D97-AF65-F5344CB8AC3E}">
+        <p14:creationId xmlns:p14="http://schemas.microsoft.com/office/powerpoint/2010/main" val="275952195"/>
+      </p:ext>
+    </p:extLst>
+  </p:cSld>
+  <p:clrMapOvr>
+    <a:masterClrMapping/>
+  </p:clrMapOvr>
+</p:notes>
+</file>
+
+<file path=ppt/notesSlides/notesSlide18.xml><?xml version="1.0" encoding="utf-8"?>
+<p:notes xmlns:a="http://schemas.openxmlformats.org/drawingml/2006/main" xmlns:r="http://schemas.openxmlformats.org/officeDocument/2006/relationships" xmlns:p="http://schemas.openxmlformats.org/presentationml/2006/main" showMasterSp="0" showMasterPhAnim="0">
+  <p:cSld>
+    <p:spTree>
+      <p:nvGrpSpPr>
+        <p:cNvPr id="1" name="Shape 359">
+          <a:extLst>
+            <a:ext uri="{FF2B5EF4-FFF2-40B4-BE49-F238E27FC236}">
+              <a16:creationId xmlns:a16="http://schemas.microsoft.com/office/drawing/2014/main" id="{624C3F03-36AB-C97E-1048-5D42219C0611}"/>
+            </a:ext>
+          </a:extLst>
+        </p:cNvPr>
+        <p:cNvGrpSpPr/>
+        <p:nvPr/>
+      </p:nvGrpSpPr>
+      <p:grpSpPr>
+        <a:xfrm>
+          <a:off x="0" y="0"/>
+          <a:ext cx="0" cy="0"/>
+          <a:chOff x="0" y="0"/>
+          <a:chExt cx="0" cy="0"/>
+        </a:xfrm>
+      </p:grpSpPr>
+      <p:sp>
+        <p:nvSpPr>
+          <p:cNvPr id="360" name="Google Shape;360;g54dda1946d_6_344:notes">
+            <a:extLst>
+              <a:ext uri="{FF2B5EF4-FFF2-40B4-BE49-F238E27FC236}">
+                <a16:creationId xmlns:a16="http://schemas.microsoft.com/office/drawing/2014/main" id="{177F7CC8-EA16-21CC-42DB-E32F17CD716A}"/>
+              </a:ext>
+            </a:extLst>
+          </p:cNvPr>
+          <p:cNvSpPr>
+            <a:spLocks noGrp="1" noRot="1" noChangeAspect="1"/>
+          </p:cNvSpPr>
+          <p:nvPr>
+            <p:ph type="sldImg" idx="2"/>
+          </p:nvPr>
+        </p:nvSpPr>
+        <p:spPr>
+          <a:xfrm>
+            <a:off x="381000" y="685800"/>
+            <a:ext cx="6096000" cy="3429000"/>
+          </a:xfrm>
+          <a:custGeom>
+            <a:avLst/>
+            <a:gdLst/>
+            <a:ahLst/>
+            <a:cxnLst/>
+            <a:rect l="l" t="t" r="r" b="b"/>
+            <a:pathLst>
+              <a:path w="120000" h="120000" extrusionOk="0">
+                <a:moveTo>
+                  <a:pt x="0" y="0"/>
+                </a:moveTo>
+                <a:lnTo>
+                  <a:pt x="120000" y="0"/>
+                </a:lnTo>
+                <a:lnTo>
+                  <a:pt x="120000" y="120000"/>
+                </a:lnTo>
+                <a:lnTo>
+                  <a:pt x="0" y="120000"/>
+                </a:lnTo>
+                <a:close/>
+              </a:path>
+            </a:pathLst>
+          </a:custGeom>
+        </p:spPr>
+      </p:sp>
+      <p:sp>
+        <p:nvSpPr>
+          <p:cNvPr id="361" name="Google Shape;361;g54dda1946d_6_344:notes">
+            <a:extLst>
+              <a:ext uri="{FF2B5EF4-FFF2-40B4-BE49-F238E27FC236}">
+                <a16:creationId xmlns:a16="http://schemas.microsoft.com/office/drawing/2014/main" id="{CB770621-6680-3EF9-F0B1-D51E4FC55BA6}"/>
+              </a:ext>
+            </a:extLst>
+          </p:cNvPr>
+          <p:cNvSpPr txBox="1">
+            <a:spLocks noGrp="1"/>
+          </p:cNvSpPr>
+          <p:nvPr>
+            <p:ph type="body" idx="1"/>
+          </p:nvPr>
+        </p:nvSpPr>
+        <p:spPr>
+          <a:xfrm>
+            <a:off x="685800" y="4343400"/>
+            <a:ext cx="5486400" cy="4114800"/>
+          </a:xfrm>
+          <a:prstGeom prst="rect">
+            <a:avLst/>
+          </a:prstGeom>
+        </p:spPr>
+        <p:txBody>
+          <a:bodyPr spcFirstLastPara="1" wrap="square" lIns="91425" tIns="91425" rIns="91425" bIns="91425" anchor="t" anchorCtr="0">
+            <a:noAutofit/>
+          </a:bodyPr>
+          <a:lstStyle/>
+          <a:p>
+            <a:pPr marL="0" lvl="0" indent="0" algn="l" rtl="0">
+              <a:spcBef>
+                <a:spcPts val="0"/>
+              </a:spcBef>
+              <a:spcAft>
+                <a:spcPts val="0"/>
+              </a:spcAft>
+              <a:buNone/>
+            </a:pPr>
+            <a:endParaRPr dirty="0"/>
+          </a:p>
+        </p:txBody>
+      </p:sp>
+    </p:spTree>
+    <p:extLst>
+      <p:ext uri="{BB962C8B-B14F-4D97-AF65-F5344CB8AC3E}">
         <p14:creationId xmlns:p14="http://schemas.microsoft.com/office/powerpoint/2010/main" val="2751944614"/>
       </p:ext>
     </p:extLst>
@@ -1822,7 +1932,7 @@
 </p:notes>
 </file>
 
-<file path=ppt/notesSlides/notesSlide18.xml><?xml version="1.0" encoding="utf-8"?>
+<file path=ppt/notesSlides/notesSlide19.xml><?xml version="1.0" encoding="utf-8"?>
 <p:notes xmlns:a="http://schemas.openxmlformats.org/drawingml/2006/main" xmlns:r="http://schemas.openxmlformats.org/officeDocument/2006/relationships" xmlns:p="http://schemas.openxmlformats.org/presentationml/2006/main" showMasterSp="0" showMasterPhAnim="0">
   <p:cSld>
     <p:spTree>
@@ -1949,7 +2059,116 @@
 </p:notes>
 </file>
 
-<file path=ppt/notesSlides/notesSlide19.xml><?xml version="1.0" encoding="utf-8"?>
+<file path=ppt/notesSlides/notesSlide2.xml><?xml version="1.0" encoding="utf-8"?>
+<p:notes xmlns:a="http://schemas.openxmlformats.org/drawingml/2006/main" xmlns:r="http://schemas.openxmlformats.org/officeDocument/2006/relationships" xmlns:p="http://schemas.openxmlformats.org/presentationml/2006/main" showMasterSp="0" showMasterPhAnim="0">
+  <p:cSld>
+    <p:spTree>
+      <p:nvGrpSpPr>
+        <p:cNvPr id="1" name="Shape 325"/>
+        <p:cNvGrpSpPr/>
+        <p:nvPr/>
+      </p:nvGrpSpPr>
+      <p:grpSpPr>
+        <a:xfrm>
+          <a:off x="0" y="0"/>
+          <a:ext cx="0" cy="0"/>
+          <a:chOff x="0" y="0"/>
+          <a:chExt cx="0" cy="0"/>
+        </a:xfrm>
+      </p:grpSpPr>
+      <p:sp>
+        <p:nvSpPr>
+          <p:cNvPr id="326" name="Google Shape;326;g1dfe0b786a0_0_0:notes"/>
+          <p:cNvSpPr>
+            <a:spLocks noGrp="1" noRot="1" noChangeAspect="1"/>
+          </p:cNvSpPr>
+          <p:nvPr>
+            <p:ph type="sldImg" idx="2"/>
+          </p:nvPr>
+        </p:nvSpPr>
+        <p:spPr>
+          <a:xfrm>
+            <a:off x="381000" y="685800"/>
+            <a:ext cx="6096000" cy="3429000"/>
+          </a:xfrm>
+          <a:custGeom>
+            <a:avLst/>
+            <a:gdLst/>
+            <a:ahLst/>
+            <a:cxnLst/>
+            <a:rect l="l" t="t" r="r" b="b"/>
+            <a:pathLst>
+              <a:path w="120000" h="120000" extrusionOk="0">
+                <a:moveTo>
+                  <a:pt x="0" y="0"/>
+                </a:moveTo>
+                <a:lnTo>
+                  <a:pt x="120000" y="0"/>
+                </a:lnTo>
+                <a:lnTo>
+                  <a:pt x="120000" y="120000"/>
+                </a:lnTo>
+                <a:lnTo>
+                  <a:pt x="0" y="120000"/>
+                </a:lnTo>
+                <a:close/>
+              </a:path>
+            </a:pathLst>
+          </a:custGeom>
+        </p:spPr>
+      </p:sp>
+      <p:sp>
+        <p:nvSpPr>
+          <p:cNvPr id="327" name="Google Shape;327;g1dfe0b786a0_0_0:notes"/>
+          <p:cNvSpPr txBox="1">
+            <a:spLocks noGrp="1"/>
+          </p:cNvSpPr>
+          <p:nvPr>
+            <p:ph type="body" idx="1"/>
+          </p:nvPr>
+        </p:nvSpPr>
+        <p:spPr>
+          <a:xfrm>
+            <a:off x="685800" y="4343400"/>
+            <a:ext cx="5486400" cy="4114800"/>
+          </a:xfrm>
+          <a:prstGeom prst="rect">
+            <a:avLst/>
+          </a:prstGeom>
+        </p:spPr>
+        <p:txBody>
+          <a:bodyPr spcFirstLastPara="1" wrap="square" lIns="91425" tIns="91425" rIns="91425" bIns="91425" anchor="t" anchorCtr="0">
+            <a:noAutofit/>
+          </a:bodyPr>
+          <a:lstStyle/>
+          <a:p>
+            <a:pPr marL="0" lvl="0" indent="0" algn="l" rtl="0">
+              <a:spcBef>
+                <a:spcPts val="0"/>
+              </a:spcBef>
+              <a:spcAft>
+                <a:spcPts val="0"/>
+              </a:spcAft>
+              <a:buNone/>
+            </a:pPr>
+            <a:endParaRPr/>
+          </a:p>
+        </p:txBody>
+      </p:sp>
+    </p:spTree>
+    <p:extLst>
+      <p:ext uri="{BB962C8B-B14F-4D97-AF65-F5344CB8AC3E}">
+        <p14:creationId xmlns:p14="http://schemas.microsoft.com/office/powerpoint/2010/main" val="1683455144"/>
+      </p:ext>
+    </p:extLst>
+  </p:cSld>
+  <p:clrMapOvr>
+    <a:masterClrMapping/>
+  </p:clrMapOvr>
+</p:notes>
+</file>
+
+<file path=ppt/notesSlides/notesSlide20.xml><?xml version="1.0" encoding="utf-8"?>
 <p:notes xmlns:a="http://schemas.openxmlformats.org/drawingml/2006/main" xmlns:r="http://schemas.openxmlformats.org/officeDocument/2006/relationships" xmlns:p="http://schemas.openxmlformats.org/presentationml/2006/main" showMasterSp="0" showMasterPhAnim="0">
   <p:cSld>
     <p:spTree>
@@ -2076,116 +2295,7 @@
 </p:notes>
 </file>
 
-<file path=ppt/notesSlides/notesSlide2.xml><?xml version="1.0" encoding="utf-8"?>
-<p:notes xmlns:a="http://schemas.openxmlformats.org/drawingml/2006/main" xmlns:r="http://schemas.openxmlformats.org/officeDocument/2006/relationships" xmlns:p="http://schemas.openxmlformats.org/presentationml/2006/main" showMasterSp="0" showMasterPhAnim="0">
-  <p:cSld>
-    <p:spTree>
-      <p:nvGrpSpPr>
-        <p:cNvPr id="1" name="Shape 325"/>
-        <p:cNvGrpSpPr/>
-        <p:nvPr/>
-      </p:nvGrpSpPr>
-      <p:grpSpPr>
-        <a:xfrm>
-          <a:off x="0" y="0"/>
-          <a:ext cx="0" cy="0"/>
-          <a:chOff x="0" y="0"/>
-          <a:chExt cx="0" cy="0"/>
-        </a:xfrm>
-      </p:grpSpPr>
-      <p:sp>
-        <p:nvSpPr>
-          <p:cNvPr id="326" name="Google Shape;326;g1dfe0b786a0_0_0:notes"/>
-          <p:cNvSpPr>
-            <a:spLocks noGrp="1" noRot="1" noChangeAspect="1"/>
-          </p:cNvSpPr>
-          <p:nvPr>
-            <p:ph type="sldImg" idx="2"/>
-          </p:nvPr>
-        </p:nvSpPr>
-        <p:spPr>
-          <a:xfrm>
-            <a:off x="381000" y="685800"/>
-            <a:ext cx="6096000" cy="3429000"/>
-          </a:xfrm>
-          <a:custGeom>
-            <a:avLst/>
-            <a:gdLst/>
-            <a:ahLst/>
-            <a:cxnLst/>
-            <a:rect l="l" t="t" r="r" b="b"/>
-            <a:pathLst>
-              <a:path w="120000" h="120000" extrusionOk="0">
-                <a:moveTo>
-                  <a:pt x="0" y="0"/>
-                </a:moveTo>
-                <a:lnTo>
-                  <a:pt x="120000" y="0"/>
-                </a:lnTo>
-                <a:lnTo>
-                  <a:pt x="120000" y="120000"/>
-                </a:lnTo>
-                <a:lnTo>
-                  <a:pt x="0" y="120000"/>
-                </a:lnTo>
-                <a:close/>
-              </a:path>
-            </a:pathLst>
-          </a:custGeom>
-        </p:spPr>
-      </p:sp>
-      <p:sp>
-        <p:nvSpPr>
-          <p:cNvPr id="327" name="Google Shape;327;g1dfe0b786a0_0_0:notes"/>
-          <p:cNvSpPr txBox="1">
-            <a:spLocks noGrp="1"/>
-          </p:cNvSpPr>
-          <p:nvPr>
-            <p:ph type="body" idx="1"/>
-          </p:nvPr>
-        </p:nvSpPr>
-        <p:spPr>
-          <a:xfrm>
-            <a:off x="685800" y="4343400"/>
-            <a:ext cx="5486400" cy="4114800"/>
-          </a:xfrm>
-          <a:prstGeom prst="rect">
-            <a:avLst/>
-          </a:prstGeom>
-        </p:spPr>
-        <p:txBody>
-          <a:bodyPr spcFirstLastPara="1" wrap="square" lIns="91425" tIns="91425" rIns="91425" bIns="91425" anchor="t" anchorCtr="0">
-            <a:noAutofit/>
-          </a:bodyPr>
-          <a:lstStyle/>
-          <a:p>
-            <a:pPr marL="0" lvl="0" indent="0" algn="l" rtl="0">
-              <a:spcBef>
-                <a:spcPts val="0"/>
-              </a:spcBef>
-              <a:spcAft>
-                <a:spcPts val="0"/>
-              </a:spcAft>
-              <a:buNone/>
-            </a:pPr>
-            <a:endParaRPr/>
-          </a:p>
-        </p:txBody>
-      </p:sp>
-    </p:spTree>
-    <p:extLst>
-      <p:ext uri="{BB962C8B-B14F-4D97-AF65-F5344CB8AC3E}">
-        <p14:creationId xmlns:p14="http://schemas.microsoft.com/office/powerpoint/2010/main" val="1683455144"/>
-      </p:ext>
-    </p:extLst>
-  </p:cSld>
-  <p:clrMapOvr>
-    <a:masterClrMapping/>
-  </p:clrMapOvr>
-</p:notes>
-</file>
-
-<file path=ppt/notesSlides/notesSlide20.xml><?xml version="1.0" encoding="utf-8"?>
+<file path=ppt/notesSlides/notesSlide21.xml><?xml version="1.0" encoding="utf-8"?>
 <p:notes xmlns:a="http://schemas.openxmlformats.org/drawingml/2006/main" xmlns:r="http://schemas.openxmlformats.org/officeDocument/2006/relationships" xmlns:p="http://schemas.openxmlformats.org/presentationml/2006/main" showMasterSp="0" showMasterPhAnim="0">
   <p:cSld>
     <p:spTree>
@@ -2294,7 +2404,7 @@
 </p:notes>
 </file>
 
-<file path=ppt/notesSlides/notesSlide21.xml><?xml version="1.0" encoding="utf-8"?>
+<file path=ppt/notesSlides/notesSlide22.xml><?xml version="1.0" encoding="utf-8"?>
 <p:notes xmlns:a="http://schemas.openxmlformats.org/drawingml/2006/main" xmlns:r="http://schemas.openxmlformats.org/officeDocument/2006/relationships" xmlns:p="http://schemas.openxmlformats.org/presentationml/2006/main" showMasterSp="0" showMasterPhAnim="0">
   <p:cSld>
     <p:spTree>
@@ -2611,7 +2721,7 @@
     </p:spTree>
     <p:extLst>
       <p:ext uri="{BB962C8B-B14F-4D97-AF65-F5344CB8AC3E}">
-        <p14:creationId xmlns:p14="http://schemas.microsoft.com/office/powerpoint/2010/main" val="337737045"/>
+        <p14:creationId xmlns:p14="http://schemas.microsoft.com/office/powerpoint/2010/main" val="3996477713"/>
       </p:ext>
     </p:extLst>
   </p:cSld>
@@ -2720,7 +2830,7 @@
     </p:spTree>
     <p:extLst>
       <p:ext uri="{BB962C8B-B14F-4D97-AF65-F5344CB8AC3E}">
-        <p14:creationId xmlns:p14="http://schemas.microsoft.com/office/powerpoint/2010/main" val="2804446117"/>
+        <p14:creationId xmlns:p14="http://schemas.microsoft.com/office/powerpoint/2010/main" val="3598010373"/>
       </p:ext>
     </p:extLst>
   </p:cSld>
@@ -2731,6 +2841,115 @@
 </file>
 
 <file path=ppt/notesSlides/notesSlide6.xml><?xml version="1.0" encoding="utf-8"?>
+<p:notes xmlns:a="http://schemas.openxmlformats.org/drawingml/2006/main" xmlns:r="http://schemas.openxmlformats.org/officeDocument/2006/relationships" xmlns:p="http://schemas.openxmlformats.org/presentationml/2006/main" showMasterSp="0" showMasterPhAnim="0">
+  <p:cSld>
+    <p:spTree>
+      <p:nvGrpSpPr>
+        <p:cNvPr id="1" name="Shape 507"/>
+        <p:cNvGrpSpPr/>
+        <p:nvPr/>
+      </p:nvGrpSpPr>
+      <p:grpSpPr>
+        <a:xfrm>
+          <a:off x="0" y="0"/>
+          <a:ext cx="0" cy="0"/>
+          <a:chOff x="0" y="0"/>
+          <a:chExt cx="0" cy="0"/>
+        </a:xfrm>
+      </p:grpSpPr>
+      <p:sp>
+        <p:nvSpPr>
+          <p:cNvPr id="508" name="Google Shape;508;g54dda1946d_4_2685:notes"/>
+          <p:cNvSpPr>
+            <a:spLocks noGrp="1" noRot="1" noChangeAspect="1"/>
+          </p:cNvSpPr>
+          <p:nvPr>
+            <p:ph type="sldImg" idx="2"/>
+          </p:nvPr>
+        </p:nvSpPr>
+        <p:spPr>
+          <a:xfrm>
+            <a:off x="381000" y="685800"/>
+            <a:ext cx="6096000" cy="3429000"/>
+          </a:xfrm>
+          <a:custGeom>
+            <a:avLst/>
+            <a:gdLst/>
+            <a:ahLst/>
+            <a:cxnLst/>
+            <a:rect l="l" t="t" r="r" b="b"/>
+            <a:pathLst>
+              <a:path w="120000" h="120000" extrusionOk="0">
+                <a:moveTo>
+                  <a:pt x="0" y="0"/>
+                </a:moveTo>
+                <a:lnTo>
+                  <a:pt x="120000" y="0"/>
+                </a:lnTo>
+                <a:lnTo>
+                  <a:pt x="120000" y="120000"/>
+                </a:lnTo>
+                <a:lnTo>
+                  <a:pt x="0" y="120000"/>
+                </a:lnTo>
+                <a:close/>
+              </a:path>
+            </a:pathLst>
+          </a:custGeom>
+        </p:spPr>
+      </p:sp>
+      <p:sp>
+        <p:nvSpPr>
+          <p:cNvPr id="509" name="Google Shape;509;g54dda1946d_4_2685:notes"/>
+          <p:cNvSpPr txBox="1">
+            <a:spLocks noGrp="1"/>
+          </p:cNvSpPr>
+          <p:nvPr>
+            <p:ph type="body" idx="1"/>
+          </p:nvPr>
+        </p:nvSpPr>
+        <p:spPr>
+          <a:xfrm>
+            <a:off x="685800" y="4343400"/>
+            <a:ext cx="5486400" cy="4114800"/>
+          </a:xfrm>
+          <a:prstGeom prst="rect">
+            <a:avLst/>
+          </a:prstGeom>
+        </p:spPr>
+        <p:txBody>
+          <a:bodyPr spcFirstLastPara="1" wrap="square" lIns="91425" tIns="91425" rIns="91425" bIns="91425" anchor="t" anchorCtr="0">
+            <a:noAutofit/>
+          </a:bodyPr>
+          <a:lstStyle/>
+          <a:p>
+            <a:pPr marL="0" lvl="0" indent="0" algn="l" rtl="0">
+              <a:spcBef>
+                <a:spcPts val="0"/>
+              </a:spcBef>
+              <a:spcAft>
+                <a:spcPts val="0"/>
+              </a:spcAft>
+              <a:buNone/>
+            </a:pPr>
+            <a:endParaRPr/>
+          </a:p>
+        </p:txBody>
+      </p:sp>
+    </p:spTree>
+    <p:extLst>
+      <p:ext uri="{BB962C8B-B14F-4D97-AF65-F5344CB8AC3E}">
+        <p14:creationId xmlns:p14="http://schemas.microsoft.com/office/powerpoint/2010/main" val="927279"/>
+      </p:ext>
+    </p:extLst>
+  </p:cSld>
+  <p:clrMapOvr>
+    <a:masterClrMapping/>
+  </p:clrMapOvr>
+</p:notes>
+</file>
+
+<file path=ppt/notesSlides/notesSlide7.xml><?xml version="1.0" encoding="utf-8"?>
 <p:notes xmlns:a="http://schemas.openxmlformats.org/drawingml/2006/main" xmlns:r="http://schemas.openxmlformats.org/officeDocument/2006/relationships" xmlns:p="http://schemas.openxmlformats.org/presentationml/2006/main" showMasterSp="0" showMasterPhAnim="0">
   <p:cSld>
     <p:spTree>
@@ -2857,7 +3076,7 @@
 </p:notes>
 </file>
 
-<file path=ppt/notesSlides/notesSlide7.xml><?xml version="1.0" encoding="utf-8"?>
+<file path=ppt/notesSlides/notesSlide8.xml><?xml version="1.0" encoding="utf-8"?>
 <p:notes xmlns:a="http://schemas.openxmlformats.org/drawingml/2006/main" xmlns:r="http://schemas.openxmlformats.org/officeDocument/2006/relationships" xmlns:p="http://schemas.openxmlformats.org/presentationml/2006/main" showMasterSp="0" showMasterPhAnim="0">
   <p:cSld>
     <p:spTree>
@@ -2966,7 +3185,7 @@
 </p:notes>
 </file>
 
-<file path=ppt/notesSlides/notesSlide8.xml><?xml version="1.0" encoding="utf-8"?>
+<file path=ppt/notesSlides/notesSlide9.xml><?xml version="1.0" encoding="utf-8"?>
 <p:notes xmlns:a="http://schemas.openxmlformats.org/drawingml/2006/main" xmlns:r="http://schemas.openxmlformats.org/officeDocument/2006/relationships" xmlns:p="http://schemas.openxmlformats.org/presentationml/2006/main" showMasterSp="0" showMasterPhAnim="0">
   <p:cSld>
     <p:spTree>
@@ -3084,115 +3303,6 @@
     <p:extLst>
       <p:ext uri="{BB962C8B-B14F-4D97-AF65-F5344CB8AC3E}">
         <p14:creationId xmlns:p14="http://schemas.microsoft.com/office/powerpoint/2010/main" val="3839862243"/>
-      </p:ext>
-    </p:extLst>
-  </p:cSld>
-  <p:clrMapOvr>
-    <a:masterClrMapping/>
-  </p:clrMapOvr>
-</p:notes>
-</file>
-
-<file path=ppt/notesSlides/notesSlide9.xml><?xml version="1.0" encoding="utf-8"?>
-<p:notes xmlns:a="http://schemas.openxmlformats.org/drawingml/2006/main" xmlns:r="http://schemas.openxmlformats.org/officeDocument/2006/relationships" xmlns:p="http://schemas.openxmlformats.org/presentationml/2006/main" showMasterSp="0" showMasterPhAnim="0">
-  <p:cSld>
-    <p:spTree>
-      <p:nvGrpSpPr>
-        <p:cNvPr id="1" name="Shape 359"/>
-        <p:cNvGrpSpPr/>
-        <p:nvPr/>
-      </p:nvGrpSpPr>
-      <p:grpSpPr>
-        <a:xfrm>
-          <a:off x="0" y="0"/>
-          <a:ext cx="0" cy="0"/>
-          <a:chOff x="0" y="0"/>
-          <a:chExt cx="0" cy="0"/>
-        </a:xfrm>
-      </p:grpSpPr>
-      <p:sp>
-        <p:nvSpPr>
-          <p:cNvPr id="360" name="Google Shape;360;g54dda1946d_6_344:notes"/>
-          <p:cNvSpPr>
-            <a:spLocks noGrp="1" noRot="1" noChangeAspect="1"/>
-          </p:cNvSpPr>
-          <p:nvPr>
-            <p:ph type="sldImg" idx="2"/>
-          </p:nvPr>
-        </p:nvSpPr>
-        <p:spPr>
-          <a:xfrm>
-            <a:off x="381000" y="685800"/>
-            <a:ext cx="6096000" cy="3429000"/>
-          </a:xfrm>
-          <a:custGeom>
-            <a:avLst/>
-            <a:gdLst/>
-            <a:ahLst/>
-            <a:cxnLst/>
-            <a:rect l="l" t="t" r="r" b="b"/>
-            <a:pathLst>
-              <a:path w="120000" h="120000" extrusionOk="0">
-                <a:moveTo>
-                  <a:pt x="0" y="0"/>
-                </a:moveTo>
-                <a:lnTo>
-                  <a:pt x="120000" y="0"/>
-                </a:lnTo>
-                <a:lnTo>
-                  <a:pt x="120000" y="120000"/>
-                </a:lnTo>
-                <a:lnTo>
-                  <a:pt x="0" y="120000"/>
-                </a:lnTo>
-                <a:close/>
-              </a:path>
-            </a:pathLst>
-          </a:custGeom>
-        </p:spPr>
-      </p:sp>
-      <p:sp>
-        <p:nvSpPr>
-          <p:cNvPr id="361" name="Google Shape;361;g54dda1946d_6_344:notes"/>
-          <p:cNvSpPr txBox="1">
-            <a:spLocks noGrp="1"/>
-          </p:cNvSpPr>
-          <p:nvPr>
-            <p:ph type="body" idx="1"/>
-          </p:nvPr>
-        </p:nvSpPr>
-        <p:spPr>
-          <a:xfrm>
-            <a:off x="685800" y="4343400"/>
-            <a:ext cx="5486400" cy="4114800"/>
-          </a:xfrm>
-          <a:prstGeom prst="rect">
-            <a:avLst/>
-          </a:prstGeom>
-        </p:spPr>
-        <p:txBody>
-          <a:bodyPr spcFirstLastPara="1" wrap="square" lIns="91425" tIns="91425" rIns="91425" bIns="91425" anchor="t" anchorCtr="0">
-            <a:noAutofit/>
-          </a:bodyPr>
-          <a:lstStyle/>
-          <a:p>
-            <a:pPr marL="0" lvl="0" indent="0" algn="l" rtl="0">
-              <a:spcBef>
-                <a:spcPts val="0"/>
-              </a:spcBef>
-              <a:spcAft>
-                <a:spcPts val="0"/>
-              </a:spcAft>
-              <a:buNone/>
-            </a:pPr>
-            <a:endParaRPr dirty="0"/>
-          </a:p>
-        </p:txBody>
-      </p:sp>
-    </p:spTree>
-    <p:extLst>
-      <p:ext uri="{BB962C8B-B14F-4D97-AF65-F5344CB8AC3E}">
-        <p14:creationId xmlns:p14="http://schemas.microsoft.com/office/powerpoint/2010/main" val="4204641393"/>
       </p:ext>
     </p:extLst>
   </p:cSld>
@@ -13510,6 +13620,637 @@
   <p:cSld>
     <p:spTree>
       <p:nvGrpSpPr>
+        <p:cNvPr id="1" name="Shape 362"/>
+        <p:cNvGrpSpPr/>
+        <p:nvPr/>
+      </p:nvGrpSpPr>
+      <p:grpSpPr>
+        <a:xfrm>
+          <a:off x="0" y="0"/>
+          <a:ext cx="0" cy="0"/>
+          <a:chOff x="0" y="0"/>
+          <a:chExt cx="0" cy="0"/>
+        </a:xfrm>
+      </p:grpSpPr>
+      <p:sp>
+        <p:nvSpPr>
+          <p:cNvPr id="363" name="Google Shape;363;p36"/>
+          <p:cNvSpPr txBox="1">
+            <a:spLocks noGrp="1"/>
+          </p:cNvSpPr>
+          <p:nvPr>
+            <p:ph type="title"/>
+          </p:nvPr>
+        </p:nvSpPr>
+        <p:spPr>
+          <a:xfrm>
+            <a:off x="719999" y="445025"/>
+            <a:ext cx="8089463" cy="572700"/>
+          </a:xfrm>
+          <a:prstGeom prst="rect">
+            <a:avLst/>
+          </a:prstGeom>
+        </p:spPr>
+        <p:txBody>
+          <a:bodyPr spcFirstLastPara="1" wrap="square" lIns="91425" tIns="91425" rIns="91425" bIns="91425" anchor="t" anchorCtr="0">
+            <a:noAutofit/>
+          </a:bodyPr>
+          <a:lstStyle/>
+          <a:p>
+            <a:pPr lvl="0"/>
+            <a:r>
+              <a:rPr lang="en-US" dirty="0"/>
+              <a:t>Sports Scheduling as an Optimization Problem</a:t>
+            </a:r>
+            <a:endParaRPr dirty="0"/>
+          </a:p>
+        </p:txBody>
+      </p:sp>
+      <p:sp>
+        <p:nvSpPr>
+          <p:cNvPr id="365" name="Google Shape;365;p36"/>
+          <p:cNvSpPr txBox="1">
+            <a:spLocks noGrp="1"/>
+          </p:cNvSpPr>
+          <p:nvPr>
+            <p:ph type="subTitle" idx="2"/>
+          </p:nvPr>
+        </p:nvSpPr>
+        <p:spPr>
+          <a:xfrm>
+            <a:off x="2911683" y="2878695"/>
+            <a:ext cx="3447553" cy="1911514"/>
+          </a:xfrm>
+          <a:prstGeom prst="rect">
+            <a:avLst/>
+          </a:prstGeom>
+        </p:spPr>
+        <p:txBody>
+          <a:bodyPr spcFirstLastPara="1" wrap="square" lIns="91425" tIns="91425" rIns="91425" bIns="91425" anchor="t" anchorCtr="0">
+            <a:noAutofit/>
+          </a:bodyPr>
+          <a:lstStyle/>
+          <a:p>
+            <a:pPr marL="596900" lvl="1" indent="0" algn="l">
+              <a:lnSpc>
+                <a:spcPct val="150000"/>
+              </a:lnSpc>
+            </a:pPr>
+            <a:r>
+              <a:rPr lang="en-US" dirty="0"/>
+              <a:t>Standard football leagues follow a </a:t>
+            </a:r>
+            <a:r>
+              <a:rPr lang="en-US" b="1" dirty="0"/>
+              <a:t>Double Round Robin</a:t>
+            </a:r>
+            <a:endParaRPr lang="en-US" dirty="0"/>
+          </a:p>
+          <a:p>
+            <a:pPr marL="882650" lvl="1" indent="-285750" algn="l">
+              <a:lnSpc>
+                <a:spcPct val="150000"/>
+              </a:lnSpc>
+              <a:buFont typeface="Arial" panose="020B0604020202020204" pitchFamily="34" charset="0"/>
+              <a:buChar char="•"/>
+            </a:pPr>
+            <a:r>
+              <a:rPr lang="en-US" dirty="0"/>
+              <a:t>Each team plays every other team </a:t>
+            </a:r>
+            <a:r>
+              <a:rPr lang="en-US" b="1" dirty="0"/>
+              <a:t>twice</a:t>
+            </a:r>
+            <a:r>
+              <a:rPr lang="en-US" dirty="0"/>
+              <a:t> (home &amp; away)</a:t>
+            </a:r>
+          </a:p>
+          <a:p>
+            <a:pPr marL="882650" lvl="1" indent="-285750" algn="l">
+              <a:lnSpc>
+                <a:spcPct val="150000"/>
+              </a:lnSpc>
+              <a:buFont typeface="Arial" panose="020B0604020202020204" pitchFamily="34" charset="0"/>
+              <a:buChar char="•"/>
+            </a:pPr>
+            <a:r>
+              <a:rPr lang="en-US" dirty="0"/>
+              <a:t>For </a:t>
+            </a:r>
+            <a:r>
+              <a:rPr lang="en-US" i="1" dirty="0"/>
+              <a:t>n</a:t>
+            </a:r>
+            <a:r>
+              <a:rPr lang="en-US" dirty="0"/>
+              <a:t> teams → </a:t>
+            </a:r>
+            <a:r>
+              <a:rPr lang="en-US" b="1" dirty="0"/>
+              <a:t>n(n−1)</a:t>
+            </a:r>
+            <a:r>
+              <a:rPr lang="en-US" dirty="0"/>
+              <a:t> total matches</a:t>
+            </a:r>
+          </a:p>
+          <a:p>
+            <a:pPr marL="596900" lvl="1" indent="0" algn="l"/>
+            <a:endParaRPr lang="en-US" dirty="0"/>
+          </a:p>
+        </p:txBody>
+      </p:sp>
+      <p:sp>
+        <p:nvSpPr>
+          <p:cNvPr id="366" name="Google Shape;366;p36"/>
+          <p:cNvSpPr txBox="1">
+            <a:spLocks noGrp="1"/>
+          </p:cNvSpPr>
+          <p:nvPr>
+            <p:ph type="subTitle" idx="3"/>
+          </p:nvPr>
+        </p:nvSpPr>
+        <p:spPr>
+          <a:xfrm>
+            <a:off x="6434178" y="2889947"/>
+            <a:ext cx="2784764" cy="1547831"/>
+          </a:xfrm>
+          <a:prstGeom prst="rect">
+            <a:avLst/>
+          </a:prstGeom>
+        </p:spPr>
+        <p:txBody>
+          <a:bodyPr spcFirstLastPara="1" wrap="square" lIns="91425" tIns="91425" rIns="91425" bIns="91425" anchor="t" anchorCtr="0">
+            <a:noAutofit/>
+          </a:bodyPr>
+          <a:lstStyle/>
+          <a:p>
+            <a:pPr marL="0" lvl="0" indent="0" eaLnBrk="0" fontAlgn="base" hangingPunct="0">
+              <a:lnSpc>
+                <a:spcPct val="150000"/>
+              </a:lnSpc>
+              <a:spcBef>
+                <a:spcPct val="0"/>
+              </a:spcBef>
+              <a:spcAft>
+                <a:spcPct val="0"/>
+              </a:spcAft>
+              <a:buClrTx/>
+              <a:buSzTx/>
+            </a:pPr>
+            <a:r>
+              <a:rPr lang="en-US" b="1" dirty="0">
+                <a:solidFill>
+                  <a:schemeClr val="tx1"/>
+                </a:solidFill>
+              </a:rPr>
+              <a:t>Egyptian Premier League has:</a:t>
+            </a:r>
+          </a:p>
+          <a:p>
+            <a:pPr marL="285750" lvl="0" indent="-285750" eaLnBrk="0" fontAlgn="base" hangingPunct="0">
+              <a:lnSpc>
+                <a:spcPct val="150000"/>
+              </a:lnSpc>
+              <a:spcBef>
+                <a:spcPct val="0"/>
+              </a:spcBef>
+              <a:spcAft>
+                <a:spcPct val="0"/>
+              </a:spcAft>
+              <a:buClrTx/>
+              <a:buSzTx/>
+              <a:buFont typeface="Arial" panose="020B0604020202020204" pitchFamily="34" charset="0"/>
+              <a:buChar char="•"/>
+            </a:pPr>
+            <a:r>
+              <a:rPr lang="en-US" altLang="en-US" b="1" dirty="0">
+                <a:solidFill>
+                  <a:schemeClr val="tx1"/>
+                </a:solidFill>
+                <a:latin typeface="Arial" panose="020B0604020202020204" pitchFamily="34" charset="0"/>
+              </a:rPr>
+              <a:t>18 teams</a:t>
+            </a:r>
+            <a:endParaRPr lang="en-US" altLang="en-US" dirty="0">
+              <a:solidFill>
+                <a:schemeClr val="tx1"/>
+              </a:solidFill>
+              <a:latin typeface="Arial" panose="020B0604020202020204" pitchFamily="34" charset="0"/>
+            </a:endParaRPr>
+          </a:p>
+          <a:p>
+            <a:pPr marL="285750" lvl="0" indent="-285750" eaLnBrk="0" fontAlgn="base" hangingPunct="0">
+              <a:lnSpc>
+                <a:spcPct val="150000"/>
+              </a:lnSpc>
+              <a:spcBef>
+                <a:spcPct val="0"/>
+              </a:spcBef>
+              <a:spcAft>
+                <a:spcPct val="0"/>
+              </a:spcAft>
+              <a:buClrTx/>
+              <a:buSzTx/>
+              <a:buFont typeface="Arial" panose="020B0604020202020204" pitchFamily="34" charset="0"/>
+              <a:buChar char="•"/>
+            </a:pPr>
+            <a:r>
+              <a:rPr lang="en-US" altLang="en-US" b="1" dirty="0">
+                <a:solidFill>
+                  <a:schemeClr val="tx1"/>
+                </a:solidFill>
+                <a:latin typeface="Arial" panose="020B0604020202020204" pitchFamily="34" charset="0"/>
+              </a:rPr>
+              <a:t>306 matches</a:t>
+            </a:r>
+            <a:endParaRPr lang="en-US" altLang="en-US" dirty="0">
+              <a:solidFill>
+                <a:schemeClr val="tx1"/>
+              </a:solidFill>
+              <a:latin typeface="Arial" panose="020B0604020202020204" pitchFamily="34" charset="0"/>
+            </a:endParaRPr>
+          </a:p>
+          <a:p>
+            <a:pPr marL="285750" lvl="0" indent="-285750" eaLnBrk="0" fontAlgn="base" hangingPunct="0">
+              <a:lnSpc>
+                <a:spcPct val="150000"/>
+              </a:lnSpc>
+              <a:spcBef>
+                <a:spcPct val="0"/>
+              </a:spcBef>
+              <a:spcAft>
+                <a:spcPct val="0"/>
+              </a:spcAft>
+              <a:buClrTx/>
+              <a:buSzTx/>
+              <a:buFont typeface="Arial" panose="020B0604020202020204" pitchFamily="34" charset="0"/>
+              <a:buChar char="•"/>
+            </a:pPr>
+            <a:r>
+              <a:rPr lang="en-US" altLang="en-US" b="1" dirty="0">
+                <a:solidFill>
+                  <a:schemeClr val="tx1"/>
+                </a:solidFill>
+                <a:latin typeface="Arial" panose="020B0604020202020204" pitchFamily="34" charset="0"/>
+              </a:rPr>
+              <a:t>34 rounds</a:t>
+            </a:r>
+            <a:endParaRPr lang="en-US" altLang="en-US" dirty="0">
+              <a:solidFill>
+                <a:schemeClr val="tx1"/>
+              </a:solidFill>
+              <a:latin typeface="Arial" panose="020B0604020202020204" pitchFamily="34" charset="0"/>
+            </a:endParaRPr>
+          </a:p>
+          <a:p>
+            <a:pPr marL="0" lvl="0" indent="0" algn="l" rtl="0">
+              <a:spcBef>
+                <a:spcPts val="0"/>
+              </a:spcBef>
+              <a:spcAft>
+                <a:spcPts val="0"/>
+              </a:spcAft>
+              <a:buNone/>
+            </a:pPr>
+            <a:endParaRPr dirty="0"/>
+          </a:p>
+        </p:txBody>
+      </p:sp>
+      <p:sp>
+        <p:nvSpPr>
+          <p:cNvPr id="367" name="Google Shape;367;p36"/>
+          <p:cNvSpPr txBox="1">
+            <a:spLocks noGrp="1"/>
+          </p:cNvSpPr>
+          <p:nvPr>
+            <p:ph type="subTitle" idx="4"/>
+          </p:nvPr>
+        </p:nvSpPr>
+        <p:spPr>
+          <a:xfrm>
+            <a:off x="500338" y="2536444"/>
+            <a:ext cx="3041678" cy="430800"/>
+          </a:xfrm>
+          <a:prstGeom prst="rect">
+            <a:avLst/>
+          </a:prstGeom>
+        </p:spPr>
+        <p:txBody>
+          <a:bodyPr spcFirstLastPara="1" wrap="square" lIns="91425" tIns="91425" rIns="91425" bIns="91425" anchor="b" anchorCtr="0">
+            <a:noAutofit/>
+          </a:bodyPr>
+          <a:lstStyle/>
+          <a:p>
+            <a:pPr marL="0" lvl="0" indent="0"/>
+            <a:r>
+              <a:rPr lang="en-US" sz="2000" b="1" dirty="0"/>
+              <a:t>NP-hard problem</a:t>
+            </a:r>
+            <a:endParaRPr sz="2000" dirty="0"/>
+          </a:p>
+        </p:txBody>
+      </p:sp>
+      <p:sp>
+        <p:nvSpPr>
+          <p:cNvPr id="368" name="Google Shape;368;p36"/>
+          <p:cNvSpPr txBox="1">
+            <a:spLocks noGrp="1"/>
+          </p:cNvSpPr>
+          <p:nvPr>
+            <p:ph type="subTitle" idx="5"/>
+          </p:nvPr>
+        </p:nvSpPr>
+        <p:spPr>
+          <a:xfrm>
+            <a:off x="3684051" y="2560498"/>
+            <a:ext cx="3920127" cy="430800"/>
+          </a:xfrm>
+          <a:prstGeom prst="rect">
+            <a:avLst/>
+          </a:prstGeom>
+        </p:spPr>
+        <p:txBody>
+          <a:bodyPr spcFirstLastPara="1" wrap="square" lIns="91425" tIns="91425" rIns="91425" bIns="91425" anchor="b" anchorCtr="0">
+            <a:noAutofit/>
+          </a:bodyPr>
+          <a:lstStyle/>
+          <a:p>
+            <a:pPr marL="0" lvl="0" indent="0"/>
+            <a:r>
+              <a:rPr lang="en-US" b="1" dirty="0"/>
+              <a:t>DRR</a:t>
+            </a:r>
+            <a:r>
+              <a:rPr lang="en-US" dirty="0"/>
+              <a:t> format</a:t>
+            </a:r>
+            <a:endParaRPr dirty="0"/>
+          </a:p>
+        </p:txBody>
+      </p:sp>
+      <p:sp>
+        <p:nvSpPr>
+          <p:cNvPr id="369" name="Google Shape;369;p36"/>
+          <p:cNvSpPr txBox="1">
+            <a:spLocks noGrp="1"/>
+          </p:cNvSpPr>
+          <p:nvPr>
+            <p:ph type="subTitle" idx="6"/>
+          </p:nvPr>
+        </p:nvSpPr>
+        <p:spPr>
+          <a:xfrm>
+            <a:off x="6667410" y="2571750"/>
+            <a:ext cx="2126672" cy="437722"/>
+          </a:xfrm>
+          <a:prstGeom prst="rect">
+            <a:avLst/>
+          </a:prstGeom>
+        </p:spPr>
+        <p:txBody>
+          <a:bodyPr spcFirstLastPara="1" wrap="square" lIns="91425" tIns="91425" rIns="91425" bIns="91425" anchor="b" anchorCtr="0">
+            <a:noAutofit/>
+          </a:bodyPr>
+          <a:lstStyle/>
+          <a:p>
+            <a:pPr marL="0" lvl="0" indent="0"/>
+            <a:r>
+              <a:rPr lang="en-US" dirty="0"/>
+              <a:t>In the EPL:</a:t>
+            </a:r>
+            <a:endParaRPr dirty="0"/>
+          </a:p>
+        </p:txBody>
+      </p:sp>
+      <p:sp>
+        <p:nvSpPr>
+          <p:cNvPr id="4" name="TextBox 3">
+            <a:extLst>
+              <a:ext uri="{FF2B5EF4-FFF2-40B4-BE49-F238E27FC236}">
+                <a16:creationId xmlns:a16="http://schemas.microsoft.com/office/drawing/2014/main" id="{7E18C114-67AD-193B-A72F-37933924273A}"/>
+              </a:ext>
+            </a:extLst>
+          </p:cNvPr>
+          <p:cNvSpPr txBox="1"/>
+          <p:nvPr/>
+        </p:nvSpPr>
+        <p:spPr>
+          <a:xfrm>
+            <a:off x="786907" y="1730896"/>
+            <a:ext cx="7932233" cy="307777"/>
+          </a:xfrm>
+          <a:prstGeom prst="rect">
+            <a:avLst/>
+          </a:prstGeom>
+          <a:noFill/>
+        </p:spPr>
+        <p:txBody>
+          <a:bodyPr wrap="square" rtlCol="0">
+            <a:spAutoFit/>
+          </a:bodyPr>
+          <a:lstStyle/>
+          <a:p>
+            <a:r>
+              <a:rPr lang="en-US" b="1" dirty="0">
+                <a:solidFill>
+                  <a:schemeClr val="tx1"/>
+                </a:solidFill>
+              </a:rPr>
+              <a:t>Sports scheduling is a subfield of Operations Research</a:t>
+            </a:r>
+            <a:r>
+              <a:rPr lang="en-US" dirty="0">
+                <a:solidFill>
+                  <a:schemeClr val="tx1"/>
+                </a:solidFill>
+              </a:rPr>
+              <a:t> and </a:t>
+            </a:r>
+            <a:r>
+              <a:rPr lang="en-US" b="1" dirty="0">
+                <a:solidFill>
+                  <a:schemeClr val="tx1"/>
+                </a:solidFill>
+              </a:rPr>
+              <a:t>Combinatorial Optimization</a:t>
+            </a:r>
+            <a:endParaRPr lang="en-US" dirty="0">
+              <a:solidFill>
+                <a:schemeClr val="tx1"/>
+              </a:solidFill>
+            </a:endParaRPr>
+          </a:p>
+        </p:txBody>
+      </p:sp>
+      <p:sp>
+        <p:nvSpPr>
+          <p:cNvPr id="2" name="TextBox 1"/>
+          <p:cNvSpPr txBox="1"/>
+          <p:nvPr/>
+        </p:nvSpPr>
+        <p:spPr>
+          <a:xfrm>
+            <a:off x="500338" y="2878695"/>
+            <a:ext cx="3108771" cy="1355499"/>
+          </a:xfrm>
+          <a:prstGeom prst="rect">
+            <a:avLst/>
+          </a:prstGeom>
+          <a:noFill/>
+        </p:spPr>
+        <p:txBody>
+          <a:bodyPr wrap="square" rtlCol="0">
+            <a:spAutoFit/>
+          </a:bodyPr>
+          <a:lstStyle/>
+          <a:p>
+            <a:pPr>
+              <a:lnSpc>
+                <a:spcPct val="150000"/>
+              </a:lnSpc>
+            </a:pPr>
+            <a:r>
+              <a:rPr lang="en-US" dirty="0">
+                <a:solidFill>
+                  <a:schemeClr val="tx1"/>
+                </a:solidFill>
+                <a:latin typeface="DM Sans" pitchFamily="2" charset="0"/>
+              </a:rPr>
+              <a:t>Complexity grows exponentially with:</a:t>
+            </a:r>
+          </a:p>
+          <a:p>
+            <a:pPr marL="285750" indent="-285750">
+              <a:lnSpc>
+                <a:spcPct val="150000"/>
+              </a:lnSpc>
+              <a:buClr>
+                <a:schemeClr val="tx1"/>
+              </a:buClr>
+              <a:buFont typeface="Arial" panose="020B0604020202020204" pitchFamily="34" charset="0"/>
+              <a:buChar char="•"/>
+            </a:pPr>
+            <a:r>
+              <a:rPr lang="en-US" dirty="0">
+                <a:solidFill>
+                  <a:schemeClr val="tx1"/>
+                </a:solidFill>
+                <a:latin typeface="DM Sans" pitchFamily="2" charset="0"/>
+              </a:rPr>
+              <a:t> number of teams </a:t>
+            </a:r>
+          </a:p>
+          <a:p>
+            <a:pPr marL="285750" indent="-285750">
+              <a:lnSpc>
+                <a:spcPct val="150000"/>
+              </a:lnSpc>
+              <a:buClr>
+                <a:schemeClr val="tx1"/>
+              </a:buClr>
+              <a:buFont typeface="Arial" panose="020B0604020202020204" pitchFamily="34" charset="0"/>
+              <a:buChar char="•"/>
+            </a:pPr>
+            <a:r>
+              <a:rPr lang="en-US" dirty="0">
+                <a:solidFill>
+                  <a:schemeClr val="tx1"/>
+                </a:solidFill>
+                <a:latin typeface="DM Sans" pitchFamily="2" charset="0"/>
+              </a:rPr>
+              <a:t> number of constraints </a:t>
+            </a:r>
+          </a:p>
+        </p:txBody>
+      </p:sp>
+      <p:cxnSp>
+        <p:nvCxnSpPr>
+          <p:cNvPr id="5" name="Straight Connector 4">
+            <a:extLst>
+              <a:ext uri="{FF2B5EF4-FFF2-40B4-BE49-F238E27FC236}">
+                <a16:creationId xmlns:a16="http://schemas.microsoft.com/office/drawing/2014/main" id="{FB739099-9304-A578-8F21-5FB60177D5E7}"/>
+              </a:ext>
+            </a:extLst>
+          </p:cNvPr>
+          <p:cNvCxnSpPr/>
+          <p:nvPr/>
+        </p:nvCxnSpPr>
+        <p:spPr>
+          <a:xfrm>
+            <a:off x="3337931" y="2439535"/>
+            <a:ext cx="0" cy="2426150"/>
+          </a:xfrm>
+          <a:prstGeom prst="line">
+            <a:avLst/>
+          </a:prstGeom>
+        </p:spPr>
+        <p:style>
+          <a:lnRef idx="2">
+            <a:schemeClr val="accent2"/>
+          </a:lnRef>
+          <a:fillRef idx="0">
+            <a:schemeClr val="accent2"/>
+          </a:fillRef>
+          <a:effectRef idx="1">
+            <a:schemeClr val="accent2"/>
+          </a:effectRef>
+          <a:fontRef idx="minor">
+            <a:schemeClr val="tx1"/>
+          </a:fontRef>
+        </p:style>
+      </p:cxnSp>
+      <p:cxnSp>
+        <p:nvCxnSpPr>
+          <p:cNvPr id="10" name="Straight Connector 9">
+            <a:extLst>
+              <a:ext uri="{FF2B5EF4-FFF2-40B4-BE49-F238E27FC236}">
+                <a16:creationId xmlns:a16="http://schemas.microsoft.com/office/drawing/2014/main" id="{A35CA4A5-B5F2-93A9-6329-6DADFAA83C02}"/>
+              </a:ext>
+            </a:extLst>
+          </p:cNvPr>
+          <p:cNvCxnSpPr/>
+          <p:nvPr/>
+        </p:nvCxnSpPr>
+        <p:spPr>
+          <a:xfrm>
+            <a:off x="6434178" y="2439535"/>
+            <a:ext cx="0" cy="2426150"/>
+          </a:xfrm>
+          <a:prstGeom prst="line">
+            <a:avLst/>
+          </a:prstGeom>
+        </p:spPr>
+        <p:style>
+          <a:lnRef idx="2">
+            <a:schemeClr val="accent2"/>
+          </a:lnRef>
+          <a:fillRef idx="0">
+            <a:schemeClr val="accent2"/>
+          </a:fillRef>
+          <a:effectRef idx="1">
+            <a:schemeClr val="accent2"/>
+          </a:effectRef>
+          <a:fontRef idx="minor">
+            <a:schemeClr val="tx1"/>
+          </a:fontRef>
+        </p:style>
+      </p:cxnSp>
+    </p:spTree>
+  </p:cSld>
+  <p:clrMapOvr>
+    <a:masterClrMapping/>
+  </p:clrMapOvr>
+</p:sld>
+</file>
+
+<file path=ppt/slides/slide11.xml><?xml version="1.0" encoding="utf-8"?>
+<p:sld xmlns:a="http://schemas.openxmlformats.org/drawingml/2006/main" xmlns:r="http://schemas.openxmlformats.org/officeDocument/2006/relationships" xmlns:p="http://schemas.openxmlformats.org/presentationml/2006/main">
+  <p:cSld>
+    <p:spTree>
+      <p:nvGrpSpPr>
         <p:cNvPr id="1" name="Shape 362">
           <a:extLst>
             <a:ext uri="{FF2B5EF4-FFF2-40B4-BE49-F238E27FC236}">
@@ -15520,7 +16261,7 @@
 </p:sld>
 </file>
 
-<file path=ppt/slides/slide11.xml><?xml version="1.0" encoding="utf-8"?>
+<file path=ppt/slides/slide12.xml><?xml version="1.0" encoding="utf-8"?>
 <p:sld xmlns:a="http://schemas.openxmlformats.org/drawingml/2006/main" xmlns:r="http://schemas.openxmlformats.org/officeDocument/2006/relationships" xmlns:p="http://schemas.openxmlformats.org/presentationml/2006/main">
   <p:cSld>
     <p:spTree>
@@ -17033,7 +17774,7 @@
 </p:sld>
 </file>
 
-<file path=ppt/slides/slide12.xml><?xml version="1.0" encoding="utf-8"?>
+<file path=ppt/slides/slide13.xml><?xml version="1.0" encoding="utf-8"?>
 <p:sld xmlns:a="http://schemas.openxmlformats.org/drawingml/2006/main" xmlns:r="http://schemas.openxmlformats.org/officeDocument/2006/relationships" xmlns:p="http://schemas.openxmlformats.org/presentationml/2006/main">
   <p:cSld>
     <p:spTree>
@@ -18440,7 +19181,7 @@
 </p:sld>
 </file>
 
-<file path=ppt/slides/slide13.xml><?xml version="1.0" encoding="utf-8"?>
+<file path=ppt/slides/slide14.xml><?xml version="1.0" encoding="utf-8"?>
 <p:sld xmlns:a="http://schemas.openxmlformats.org/drawingml/2006/main" xmlns:r="http://schemas.openxmlformats.org/officeDocument/2006/relationships" xmlns:p="http://schemas.openxmlformats.org/presentationml/2006/main">
   <p:cSld>
     <p:spTree>
@@ -18969,7 +19710,7 @@
 </p:sld>
 </file>
 
-<file path=ppt/slides/slide14.xml><?xml version="1.0" encoding="utf-8"?>
+<file path=ppt/slides/slide15.xml><?xml version="1.0" encoding="utf-8"?>
 <p:sld xmlns:a="http://schemas.openxmlformats.org/drawingml/2006/main" xmlns:r="http://schemas.openxmlformats.org/officeDocument/2006/relationships" xmlns:p="http://schemas.openxmlformats.org/presentationml/2006/main">
   <p:cSld>
     <p:spTree>
@@ -19247,7 +19988,7 @@
 </p:sld>
 </file>
 
-<file path=ppt/slides/slide15.xml><?xml version="1.0" encoding="utf-8"?>
+<file path=ppt/slides/slide16.xml><?xml version="1.0" encoding="utf-8"?>
 <p:sld xmlns:a="http://schemas.openxmlformats.org/drawingml/2006/main" xmlns:r="http://schemas.openxmlformats.org/officeDocument/2006/relationships" xmlns:p="http://schemas.openxmlformats.org/presentationml/2006/main">
   <p:cSld>
     <p:spTree>
@@ -24439,7 +25180,7 @@
 </p:sld>
 </file>
 
-<file path=ppt/slides/slide16.xml><?xml version="1.0" encoding="utf-8"?>
+<file path=ppt/slides/slide17.xml><?xml version="1.0" encoding="utf-8"?>
 <p:sld xmlns:a="http://schemas.openxmlformats.org/drawingml/2006/main" xmlns:r="http://schemas.openxmlformats.org/officeDocument/2006/relationships" xmlns:p="http://schemas.openxmlformats.org/presentationml/2006/main">
   <p:cSld>
     <p:spTree>
@@ -26017,7 +26758,7 @@
 </p:sld>
 </file>
 
-<file path=ppt/slides/slide17.xml><?xml version="1.0" encoding="utf-8"?>
+<file path=ppt/slides/slide18.xml><?xml version="1.0" encoding="utf-8"?>
 <p:sld xmlns:a="http://schemas.openxmlformats.org/drawingml/2006/main" xmlns:r="http://schemas.openxmlformats.org/officeDocument/2006/relationships" xmlns:p="http://schemas.openxmlformats.org/presentationml/2006/main">
   <p:cSld>
     <p:spTree>
@@ -27084,7 +27825,7 @@
 </p:sld>
 </file>
 
-<file path=ppt/slides/slide18.xml><?xml version="1.0" encoding="utf-8"?>
+<file path=ppt/slides/slide19.xml><?xml version="1.0" encoding="utf-8"?>
 <p:sld xmlns:a="http://schemas.openxmlformats.org/drawingml/2006/main" xmlns:r="http://schemas.openxmlformats.org/officeDocument/2006/relationships" xmlns:p="http://schemas.openxmlformats.org/presentationml/2006/main">
   <p:cSld>
     <p:spTree>
@@ -28100,7 +28841,478 @@
 </p:sld>
 </file>
 
-<file path=ppt/slides/slide19.xml><?xml version="1.0" encoding="utf-8"?>
+<file path=ppt/slides/slide2.xml><?xml version="1.0" encoding="utf-8"?>
+<p:sld xmlns:a="http://schemas.openxmlformats.org/drawingml/2006/main" xmlns:r="http://schemas.openxmlformats.org/officeDocument/2006/relationships" xmlns:p="http://schemas.openxmlformats.org/presentationml/2006/main">
+  <p:cSld>
+    <p:spTree>
+      <p:nvGrpSpPr>
+        <p:cNvPr id="1" name="Shape 328"/>
+        <p:cNvGrpSpPr/>
+        <p:nvPr/>
+      </p:nvGrpSpPr>
+      <p:grpSpPr>
+        <a:xfrm>
+          <a:off x="0" y="0"/>
+          <a:ext cx="0" cy="0"/>
+          <a:chOff x="0" y="0"/>
+          <a:chExt cx="0" cy="0"/>
+        </a:xfrm>
+      </p:grpSpPr>
+      <p:sp>
+        <p:nvSpPr>
+          <p:cNvPr id="329" name="Google Shape;329;p34"/>
+          <p:cNvSpPr txBox="1">
+            <a:spLocks noGrp="1"/>
+          </p:cNvSpPr>
+          <p:nvPr>
+            <p:ph type="title"/>
+          </p:nvPr>
+        </p:nvSpPr>
+        <p:spPr>
+          <a:xfrm>
+            <a:off x="2083725" y="1527636"/>
+            <a:ext cx="4894500" cy="965729"/>
+          </a:xfrm>
+          <a:prstGeom prst="rect">
+            <a:avLst/>
+          </a:prstGeom>
+        </p:spPr>
+        <p:txBody>
+          <a:bodyPr spcFirstLastPara="1" wrap="square" lIns="91425" tIns="91425" rIns="91425" bIns="91425" anchor="b" anchorCtr="0">
+            <a:noAutofit/>
+          </a:bodyPr>
+          <a:lstStyle/>
+          <a:p>
+            <a:pPr marL="0" lvl="0" indent="0" algn="l" rtl="0">
+              <a:spcBef>
+                <a:spcPts val="0"/>
+              </a:spcBef>
+              <a:spcAft>
+                <a:spcPts val="0"/>
+              </a:spcAft>
+              <a:buNone/>
+            </a:pPr>
+            <a:r>
+              <a:rPr lang="en" dirty="0"/>
+              <a:t>Introduction</a:t>
+            </a:r>
+            <a:endParaRPr dirty="0"/>
+          </a:p>
+        </p:txBody>
+      </p:sp>
+      <p:sp>
+        <p:nvSpPr>
+          <p:cNvPr id="330" name="Google Shape;330;p34"/>
+          <p:cNvSpPr txBox="1">
+            <a:spLocks noGrp="1"/>
+          </p:cNvSpPr>
+          <p:nvPr>
+            <p:ph type="subTitle" idx="1"/>
+          </p:nvPr>
+        </p:nvSpPr>
+        <p:spPr>
+          <a:xfrm>
+            <a:off x="2124750" y="2800190"/>
+            <a:ext cx="5806964" cy="510000"/>
+          </a:xfrm>
+          <a:prstGeom prst="rect">
+            <a:avLst/>
+          </a:prstGeom>
+        </p:spPr>
+        <p:txBody>
+          <a:bodyPr spcFirstLastPara="1" wrap="square" lIns="91425" tIns="91425" rIns="91425" bIns="91425" anchor="t" anchorCtr="0">
+            <a:noAutofit/>
+          </a:bodyPr>
+          <a:lstStyle/>
+          <a:p>
+            <a:pPr marL="0" lvl="0" indent="0"/>
+            <a:r>
+              <a:rPr lang="en-US" b="1" dirty="0"/>
+              <a:t>Introduction To The Project And Problem Overview </a:t>
+            </a:r>
+          </a:p>
+        </p:txBody>
+      </p:sp>
+      <p:sp>
+        <p:nvSpPr>
+          <p:cNvPr id="331" name="Google Shape;331;p34"/>
+          <p:cNvSpPr txBox="1">
+            <a:spLocks noGrp="1"/>
+          </p:cNvSpPr>
+          <p:nvPr>
+            <p:ph type="title" idx="2"/>
+          </p:nvPr>
+        </p:nvSpPr>
+        <p:spPr>
+          <a:xfrm>
+            <a:off x="713213" y="1492050"/>
+            <a:ext cx="1194000" cy="1106700"/>
+          </a:xfrm>
+          <a:prstGeom prst="rect">
+            <a:avLst/>
+          </a:prstGeom>
+        </p:spPr>
+        <p:txBody>
+          <a:bodyPr spcFirstLastPara="1" wrap="square" lIns="91425" tIns="91425" rIns="91425" bIns="91425" anchor="b" anchorCtr="0">
+            <a:noAutofit/>
+          </a:bodyPr>
+          <a:lstStyle/>
+          <a:p>
+            <a:pPr marL="0" lvl="0" indent="0" algn="ctr" rtl="0">
+              <a:spcBef>
+                <a:spcPts val="0"/>
+              </a:spcBef>
+              <a:spcAft>
+                <a:spcPts val="0"/>
+              </a:spcAft>
+              <a:buNone/>
+            </a:pPr>
+            <a:r>
+              <a:rPr lang="en"/>
+              <a:t>01</a:t>
+            </a:r>
+            <a:endParaRPr/>
+          </a:p>
+        </p:txBody>
+      </p:sp>
+      <p:grpSp>
+        <p:nvGrpSpPr>
+          <p:cNvPr id="332" name="Google Shape;332;p34"/>
+          <p:cNvGrpSpPr/>
+          <p:nvPr/>
+        </p:nvGrpSpPr>
+        <p:grpSpPr>
+          <a:xfrm>
+            <a:off x="7931714" y="398014"/>
+            <a:ext cx="281947" cy="1094035"/>
+            <a:chOff x="7256520" y="835200"/>
+            <a:chExt cx="562320" cy="2181960"/>
+          </a:xfrm>
+        </p:grpSpPr>
+        <p:sp>
+          <p:nvSpPr>
+            <p:cNvPr id="333" name="Google Shape;333;p34"/>
+            <p:cNvSpPr/>
+            <p:nvPr/>
+          </p:nvSpPr>
+          <p:spPr>
+            <a:xfrm>
+              <a:off x="7256520" y="2444400"/>
+              <a:ext cx="562320" cy="572760"/>
+            </a:xfrm>
+            <a:custGeom>
+              <a:avLst/>
+              <a:gdLst/>
+              <a:ahLst/>
+              <a:cxnLst/>
+              <a:rect l="l" t="t" r="r" b="b"/>
+              <a:pathLst>
+                <a:path w="1562" h="1591" extrusionOk="0">
+                  <a:moveTo>
+                    <a:pt x="295" y="0"/>
+                  </a:moveTo>
+                  <a:lnTo>
+                    <a:pt x="0" y="301"/>
+                  </a:lnTo>
+                  <a:lnTo>
+                    <a:pt x="486" y="796"/>
+                  </a:lnTo>
+                  <a:lnTo>
+                    <a:pt x="0" y="1291"/>
+                  </a:lnTo>
+                  <a:lnTo>
+                    <a:pt x="295" y="1591"/>
+                  </a:lnTo>
+                  <a:lnTo>
+                    <a:pt x="781" y="1096"/>
+                  </a:lnTo>
+                  <a:lnTo>
+                    <a:pt x="1267" y="1591"/>
+                  </a:lnTo>
+                  <a:lnTo>
+                    <a:pt x="1562" y="1291"/>
+                  </a:lnTo>
+                  <a:lnTo>
+                    <a:pt x="1076" y="796"/>
+                  </a:lnTo>
+                  <a:lnTo>
+                    <a:pt x="1562" y="301"/>
+                  </a:lnTo>
+                  <a:lnTo>
+                    <a:pt x="1267" y="0"/>
+                  </a:lnTo>
+                  <a:lnTo>
+                    <a:pt x="781" y="496"/>
+                  </a:lnTo>
+                  <a:lnTo>
+                    <a:pt x="295" y="0"/>
+                  </a:lnTo>
+                  <a:close/>
+                </a:path>
+              </a:pathLst>
+            </a:custGeom>
+            <a:solidFill>
+              <a:schemeClr val="dk1"/>
+            </a:solidFill>
+            <a:ln>
+              <a:noFill/>
+            </a:ln>
+          </p:spPr>
+          <p:txBody>
+            <a:bodyPr spcFirstLastPara="1" wrap="square" lIns="90000" tIns="45000" rIns="90000" bIns="45000" anchor="ctr" anchorCtr="1">
+              <a:noAutofit/>
+            </a:bodyPr>
+            <a:lstStyle/>
+            <a:p>
+              <a:pPr marL="0" marR="0" lvl="0" indent="0" algn="l" rtl="0">
+                <a:spcBef>
+                  <a:spcPts val="0"/>
+                </a:spcBef>
+                <a:spcAft>
+                  <a:spcPts val="0"/>
+                </a:spcAft>
+                <a:buNone/>
+              </a:pPr>
+              <a:endParaRPr sz="1800" b="0" strike="noStrike">
+                <a:solidFill>
+                  <a:srgbClr val="000000"/>
+                </a:solidFill>
+                <a:latin typeface="Arial"/>
+                <a:ea typeface="Arial"/>
+                <a:cs typeface="Arial"/>
+                <a:sym typeface="Arial"/>
+              </a:endParaRPr>
+            </a:p>
+          </p:txBody>
+        </p:sp>
+        <p:sp>
+          <p:nvSpPr>
+            <p:cNvPr id="334" name="Google Shape;334;p34"/>
+            <p:cNvSpPr/>
+            <p:nvPr/>
+          </p:nvSpPr>
+          <p:spPr>
+            <a:xfrm>
+              <a:off x="7256520" y="1639800"/>
+              <a:ext cx="562320" cy="573120"/>
+            </a:xfrm>
+            <a:custGeom>
+              <a:avLst/>
+              <a:gdLst/>
+              <a:ahLst/>
+              <a:cxnLst/>
+              <a:rect l="l" t="t" r="r" b="b"/>
+              <a:pathLst>
+                <a:path w="1562" h="1592" extrusionOk="0">
+                  <a:moveTo>
+                    <a:pt x="295" y="0"/>
+                  </a:moveTo>
+                  <a:lnTo>
+                    <a:pt x="0" y="301"/>
+                  </a:lnTo>
+                  <a:lnTo>
+                    <a:pt x="486" y="796"/>
+                  </a:lnTo>
+                  <a:lnTo>
+                    <a:pt x="0" y="1291"/>
+                  </a:lnTo>
+                  <a:lnTo>
+                    <a:pt x="295" y="1592"/>
+                  </a:lnTo>
+                  <a:lnTo>
+                    <a:pt x="781" y="1097"/>
+                  </a:lnTo>
+                  <a:lnTo>
+                    <a:pt x="1267" y="1592"/>
+                  </a:lnTo>
+                  <a:lnTo>
+                    <a:pt x="1562" y="1291"/>
+                  </a:lnTo>
+                  <a:lnTo>
+                    <a:pt x="1076" y="796"/>
+                  </a:lnTo>
+                  <a:lnTo>
+                    <a:pt x="1562" y="301"/>
+                  </a:lnTo>
+                  <a:lnTo>
+                    <a:pt x="1267" y="0"/>
+                  </a:lnTo>
+                  <a:lnTo>
+                    <a:pt x="781" y="496"/>
+                  </a:lnTo>
+                  <a:lnTo>
+                    <a:pt x="295" y="0"/>
+                  </a:lnTo>
+                  <a:close/>
+                </a:path>
+              </a:pathLst>
+            </a:custGeom>
+            <a:solidFill>
+              <a:schemeClr val="dk1"/>
+            </a:solidFill>
+            <a:ln>
+              <a:noFill/>
+            </a:ln>
+          </p:spPr>
+          <p:txBody>
+            <a:bodyPr spcFirstLastPara="1" wrap="square" lIns="90000" tIns="45000" rIns="90000" bIns="45000" anchor="ctr" anchorCtr="1">
+              <a:noAutofit/>
+            </a:bodyPr>
+            <a:lstStyle/>
+            <a:p>
+              <a:pPr marL="0" marR="0" lvl="0" indent="0" algn="l" rtl="0">
+                <a:spcBef>
+                  <a:spcPts val="0"/>
+                </a:spcBef>
+                <a:spcAft>
+                  <a:spcPts val="0"/>
+                </a:spcAft>
+                <a:buNone/>
+              </a:pPr>
+              <a:endParaRPr sz="1800" b="0" strike="noStrike" dirty="0">
+                <a:solidFill>
+                  <a:srgbClr val="000000"/>
+                </a:solidFill>
+                <a:latin typeface="Arial"/>
+                <a:ea typeface="Arial"/>
+                <a:cs typeface="Arial"/>
+                <a:sym typeface="Arial"/>
+              </a:endParaRPr>
+            </a:p>
+          </p:txBody>
+        </p:sp>
+        <p:sp>
+          <p:nvSpPr>
+            <p:cNvPr id="335" name="Google Shape;335;p34"/>
+            <p:cNvSpPr/>
+            <p:nvPr/>
+          </p:nvSpPr>
+          <p:spPr>
+            <a:xfrm>
+              <a:off x="7256520" y="835200"/>
+              <a:ext cx="562320" cy="573120"/>
+            </a:xfrm>
+            <a:custGeom>
+              <a:avLst/>
+              <a:gdLst/>
+              <a:ahLst/>
+              <a:cxnLst/>
+              <a:rect l="l" t="t" r="r" b="b"/>
+              <a:pathLst>
+                <a:path w="1562" h="1592" extrusionOk="0">
+                  <a:moveTo>
+                    <a:pt x="295" y="0"/>
+                  </a:moveTo>
+                  <a:lnTo>
+                    <a:pt x="0" y="301"/>
+                  </a:lnTo>
+                  <a:lnTo>
+                    <a:pt x="486" y="796"/>
+                  </a:lnTo>
+                  <a:lnTo>
+                    <a:pt x="0" y="1291"/>
+                  </a:lnTo>
+                  <a:lnTo>
+                    <a:pt x="295" y="1592"/>
+                  </a:lnTo>
+                  <a:lnTo>
+                    <a:pt x="781" y="1097"/>
+                  </a:lnTo>
+                  <a:lnTo>
+                    <a:pt x="1267" y="1592"/>
+                  </a:lnTo>
+                  <a:lnTo>
+                    <a:pt x="1562" y="1291"/>
+                  </a:lnTo>
+                  <a:lnTo>
+                    <a:pt x="1076" y="796"/>
+                  </a:lnTo>
+                  <a:lnTo>
+                    <a:pt x="1562" y="301"/>
+                  </a:lnTo>
+                  <a:lnTo>
+                    <a:pt x="1267" y="0"/>
+                  </a:lnTo>
+                  <a:lnTo>
+                    <a:pt x="781" y="495"/>
+                  </a:lnTo>
+                  <a:lnTo>
+                    <a:pt x="295" y="0"/>
+                  </a:lnTo>
+                  <a:close/>
+                </a:path>
+              </a:pathLst>
+            </a:custGeom>
+            <a:solidFill>
+              <a:schemeClr val="dk1"/>
+            </a:solidFill>
+            <a:ln>
+              <a:noFill/>
+            </a:ln>
+          </p:spPr>
+          <p:txBody>
+            <a:bodyPr spcFirstLastPara="1" wrap="square" lIns="90000" tIns="45000" rIns="90000" bIns="45000" anchor="ctr" anchorCtr="1">
+              <a:noAutofit/>
+            </a:bodyPr>
+            <a:lstStyle/>
+            <a:p>
+              <a:pPr marL="0" marR="0" lvl="0" indent="0" algn="l" rtl="0">
+                <a:spcBef>
+                  <a:spcPts val="0"/>
+                </a:spcBef>
+                <a:spcAft>
+                  <a:spcPts val="0"/>
+                </a:spcAft>
+                <a:buNone/>
+              </a:pPr>
+              <a:endParaRPr sz="1800" b="0" strike="noStrike">
+                <a:solidFill>
+                  <a:srgbClr val="000000"/>
+                </a:solidFill>
+                <a:latin typeface="Arial"/>
+                <a:ea typeface="Arial"/>
+                <a:cs typeface="Arial"/>
+                <a:sym typeface="Arial"/>
+              </a:endParaRPr>
+            </a:p>
+          </p:txBody>
+        </p:sp>
+      </p:grpSp>
+      <p:cxnSp>
+        <p:nvCxnSpPr>
+          <p:cNvPr id="336" name="Google Shape;336;p34"/>
+          <p:cNvCxnSpPr/>
+          <p:nvPr/>
+        </p:nvCxnSpPr>
+        <p:spPr>
+          <a:xfrm rot="10800000">
+            <a:off x="2124700" y="2598750"/>
+            <a:ext cx="6556800" cy="0"/>
+          </a:xfrm>
+          <a:prstGeom prst="straightConnector1">
+            <a:avLst/>
+          </a:prstGeom>
+          <a:noFill/>
+          <a:ln w="38100" cap="flat" cmpd="sng">
+            <a:solidFill>
+              <a:schemeClr val="dk1"/>
+            </a:solidFill>
+            <a:prstDash val="solid"/>
+            <a:round/>
+            <a:headEnd type="none" w="med" len="med"/>
+            <a:tailEnd type="none" w="med" len="med"/>
+          </a:ln>
+        </p:spPr>
+      </p:cxnSp>
+    </p:spTree>
+  </p:cSld>
+  <p:clrMapOvr>
+    <a:masterClrMapping/>
+  </p:clrMapOvr>
+</p:sld>
+</file>
+
+<file path=ppt/slides/slide20.xml><?xml version="1.0" encoding="utf-8"?>
 <p:sld xmlns:a="http://schemas.openxmlformats.org/drawingml/2006/main" xmlns:r="http://schemas.openxmlformats.org/officeDocument/2006/relationships" xmlns:p="http://schemas.openxmlformats.org/presentationml/2006/main">
   <p:cSld>
     <p:spTree>
@@ -28338,478 +29550,7 @@
 </p:sld>
 </file>
 
-<file path=ppt/slides/slide2.xml><?xml version="1.0" encoding="utf-8"?>
-<p:sld xmlns:a="http://schemas.openxmlformats.org/drawingml/2006/main" xmlns:r="http://schemas.openxmlformats.org/officeDocument/2006/relationships" xmlns:p="http://schemas.openxmlformats.org/presentationml/2006/main">
-  <p:cSld>
-    <p:spTree>
-      <p:nvGrpSpPr>
-        <p:cNvPr id="1" name="Shape 328"/>
-        <p:cNvGrpSpPr/>
-        <p:nvPr/>
-      </p:nvGrpSpPr>
-      <p:grpSpPr>
-        <a:xfrm>
-          <a:off x="0" y="0"/>
-          <a:ext cx="0" cy="0"/>
-          <a:chOff x="0" y="0"/>
-          <a:chExt cx="0" cy="0"/>
-        </a:xfrm>
-      </p:grpSpPr>
-      <p:sp>
-        <p:nvSpPr>
-          <p:cNvPr id="329" name="Google Shape;329;p34"/>
-          <p:cNvSpPr txBox="1">
-            <a:spLocks noGrp="1"/>
-          </p:cNvSpPr>
-          <p:nvPr>
-            <p:ph type="title"/>
-          </p:nvPr>
-        </p:nvSpPr>
-        <p:spPr>
-          <a:xfrm>
-            <a:off x="2083725" y="1527636"/>
-            <a:ext cx="4894500" cy="965729"/>
-          </a:xfrm>
-          <a:prstGeom prst="rect">
-            <a:avLst/>
-          </a:prstGeom>
-        </p:spPr>
-        <p:txBody>
-          <a:bodyPr spcFirstLastPara="1" wrap="square" lIns="91425" tIns="91425" rIns="91425" bIns="91425" anchor="b" anchorCtr="0">
-            <a:noAutofit/>
-          </a:bodyPr>
-          <a:lstStyle/>
-          <a:p>
-            <a:pPr marL="0" lvl="0" indent="0" algn="l" rtl="0">
-              <a:spcBef>
-                <a:spcPts val="0"/>
-              </a:spcBef>
-              <a:spcAft>
-                <a:spcPts val="0"/>
-              </a:spcAft>
-              <a:buNone/>
-            </a:pPr>
-            <a:r>
-              <a:rPr lang="en" dirty="0"/>
-              <a:t>Introduction</a:t>
-            </a:r>
-            <a:endParaRPr dirty="0"/>
-          </a:p>
-        </p:txBody>
-      </p:sp>
-      <p:sp>
-        <p:nvSpPr>
-          <p:cNvPr id="330" name="Google Shape;330;p34"/>
-          <p:cNvSpPr txBox="1">
-            <a:spLocks noGrp="1"/>
-          </p:cNvSpPr>
-          <p:nvPr>
-            <p:ph type="subTitle" idx="1"/>
-          </p:nvPr>
-        </p:nvSpPr>
-        <p:spPr>
-          <a:xfrm>
-            <a:off x="2124750" y="2800190"/>
-            <a:ext cx="5806964" cy="510000"/>
-          </a:xfrm>
-          <a:prstGeom prst="rect">
-            <a:avLst/>
-          </a:prstGeom>
-        </p:spPr>
-        <p:txBody>
-          <a:bodyPr spcFirstLastPara="1" wrap="square" lIns="91425" tIns="91425" rIns="91425" bIns="91425" anchor="t" anchorCtr="0">
-            <a:noAutofit/>
-          </a:bodyPr>
-          <a:lstStyle/>
-          <a:p>
-            <a:pPr marL="0" lvl="0" indent="0"/>
-            <a:r>
-              <a:rPr lang="en-US" b="1" dirty="0"/>
-              <a:t>Introduction To The Project And Problem Overview </a:t>
-            </a:r>
-          </a:p>
-        </p:txBody>
-      </p:sp>
-      <p:sp>
-        <p:nvSpPr>
-          <p:cNvPr id="331" name="Google Shape;331;p34"/>
-          <p:cNvSpPr txBox="1">
-            <a:spLocks noGrp="1"/>
-          </p:cNvSpPr>
-          <p:nvPr>
-            <p:ph type="title" idx="2"/>
-          </p:nvPr>
-        </p:nvSpPr>
-        <p:spPr>
-          <a:xfrm>
-            <a:off x="713213" y="1492050"/>
-            <a:ext cx="1194000" cy="1106700"/>
-          </a:xfrm>
-          <a:prstGeom prst="rect">
-            <a:avLst/>
-          </a:prstGeom>
-        </p:spPr>
-        <p:txBody>
-          <a:bodyPr spcFirstLastPara="1" wrap="square" lIns="91425" tIns="91425" rIns="91425" bIns="91425" anchor="b" anchorCtr="0">
-            <a:noAutofit/>
-          </a:bodyPr>
-          <a:lstStyle/>
-          <a:p>
-            <a:pPr marL="0" lvl="0" indent="0" algn="ctr" rtl="0">
-              <a:spcBef>
-                <a:spcPts val="0"/>
-              </a:spcBef>
-              <a:spcAft>
-                <a:spcPts val="0"/>
-              </a:spcAft>
-              <a:buNone/>
-            </a:pPr>
-            <a:r>
-              <a:rPr lang="en"/>
-              <a:t>01</a:t>
-            </a:r>
-            <a:endParaRPr/>
-          </a:p>
-        </p:txBody>
-      </p:sp>
-      <p:grpSp>
-        <p:nvGrpSpPr>
-          <p:cNvPr id="332" name="Google Shape;332;p34"/>
-          <p:cNvGrpSpPr/>
-          <p:nvPr/>
-        </p:nvGrpSpPr>
-        <p:grpSpPr>
-          <a:xfrm>
-            <a:off x="7931714" y="398014"/>
-            <a:ext cx="281947" cy="1094035"/>
-            <a:chOff x="7256520" y="835200"/>
-            <a:chExt cx="562320" cy="2181960"/>
-          </a:xfrm>
-        </p:grpSpPr>
-        <p:sp>
-          <p:nvSpPr>
-            <p:cNvPr id="333" name="Google Shape;333;p34"/>
-            <p:cNvSpPr/>
-            <p:nvPr/>
-          </p:nvSpPr>
-          <p:spPr>
-            <a:xfrm>
-              <a:off x="7256520" y="2444400"/>
-              <a:ext cx="562320" cy="572760"/>
-            </a:xfrm>
-            <a:custGeom>
-              <a:avLst/>
-              <a:gdLst/>
-              <a:ahLst/>
-              <a:cxnLst/>
-              <a:rect l="l" t="t" r="r" b="b"/>
-              <a:pathLst>
-                <a:path w="1562" h="1591" extrusionOk="0">
-                  <a:moveTo>
-                    <a:pt x="295" y="0"/>
-                  </a:moveTo>
-                  <a:lnTo>
-                    <a:pt x="0" y="301"/>
-                  </a:lnTo>
-                  <a:lnTo>
-                    <a:pt x="486" y="796"/>
-                  </a:lnTo>
-                  <a:lnTo>
-                    <a:pt x="0" y="1291"/>
-                  </a:lnTo>
-                  <a:lnTo>
-                    <a:pt x="295" y="1591"/>
-                  </a:lnTo>
-                  <a:lnTo>
-                    <a:pt x="781" y="1096"/>
-                  </a:lnTo>
-                  <a:lnTo>
-                    <a:pt x="1267" y="1591"/>
-                  </a:lnTo>
-                  <a:lnTo>
-                    <a:pt x="1562" y="1291"/>
-                  </a:lnTo>
-                  <a:lnTo>
-                    <a:pt x="1076" y="796"/>
-                  </a:lnTo>
-                  <a:lnTo>
-                    <a:pt x="1562" y="301"/>
-                  </a:lnTo>
-                  <a:lnTo>
-                    <a:pt x="1267" y="0"/>
-                  </a:lnTo>
-                  <a:lnTo>
-                    <a:pt x="781" y="496"/>
-                  </a:lnTo>
-                  <a:lnTo>
-                    <a:pt x="295" y="0"/>
-                  </a:lnTo>
-                  <a:close/>
-                </a:path>
-              </a:pathLst>
-            </a:custGeom>
-            <a:solidFill>
-              <a:schemeClr val="dk1"/>
-            </a:solidFill>
-            <a:ln>
-              <a:noFill/>
-            </a:ln>
-          </p:spPr>
-          <p:txBody>
-            <a:bodyPr spcFirstLastPara="1" wrap="square" lIns="90000" tIns="45000" rIns="90000" bIns="45000" anchor="ctr" anchorCtr="1">
-              <a:noAutofit/>
-            </a:bodyPr>
-            <a:lstStyle/>
-            <a:p>
-              <a:pPr marL="0" marR="0" lvl="0" indent="0" algn="l" rtl="0">
-                <a:spcBef>
-                  <a:spcPts val="0"/>
-                </a:spcBef>
-                <a:spcAft>
-                  <a:spcPts val="0"/>
-                </a:spcAft>
-                <a:buNone/>
-              </a:pPr>
-              <a:endParaRPr sz="1800" b="0" strike="noStrike">
-                <a:solidFill>
-                  <a:srgbClr val="000000"/>
-                </a:solidFill>
-                <a:latin typeface="Arial"/>
-                <a:ea typeface="Arial"/>
-                <a:cs typeface="Arial"/>
-                <a:sym typeface="Arial"/>
-              </a:endParaRPr>
-            </a:p>
-          </p:txBody>
-        </p:sp>
-        <p:sp>
-          <p:nvSpPr>
-            <p:cNvPr id="334" name="Google Shape;334;p34"/>
-            <p:cNvSpPr/>
-            <p:nvPr/>
-          </p:nvSpPr>
-          <p:spPr>
-            <a:xfrm>
-              <a:off x="7256520" y="1639800"/>
-              <a:ext cx="562320" cy="573120"/>
-            </a:xfrm>
-            <a:custGeom>
-              <a:avLst/>
-              <a:gdLst/>
-              <a:ahLst/>
-              <a:cxnLst/>
-              <a:rect l="l" t="t" r="r" b="b"/>
-              <a:pathLst>
-                <a:path w="1562" h="1592" extrusionOk="0">
-                  <a:moveTo>
-                    <a:pt x="295" y="0"/>
-                  </a:moveTo>
-                  <a:lnTo>
-                    <a:pt x="0" y="301"/>
-                  </a:lnTo>
-                  <a:lnTo>
-                    <a:pt x="486" y="796"/>
-                  </a:lnTo>
-                  <a:lnTo>
-                    <a:pt x="0" y="1291"/>
-                  </a:lnTo>
-                  <a:lnTo>
-                    <a:pt x="295" y="1592"/>
-                  </a:lnTo>
-                  <a:lnTo>
-                    <a:pt x="781" y="1097"/>
-                  </a:lnTo>
-                  <a:lnTo>
-                    <a:pt x="1267" y="1592"/>
-                  </a:lnTo>
-                  <a:lnTo>
-                    <a:pt x="1562" y="1291"/>
-                  </a:lnTo>
-                  <a:lnTo>
-                    <a:pt x="1076" y="796"/>
-                  </a:lnTo>
-                  <a:lnTo>
-                    <a:pt x="1562" y="301"/>
-                  </a:lnTo>
-                  <a:lnTo>
-                    <a:pt x="1267" y="0"/>
-                  </a:lnTo>
-                  <a:lnTo>
-                    <a:pt x="781" y="496"/>
-                  </a:lnTo>
-                  <a:lnTo>
-                    <a:pt x="295" y="0"/>
-                  </a:lnTo>
-                  <a:close/>
-                </a:path>
-              </a:pathLst>
-            </a:custGeom>
-            <a:solidFill>
-              <a:schemeClr val="dk1"/>
-            </a:solidFill>
-            <a:ln>
-              <a:noFill/>
-            </a:ln>
-          </p:spPr>
-          <p:txBody>
-            <a:bodyPr spcFirstLastPara="1" wrap="square" lIns="90000" tIns="45000" rIns="90000" bIns="45000" anchor="ctr" anchorCtr="1">
-              <a:noAutofit/>
-            </a:bodyPr>
-            <a:lstStyle/>
-            <a:p>
-              <a:pPr marL="0" marR="0" lvl="0" indent="0" algn="l" rtl="0">
-                <a:spcBef>
-                  <a:spcPts val="0"/>
-                </a:spcBef>
-                <a:spcAft>
-                  <a:spcPts val="0"/>
-                </a:spcAft>
-                <a:buNone/>
-              </a:pPr>
-              <a:endParaRPr sz="1800" b="0" strike="noStrike" dirty="0">
-                <a:solidFill>
-                  <a:srgbClr val="000000"/>
-                </a:solidFill>
-                <a:latin typeface="Arial"/>
-                <a:ea typeface="Arial"/>
-                <a:cs typeface="Arial"/>
-                <a:sym typeface="Arial"/>
-              </a:endParaRPr>
-            </a:p>
-          </p:txBody>
-        </p:sp>
-        <p:sp>
-          <p:nvSpPr>
-            <p:cNvPr id="335" name="Google Shape;335;p34"/>
-            <p:cNvSpPr/>
-            <p:nvPr/>
-          </p:nvSpPr>
-          <p:spPr>
-            <a:xfrm>
-              <a:off x="7256520" y="835200"/>
-              <a:ext cx="562320" cy="573120"/>
-            </a:xfrm>
-            <a:custGeom>
-              <a:avLst/>
-              <a:gdLst/>
-              <a:ahLst/>
-              <a:cxnLst/>
-              <a:rect l="l" t="t" r="r" b="b"/>
-              <a:pathLst>
-                <a:path w="1562" h="1592" extrusionOk="0">
-                  <a:moveTo>
-                    <a:pt x="295" y="0"/>
-                  </a:moveTo>
-                  <a:lnTo>
-                    <a:pt x="0" y="301"/>
-                  </a:lnTo>
-                  <a:lnTo>
-                    <a:pt x="486" y="796"/>
-                  </a:lnTo>
-                  <a:lnTo>
-                    <a:pt x="0" y="1291"/>
-                  </a:lnTo>
-                  <a:lnTo>
-                    <a:pt x="295" y="1592"/>
-                  </a:lnTo>
-                  <a:lnTo>
-                    <a:pt x="781" y="1097"/>
-                  </a:lnTo>
-                  <a:lnTo>
-                    <a:pt x="1267" y="1592"/>
-                  </a:lnTo>
-                  <a:lnTo>
-                    <a:pt x="1562" y="1291"/>
-                  </a:lnTo>
-                  <a:lnTo>
-                    <a:pt x="1076" y="796"/>
-                  </a:lnTo>
-                  <a:lnTo>
-                    <a:pt x="1562" y="301"/>
-                  </a:lnTo>
-                  <a:lnTo>
-                    <a:pt x="1267" y="0"/>
-                  </a:lnTo>
-                  <a:lnTo>
-                    <a:pt x="781" y="495"/>
-                  </a:lnTo>
-                  <a:lnTo>
-                    <a:pt x="295" y="0"/>
-                  </a:lnTo>
-                  <a:close/>
-                </a:path>
-              </a:pathLst>
-            </a:custGeom>
-            <a:solidFill>
-              <a:schemeClr val="dk1"/>
-            </a:solidFill>
-            <a:ln>
-              <a:noFill/>
-            </a:ln>
-          </p:spPr>
-          <p:txBody>
-            <a:bodyPr spcFirstLastPara="1" wrap="square" lIns="90000" tIns="45000" rIns="90000" bIns="45000" anchor="ctr" anchorCtr="1">
-              <a:noAutofit/>
-            </a:bodyPr>
-            <a:lstStyle/>
-            <a:p>
-              <a:pPr marL="0" marR="0" lvl="0" indent="0" algn="l" rtl="0">
-                <a:spcBef>
-                  <a:spcPts val="0"/>
-                </a:spcBef>
-                <a:spcAft>
-                  <a:spcPts val="0"/>
-                </a:spcAft>
-                <a:buNone/>
-              </a:pPr>
-              <a:endParaRPr sz="1800" b="0" strike="noStrike">
-                <a:solidFill>
-                  <a:srgbClr val="000000"/>
-                </a:solidFill>
-                <a:latin typeface="Arial"/>
-                <a:ea typeface="Arial"/>
-                <a:cs typeface="Arial"/>
-                <a:sym typeface="Arial"/>
-              </a:endParaRPr>
-            </a:p>
-          </p:txBody>
-        </p:sp>
-      </p:grpSp>
-      <p:cxnSp>
-        <p:nvCxnSpPr>
-          <p:cNvPr id="336" name="Google Shape;336;p34"/>
-          <p:cNvCxnSpPr/>
-          <p:nvPr/>
-        </p:nvCxnSpPr>
-        <p:spPr>
-          <a:xfrm rot="10800000">
-            <a:off x="2124700" y="2598750"/>
-            <a:ext cx="6556800" cy="0"/>
-          </a:xfrm>
-          <a:prstGeom prst="straightConnector1">
-            <a:avLst/>
-          </a:prstGeom>
-          <a:noFill/>
-          <a:ln w="38100" cap="flat" cmpd="sng">
-            <a:solidFill>
-              <a:schemeClr val="dk1"/>
-            </a:solidFill>
-            <a:prstDash val="solid"/>
-            <a:round/>
-            <a:headEnd type="none" w="med" len="med"/>
-            <a:tailEnd type="none" w="med" len="med"/>
-          </a:ln>
-        </p:spPr>
-      </p:cxnSp>
-    </p:spTree>
-  </p:cSld>
-  <p:clrMapOvr>
-    <a:masterClrMapping/>
-  </p:clrMapOvr>
-</p:sld>
-</file>
-
-<file path=ppt/slides/slide20.xml><?xml version="1.0" encoding="utf-8"?>
+<file path=ppt/slides/slide21.xml><?xml version="1.0" encoding="utf-8"?>
 <p:sld xmlns:a="http://schemas.openxmlformats.org/drawingml/2006/main" xmlns:r="http://schemas.openxmlformats.org/officeDocument/2006/relationships" xmlns:p="http://schemas.openxmlformats.org/presentationml/2006/main">
   <p:cSld>
     <p:spTree>
@@ -29980,7 +30721,7 @@
 </p:sld>
 </file>
 
-<file path=ppt/slides/slide21.xml><?xml version="1.0" encoding="utf-8"?>
+<file path=ppt/slides/slide22.xml><?xml version="1.0" encoding="utf-8"?>
 <p:sld xmlns:a="http://schemas.openxmlformats.org/drawingml/2006/main" xmlns:r="http://schemas.openxmlformats.org/officeDocument/2006/relationships" xmlns:p="http://schemas.openxmlformats.org/presentationml/2006/main">
   <p:cSld>
     <p:bg>
@@ -30578,8 +31319,8 @@
         </p:nvSpPr>
         <p:spPr bwMode="auto">
           <a:xfrm>
-            <a:off x="619200" y="-1473403"/>
-            <a:ext cx="8050620" cy="6855723"/>
+            <a:off x="619200" y="-1069445"/>
+            <a:ext cx="8050620" cy="6047809"/>
           </a:xfrm>
           <a:prstGeom prst="rect">
             <a:avLst/>
@@ -30803,7 +31544,7 @@
           <a:p>
             <a:pPr marL="285750" marR="0" lvl="0" indent="-285750" algn="l" defTabSz="914400" rtl="0" eaLnBrk="0" fontAlgn="base" latinLnBrk="0" hangingPunct="0">
               <a:lnSpc>
-                <a:spcPct val="150000"/>
+                <a:spcPct val="200000"/>
               </a:lnSpc>
               <a:spcBef>
                 <a:spcPct val="0"/>
@@ -30828,13 +31569,57 @@
                 <a:effectLst/>
                 <a:latin typeface="DM Sans" pitchFamily="2" charset="0"/>
               </a:rPr>
-              <a:t>global sport, resulting in further delays. This accumulation pushed season start dates as far back as December, creating a time deficit that was never recovered.</a:t>
+              <a:t>Global Disruption: </a:t>
+            </a:r>
+            <a:r>
+              <a:rPr kumimoji="0" lang="en-US" altLang="en-US" sz="1500" i="0" u="none" strike="noStrike" cap="none" normalizeH="0" baseline="0" dirty="0">
+                <a:ln>
+                  <a:noFill/>
+                </a:ln>
+                <a:solidFill>
+                  <a:schemeClr val="tx1"/>
+                </a:solidFill>
+                <a:effectLst/>
+                <a:latin typeface="DM Sans" pitchFamily="2" charset="0"/>
+              </a:rPr>
+              <a:t>COVID-19 disrupted global sport, resulting in further delays.</a:t>
             </a:r>
           </a:p>
           <a:p>
             <a:pPr marL="285750" marR="0" lvl="0" indent="-285750" algn="l" defTabSz="914400" rtl="0" eaLnBrk="0" fontAlgn="base" latinLnBrk="0" hangingPunct="0">
               <a:lnSpc>
-                <a:spcPct val="150000"/>
+                <a:spcPct val="200000"/>
+              </a:lnSpc>
+              <a:spcBef>
+                <a:spcPct val="0"/>
+              </a:spcBef>
+              <a:spcAft>
+                <a:spcPct val="0"/>
+              </a:spcAft>
+              <a:buClrTx/>
+              <a:buSzTx/>
+              <a:buFont typeface="Arial" panose="020B0604020202020204" pitchFamily="34" charset="0"/>
+              <a:buChar char="•"/>
+              <a:tabLst/>
+            </a:pPr>
+            <a:r>
+              <a:rPr kumimoji="0" lang="en-US" altLang="en-US" sz="1500" b="1" i="0" u="none" strike="noStrike" cap="none" normalizeH="0" baseline="0" dirty="0">
+                <a:ln>
+                  <a:noFill/>
+                </a:ln>
+                <a:solidFill>
+                  <a:schemeClr val="tx1"/>
+                </a:solidFill>
+                <a:effectLst/>
+                <a:latin typeface="DM Sans" pitchFamily="2" charset="0"/>
+              </a:rPr>
+              <a:t>This accumulation pushed season start dates as far back as December, creating a time deficit that was never recovered.</a:t>
+            </a:r>
+          </a:p>
+          <a:p>
+            <a:pPr marL="285750" marR="0" lvl="0" indent="-285750" algn="l" defTabSz="914400" rtl="0" eaLnBrk="0" fontAlgn="base" latinLnBrk="0" hangingPunct="0">
+              <a:lnSpc>
+                <a:spcPct val="200000"/>
               </a:lnSpc>
               <a:spcBef>
                 <a:spcPct val="0"/>
@@ -30876,159 +31661,6 @@
             </a:r>
           </a:p>
           <a:p>
-            <a:pPr marL="285750" marR="0" lvl="0" indent="-285750" algn="l" defTabSz="914400" rtl="0" eaLnBrk="0" fontAlgn="base" latinLnBrk="0" hangingPunct="0">
-              <a:lnSpc>
-                <a:spcPct val="150000"/>
-              </a:lnSpc>
-              <a:spcBef>
-                <a:spcPct val="0"/>
-              </a:spcBef>
-              <a:spcAft>
-                <a:spcPct val="0"/>
-              </a:spcAft>
-              <a:buClrTx/>
-              <a:buSzTx/>
-              <a:buFont typeface="Arial" panose="020B0604020202020204" pitchFamily="34" charset="0"/>
-              <a:buChar char="•"/>
-              <a:tabLst/>
-            </a:pPr>
-            <a:r>
-              <a:rPr kumimoji="0" lang="en-US" altLang="en-US" sz="1500" b="1" i="0" u="none" strike="noStrike" cap="none" normalizeH="0" baseline="0" dirty="0">
-                <a:ln>
-                  <a:noFill/>
-                </a:ln>
-                <a:solidFill>
-                  <a:schemeClr val="tx1"/>
-                </a:solidFill>
-                <a:effectLst/>
-                <a:latin typeface="DM Sans" pitchFamily="2" charset="0"/>
-              </a:rPr>
-              <a:t>The Qualifier</a:t>
-            </a:r>
-            <a:r>
-              <a:rPr kumimoji="0" lang="en-US" altLang="en-US" sz="1500" i="0" u="none" strike="noStrike" cap="none" normalizeH="0" baseline="0" dirty="0">
-                <a:ln>
-                  <a:noFill/>
-                </a:ln>
-                <a:solidFill>
-                  <a:schemeClr val="tx1"/>
-                </a:solidFill>
-                <a:effectLst/>
-                <a:latin typeface="DM Sans" pitchFamily="2" charset="0"/>
-              </a:rPr>
-              <a:t>: All 18 teams play a single round-robin (only 17 matches per team). There are no return legs.</a:t>
-            </a:r>
-          </a:p>
-          <a:p>
-            <a:pPr marL="285750" marR="0" lvl="0" indent="-285750" algn="l" defTabSz="914400" rtl="0" eaLnBrk="0" fontAlgn="base" latinLnBrk="0" hangingPunct="0">
-              <a:lnSpc>
-                <a:spcPct val="150000"/>
-              </a:lnSpc>
-              <a:spcBef>
-                <a:spcPct val="0"/>
-              </a:spcBef>
-              <a:spcAft>
-                <a:spcPct val="0"/>
-              </a:spcAft>
-              <a:buClrTx/>
-              <a:buSzTx/>
-              <a:buFont typeface="Arial" panose="020B0604020202020204" pitchFamily="34" charset="0"/>
-              <a:buChar char="•"/>
-              <a:tabLst/>
-            </a:pPr>
-            <a:r>
-              <a:rPr kumimoji="0" lang="en-US" altLang="en-US" sz="1500" b="1" i="0" u="none" strike="noStrike" cap="none" normalizeH="0" baseline="0" dirty="0">
-                <a:ln>
-                  <a:noFill/>
-                </a:ln>
-                <a:solidFill>
-                  <a:schemeClr val="tx1"/>
-                </a:solidFill>
-                <a:effectLst/>
-                <a:latin typeface="DM Sans" pitchFamily="2" charset="0"/>
-              </a:rPr>
-              <a:t>The Split: </a:t>
-            </a:r>
-          </a:p>
-          <a:p>
-            <a:pPr marL="742950" lvl="1" indent="-285750" algn="l" eaLnBrk="0" fontAlgn="base" hangingPunct="0">
-              <a:lnSpc>
-                <a:spcPct val="150000"/>
-              </a:lnSpc>
-              <a:spcBef>
-                <a:spcPct val="0"/>
-              </a:spcBef>
-              <a:spcAft>
-                <a:spcPct val="0"/>
-              </a:spcAft>
-              <a:buClrTx/>
-              <a:buSzTx/>
-              <a:buFont typeface="Wingdings" panose="05000000000000000000" pitchFamily="2" charset="2"/>
-              <a:buChar char="Ø"/>
-            </a:pPr>
-            <a:r>
-              <a:rPr lang="en-US" altLang="en-US" sz="1500" b="1" dirty="0">
-                <a:solidFill>
-                  <a:schemeClr val="tx1"/>
-                </a:solidFill>
-                <a:latin typeface="DM Sans" pitchFamily="2" charset="0"/>
-              </a:rPr>
-              <a:t>Top 9</a:t>
-            </a:r>
-            <a:r>
-              <a:rPr lang="en-US" altLang="en-US" sz="1500" dirty="0">
-                <a:solidFill>
-                  <a:schemeClr val="tx1"/>
-                </a:solidFill>
-                <a:latin typeface="DM Sans" pitchFamily="2" charset="0"/>
-              </a:rPr>
-              <a:t>: Compete for the title and continental spots.</a:t>
-            </a:r>
-          </a:p>
-          <a:p>
-            <a:pPr marL="742950" lvl="1" indent="-285750" algn="l" eaLnBrk="0" fontAlgn="base" hangingPunct="0">
-              <a:lnSpc>
-                <a:spcPct val="150000"/>
-              </a:lnSpc>
-              <a:spcBef>
-                <a:spcPct val="0"/>
-              </a:spcBef>
-              <a:spcAft>
-                <a:spcPct val="0"/>
-              </a:spcAft>
-              <a:buClrTx/>
-              <a:buSzTx/>
-              <a:buFont typeface="Wingdings" panose="05000000000000000000" pitchFamily="2" charset="2"/>
-              <a:buChar char="Ø"/>
-            </a:pPr>
-            <a:r>
-              <a:rPr kumimoji="0" lang="en-US" altLang="en-US" sz="1500" b="1" i="0" u="none" strike="noStrike" cap="none" normalizeH="0" baseline="0" dirty="0">
-                <a:ln>
-                  <a:noFill/>
-                </a:ln>
-                <a:solidFill>
-                  <a:schemeClr val="tx1"/>
-                </a:solidFill>
-                <a:effectLst/>
-                <a:latin typeface="DM Sans" pitchFamily="2" charset="0"/>
-              </a:rPr>
-              <a:t>Bottom 9: </a:t>
-            </a:r>
-            <a:r>
-              <a:rPr kumimoji="0" lang="en-US" altLang="en-US" sz="1500" i="0" u="none" strike="noStrike" cap="none" normalizeH="0" baseline="0" dirty="0">
-                <a:ln>
-                  <a:noFill/>
-                </a:ln>
-                <a:solidFill>
-                  <a:schemeClr val="tx1"/>
-                </a:solidFill>
-                <a:effectLst/>
-                <a:latin typeface="DM Sans" pitchFamily="2" charset="0"/>
-              </a:rPr>
-              <a:t>Compete to avoid relegation.</a:t>
-            </a:r>
-          </a:p>
-          <a:p>
             <a:pPr marL="457200" lvl="1" indent="0" algn="l" eaLnBrk="0" fontAlgn="base" hangingPunct="0">
               <a:lnSpc>
                 <a:spcPct val="150000"/>
@@ -31102,7 +31734,7 @@
     </p:spTree>
     <p:extLst>
       <p:ext uri="{BB962C8B-B14F-4D97-AF65-F5344CB8AC3E}">
-        <p14:creationId xmlns:p14="http://schemas.microsoft.com/office/powerpoint/2010/main" val="2596226451"/>
+        <p14:creationId xmlns:p14="http://schemas.microsoft.com/office/powerpoint/2010/main" val="4177559168"/>
       </p:ext>
     </p:extLst>
   </p:cSld>
@@ -31113,6 +31745,288 @@
 </file>
 
 <file path=ppt/slides/slide5.xml><?xml version="1.0" encoding="utf-8"?>
+<p:sld xmlns:a="http://schemas.openxmlformats.org/drawingml/2006/main" xmlns:r="http://schemas.openxmlformats.org/officeDocument/2006/relationships" xmlns:p="http://schemas.openxmlformats.org/presentationml/2006/main">
+  <p:cSld>
+    <p:spTree>
+      <p:nvGrpSpPr>
+        <p:cNvPr id="1" name="Shape 510"/>
+        <p:cNvGrpSpPr/>
+        <p:nvPr/>
+      </p:nvGrpSpPr>
+      <p:grpSpPr>
+        <a:xfrm>
+          <a:off x="0" y="0"/>
+          <a:ext cx="0" cy="0"/>
+          <a:chOff x="0" y="0"/>
+          <a:chExt cx="0" cy="0"/>
+        </a:xfrm>
+      </p:grpSpPr>
+      <p:sp>
+        <p:nvSpPr>
+          <p:cNvPr id="511" name="Google Shape;511;p46"/>
+          <p:cNvSpPr txBox="1">
+            <a:spLocks noGrp="1"/>
+          </p:cNvSpPr>
+          <p:nvPr>
+            <p:ph type="title"/>
+          </p:nvPr>
+        </p:nvSpPr>
+        <p:spPr>
+          <a:xfrm>
+            <a:off x="916500" y="398457"/>
+            <a:ext cx="7493100" cy="572700"/>
+          </a:xfrm>
+          <a:prstGeom prst="rect">
+            <a:avLst/>
+          </a:prstGeom>
+        </p:spPr>
+        <p:txBody>
+          <a:bodyPr spcFirstLastPara="1" wrap="square" lIns="91425" tIns="91425" rIns="91425" bIns="91425" anchor="t" anchorCtr="0">
+            <a:noAutofit/>
+          </a:bodyPr>
+          <a:lstStyle/>
+          <a:p>
+            <a:pPr marL="0" lvl="0" indent="0" rtl="0">
+              <a:spcBef>
+                <a:spcPts val="0"/>
+              </a:spcBef>
+              <a:spcAft>
+                <a:spcPts val="0"/>
+              </a:spcAft>
+              <a:buNone/>
+            </a:pPr>
+            <a:r>
+              <a:rPr lang="en-US" dirty="0"/>
+              <a:t>2024/2025 Exceptional Format</a:t>
+            </a:r>
+          </a:p>
+        </p:txBody>
+      </p:sp>
+      <p:sp>
+        <p:nvSpPr>
+          <p:cNvPr id="17" name="TextBox 16">
+            <a:extLst>
+              <a:ext uri="{FF2B5EF4-FFF2-40B4-BE49-F238E27FC236}">
+                <a16:creationId xmlns:a16="http://schemas.microsoft.com/office/drawing/2014/main" id="{D1E04750-94B4-47C2-87E9-581FB9B6F9EC}"/>
+              </a:ext>
+            </a:extLst>
+          </p:cNvPr>
+          <p:cNvSpPr txBox="1"/>
+          <p:nvPr/>
+        </p:nvSpPr>
+        <p:spPr>
+          <a:xfrm>
+            <a:off x="617035" y="1152293"/>
+            <a:ext cx="8779726" cy="2999347"/>
+          </a:xfrm>
+          <a:prstGeom prst="rect">
+            <a:avLst/>
+          </a:prstGeom>
+          <a:noFill/>
+        </p:spPr>
+        <p:txBody>
+          <a:bodyPr wrap="square">
+            <a:spAutoFit/>
+          </a:bodyPr>
+          <a:lstStyle/>
+          <a:p>
+            <a:pPr marL="285750" marR="0" lvl="0" indent="-285750" algn="l" defTabSz="914400" rtl="0" eaLnBrk="0" fontAlgn="base" latinLnBrk="0" hangingPunct="0">
+              <a:lnSpc>
+                <a:spcPct val="200000"/>
+              </a:lnSpc>
+              <a:spcBef>
+                <a:spcPct val="0"/>
+              </a:spcBef>
+              <a:spcAft>
+                <a:spcPct val="0"/>
+              </a:spcAft>
+              <a:buClrTx/>
+              <a:buSzTx/>
+              <a:buFont typeface="Arial" panose="020B0604020202020204" pitchFamily="34" charset="0"/>
+              <a:buChar char="•"/>
+              <a:tabLst/>
+            </a:pPr>
+            <a:r>
+              <a:rPr kumimoji="0" lang="en-US" altLang="en-US" sz="1600" b="1" i="0" u="none" strike="noStrike" cap="none" normalizeH="0" baseline="0" dirty="0">
+                <a:ln>
+                  <a:noFill/>
+                </a:ln>
+                <a:solidFill>
+                  <a:schemeClr val="tx1"/>
+                </a:solidFill>
+                <a:effectLst/>
+                <a:latin typeface="DM Sans" pitchFamily="2" charset="0"/>
+              </a:rPr>
+              <a:t>The Qualifier</a:t>
+            </a:r>
+            <a:r>
+              <a:rPr kumimoji="0" lang="en-US" altLang="en-US" sz="1600" i="0" u="none" strike="noStrike" cap="none" normalizeH="0" baseline="0" dirty="0">
+                <a:ln>
+                  <a:noFill/>
+                </a:ln>
+                <a:solidFill>
+                  <a:schemeClr val="tx1"/>
+                </a:solidFill>
+                <a:effectLst/>
+                <a:latin typeface="DM Sans" pitchFamily="2" charset="0"/>
+              </a:rPr>
+              <a:t>: All 18 teams compete in a single round-robin format (17 matches per team), with no return legs.</a:t>
+            </a:r>
+          </a:p>
+          <a:p>
+            <a:pPr marL="285750" marR="0" lvl="0" indent="-285750" algn="l" defTabSz="914400" rtl="0" eaLnBrk="0" fontAlgn="base" latinLnBrk="0" hangingPunct="0">
+              <a:lnSpc>
+                <a:spcPct val="200000"/>
+              </a:lnSpc>
+              <a:spcBef>
+                <a:spcPct val="0"/>
+              </a:spcBef>
+              <a:spcAft>
+                <a:spcPct val="0"/>
+              </a:spcAft>
+              <a:buClrTx/>
+              <a:buSzTx/>
+              <a:buFont typeface="Arial" panose="020B0604020202020204" pitchFamily="34" charset="0"/>
+              <a:buChar char="•"/>
+              <a:tabLst/>
+            </a:pPr>
+            <a:r>
+              <a:rPr kumimoji="0" lang="en-US" altLang="en-US" sz="1600" b="1" i="0" u="none" strike="noStrike" cap="none" normalizeH="0" baseline="0" dirty="0">
+                <a:ln>
+                  <a:noFill/>
+                </a:ln>
+                <a:solidFill>
+                  <a:schemeClr val="tx1"/>
+                </a:solidFill>
+                <a:effectLst/>
+                <a:latin typeface="DM Sans" pitchFamily="2" charset="0"/>
+              </a:rPr>
+              <a:t>The Split:</a:t>
+            </a:r>
+          </a:p>
+          <a:p>
+            <a:pPr marL="742950" lvl="1" indent="-285750" algn="l" eaLnBrk="0" fontAlgn="base" hangingPunct="0">
+              <a:lnSpc>
+                <a:spcPct val="200000"/>
+              </a:lnSpc>
+              <a:spcBef>
+                <a:spcPct val="0"/>
+              </a:spcBef>
+              <a:spcAft>
+                <a:spcPct val="0"/>
+              </a:spcAft>
+              <a:buClrTx/>
+              <a:buSzTx/>
+              <a:buFont typeface="Wingdings" panose="05000000000000000000" pitchFamily="2" charset="2"/>
+              <a:buChar char="Ø"/>
+            </a:pPr>
+            <a:r>
+              <a:rPr kumimoji="0" lang="en-US" altLang="en-US" sz="1600" b="1" i="0" u="none" strike="noStrike" cap="none" normalizeH="0" baseline="0" dirty="0">
+                <a:ln>
+                  <a:noFill/>
+                </a:ln>
+                <a:solidFill>
+                  <a:schemeClr val="tx1"/>
+                </a:solidFill>
+                <a:effectLst/>
+                <a:latin typeface="DM Sans" pitchFamily="2" charset="0"/>
+              </a:rPr>
+              <a:t>Top 9: </a:t>
+            </a:r>
+            <a:r>
+              <a:rPr kumimoji="0" lang="en-US" altLang="en-US" sz="1600" i="0" u="none" strike="noStrike" cap="none" normalizeH="0" baseline="0" dirty="0">
+                <a:ln>
+                  <a:noFill/>
+                </a:ln>
+                <a:solidFill>
+                  <a:schemeClr val="tx1"/>
+                </a:solidFill>
+                <a:effectLst/>
+                <a:latin typeface="DM Sans" pitchFamily="2" charset="0"/>
+              </a:rPr>
+              <a:t>Compete for the league title and continental qualification.</a:t>
+            </a:r>
+          </a:p>
+          <a:p>
+            <a:pPr marL="742950" lvl="1" indent="-285750" algn="l" eaLnBrk="0" fontAlgn="base" hangingPunct="0">
+              <a:lnSpc>
+                <a:spcPct val="200000"/>
+              </a:lnSpc>
+              <a:spcBef>
+                <a:spcPct val="0"/>
+              </a:spcBef>
+              <a:spcAft>
+                <a:spcPct val="0"/>
+              </a:spcAft>
+              <a:buClrTx/>
+              <a:buSzTx/>
+              <a:buFont typeface="Wingdings" panose="05000000000000000000" pitchFamily="2" charset="2"/>
+              <a:buChar char="Ø"/>
+            </a:pPr>
+            <a:r>
+              <a:rPr lang="en-US" altLang="en-US" sz="1600" b="1" dirty="0">
+                <a:solidFill>
+                  <a:schemeClr val="tx1"/>
+                </a:solidFill>
+                <a:latin typeface="DM Sans" pitchFamily="2" charset="0"/>
+              </a:rPr>
+              <a:t>Bottom 9: </a:t>
+            </a:r>
+            <a:r>
+              <a:rPr lang="en-US" altLang="en-US" sz="1600" dirty="0">
+                <a:solidFill>
+                  <a:schemeClr val="tx1"/>
+                </a:solidFill>
+                <a:latin typeface="DM Sans" pitchFamily="2" charset="0"/>
+              </a:rPr>
+              <a:t>Compete to avoid relegation.</a:t>
+            </a:r>
+            <a:endParaRPr kumimoji="0" lang="en-US" altLang="en-US" sz="1600" i="0" u="none" strike="noStrike" cap="none" normalizeH="0" baseline="0" dirty="0">
+              <a:ln>
+                <a:noFill/>
+              </a:ln>
+              <a:solidFill>
+                <a:schemeClr val="tx1"/>
+              </a:solidFill>
+              <a:effectLst/>
+              <a:latin typeface="DM Sans" pitchFamily="2" charset="0"/>
+            </a:endParaRPr>
+          </a:p>
+          <a:p>
+            <a:pPr marL="457200" lvl="1" algn="l" eaLnBrk="0" fontAlgn="base" hangingPunct="0">
+              <a:lnSpc>
+                <a:spcPct val="250000"/>
+              </a:lnSpc>
+              <a:spcBef>
+                <a:spcPct val="0"/>
+              </a:spcBef>
+              <a:spcAft>
+                <a:spcPct val="0"/>
+              </a:spcAft>
+              <a:buClrTx/>
+              <a:buSzTx/>
+            </a:pPr>
+            <a:r>
+              <a:rPr lang="en-US" dirty="0"/>
+              <a:t>:</a:t>
+            </a:r>
+          </a:p>
+        </p:txBody>
+      </p:sp>
+    </p:spTree>
+    <p:extLst>
+      <p:ext uri="{BB962C8B-B14F-4D97-AF65-F5344CB8AC3E}">
+        <p14:creationId xmlns:p14="http://schemas.microsoft.com/office/powerpoint/2010/main" val="548569746"/>
+      </p:ext>
+    </p:extLst>
+  </p:cSld>
+  <p:clrMapOvr>
+    <a:masterClrMapping/>
+  </p:clrMapOvr>
+</p:sld>
+</file>
+
+<file path=ppt/slides/slide6.xml><?xml version="1.0" encoding="utf-8"?>
 <p:sld xmlns:a="http://schemas.openxmlformats.org/drawingml/2006/main" xmlns:r="http://schemas.openxmlformats.org/officeDocument/2006/relationships" xmlns:p="http://schemas.openxmlformats.org/presentationml/2006/main">
   <p:cSld>
     <p:spTree>
@@ -31298,6 +32212,11 @@
         </p:spPr>
       </p:pic>
     </p:spTree>
+    <p:extLst>
+      <p:ext uri="{BB962C8B-B14F-4D97-AF65-F5344CB8AC3E}">
+        <p14:creationId xmlns:p14="http://schemas.microsoft.com/office/powerpoint/2010/main" val="4294538523"/>
+      </p:ext>
+    </p:extLst>
   </p:cSld>
   <p:clrMapOvr>
     <a:masterClrMapping/>
@@ -31305,7 +32224,7 @@
 </p:sld>
 </file>
 
-<file path=ppt/slides/slide6.xml><?xml version="1.0" encoding="utf-8"?>
+<file path=ppt/slides/slide7.xml><?xml version="1.0" encoding="utf-8"?>
 <p:sld xmlns:a="http://schemas.openxmlformats.org/drawingml/2006/main" xmlns:r="http://schemas.openxmlformats.org/officeDocument/2006/relationships" xmlns:p="http://schemas.openxmlformats.org/presentationml/2006/main">
   <p:cSld>
     <p:spTree>
@@ -34085,7 +35004,7 @@
 </p:sld>
 </file>
 
-<file path=ppt/slides/slide7.xml><?xml version="1.0" encoding="utf-8"?>
+<file path=ppt/slides/slide8.xml><?xml version="1.0" encoding="utf-8"?>
 <p:sld xmlns:a="http://schemas.openxmlformats.org/drawingml/2006/main" xmlns:r="http://schemas.openxmlformats.org/officeDocument/2006/relationships" xmlns:p="http://schemas.openxmlformats.org/presentationml/2006/main">
   <p:cSld>
     <p:spTree>
@@ -34690,7 +35609,7 @@
 </p:sld>
 </file>
 
-<file path=ppt/slides/slide8.xml><?xml version="1.0" encoding="utf-8"?>
+<file path=ppt/slides/slide9.xml><?xml version="1.0" encoding="utf-8"?>
 <p:sld xmlns:a="http://schemas.openxmlformats.org/drawingml/2006/main" xmlns:r="http://schemas.openxmlformats.org/officeDocument/2006/relationships" xmlns:p="http://schemas.openxmlformats.org/presentationml/2006/main">
   <p:cSld>
     <p:spTree>
@@ -35213,637 +36132,6 @@
         <p14:creationId xmlns:p14="http://schemas.microsoft.com/office/powerpoint/2010/main" val="542984284"/>
       </p:ext>
     </p:extLst>
-  </p:cSld>
-  <p:clrMapOvr>
-    <a:masterClrMapping/>
-  </p:clrMapOvr>
-</p:sld>
-</file>
-
-<file path=ppt/slides/slide9.xml><?xml version="1.0" encoding="utf-8"?>
-<p:sld xmlns:a="http://schemas.openxmlformats.org/drawingml/2006/main" xmlns:r="http://schemas.openxmlformats.org/officeDocument/2006/relationships" xmlns:p="http://schemas.openxmlformats.org/presentationml/2006/main">
-  <p:cSld>
-    <p:spTree>
-      <p:nvGrpSpPr>
-        <p:cNvPr id="1" name="Shape 362"/>
-        <p:cNvGrpSpPr/>
-        <p:nvPr/>
-      </p:nvGrpSpPr>
-      <p:grpSpPr>
-        <a:xfrm>
-          <a:off x="0" y="0"/>
-          <a:ext cx="0" cy="0"/>
-          <a:chOff x="0" y="0"/>
-          <a:chExt cx="0" cy="0"/>
-        </a:xfrm>
-      </p:grpSpPr>
-      <p:sp>
-        <p:nvSpPr>
-          <p:cNvPr id="363" name="Google Shape;363;p36"/>
-          <p:cNvSpPr txBox="1">
-            <a:spLocks noGrp="1"/>
-          </p:cNvSpPr>
-          <p:nvPr>
-            <p:ph type="title"/>
-          </p:nvPr>
-        </p:nvSpPr>
-        <p:spPr>
-          <a:xfrm>
-            <a:off x="719999" y="445025"/>
-            <a:ext cx="8089463" cy="572700"/>
-          </a:xfrm>
-          <a:prstGeom prst="rect">
-            <a:avLst/>
-          </a:prstGeom>
-        </p:spPr>
-        <p:txBody>
-          <a:bodyPr spcFirstLastPara="1" wrap="square" lIns="91425" tIns="91425" rIns="91425" bIns="91425" anchor="t" anchorCtr="0">
-            <a:noAutofit/>
-          </a:bodyPr>
-          <a:lstStyle/>
-          <a:p>
-            <a:pPr lvl="0"/>
-            <a:r>
-              <a:rPr lang="en-US" dirty="0"/>
-              <a:t>Sports Scheduling as an Optimization Problem</a:t>
-            </a:r>
-            <a:endParaRPr dirty="0"/>
-          </a:p>
-        </p:txBody>
-      </p:sp>
-      <p:sp>
-        <p:nvSpPr>
-          <p:cNvPr id="365" name="Google Shape;365;p36"/>
-          <p:cNvSpPr txBox="1">
-            <a:spLocks noGrp="1"/>
-          </p:cNvSpPr>
-          <p:nvPr>
-            <p:ph type="subTitle" idx="2"/>
-          </p:nvPr>
-        </p:nvSpPr>
-        <p:spPr>
-          <a:xfrm>
-            <a:off x="2911683" y="2878695"/>
-            <a:ext cx="3447553" cy="1911514"/>
-          </a:xfrm>
-          <a:prstGeom prst="rect">
-            <a:avLst/>
-          </a:prstGeom>
-        </p:spPr>
-        <p:txBody>
-          <a:bodyPr spcFirstLastPara="1" wrap="square" lIns="91425" tIns="91425" rIns="91425" bIns="91425" anchor="t" anchorCtr="0">
-            <a:noAutofit/>
-          </a:bodyPr>
-          <a:lstStyle/>
-          <a:p>
-            <a:pPr marL="596900" lvl="1" indent="0" algn="l">
-              <a:lnSpc>
-                <a:spcPct val="150000"/>
-              </a:lnSpc>
-            </a:pPr>
-            <a:r>
-              <a:rPr lang="en-US" dirty="0"/>
-              <a:t>Standard football leagues follow a </a:t>
-            </a:r>
-            <a:r>
-              <a:rPr lang="en-US" b="1" dirty="0"/>
-              <a:t>Double Round Robin</a:t>
-            </a:r>
-            <a:endParaRPr lang="en-US" dirty="0"/>
-          </a:p>
-          <a:p>
-            <a:pPr marL="882650" lvl="1" indent="-285750" algn="l">
-              <a:lnSpc>
-                <a:spcPct val="150000"/>
-              </a:lnSpc>
-              <a:buFont typeface="Arial" panose="020B0604020202020204" pitchFamily="34" charset="0"/>
-              <a:buChar char="•"/>
-            </a:pPr>
-            <a:r>
-              <a:rPr lang="en-US" dirty="0"/>
-              <a:t>Each team plays every other team </a:t>
-            </a:r>
-            <a:r>
-              <a:rPr lang="en-US" b="1" dirty="0"/>
-              <a:t>twice</a:t>
-            </a:r>
-            <a:r>
-              <a:rPr lang="en-US" dirty="0"/>
-              <a:t> (home &amp; away)</a:t>
-            </a:r>
-          </a:p>
-          <a:p>
-            <a:pPr marL="882650" lvl="1" indent="-285750" algn="l">
-              <a:lnSpc>
-                <a:spcPct val="150000"/>
-              </a:lnSpc>
-              <a:buFont typeface="Arial" panose="020B0604020202020204" pitchFamily="34" charset="0"/>
-              <a:buChar char="•"/>
-            </a:pPr>
-            <a:r>
-              <a:rPr lang="en-US" dirty="0"/>
-              <a:t>For </a:t>
-            </a:r>
-            <a:r>
-              <a:rPr lang="en-US" i="1" dirty="0"/>
-              <a:t>n</a:t>
-            </a:r>
-            <a:r>
-              <a:rPr lang="en-US" dirty="0"/>
-              <a:t> teams → </a:t>
-            </a:r>
-            <a:r>
-              <a:rPr lang="en-US" b="1" dirty="0"/>
-              <a:t>n(n−1)</a:t>
-            </a:r>
-            <a:r>
-              <a:rPr lang="en-US" dirty="0"/>
-              <a:t> total matches</a:t>
-            </a:r>
-          </a:p>
-          <a:p>
-            <a:pPr marL="596900" lvl="1" indent="0" algn="l"/>
-            <a:endParaRPr lang="en-US" dirty="0"/>
-          </a:p>
-        </p:txBody>
-      </p:sp>
-      <p:sp>
-        <p:nvSpPr>
-          <p:cNvPr id="366" name="Google Shape;366;p36"/>
-          <p:cNvSpPr txBox="1">
-            <a:spLocks noGrp="1"/>
-          </p:cNvSpPr>
-          <p:nvPr>
-            <p:ph type="subTitle" idx="3"/>
-          </p:nvPr>
-        </p:nvSpPr>
-        <p:spPr>
-          <a:xfrm>
-            <a:off x="6434178" y="2889947"/>
-            <a:ext cx="2784764" cy="1547831"/>
-          </a:xfrm>
-          <a:prstGeom prst="rect">
-            <a:avLst/>
-          </a:prstGeom>
-        </p:spPr>
-        <p:txBody>
-          <a:bodyPr spcFirstLastPara="1" wrap="square" lIns="91425" tIns="91425" rIns="91425" bIns="91425" anchor="t" anchorCtr="0">
-            <a:noAutofit/>
-          </a:bodyPr>
-          <a:lstStyle/>
-          <a:p>
-            <a:pPr marL="0" lvl="0" indent="0" eaLnBrk="0" fontAlgn="base" hangingPunct="0">
-              <a:lnSpc>
-                <a:spcPct val="150000"/>
-              </a:lnSpc>
-              <a:spcBef>
-                <a:spcPct val="0"/>
-              </a:spcBef>
-              <a:spcAft>
-                <a:spcPct val="0"/>
-              </a:spcAft>
-              <a:buClrTx/>
-              <a:buSzTx/>
-            </a:pPr>
-            <a:r>
-              <a:rPr lang="en-US" b="1" dirty="0">
-                <a:solidFill>
-                  <a:schemeClr val="tx1"/>
-                </a:solidFill>
-              </a:rPr>
-              <a:t>Egyptian Premier League has:</a:t>
-            </a:r>
-          </a:p>
-          <a:p>
-            <a:pPr marL="285750" lvl="0" indent="-285750" eaLnBrk="0" fontAlgn="base" hangingPunct="0">
-              <a:lnSpc>
-                <a:spcPct val="150000"/>
-              </a:lnSpc>
-              <a:spcBef>
-                <a:spcPct val="0"/>
-              </a:spcBef>
-              <a:spcAft>
-                <a:spcPct val="0"/>
-              </a:spcAft>
-              <a:buClrTx/>
-              <a:buSzTx/>
-              <a:buFont typeface="Arial" panose="020B0604020202020204" pitchFamily="34" charset="0"/>
-              <a:buChar char="•"/>
-            </a:pPr>
-            <a:r>
-              <a:rPr lang="en-US" altLang="en-US" b="1" dirty="0">
-                <a:solidFill>
-                  <a:schemeClr val="tx1"/>
-                </a:solidFill>
-                <a:latin typeface="Arial" panose="020B0604020202020204" pitchFamily="34" charset="0"/>
-              </a:rPr>
-              <a:t>18 teams</a:t>
-            </a:r>
-            <a:endParaRPr lang="en-US" altLang="en-US" dirty="0">
-              <a:solidFill>
-                <a:schemeClr val="tx1"/>
-              </a:solidFill>
-              <a:latin typeface="Arial" panose="020B0604020202020204" pitchFamily="34" charset="0"/>
-            </a:endParaRPr>
-          </a:p>
-          <a:p>
-            <a:pPr marL="285750" lvl="0" indent="-285750" eaLnBrk="0" fontAlgn="base" hangingPunct="0">
-              <a:lnSpc>
-                <a:spcPct val="150000"/>
-              </a:lnSpc>
-              <a:spcBef>
-                <a:spcPct val="0"/>
-              </a:spcBef>
-              <a:spcAft>
-                <a:spcPct val="0"/>
-              </a:spcAft>
-              <a:buClrTx/>
-              <a:buSzTx/>
-              <a:buFont typeface="Arial" panose="020B0604020202020204" pitchFamily="34" charset="0"/>
-              <a:buChar char="•"/>
-            </a:pPr>
-            <a:r>
-              <a:rPr lang="en-US" altLang="en-US" b="1" dirty="0">
-                <a:solidFill>
-                  <a:schemeClr val="tx1"/>
-                </a:solidFill>
-                <a:latin typeface="Arial" panose="020B0604020202020204" pitchFamily="34" charset="0"/>
-              </a:rPr>
-              <a:t>306 matches</a:t>
-            </a:r>
-            <a:endParaRPr lang="en-US" altLang="en-US" dirty="0">
-              <a:solidFill>
-                <a:schemeClr val="tx1"/>
-              </a:solidFill>
-              <a:latin typeface="Arial" panose="020B0604020202020204" pitchFamily="34" charset="0"/>
-            </a:endParaRPr>
-          </a:p>
-          <a:p>
-            <a:pPr marL="285750" lvl="0" indent="-285750" eaLnBrk="0" fontAlgn="base" hangingPunct="0">
-              <a:lnSpc>
-                <a:spcPct val="150000"/>
-              </a:lnSpc>
-              <a:spcBef>
-                <a:spcPct val="0"/>
-              </a:spcBef>
-              <a:spcAft>
-                <a:spcPct val="0"/>
-              </a:spcAft>
-              <a:buClrTx/>
-              <a:buSzTx/>
-              <a:buFont typeface="Arial" panose="020B0604020202020204" pitchFamily="34" charset="0"/>
-              <a:buChar char="•"/>
-            </a:pPr>
-            <a:r>
-              <a:rPr lang="en-US" altLang="en-US" b="1" dirty="0">
-                <a:solidFill>
-                  <a:schemeClr val="tx1"/>
-                </a:solidFill>
-                <a:latin typeface="Arial" panose="020B0604020202020204" pitchFamily="34" charset="0"/>
-              </a:rPr>
-              <a:t>34 rounds</a:t>
-            </a:r>
-            <a:endParaRPr lang="en-US" altLang="en-US" dirty="0">
-              <a:solidFill>
-                <a:schemeClr val="tx1"/>
-              </a:solidFill>
-              <a:latin typeface="Arial" panose="020B0604020202020204" pitchFamily="34" charset="0"/>
-            </a:endParaRPr>
-          </a:p>
-          <a:p>
-            <a:pPr marL="0" lvl="0" indent="0" algn="l" rtl="0">
-              <a:spcBef>
-                <a:spcPts val="0"/>
-              </a:spcBef>
-              <a:spcAft>
-                <a:spcPts val="0"/>
-              </a:spcAft>
-              <a:buNone/>
-            </a:pPr>
-            <a:endParaRPr dirty="0"/>
-          </a:p>
-        </p:txBody>
-      </p:sp>
-      <p:sp>
-        <p:nvSpPr>
-          <p:cNvPr id="367" name="Google Shape;367;p36"/>
-          <p:cNvSpPr txBox="1">
-            <a:spLocks noGrp="1"/>
-          </p:cNvSpPr>
-          <p:nvPr>
-            <p:ph type="subTitle" idx="4"/>
-          </p:nvPr>
-        </p:nvSpPr>
-        <p:spPr>
-          <a:xfrm>
-            <a:off x="500338" y="2536444"/>
-            <a:ext cx="3041678" cy="430800"/>
-          </a:xfrm>
-          <a:prstGeom prst="rect">
-            <a:avLst/>
-          </a:prstGeom>
-        </p:spPr>
-        <p:txBody>
-          <a:bodyPr spcFirstLastPara="1" wrap="square" lIns="91425" tIns="91425" rIns="91425" bIns="91425" anchor="b" anchorCtr="0">
-            <a:noAutofit/>
-          </a:bodyPr>
-          <a:lstStyle/>
-          <a:p>
-            <a:pPr marL="0" lvl="0" indent="0"/>
-            <a:r>
-              <a:rPr lang="en-US" sz="2000" b="1" dirty="0"/>
-              <a:t>NP-hard problem</a:t>
-            </a:r>
-            <a:endParaRPr sz="2000" dirty="0"/>
-          </a:p>
-        </p:txBody>
-      </p:sp>
-      <p:sp>
-        <p:nvSpPr>
-          <p:cNvPr id="368" name="Google Shape;368;p36"/>
-          <p:cNvSpPr txBox="1">
-            <a:spLocks noGrp="1"/>
-          </p:cNvSpPr>
-          <p:nvPr>
-            <p:ph type="subTitle" idx="5"/>
-          </p:nvPr>
-        </p:nvSpPr>
-        <p:spPr>
-          <a:xfrm>
-            <a:off x="3684051" y="2560498"/>
-            <a:ext cx="3920127" cy="430800"/>
-          </a:xfrm>
-          <a:prstGeom prst="rect">
-            <a:avLst/>
-          </a:prstGeom>
-        </p:spPr>
-        <p:txBody>
-          <a:bodyPr spcFirstLastPara="1" wrap="square" lIns="91425" tIns="91425" rIns="91425" bIns="91425" anchor="b" anchorCtr="0">
-            <a:noAutofit/>
-          </a:bodyPr>
-          <a:lstStyle/>
-          <a:p>
-            <a:pPr marL="0" lvl="0" indent="0"/>
-            <a:r>
-              <a:rPr lang="en-US" b="1" dirty="0"/>
-              <a:t>DRR</a:t>
-            </a:r>
-            <a:r>
-              <a:rPr lang="en-US" dirty="0"/>
-              <a:t> format</a:t>
-            </a:r>
-            <a:endParaRPr dirty="0"/>
-          </a:p>
-        </p:txBody>
-      </p:sp>
-      <p:sp>
-        <p:nvSpPr>
-          <p:cNvPr id="369" name="Google Shape;369;p36"/>
-          <p:cNvSpPr txBox="1">
-            <a:spLocks noGrp="1"/>
-          </p:cNvSpPr>
-          <p:nvPr>
-            <p:ph type="subTitle" idx="6"/>
-          </p:nvPr>
-        </p:nvSpPr>
-        <p:spPr>
-          <a:xfrm>
-            <a:off x="6667410" y="2571750"/>
-            <a:ext cx="2126672" cy="437722"/>
-          </a:xfrm>
-          <a:prstGeom prst="rect">
-            <a:avLst/>
-          </a:prstGeom>
-        </p:spPr>
-        <p:txBody>
-          <a:bodyPr spcFirstLastPara="1" wrap="square" lIns="91425" tIns="91425" rIns="91425" bIns="91425" anchor="b" anchorCtr="0">
-            <a:noAutofit/>
-          </a:bodyPr>
-          <a:lstStyle/>
-          <a:p>
-            <a:pPr marL="0" lvl="0" indent="0"/>
-            <a:r>
-              <a:rPr lang="en-US" dirty="0"/>
-              <a:t>In the EPL:</a:t>
-            </a:r>
-            <a:endParaRPr dirty="0"/>
-          </a:p>
-        </p:txBody>
-      </p:sp>
-      <p:sp>
-        <p:nvSpPr>
-          <p:cNvPr id="4" name="TextBox 3">
-            <a:extLst>
-              <a:ext uri="{FF2B5EF4-FFF2-40B4-BE49-F238E27FC236}">
-                <a16:creationId xmlns:a16="http://schemas.microsoft.com/office/drawing/2014/main" id="{7E18C114-67AD-193B-A72F-37933924273A}"/>
-              </a:ext>
-            </a:extLst>
-          </p:cNvPr>
-          <p:cNvSpPr txBox="1"/>
-          <p:nvPr/>
-        </p:nvSpPr>
-        <p:spPr>
-          <a:xfrm>
-            <a:off x="786907" y="1730896"/>
-            <a:ext cx="7932233" cy="307777"/>
-          </a:xfrm>
-          <a:prstGeom prst="rect">
-            <a:avLst/>
-          </a:prstGeom>
-          <a:noFill/>
-        </p:spPr>
-        <p:txBody>
-          <a:bodyPr wrap="square" rtlCol="0">
-            <a:spAutoFit/>
-          </a:bodyPr>
-          <a:lstStyle/>
-          <a:p>
-            <a:r>
-              <a:rPr lang="en-US" b="1" dirty="0">
-                <a:solidFill>
-                  <a:schemeClr val="tx1"/>
-                </a:solidFill>
-              </a:rPr>
-              <a:t>Sports scheduling is a subfield of Operations Research</a:t>
-            </a:r>
-            <a:r>
-              <a:rPr lang="en-US" dirty="0">
-                <a:solidFill>
-                  <a:schemeClr val="tx1"/>
-                </a:solidFill>
-              </a:rPr>
-              <a:t> and </a:t>
-            </a:r>
-            <a:r>
-              <a:rPr lang="en-US" b="1" dirty="0">
-                <a:solidFill>
-                  <a:schemeClr val="tx1"/>
-                </a:solidFill>
-              </a:rPr>
-              <a:t>Combinatorial Optimization</a:t>
-            </a:r>
-            <a:endParaRPr lang="en-US" dirty="0">
-              <a:solidFill>
-                <a:schemeClr val="tx1"/>
-              </a:solidFill>
-            </a:endParaRPr>
-          </a:p>
-        </p:txBody>
-      </p:sp>
-      <p:sp>
-        <p:nvSpPr>
-          <p:cNvPr id="2" name="TextBox 1"/>
-          <p:cNvSpPr txBox="1"/>
-          <p:nvPr/>
-        </p:nvSpPr>
-        <p:spPr>
-          <a:xfrm>
-            <a:off x="500338" y="2878695"/>
-            <a:ext cx="3108771" cy="1355499"/>
-          </a:xfrm>
-          <a:prstGeom prst="rect">
-            <a:avLst/>
-          </a:prstGeom>
-          <a:noFill/>
-        </p:spPr>
-        <p:txBody>
-          <a:bodyPr wrap="square" rtlCol="0">
-            <a:spAutoFit/>
-          </a:bodyPr>
-          <a:lstStyle/>
-          <a:p>
-            <a:pPr>
-              <a:lnSpc>
-                <a:spcPct val="150000"/>
-              </a:lnSpc>
-            </a:pPr>
-            <a:r>
-              <a:rPr lang="en-US" dirty="0">
-                <a:solidFill>
-                  <a:schemeClr val="tx1"/>
-                </a:solidFill>
-                <a:latin typeface="DM Sans" pitchFamily="2" charset="0"/>
-              </a:rPr>
-              <a:t>Complexity grows exponentially with:</a:t>
-            </a:r>
-          </a:p>
-          <a:p>
-            <a:pPr marL="285750" indent="-285750">
-              <a:lnSpc>
-                <a:spcPct val="150000"/>
-              </a:lnSpc>
-              <a:buClr>
-                <a:schemeClr val="tx1"/>
-              </a:buClr>
-              <a:buFont typeface="Arial" panose="020B0604020202020204" pitchFamily="34" charset="0"/>
-              <a:buChar char="•"/>
-            </a:pPr>
-            <a:r>
-              <a:rPr lang="en-US" dirty="0">
-                <a:solidFill>
-                  <a:schemeClr val="tx1"/>
-                </a:solidFill>
-                <a:latin typeface="DM Sans" pitchFamily="2" charset="0"/>
-              </a:rPr>
-              <a:t> number of teams </a:t>
-            </a:r>
-          </a:p>
-          <a:p>
-            <a:pPr marL="285750" indent="-285750">
-              <a:lnSpc>
-                <a:spcPct val="150000"/>
-              </a:lnSpc>
-              <a:buClr>
-                <a:schemeClr val="tx1"/>
-              </a:buClr>
-              <a:buFont typeface="Arial" panose="020B0604020202020204" pitchFamily="34" charset="0"/>
-              <a:buChar char="•"/>
-            </a:pPr>
-            <a:r>
-              <a:rPr lang="en-US" dirty="0">
-                <a:solidFill>
-                  <a:schemeClr val="tx1"/>
-                </a:solidFill>
-                <a:latin typeface="DM Sans" pitchFamily="2" charset="0"/>
-              </a:rPr>
-              <a:t> number of constraints </a:t>
-            </a:r>
-          </a:p>
-        </p:txBody>
-      </p:sp>
-      <p:cxnSp>
-        <p:nvCxnSpPr>
-          <p:cNvPr id="5" name="Straight Connector 4">
-            <a:extLst>
-              <a:ext uri="{FF2B5EF4-FFF2-40B4-BE49-F238E27FC236}">
-                <a16:creationId xmlns:a16="http://schemas.microsoft.com/office/drawing/2014/main" id="{FB739099-9304-A578-8F21-5FB60177D5E7}"/>
-              </a:ext>
-            </a:extLst>
-          </p:cNvPr>
-          <p:cNvCxnSpPr/>
-          <p:nvPr/>
-        </p:nvCxnSpPr>
-        <p:spPr>
-          <a:xfrm>
-            <a:off x="3337931" y="2439535"/>
-            <a:ext cx="0" cy="2426150"/>
-          </a:xfrm>
-          <a:prstGeom prst="line">
-            <a:avLst/>
-          </a:prstGeom>
-        </p:spPr>
-        <p:style>
-          <a:lnRef idx="2">
-            <a:schemeClr val="accent2"/>
-          </a:lnRef>
-          <a:fillRef idx="0">
-            <a:schemeClr val="accent2"/>
-          </a:fillRef>
-          <a:effectRef idx="1">
-            <a:schemeClr val="accent2"/>
-          </a:effectRef>
-          <a:fontRef idx="minor">
-            <a:schemeClr val="tx1"/>
-          </a:fontRef>
-        </p:style>
-      </p:cxnSp>
-      <p:cxnSp>
-        <p:nvCxnSpPr>
-          <p:cNvPr id="10" name="Straight Connector 9">
-            <a:extLst>
-              <a:ext uri="{FF2B5EF4-FFF2-40B4-BE49-F238E27FC236}">
-                <a16:creationId xmlns:a16="http://schemas.microsoft.com/office/drawing/2014/main" id="{A35CA4A5-B5F2-93A9-6329-6DADFAA83C02}"/>
-              </a:ext>
-            </a:extLst>
-          </p:cNvPr>
-          <p:cNvCxnSpPr/>
-          <p:nvPr/>
-        </p:nvCxnSpPr>
-        <p:spPr>
-          <a:xfrm>
-            <a:off x="6434178" y="2439535"/>
-            <a:ext cx="0" cy="2426150"/>
-          </a:xfrm>
-          <a:prstGeom prst="line">
-            <a:avLst/>
-          </a:prstGeom>
-        </p:spPr>
-        <p:style>
-          <a:lnRef idx="2">
-            <a:schemeClr val="accent2"/>
-          </a:lnRef>
-          <a:fillRef idx="0">
-            <a:schemeClr val="accent2"/>
-          </a:fillRef>
-          <a:effectRef idx="1">
-            <a:schemeClr val="accent2"/>
-          </a:effectRef>
-          <a:fontRef idx="minor">
-            <a:schemeClr val="tx1"/>
-          </a:fontRef>
-        </p:style>
-      </p:cxnSp>
-    </p:spTree>
   </p:cSld>
   <p:clrMapOvr>
     <a:masterClrMapping/>
@@ -36414,6 +36702,15 @@
 </file>
 
 <file path=customXml/item1.xml><?xml version="1.0" encoding="utf-8"?>
+<?mso-contentType ?>
+<FormTemplates xmlns="http://schemas.microsoft.com/sharepoint/v3/contenttype/forms">
+  <Display>DocumentLibraryForm</Display>
+  <Edit>DocumentLibraryForm</Edit>
+  <New>DocumentLibraryForm</New>
+</FormTemplates>
+</file>
+
+<file path=customXml/item2.xml><?xml version="1.0" encoding="utf-8"?>
 <ct:contentTypeSchema xmlns:ct="http://schemas.microsoft.com/office/2006/metadata/contentType" xmlns:ma="http://schemas.microsoft.com/office/2006/metadata/properties/metaAttributes" ct:_="" ma:_="" ma:contentTypeName="Document" ma:contentTypeID="0x01010058EF0F6A95660A4A8A96CF00B1CF5037" ma:contentTypeVersion="8" ma:contentTypeDescription="Create a new document." ma:contentTypeScope="" ma:versionID="07112cf381e643d660836564ada6a4e4">
   <xsd:schema xmlns:xsd="http://www.w3.org/2001/XMLSchema" xmlns:xs="http://www.w3.org/2001/XMLSchema" xmlns:p="http://schemas.microsoft.com/office/2006/metadata/properties" xmlns:ns3="9427ba3f-bf6b-4e36-982f-401b240078b5" xmlns:ns4="ed82aeb9-b910-4c50-992f-22dbdd50696f" targetNamespace="http://schemas.microsoft.com/office/2006/metadata/properties" ma:root="true" ma:fieldsID="f4d5d8ac3f0c1f50cdcd6f42d32044d8" ns3:_="" ns4:_="">
     <xsd:import namespace="9427ba3f-bf6b-4e36-982f-401b240078b5"/>
@@ -36602,15 +36899,6 @@
 </ct:contentTypeSchema>
 </file>
 
-<file path=customXml/item2.xml><?xml version="1.0" encoding="utf-8"?>
-<?mso-contentType ?>
-<FormTemplates xmlns="http://schemas.microsoft.com/sharepoint/v3/contenttype/forms">
-  <Display>DocumentLibraryForm</Display>
-  <Edit>DocumentLibraryForm</Edit>
-  <New>DocumentLibraryForm</New>
-</FormTemplates>
-</file>
-
 <file path=customXml/item3.xml><?xml version="1.0" encoding="utf-8"?>
 <p:properties xmlns:p="http://schemas.microsoft.com/office/2006/metadata/properties" xmlns:xsi="http://www.w3.org/2001/XMLSchema-instance" xmlns:pc="http://schemas.microsoft.com/office/infopath/2007/PartnerControls">
   <documentManagement>
@@ -36620,6 +36908,14 @@
 </file>
 
 <file path=customXml/itemProps1.xml><?xml version="1.0" encoding="utf-8"?>
+<ds:datastoreItem xmlns:ds="http://schemas.openxmlformats.org/officeDocument/2006/customXml" ds:itemID="{4309E11F-D857-4267-A6D9-2945B8F42689}">
+  <ds:schemaRefs>
+    <ds:schemaRef ds:uri="http://schemas.microsoft.com/sharepoint/v3/contenttype/forms"/>
+  </ds:schemaRefs>
+</ds:datastoreItem>
+</file>
+
+<file path=customXml/itemProps2.xml><?xml version="1.0" encoding="utf-8"?>
 <ds:datastoreItem xmlns:ds="http://schemas.openxmlformats.org/officeDocument/2006/customXml" ds:itemID="{97686E73-217C-4C92-91A5-4D2E68FA7146}">
   <ds:schemaRefs>
     <ds:schemaRef ds:uri="http://schemas.microsoft.com/office/2006/metadata/contentType"/>
@@ -36634,14 +36930,6 @@
     <ds:schemaRef ds:uri="http://purl.org/dc/elements/1.1/"/>
     <ds:schemaRef ds:uri="http://purl.org/dc/terms/"/>
     <ds:schemaRef ds:uri="http://schemas.microsoft.com/internal/obd"/>
-  </ds:schemaRefs>
-</ds:datastoreItem>
-</file>
-
-<file path=customXml/itemProps2.xml><?xml version="1.0" encoding="utf-8"?>
-<ds:datastoreItem xmlns:ds="http://schemas.openxmlformats.org/officeDocument/2006/customXml" ds:itemID="{4309E11F-D857-4267-A6D9-2945B8F42689}">
-  <ds:schemaRefs>
-    <ds:schemaRef ds:uri="http://schemas.microsoft.com/sharepoint/v3/contenttype/forms"/>
   </ds:schemaRefs>
 </ds:datastoreItem>
 </file>

--- a/Documentations/presentation V1.pptx
+++ b/Documentations/presentation V1.pptx
@@ -5,7 +5,7 @@
     <p:sldMasterId id="2147483674" r:id="rId4"/>
   </p:sldMasterIdLst>
   <p:notesMasterIdLst>
-    <p:notesMasterId r:id="rId27"/>
+    <p:notesMasterId r:id="rId28"/>
   </p:notesMasterIdLst>
   <p:sldIdLst>
     <p:sldId id="256" r:id="rId5"/>
@@ -28,37 +28,38 @@
     <p:sldId id="313" r:id="rId22"/>
     <p:sldId id="310" r:id="rId23"/>
     <p:sldId id="311" r:id="rId24"/>
-    <p:sldId id="257" r:id="rId25"/>
-    <p:sldId id="314" r:id="rId26"/>
+    <p:sldId id="318" r:id="rId25"/>
+    <p:sldId id="257" r:id="rId26"/>
+    <p:sldId id="314" r:id="rId27"/>
   </p:sldIdLst>
   <p:sldSz cx="9144000" cy="5143500" type="screen16x9"/>
   <p:notesSz cx="6858000" cy="9144000"/>
   <p:embeddedFontLst>
     <p:embeddedFont>
-      <p:font typeface="DM Sans" panose="020B0604020202020204" charset="0"/>
-      <p:regular r:id="rId28"/>
-      <p:bold r:id="rId29"/>
-      <p:italic r:id="rId30"/>
-      <p:boldItalic r:id="rId31"/>
+      <p:font typeface="DM Sans" pitchFamily="2" charset="0"/>
+      <p:regular r:id="rId29"/>
+      <p:bold r:id="rId30"/>
+      <p:italic r:id="rId31"/>
+      <p:boldItalic r:id="rId32"/>
     </p:embeddedFont>
     <p:embeddedFont>
       <p:font typeface="Lato" panose="020F0502020204030203" pitchFamily="34" charset="0"/>
-      <p:regular r:id="rId32"/>
-      <p:bold r:id="rId33"/>
-      <p:italic r:id="rId34"/>
-      <p:boldItalic r:id="rId35"/>
+      <p:regular r:id="rId33"/>
+      <p:bold r:id="rId34"/>
+      <p:italic r:id="rId35"/>
+      <p:boldItalic r:id="rId36"/>
     </p:embeddedFont>
     <p:embeddedFont>
       <p:font typeface="Montserrat" panose="00000500000000000000" pitchFamily="2" charset="0"/>
-      <p:regular r:id="rId36"/>
-      <p:bold r:id="rId37"/>
-      <p:italic r:id="rId38"/>
-      <p:boldItalic r:id="rId39"/>
+      <p:regular r:id="rId37"/>
+      <p:bold r:id="rId38"/>
+      <p:italic r:id="rId39"/>
+      <p:boldItalic r:id="rId40"/>
     </p:embeddedFont>
     <p:embeddedFont>
       <p:font typeface="Montserrat ExtraBold" panose="00000900000000000000" pitchFamily="2" charset="0"/>
-      <p:bold r:id="rId40"/>
-      <p:boldItalic r:id="rId41"/>
+      <p:bold r:id="rId41"/>
+      <p:boldItalic r:id="rId42"/>
     </p:embeddedFont>
   </p:embeddedFontLst>
   <p:defaultTextStyle>
@@ -2300,6 +2301,133 @@
   <p:cSld>
     <p:spTree>
       <p:nvGrpSpPr>
+        <p:cNvPr id="1" name="Shape 310">
+          <a:extLst>
+            <a:ext uri="{FF2B5EF4-FFF2-40B4-BE49-F238E27FC236}">
+              <a16:creationId xmlns:a16="http://schemas.microsoft.com/office/drawing/2014/main" id="{9747235F-1F6F-292F-B075-4D17AE6F4EDD}"/>
+            </a:ext>
+          </a:extLst>
+        </p:cNvPr>
+        <p:cNvGrpSpPr/>
+        <p:nvPr/>
+      </p:nvGrpSpPr>
+      <p:grpSpPr>
+        <a:xfrm>
+          <a:off x="0" y="0"/>
+          <a:ext cx="0" cy="0"/>
+          <a:chOff x="0" y="0"/>
+          <a:chExt cx="0" cy="0"/>
+        </a:xfrm>
+      </p:grpSpPr>
+      <p:sp>
+        <p:nvSpPr>
+          <p:cNvPr id="311" name="Google Shape;311;g54dda1946d_6_322:notes">
+            <a:extLst>
+              <a:ext uri="{FF2B5EF4-FFF2-40B4-BE49-F238E27FC236}">
+                <a16:creationId xmlns:a16="http://schemas.microsoft.com/office/drawing/2014/main" id="{B06ACC7B-CCC5-9974-CB49-DD5F6589692F}"/>
+              </a:ext>
+            </a:extLst>
+          </p:cNvPr>
+          <p:cNvSpPr>
+            <a:spLocks noGrp="1" noRot="1" noChangeAspect="1"/>
+          </p:cNvSpPr>
+          <p:nvPr>
+            <p:ph type="sldImg" idx="2"/>
+          </p:nvPr>
+        </p:nvSpPr>
+        <p:spPr>
+          <a:xfrm>
+            <a:off x="381000" y="685800"/>
+            <a:ext cx="6096000" cy="3429000"/>
+          </a:xfrm>
+          <a:custGeom>
+            <a:avLst/>
+            <a:gdLst/>
+            <a:ahLst/>
+            <a:cxnLst/>
+            <a:rect l="l" t="t" r="r" b="b"/>
+            <a:pathLst>
+              <a:path w="120000" h="120000" extrusionOk="0">
+                <a:moveTo>
+                  <a:pt x="0" y="0"/>
+                </a:moveTo>
+                <a:lnTo>
+                  <a:pt x="120000" y="0"/>
+                </a:lnTo>
+                <a:lnTo>
+                  <a:pt x="120000" y="120000"/>
+                </a:lnTo>
+                <a:lnTo>
+                  <a:pt x="0" y="120000"/>
+                </a:lnTo>
+                <a:close/>
+              </a:path>
+            </a:pathLst>
+          </a:custGeom>
+        </p:spPr>
+      </p:sp>
+      <p:sp>
+        <p:nvSpPr>
+          <p:cNvPr id="312" name="Google Shape;312;g54dda1946d_6_322:notes">
+            <a:extLst>
+              <a:ext uri="{FF2B5EF4-FFF2-40B4-BE49-F238E27FC236}">
+                <a16:creationId xmlns:a16="http://schemas.microsoft.com/office/drawing/2014/main" id="{EAB6CDA7-16E4-336B-9CAA-5CDC5817E715}"/>
+              </a:ext>
+            </a:extLst>
+          </p:cNvPr>
+          <p:cNvSpPr txBox="1">
+            <a:spLocks noGrp="1"/>
+          </p:cNvSpPr>
+          <p:nvPr>
+            <p:ph type="body" idx="1"/>
+          </p:nvPr>
+        </p:nvSpPr>
+        <p:spPr>
+          <a:xfrm>
+            <a:off x="685800" y="4343400"/>
+            <a:ext cx="5486400" cy="4114800"/>
+          </a:xfrm>
+          <a:prstGeom prst="rect">
+            <a:avLst/>
+          </a:prstGeom>
+        </p:spPr>
+        <p:txBody>
+          <a:bodyPr spcFirstLastPara="1" wrap="square" lIns="91425" tIns="91425" rIns="91425" bIns="91425" anchor="t" anchorCtr="0">
+            <a:noAutofit/>
+          </a:bodyPr>
+          <a:lstStyle/>
+          <a:p>
+            <a:pPr marL="0" lvl="0" indent="0" algn="l" rtl="0">
+              <a:spcBef>
+                <a:spcPts val="0"/>
+              </a:spcBef>
+              <a:spcAft>
+                <a:spcPts val="0"/>
+              </a:spcAft>
+              <a:buNone/>
+            </a:pPr>
+            <a:endParaRPr/>
+          </a:p>
+        </p:txBody>
+      </p:sp>
+    </p:spTree>
+    <p:extLst>
+      <p:ext uri="{BB962C8B-B14F-4D97-AF65-F5344CB8AC3E}">
+        <p14:creationId xmlns:p14="http://schemas.microsoft.com/office/powerpoint/2010/main" val="101489006"/>
+      </p:ext>
+    </p:extLst>
+  </p:cSld>
+  <p:clrMapOvr>
+    <a:masterClrMapping/>
+  </p:clrMapOvr>
+</p:notes>
+</file>
+
+<file path=ppt/notesSlides/notesSlide22.xml><?xml version="1.0" encoding="utf-8"?>
+<p:notes xmlns:a="http://schemas.openxmlformats.org/drawingml/2006/main" xmlns:r="http://schemas.openxmlformats.org/officeDocument/2006/relationships" xmlns:p="http://schemas.openxmlformats.org/presentationml/2006/main" showMasterSp="0" showMasterPhAnim="0">
+  <p:cSld>
+    <p:spTree>
+      <p:nvGrpSpPr>
         <p:cNvPr id="1" name="Shape 284"/>
         <p:cNvGrpSpPr/>
         <p:nvPr/>
@@ -2404,7 +2532,7 @@
 </p:notes>
 </file>
 
-<file path=ppt/notesSlides/notesSlide22.xml><?xml version="1.0" encoding="utf-8"?>
+<file path=ppt/notesSlides/notesSlide23.xml><?xml version="1.0" encoding="utf-8"?>
 <p:notes xmlns:a="http://schemas.openxmlformats.org/drawingml/2006/main" xmlns:r="http://schemas.openxmlformats.org/officeDocument/2006/relationships" xmlns:p="http://schemas.openxmlformats.org/presentationml/2006/main" showMasterSp="0" showMasterPhAnim="0">
   <p:cSld>
     <p:spTree>
@@ -13949,7 +14077,7 @@
               <a:rPr lang="en-US" sz="2000" b="1" dirty="0"/>
               <a:t>NP-hard problem</a:t>
             </a:r>
-            <a:endParaRPr sz="2000" dirty="0"/>
+            <a:endParaRPr sz="1000" dirty="0"/>
           </a:p>
         </p:txBody>
       </p:sp>
@@ -18002,7 +18130,7 @@
                   <a:schemeClr val="tx1"/>
                 </a:solidFill>
               </a:rPr>
-              <a:t>Stadium Sharing</a:t>
+              <a:t>Shared Resources</a:t>
             </a:r>
             <a:endParaRPr sz="2000" b="1" dirty="0">
               <a:solidFill>
@@ -18053,8 +18181,15 @@
                 </a:solidFill>
                 <a:latin typeface="DM Sans" pitchFamily="2" charset="0"/>
               </a:rPr>
-              <a:t>Unlike Europe, multiple teams share "Cairo International" and "Borg Al-Arab," creating bottlenecks</a:t>
+              <a:t>Multiple teams share "Cairo International" and "Borg Al-Arab," creating bottlenecks</a:t>
             </a:r>
+          </a:p>
+          <a:p>
+            <a:pPr lvl="0">
+              <a:lnSpc>
+                <a:spcPct val="115000"/>
+              </a:lnSpc>
+            </a:pPr>
             <a:endParaRPr dirty="0">
               <a:solidFill>
                 <a:schemeClr val="tx1"/>
@@ -18105,7 +18240,7 @@
                   <a:schemeClr val="tx1"/>
                 </a:solidFill>
               </a:rPr>
-              <a:t>CAF Uncertainty</a:t>
+              <a:t>CAF Conflict</a:t>
             </a:r>
             <a:endParaRPr sz="2000" b="1" dirty="0">
               <a:solidFill>
@@ -20250,7 +20385,7 @@
             <a:pPr marL="0" lvl="0" indent="0"/>
             <a:r>
               <a:rPr lang="en-US" dirty="0"/>
-              <a:t>KM distance between every stadium (for travel costs)</a:t>
+              <a:t>KM distance between every 2 nodes on a network (for travel costs)</a:t>
             </a:r>
             <a:endParaRPr dirty="0"/>
           </a:p>
@@ -26898,7 +27033,7 @@
             </a:pPr>
             <a:r>
               <a:rPr lang="en-US" sz="1500" b="1" dirty="0"/>
-              <a:t>Smart Blocking: </a:t>
+              <a:t>Blocking: </a:t>
             </a:r>
             <a:r>
               <a:rPr lang="en-US" sz="1500" dirty="0"/>
@@ -29522,7 +29657,7 @@
             </a:pPr>
             <a:r>
               <a:rPr lang="en-US" sz="1800" b="1" dirty="0"/>
-              <a:t>Next Phase: Formulating the Multi-Objective Integer Linear Programming (ILP) Model to generate the schedule.</a:t>
+              <a:t>Next Phase: Formulating the Integer Linear Programming (ILP) Model to generate the schedule.</a:t>
             </a:r>
             <a:endParaRPr kumimoji="0" lang="en-US" altLang="en-US" sz="1800" b="0" i="0" u="none" strike="noStrike" cap="none" normalizeH="0" baseline="0" dirty="0">
               <a:ln>
@@ -29551,6 +29686,790 @@
 </file>
 
 <file path=ppt/slides/slide21.xml><?xml version="1.0" encoding="utf-8"?>
+<p:sld xmlns:a="http://schemas.openxmlformats.org/drawingml/2006/main" xmlns:r="http://schemas.openxmlformats.org/officeDocument/2006/relationships" xmlns:p="http://schemas.openxmlformats.org/presentationml/2006/main">
+  <p:cSld>
+    <p:spTree>
+      <p:nvGrpSpPr>
+        <p:cNvPr id="1" name="Shape 313">
+          <a:extLst>
+            <a:ext uri="{FF2B5EF4-FFF2-40B4-BE49-F238E27FC236}">
+              <a16:creationId xmlns:a16="http://schemas.microsoft.com/office/drawing/2014/main" id="{C6268C87-CBD2-E48E-BBEE-2108CA5CB5EE}"/>
+            </a:ext>
+          </a:extLst>
+        </p:cNvPr>
+        <p:cNvGrpSpPr/>
+        <p:nvPr/>
+      </p:nvGrpSpPr>
+      <p:grpSpPr>
+        <a:xfrm>
+          <a:off x="0" y="0"/>
+          <a:ext cx="0" cy="0"/>
+          <a:chOff x="0" y="0"/>
+          <a:chExt cx="0" cy="0"/>
+        </a:xfrm>
+      </p:grpSpPr>
+      <p:sp>
+        <p:nvSpPr>
+          <p:cNvPr id="314" name="Google Shape;314;p32">
+            <a:extLst>
+              <a:ext uri="{FF2B5EF4-FFF2-40B4-BE49-F238E27FC236}">
+                <a16:creationId xmlns:a16="http://schemas.microsoft.com/office/drawing/2014/main" id="{422328E0-39E0-E94E-33E2-2A67E6782902}"/>
+              </a:ext>
+            </a:extLst>
+          </p:cNvPr>
+          <p:cNvSpPr txBox="1">
+            <a:spLocks noGrp="1"/>
+          </p:cNvSpPr>
+          <p:nvPr>
+            <p:ph type="title"/>
+          </p:nvPr>
+        </p:nvSpPr>
+        <p:spPr>
+          <a:xfrm>
+            <a:off x="720000" y="445025"/>
+            <a:ext cx="7704000" cy="572700"/>
+          </a:xfrm>
+          <a:prstGeom prst="rect">
+            <a:avLst/>
+          </a:prstGeom>
+        </p:spPr>
+        <p:txBody>
+          <a:bodyPr spcFirstLastPara="1" wrap="square" lIns="91425" tIns="91425" rIns="91425" bIns="91425" anchor="t" anchorCtr="0">
+            <a:noAutofit/>
+          </a:bodyPr>
+          <a:lstStyle/>
+          <a:p>
+            <a:pPr lvl="0"/>
+            <a:r>
+              <a:rPr lang="en-US" dirty="0"/>
+              <a:t>References</a:t>
+            </a:r>
+            <a:endParaRPr dirty="0"/>
+          </a:p>
+        </p:txBody>
+      </p:sp>
+      <p:graphicFrame>
+        <p:nvGraphicFramePr>
+          <p:cNvPr id="5" name="Table 4">
+            <a:extLst>
+              <a:ext uri="{FF2B5EF4-FFF2-40B4-BE49-F238E27FC236}">
+                <a16:creationId xmlns:a16="http://schemas.microsoft.com/office/drawing/2014/main" id="{8B41EDEC-0304-80B9-5928-6F85AD383B56}"/>
+              </a:ext>
+            </a:extLst>
+          </p:cNvPr>
+          <p:cNvGraphicFramePr>
+            <a:graphicFrameLocks noGrp="1"/>
+          </p:cNvGraphicFramePr>
+          <p:nvPr>
+            <p:extLst>
+              <p:ext uri="{D42A27DB-BD31-4B8C-83A1-F6EECF244321}">
+                <p14:modId xmlns:p14="http://schemas.microsoft.com/office/powerpoint/2010/main" val="4246598501"/>
+              </p:ext>
+            </p:extLst>
+          </p:nvPr>
+        </p:nvGraphicFramePr>
+        <p:xfrm>
+          <a:off x="720000" y="1152527"/>
+          <a:ext cx="7836702" cy="3049686"/>
+        </p:xfrm>
+        <a:graphic>
+          <a:graphicData uri="http://schemas.openxmlformats.org/drawingml/2006/table">
+            <a:tbl>
+              <a:tblPr firstRow="1" firstCol="1" bandRow="1"/>
+              <a:tblGrid>
+                <a:gridCol w="239005">
+                  <a:extLst>
+                    <a:ext uri="{9D8B030D-6E8A-4147-A177-3AD203B41FA5}">
+                      <a16:colId xmlns:a16="http://schemas.microsoft.com/office/drawing/2014/main" val="4294718165"/>
+                    </a:ext>
+                  </a:extLst>
+                </a:gridCol>
+                <a:gridCol w="7597697">
+                  <a:extLst>
+                    <a:ext uri="{9D8B030D-6E8A-4147-A177-3AD203B41FA5}">
+                      <a16:colId xmlns:a16="http://schemas.microsoft.com/office/drawing/2014/main" val="1349942756"/>
+                    </a:ext>
+                  </a:extLst>
+                </a:gridCol>
+              </a:tblGrid>
+              <a:tr h="508281">
+                <a:tc>
+                  <a:txBody>
+                    <a:bodyPr/>
+                    <a:lstStyle/>
+                    <a:p>
+                      <a:pPr marL="0" marR="0">
+                        <a:lnSpc>
+                          <a:spcPct val="115000"/>
+                        </a:lnSpc>
+                        <a:spcAft>
+                          <a:spcPts val="800"/>
+                        </a:spcAft>
+                        <a:buNone/>
+                      </a:pPr>
+                      <a:r>
+                        <a:rPr lang="en-US" sz="1000" b="1" dirty="0">
+                          <a:effectLst/>
+                          <a:latin typeface="DM Sans" pitchFamily="2" charset="0"/>
+                          <a:ea typeface="Calibri" panose="020F0502020204030204" pitchFamily="34" charset="0"/>
+                          <a:cs typeface="Arial" panose="020B0604020202020204" pitchFamily="34" charset="0"/>
+                        </a:rPr>
+                        <a:t>[1] </a:t>
+                      </a:r>
+                    </a:p>
+                  </a:txBody>
+                  <a:tcPr marL="6940" marR="6940" marT="6940" marB="6940">
+                    <a:lnL>
+                      <a:noFill/>
+                    </a:lnL>
+                    <a:lnR>
+                      <a:noFill/>
+                    </a:lnR>
+                    <a:lnT>
+                      <a:noFill/>
+                    </a:lnT>
+                    <a:lnB>
+                      <a:noFill/>
+                    </a:lnB>
+                    <a:noFill/>
+                  </a:tcPr>
+                </a:tc>
+                <a:tc>
+                  <a:txBody>
+                    <a:bodyPr/>
+                    <a:lstStyle/>
+                    <a:p>
+                      <a:pPr marL="0" marR="0">
+                        <a:lnSpc>
+                          <a:spcPct val="115000"/>
+                        </a:lnSpc>
+                        <a:spcAft>
+                          <a:spcPts val="800"/>
+                        </a:spcAft>
+                        <a:buNone/>
+                      </a:pPr>
+                      <a:r>
+                        <a:rPr lang="en-US" sz="1000" b="1" dirty="0">
+                          <a:effectLst/>
+                          <a:latin typeface="DM Sans" pitchFamily="2" charset="0"/>
+                          <a:ea typeface="Calibri" panose="020F0502020204030204" pitchFamily="34" charset="0"/>
+                          <a:cs typeface="Arial" panose="020B0604020202020204" pitchFamily="34" charset="0"/>
+                        </a:rPr>
+                        <a:t>R. V. Rasmussen and M. A. Trick, "Round robin scheduling – a survey," </a:t>
+                      </a:r>
+                      <a:r>
+                        <a:rPr lang="en-US" sz="1000" b="1" i="1" dirty="0">
+                          <a:effectLst/>
+                          <a:latin typeface="DM Sans" pitchFamily="2" charset="0"/>
+                          <a:ea typeface="Calibri" panose="020F0502020204030204" pitchFamily="34" charset="0"/>
+                          <a:cs typeface="Arial" panose="020B0604020202020204" pitchFamily="34" charset="0"/>
+                        </a:rPr>
+                        <a:t>European Journal of Operational Research, </a:t>
+                      </a:r>
+                      <a:r>
+                        <a:rPr lang="en-US" sz="1000" b="1" dirty="0">
+                          <a:effectLst/>
+                          <a:latin typeface="DM Sans" pitchFamily="2" charset="0"/>
+                          <a:ea typeface="Calibri" panose="020F0502020204030204" pitchFamily="34" charset="0"/>
+                          <a:cs typeface="Arial" panose="020B0604020202020204" pitchFamily="34" charset="0"/>
+                        </a:rPr>
+                        <a:t>2008. </a:t>
+                      </a:r>
+                    </a:p>
+                  </a:txBody>
+                  <a:tcPr marL="6940" marR="6940" marT="6940" marB="6940">
+                    <a:lnL>
+                      <a:noFill/>
+                    </a:lnL>
+                    <a:lnR>
+                      <a:noFill/>
+                    </a:lnR>
+                    <a:lnT>
+                      <a:noFill/>
+                    </a:lnT>
+                    <a:lnB>
+                      <a:noFill/>
+                    </a:lnB>
+                    <a:noFill/>
+                  </a:tcPr>
+                </a:tc>
+                <a:extLst>
+                  <a:ext uri="{0D108BD9-81ED-4DB2-BD59-A6C34878D82A}">
+                    <a16:rowId xmlns:a16="http://schemas.microsoft.com/office/drawing/2014/main" val="2049997458"/>
+                  </a:ext>
+                </a:extLst>
+              </a:tr>
+              <a:tr h="508281">
+                <a:tc>
+                  <a:txBody>
+                    <a:bodyPr/>
+                    <a:lstStyle/>
+                    <a:p>
+                      <a:pPr marL="0" marR="0">
+                        <a:lnSpc>
+                          <a:spcPct val="115000"/>
+                        </a:lnSpc>
+                        <a:spcAft>
+                          <a:spcPts val="800"/>
+                        </a:spcAft>
+                        <a:buNone/>
+                      </a:pPr>
+                      <a:r>
+                        <a:rPr lang="en-US" sz="1000" b="1" dirty="0">
+                          <a:effectLst/>
+                          <a:latin typeface="DM Sans" pitchFamily="2" charset="0"/>
+                          <a:ea typeface="Calibri" panose="020F0502020204030204" pitchFamily="34" charset="0"/>
+                          <a:cs typeface="Arial" panose="020B0604020202020204" pitchFamily="34" charset="0"/>
+                        </a:rPr>
+                        <a:t>[2] </a:t>
+                      </a:r>
+                    </a:p>
+                  </a:txBody>
+                  <a:tcPr marL="6940" marR="6940" marT="6940" marB="6940">
+                    <a:lnL>
+                      <a:noFill/>
+                    </a:lnL>
+                    <a:lnR>
+                      <a:noFill/>
+                    </a:lnR>
+                    <a:lnT>
+                      <a:noFill/>
+                    </a:lnT>
+                    <a:lnB>
+                      <a:noFill/>
+                    </a:lnB>
+                    <a:noFill/>
+                  </a:tcPr>
+                </a:tc>
+                <a:tc>
+                  <a:txBody>
+                    <a:bodyPr/>
+                    <a:lstStyle/>
+                    <a:p>
+                      <a:pPr marL="0" marR="0">
+                        <a:lnSpc>
+                          <a:spcPct val="115000"/>
+                        </a:lnSpc>
+                        <a:spcAft>
+                          <a:spcPts val="800"/>
+                        </a:spcAft>
+                        <a:buNone/>
+                      </a:pPr>
+                      <a:r>
+                        <a:rPr lang="en-US" sz="1000" b="1" dirty="0">
+                          <a:effectLst/>
+                          <a:latin typeface="DM Sans" pitchFamily="2" charset="0"/>
+                          <a:ea typeface="Calibri" panose="020F0502020204030204" pitchFamily="34" charset="0"/>
+                          <a:cs typeface="Arial" panose="020B0604020202020204" pitchFamily="34" charset="0"/>
+                        </a:rPr>
+                        <a:t>D. Van Bulck, D. Goossens and F. </a:t>
+                      </a:r>
+                      <a:r>
+                        <a:rPr lang="en-US" sz="1000" b="1" dirty="0" err="1">
+                          <a:effectLst/>
+                          <a:latin typeface="DM Sans" pitchFamily="2" charset="0"/>
+                          <a:ea typeface="Calibri" panose="020F0502020204030204" pitchFamily="34" charset="0"/>
+                          <a:cs typeface="Arial" panose="020B0604020202020204" pitchFamily="34" charset="0"/>
+                        </a:rPr>
+                        <a:t>Spieksma</a:t>
+                      </a:r>
+                      <a:r>
+                        <a:rPr lang="en-US" sz="1000" b="1" dirty="0">
+                          <a:effectLst/>
+                          <a:latin typeface="DM Sans" pitchFamily="2" charset="0"/>
+                          <a:ea typeface="Calibri" panose="020F0502020204030204" pitchFamily="34" charset="0"/>
+                          <a:cs typeface="Arial" panose="020B0604020202020204" pitchFamily="34" charset="0"/>
+                        </a:rPr>
+                        <a:t>, "Integer programming models for round robin tournaments," </a:t>
+                      </a:r>
+                      <a:r>
+                        <a:rPr lang="en-US" sz="1000" b="1" i="1" dirty="0">
+                          <a:effectLst/>
+                          <a:latin typeface="DM Sans" pitchFamily="2" charset="0"/>
+                          <a:ea typeface="Calibri" panose="020F0502020204030204" pitchFamily="34" charset="0"/>
+                          <a:cs typeface="Arial" panose="020B0604020202020204" pitchFamily="34" charset="0"/>
+                        </a:rPr>
+                        <a:t>European Journal of Operational Research, </a:t>
+                      </a:r>
+                      <a:r>
+                        <a:rPr lang="en-US" sz="1000" b="1" dirty="0">
+                          <a:effectLst/>
+                          <a:latin typeface="DM Sans" pitchFamily="2" charset="0"/>
+                          <a:ea typeface="Calibri" panose="020F0502020204030204" pitchFamily="34" charset="0"/>
+                          <a:cs typeface="Arial" panose="020B0604020202020204" pitchFamily="34" charset="0"/>
+                        </a:rPr>
+                        <a:t>2023. </a:t>
+                      </a:r>
+                    </a:p>
+                  </a:txBody>
+                  <a:tcPr marL="6940" marR="6940" marT="6940" marB="6940">
+                    <a:lnL>
+                      <a:noFill/>
+                    </a:lnL>
+                    <a:lnR>
+                      <a:noFill/>
+                    </a:lnR>
+                    <a:lnT>
+                      <a:noFill/>
+                    </a:lnT>
+                    <a:lnB>
+                      <a:noFill/>
+                    </a:lnB>
+                    <a:noFill/>
+                  </a:tcPr>
+                </a:tc>
+                <a:extLst>
+                  <a:ext uri="{0D108BD9-81ED-4DB2-BD59-A6C34878D82A}">
+                    <a16:rowId xmlns:a16="http://schemas.microsoft.com/office/drawing/2014/main" val="673108309"/>
+                  </a:ext>
+                </a:extLst>
+              </a:tr>
+              <a:tr h="508281">
+                <a:tc>
+                  <a:txBody>
+                    <a:bodyPr/>
+                    <a:lstStyle/>
+                    <a:p>
+                      <a:pPr marL="0" marR="0">
+                        <a:lnSpc>
+                          <a:spcPct val="115000"/>
+                        </a:lnSpc>
+                        <a:spcAft>
+                          <a:spcPts val="800"/>
+                        </a:spcAft>
+                        <a:buNone/>
+                      </a:pPr>
+                      <a:r>
+                        <a:rPr lang="en-US" sz="1000" b="1" dirty="0">
+                          <a:effectLst/>
+                          <a:latin typeface="DM Sans" pitchFamily="2" charset="0"/>
+                          <a:ea typeface="Calibri" panose="020F0502020204030204" pitchFamily="34" charset="0"/>
+                          <a:cs typeface="Arial" panose="020B0604020202020204" pitchFamily="34" charset="0"/>
+                        </a:rPr>
+                        <a:t>[3] </a:t>
+                      </a:r>
+                    </a:p>
+                  </a:txBody>
+                  <a:tcPr marL="6940" marR="6940" marT="6940" marB="6940">
+                    <a:lnL>
+                      <a:noFill/>
+                    </a:lnL>
+                    <a:lnR>
+                      <a:noFill/>
+                    </a:lnR>
+                    <a:lnT>
+                      <a:noFill/>
+                    </a:lnT>
+                    <a:lnB>
+                      <a:noFill/>
+                    </a:lnB>
+                    <a:noFill/>
+                  </a:tcPr>
+                </a:tc>
+                <a:tc>
+                  <a:txBody>
+                    <a:bodyPr/>
+                    <a:lstStyle/>
+                    <a:p>
+                      <a:pPr marL="0" marR="0">
+                        <a:lnSpc>
+                          <a:spcPct val="115000"/>
+                        </a:lnSpc>
+                        <a:spcAft>
+                          <a:spcPts val="800"/>
+                        </a:spcAft>
+                        <a:buNone/>
+                      </a:pPr>
+                      <a:r>
+                        <a:rPr lang="en-US" sz="1000" b="1" dirty="0">
+                          <a:effectLst/>
+                          <a:latin typeface="DM Sans" pitchFamily="2" charset="0"/>
+                          <a:ea typeface="Calibri" panose="020F0502020204030204" pitchFamily="34" charset="0"/>
+                          <a:cs typeface="Arial" panose="020B0604020202020204" pitchFamily="34" charset="0"/>
+                        </a:rPr>
+                        <a:t>P. Staats, "Generic Scheduling of Sports Tournaments," Utrecht University, Utrecht, 2009.</a:t>
+                      </a:r>
+                    </a:p>
+                  </a:txBody>
+                  <a:tcPr marL="6940" marR="6940" marT="6940" marB="6940">
+                    <a:lnL>
+                      <a:noFill/>
+                    </a:lnL>
+                    <a:lnR>
+                      <a:noFill/>
+                    </a:lnR>
+                    <a:lnT>
+                      <a:noFill/>
+                    </a:lnT>
+                    <a:lnB>
+                      <a:noFill/>
+                    </a:lnB>
+                    <a:noFill/>
+                  </a:tcPr>
+                </a:tc>
+                <a:extLst>
+                  <a:ext uri="{0D108BD9-81ED-4DB2-BD59-A6C34878D82A}">
+                    <a16:rowId xmlns:a16="http://schemas.microsoft.com/office/drawing/2014/main" val="2754345337"/>
+                  </a:ext>
+                </a:extLst>
+              </a:tr>
+              <a:tr h="508281">
+                <a:tc>
+                  <a:txBody>
+                    <a:bodyPr/>
+                    <a:lstStyle/>
+                    <a:p>
+                      <a:pPr marL="0" marR="0">
+                        <a:lnSpc>
+                          <a:spcPct val="115000"/>
+                        </a:lnSpc>
+                        <a:spcAft>
+                          <a:spcPts val="800"/>
+                        </a:spcAft>
+                        <a:buNone/>
+                      </a:pPr>
+                      <a:r>
+                        <a:rPr lang="en-US" sz="1000" b="1" dirty="0">
+                          <a:effectLst/>
+                          <a:latin typeface="DM Sans" pitchFamily="2" charset="0"/>
+                          <a:ea typeface="Calibri" panose="020F0502020204030204" pitchFamily="34" charset="0"/>
+                          <a:cs typeface="Arial" panose="020B0604020202020204" pitchFamily="34" charset="0"/>
+                        </a:rPr>
+                        <a:t>[4] </a:t>
+                      </a:r>
+                    </a:p>
+                  </a:txBody>
+                  <a:tcPr marL="6940" marR="6940" marT="6940" marB="6940">
+                    <a:lnL>
+                      <a:noFill/>
+                    </a:lnL>
+                    <a:lnR>
+                      <a:noFill/>
+                    </a:lnR>
+                    <a:lnT>
+                      <a:noFill/>
+                    </a:lnT>
+                    <a:lnB>
+                      <a:noFill/>
+                    </a:lnB>
+                    <a:noFill/>
+                  </a:tcPr>
+                </a:tc>
+                <a:tc>
+                  <a:txBody>
+                    <a:bodyPr/>
+                    <a:lstStyle/>
+                    <a:p>
+                      <a:pPr marL="0" marR="0">
+                        <a:lnSpc>
+                          <a:spcPct val="115000"/>
+                        </a:lnSpc>
+                        <a:spcAft>
+                          <a:spcPts val="800"/>
+                        </a:spcAft>
+                        <a:buNone/>
+                      </a:pPr>
+                      <a:r>
+                        <a:rPr lang="en-US" sz="1000" b="1" dirty="0">
+                          <a:effectLst/>
+                          <a:latin typeface="DM Sans" pitchFamily="2" charset="0"/>
+                          <a:ea typeface="Calibri" panose="020F0502020204030204" pitchFamily="34" charset="0"/>
+                          <a:cs typeface="Arial" panose="020B0604020202020204" pitchFamily="34" charset="0"/>
+                        </a:rPr>
+                        <a:t>D. R. Goossens and F. C. R. </a:t>
+                      </a:r>
+                      <a:r>
+                        <a:rPr lang="en-US" sz="1000" b="1" dirty="0" err="1">
+                          <a:effectLst/>
+                          <a:latin typeface="DM Sans" pitchFamily="2" charset="0"/>
+                          <a:ea typeface="Calibri" panose="020F0502020204030204" pitchFamily="34" charset="0"/>
+                          <a:cs typeface="Arial" panose="020B0604020202020204" pitchFamily="34" charset="0"/>
+                        </a:rPr>
+                        <a:t>Spieksma</a:t>
+                      </a:r>
+                      <a:r>
+                        <a:rPr lang="en-US" sz="1000" b="1" dirty="0">
+                          <a:effectLst/>
+                          <a:latin typeface="DM Sans" pitchFamily="2" charset="0"/>
+                          <a:ea typeface="Calibri" panose="020F0502020204030204" pitchFamily="34" charset="0"/>
+                          <a:cs typeface="Arial" panose="020B0604020202020204" pitchFamily="34" charset="0"/>
+                        </a:rPr>
+                        <a:t>, "Soccer schedules in Europe: an overview," </a:t>
+                      </a:r>
+                      <a:r>
+                        <a:rPr lang="en-US" sz="1000" b="1" i="1" dirty="0">
+                          <a:effectLst/>
+                          <a:latin typeface="DM Sans" pitchFamily="2" charset="0"/>
+                          <a:ea typeface="Calibri" panose="020F0502020204030204" pitchFamily="34" charset="0"/>
+                          <a:cs typeface="Arial" panose="020B0604020202020204" pitchFamily="34" charset="0"/>
+                        </a:rPr>
+                        <a:t>Journal of Scheduling, </a:t>
+                      </a:r>
+                      <a:r>
+                        <a:rPr lang="en-US" sz="1000" b="1" dirty="0">
+                          <a:effectLst/>
+                          <a:latin typeface="DM Sans" pitchFamily="2" charset="0"/>
+                          <a:ea typeface="Calibri" panose="020F0502020204030204" pitchFamily="34" charset="0"/>
+                          <a:cs typeface="Arial" panose="020B0604020202020204" pitchFamily="34" charset="0"/>
+                        </a:rPr>
+                        <a:t>vol. 15, no. 5, pp. 641-651, 2012. </a:t>
+                      </a:r>
+                    </a:p>
+                  </a:txBody>
+                  <a:tcPr marL="6940" marR="6940" marT="6940" marB="6940">
+                    <a:lnL>
+                      <a:noFill/>
+                    </a:lnL>
+                    <a:lnR>
+                      <a:noFill/>
+                    </a:lnR>
+                    <a:lnT>
+                      <a:noFill/>
+                    </a:lnT>
+                    <a:lnB>
+                      <a:noFill/>
+                    </a:lnB>
+                    <a:noFill/>
+                  </a:tcPr>
+                </a:tc>
+                <a:extLst>
+                  <a:ext uri="{0D108BD9-81ED-4DB2-BD59-A6C34878D82A}">
+                    <a16:rowId xmlns:a16="http://schemas.microsoft.com/office/drawing/2014/main" val="3190267609"/>
+                  </a:ext>
+                </a:extLst>
+              </a:tr>
+              <a:tr h="508281">
+                <a:tc>
+                  <a:txBody>
+                    <a:bodyPr/>
+                    <a:lstStyle/>
+                    <a:p>
+                      <a:pPr marL="0" marR="0">
+                        <a:lnSpc>
+                          <a:spcPct val="115000"/>
+                        </a:lnSpc>
+                        <a:spcAft>
+                          <a:spcPts val="800"/>
+                        </a:spcAft>
+                        <a:buNone/>
+                      </a:pPr>
+                      <a:r>
+                        <a:rPr lang="en-US" sz="1000" b="1" dirty="0">
+                          <a:effectLst/>
+                          <a:latin typeface="DM Sans" pitchFamily="2" charset="0"/>
+                          <a:ea typeface="Calibri" panose="020F0502020204030204" pitchFamily="34" charset="0"/>
+                          <a:cs typeface="Arial" panose="020B0604020202020204" pitchFamily="34" charset="0"/>
+                        </a:rPr>
+                        <a:t>[5] </a:t>
+                      </a:r>
+                    </a:p>
+                  </a:txBody>
+                  <a:tcPr marL="6940" marR="6940" marT="6940" marB="6940">
+                    <a:lnL>
+                      <a:noFill/>
+                    </a:lnL>
+                    <a:lnR>
+                      <a:noFill/>
+                    </a:lnR>
+                    <a:lnT>
+                      <a:noFill/>
+                    </a:lnT>
+                    <a:lnB>
+                      <a:noFill/>
+                    </a:lnB>
+                    <a:noFill/>
+                  </a:tcPr>
+                </a:tc>
+                <a:tc>
+                  <a:txBody>
+                    <a:bodyPr/>
+                    <a:lstStyle/>
+                    <a:p>
+                      <a:pPr marL="0" marR="0">
+                        <a:lnSpc>
+                          <a:spcPct val="115000"/>
+                        </a:lnSpc>
+                        <a:spcAft>
+                          <a:spcPts val="800"/>
+                        </a:spcAft>
+                        <a:buNone/>
+                      </a:pPr>
+                      <a:r>
+                        <a:rPr lang="en-US" sz="1000" b="1">
+                          <a:effectLst/>
+                          <a:latin typeface="DM Sans" pitchFamily="2" charset="0"/>
+                          <a:ea typeface="Calibri" panose="020F0502020204030204" pitchFamily="34" charset="0"/>
+                          <a:cs typeface="Arial" panose="020B0604020202020204" pitchFamily="34" charset="0"/>
+                        </a:rPr>
+                        <a:t>K. Easton, G. Nemhauser and M. Trick, "The traveling tournament problem description and benchmarks," </a:t>
+                      </a:r>
+                      <a:r>
+                        <a:rPr lang="en-US" sz="1000" b="1" i="1">
+                          <a:effectLst/>
+                          <a:latin typeface="DM Sans" pitchFamily="2" charset="0"/>
+                          <a:ea typeface="Calibri" panose="020F0502020204030204" pitchFamily="34" charset="0"/>
+                          <a:cs typeface="Arial" panose="020B0604020202020204" pitchFamily="34" charset="0"/>
+                        </a:rPr>
+                        <a:t>Principles and Practice of Constraint Programming, </a:t>
+                      </a:r>
+                      <a:r>
+                        <a:rPr lang="en-US" sz="1000" b="1">
+                          <a:effectLst/>
+                          <a:latin typeface="DM Sans" pitchFamily="2" charset="0"/>
+                          <a:ea typeface="Calibri" panose="020F0502020204030204" pitchFamily="34" charset="0"/>
+                          <a:cs typeface="Arial" panose="020B0604020202020204" pitchFamily="34" charset="0"/>
+                        </a:rPr>
+                        <a:t>pp. 580-584, 2001. </a:t>
+                      </a:r>
+                    </a:p>
+                  </a:txBody>
+                  <a:tcPr marL="6940" marR="6940" marT="6940" marB="6940">
+                    <a:lnL>
+                      <a:noFill/>
+                    </a:lnL>
+                    <a:lnR>
+                      <a:noFill/>
+                    </a:lnR>
+                    <a:lnT>
+                      <a:noFill/>
+                    </a:lnT>
+                    <a:lnB>
+                      <a:noFill/>
+                    </a:lnB>
+                    <a:noFill/>
+                  </a:tcPr>
+                </a:tc>
+                <a:extLst>
+                  <a:ext uri="{0D108BD9-81ED-4DB2-BD59-A6C34878D82A}">
+                    <a16:rowId xmlns:a16="http://schemas.microsoft.com/office/drawing/2014/main" val="1684665921"/>
+                  </a:ext>
+                </a:extLst>
+              </a:tr>
+              <a:tr h="508281">
+                <a:tc>
+                  <a:txBody>
+                    <a:bodyPr/>
+                    <a:lstStyle/>
+                    <a:p>
+                      <a:pPr marL="0" marR="0">
+                        <a:lnSpc>
+                          <a:spcPct val="115000"/>
+                        </a:lnSpc>
+                        <a:spcAft>
+                          <a:spcPts val="800"/>
+                        </a:spcAft>
+                        <a:buNone/>
+                      </a:pPr>
+                      <a:r>
+                        <a:rPr lang="en-US" sz="1000" b="1" dirty="0">
+                          <a:effectLst/>
+                          <a:latin typeface="DM Sans" pitchFamily="2" charset="0"/>
+                          <a:ea typeface="Calibri" panose="020F0502020204030204" pitchFamily="34" charset="0"/>
+                          <a:cs typeface="Arial" panose="020B0604020202020204" pitchFamily="34" charset="0"/>
+                        </a:rPr>
+                        <a:t>[6] </a:t>
+                      </a:r>
+                    </a:p>
+                  </a:txBody>
+                  <a:tcPr marL="6940" marR="6940" marT="6940" marB="6940">
+                    <a:lnL>
+                      <a:noFill/>
+                    </a:lnL>
+                    <a:lnR>
+                      <a:noFill/>
+                    </a:lnR>
+                    <a:lnT>
+                      <a:noFill/>
+                    </a:lnT>
+                    <a:lnB>
+                      <a:noFill/>
+                    </a:lnB>
+                    <a:noFill/>
+                  </a:tcPr>
+                </a:tc>
+                <a:tc>
+                  <a:txBody>
+                    <a:bodyPr/>
+                    <a:lstStyle/>
+                    <a:p>
+                      <a:pPr marL="0" marR="0">
+                        <a:lnSpc>
+                          <a:spcPct val="115000"/>
+                        </a:lnSpc>
+                        <a:spcAft>
+                          <a:spcPts val="800"/>
+                        </a:spcAft>
+                        <a:buNone/>
+                      </a:pPr>
+                      <a:r>
+                        <a:rPr lang="en-US" sz="1000" b="1" dirty="0">
+                          <a:effectLst/>
+                          <a:latin typeface="DM Sans" pitchFamily="2" charset="0"/>
+                          <a:ea typeface="Calibri" panose="020F0502020204030204" pitchFamily="34" charset="0"/>
+                          <a:cs typeface="Arial" panose="020B0604020202020204" pitchFamily="34" charset="0"/>
+                        </a:rPr>
+                        <a:t>G. Durán, M. Guajardo and J. Wolf-Yadlin, "Scheduling the Chilean soccer league by integer programming," </a:t>
+                      </a:r>
+                      <a:r>
+                        <a:rPr lang="en-US" sz="1000" b="1" i="1" dirty="0">
+                          <a:effectLst/>
+                          <a:latin typeface="DM Sans" pitchFamily="2" charset="0"/>
+                          <a:ea typeface="Calibri" panose="020F0502020204030204" pitchFamily="34" charset="0"/>
+                          <a:cs typeface="Arial" panose="020B0604020202020204" pitchFamily="34" charset="0"/>
+                        </a:rPr>
+                        <a:t>Interfaces, </a:t>
+                      </a:r>
+                      <a:r>
+                        <a:rPr lang="en-US" sz="1000" b="1" dirty="0">
+                          <a:effectLst/>
+                          <a:latin typeface="DM Sans" pitchFamily="2" charset="0"/>
+                          <a:ea typeface="Calibri" panose="020F0502020204030204" pitchFamily="34" charset="0"/>
+                          <a:cs typeface="Arial" panose="020B0604020202020204" pitchFamily="34" charset="0"/>
+                        </a:rPr>
+                        <a:t>vol. 37, no. 6, pp. 539-552, 2007. </a:t>
+                      </a:r>
+                    </a:p>
+                  </a:txBody>
+                  <a:tcPr marL="6940" marR="6940" marT="6940" marB="6940">
+                    <a:lnL>
+                      <a:noFill/>
+                    </a:lnL>
+                    <a:lnR>
+                      <a:noFill/>
+                    </a:lnR>
+                    <a:lnT>
+                      <a:noFill/>
+                    </a:lnT>
+                    <a:lnB>
+                      <a:noFill/>
+                    </a:lnB>
+                    <a:noFill/>
+                  </a:tcPr>
+                </a:tc>
+                <a:extLst>
+                  <a:ext uri="{0D108BD9-81ED-4DB2-BD59-A6C34878D82A}">
+                    <a16:rowId xmlns:a16="http://schemas.microsoft.com/office/drawing/2014/main" val="3484291916"/>
+                  </a:ext>
+                </a:extLst>
+              </a:tr>
+            </a:tbl>
+          </a:graphicData>
+        </a:graphic>
+      </p:graphicFrame>
+    </p:spTree>
+    <p:extLst>
+      <p:ext uri="{BB962C8B-B14F-4D97-AF65-F5344CB8AC3E}">
+        <p14:creationId xmlns:p14="http://schemas.microsoft.com/office/powerpoint/2010/main" val="83040034"/>
+      </p:ext>
+    </p:extLst>
+  </p:cSld>
+  <p:clrMapOvr>
+    <a:masterClrMapping/>
+  </p:clrMapOvr>
+</p:sld>
+</file>
+
+<file path=ppt/slides/slide22.xml><?xml version="1.0" encoding="utf-8"?>
 <p:sld xmlns:a="http://schemas.openxmlformats.org/drawingml/2006/main" xmlns:r="http://schemas.openxmlformats.org/officeDocument/2006/relationships" xmlns:p="http://schemas.openxmlformats.org/presentationml/2006/main">
   <p:cSld>
     <p:spTree>
@@ -30721,7 +31640,7 @@
 </p:sld>
 </file>
 
-<file path=ppt/slides/slide22.xml><?xml version="1.0" encoding="utf-8"?>
+<file path=ppt/slides/slide23.xml><?xml version="1.0" encoding="utf-8"?>
 <p:sld xmlns:a="http://schemas.openxmlformats.org/drawingml/2006/main" xmlns:r="http://schemas.openxmlformats.org/officeDocument/2006/relationships" xmlns:p="http://schemas.openxmlformats.org/presentationml/2006/main">
   <p:cSld>
     <p:bg>
@@ -30910,7 +31829,7 @@
             <a:pPr lvl="0"/>
             <a:r>
               <a:rPr lang="en-US" dirty="0"/>
-              <a:t>The Origin Story </a:t>
+              <a:t>The origin of the story </a:t>
             </a:r>
             <a:endParaRPr dirty="0"/>
           </a:p>
@@ -30934,8 +31853,8 @@
         </p:nvSpPr>
         <p:spPr bwMode="auto">
           <a:xfrm>
-            <a:off x="720000" y="471175"/>
-            <a:ext cx="8050620" cy="4201150"/>
+            <a:off x="512956" y="866657"/>
+            <a:ext cx="8302269" cy="3831818"/>
           </a:xfrm>
           <a:prstGeom prst="rect">
             <a:avLst/>
@@ -30983,7 +31902,7 @@
           </a:bodyPr>
           <a:lstStyle/>
           <a:p>
-            <a:pPr marL="285750" marR="0" lvl="0" indent="-285750" algn="l" defTabSz="914400" rtl="0" eaLnBrk="0" fontAlgn="base" latinLnBrk="0" hangingPunct="0">
+            <a:pPr marL="0" marR="0" lvl="0" indent="0" algn="l" defTabSz="914400" rtl="0" eaLnBrk="0" fontAlgn="base" latinLnBrk="0" hangingPunct="0">
               <a:lnSpc>
                 <a:spcPct val="150000"/>
               </a:lnSpc>
@@ -30995,8 +31914,6 @@
               </a:spcAft>
               <a:buClrTx/>
               <a:buSzTx/>
-              <a:buFont typeface="Arial" panose="020B0604020202020204" pitchFamily="34" charset="0"/>
-              <a:buChar char="•"/>
               <a:tabLst/>
             </a:pPr>
             <a:endParaRPr kumimoji="0" lang="en-US" altLang="en-US" sz="1600" b="1" i="0" u="none" strike="noStrike" cap="none" normalizeH="0" baseline="0" dirty="0">
@@ -31011,31 +31928,7 @@
             </a:endParaRPr>
           </a:p>
           <a:p>
-            <a:pPr marL="285750" marR="0" lvl="0" indent="-285750" algn="l" defTabSz="914400" rtl="0" eaLnBrk="0" fontAlgn="base" latinLnBrk="0" hangingPunct="0">
-              <a:lnSpc>
-                <a:spcPct val="150000"/>
-              </a:lnSpc>
-              <a:spcBef>
-                <a:spcPct val="0"/>
-              </a:spcBef>
-              <a:spcAft>
-                <a:spcPct val="0"/>
-              </a:spcAft>
-              <a:buClrTx/>
-              <a:buSzTx/>
-              <a:buFont typeface="Arial" panose="020B0604020202020204" pitchFamily="34" charset="0"/>
-              <a:buChar char="•"/>
-              <a:tabLst/>
-            </a:pPr>
-            <a:endParaRPr lang="en-US" altLang="en-US" sz="1600" b="1" dirty="0">
-              <a:solidFill>
-                <a:schemeClr val="tx1"/>
-              </a:solidFill>
-              <a:latin typeface="DM Sans" pitchFamily="2" charset="0"/>
-            </a:endParaRPr>
-          </a:p>
-          <a:p>
-            <a:pPr marL="285750" marR="0" lvl="0" indent="-285750" algn="l" defTabSz="914400" rtl="0" eaLnBrk="0" fontAlgn="base" latinLnBrk="0" hangingPunct="0">
+            <a:pPr marL="285750" marR="0" lvl="0" indent="-285750" algn="l" defTabSz="914400" eaLnBrk="0" fontAlgn="base" latinLnBrk="0" hangingPunct="0">
               <a:lnSpc>
                 <a:spcPct val="150000"/>
               </a:lnSpc>
@@ -31052,35 +31945,14 @@
               <a:tabLst/>
             </a:pPr>
             <a:r>
-              <a:rPr kumimoji="0" lang="en-US" altLang="en-US" sz="1600" b="1" i="0" u="none" strike="noStrike" cap="none" normalizeH="0" baseline="0" dirty="0">
-                <a:ln>
-                  <a:noFill/>
-                </a:ln>
+              <a:rPr lang="en-US" altLang="en-US" sz="1600" b="1" dirty="0">
                 <a:solidFill>
                   <a:schemeClr val="tx1"/>
                 </a:solidFill>
-                <a:effectLst/>
                 <a:latin typeface="DM Sans" pitchFamily="2" charset="0"/>
               </a:rPr>
-              <a:t>The instability began during the 2018/2019 season, triggered by Egypt's emergency hosting of the 2019 AFCON in June.</a:t>
+              <a:t>For years, league scheduling relied on manual planning, quietly accumulating issues that became impossible to ignore during Egypt’s emergency hosting of AFCON 2019.</a:t>
             </a:r>
-          </a:p>
-          <a:p>
-            <a:pPr marL="742950" lvl="1" indent="-285750" algn="l" eaLnBrk="0" fontAlgn="base" hangingPunct="0">
-              <a:lnSpc>
-                <a:spcPct val="150000"/>
-              </a:lnSpc>
-              <a:spcBef>
-                <a:spcPct val="0"/>
-              </a:spcBef>
-              <a:spcAft>
-                <a:spcPct val="0"/>
-              </a:spcAft>
-              <a:buClrTx/>
-              <a:buSzTx/>
-              <a:buFont typeface="Wingdings" panose="05000000000000000000" pitchFamily="2" charset="2"/>
-              <a:buChar char="Ø"/>
-            </a:pPr>
             <a:r>
               <a:rPr kumimoji="0" lang="en-US" altLang="en-US" sz="1600" b="1" i="0" u="none" strike="noStrike" cap="none" normalizeH="0" baseline="0" dirty="0">
                 <a:ln>
@@ -32153,7 +33025,7 @@
                 <a:effectLst/>
                 <a:latin typeface="DM Sans" panose="020B0604020202020204" charset="0"/>
               </a:rPr>
-              <a:t>This chart illustrates the 2020/2021 crisis peak, comparing the disparity in matches played by five teams at the same point in the season.</a:t>
+              <a:t>This chart illustrates the 2020/2021 problem’s peak, comparing the disparity in matches played by five teams at the same point in the season.</a:t>
             </a:r>
             <a:endParaRPr lang="en-US" sz="1600" b="1" dirty="0">
               <a:solidFill>
@@ -35064,7 +35936,7 @@
         <p:spPr>
           <a:xfrm>
             <a:off x="1024796" y="1439100"/>
-            <a:ext cx="5246463" cy="442500"/>
+            <a:ext cx="6401916" cy="442500"/>
           </a:xfrm>
           <a:prstGeom prst="roundRect">
             <a:avLst>
@@ -35092,6 +35964,7 @@
                 <a:solidFill>
                   <a:schemeClr val="tx1"/>
                 </a:solidFill>
+                <a:latin typeface="Montserrat" panose="00000500000000000000" pitchFamily="2" charset="0"/>
               </a:rPr>
               <a:t>An Optimization-Based System.</a:t>
             </a:r>
@@ -35099,7 +35972,7 @@
               <a:solidFill>
                 <a:schemeClr val="tx1"/>
               </a:solidFill>
-              <a:latin typeface="Montserrat ExtraBold"/>
+              <a:latin typeface="Montserrat" panose="00000500000000000000" pitchFamily="2" charset="0"/>
               <a:ea typeface="Montserrat ExtraBold"/>
               <a:cs typeface="Montserrat ExtraBold"/>
               <a:sym typeface="Montserrat ExtraBold"/>
@@ -35144,6 +36017,7 @@
                 <a:solidFill>
                   <a:schemeClr val="tx1"/>
                 </a:solidFill>
+                <a:latin typeface="Montserrat" panose="00000500000000000000" pitchFamily="2" charset="0"/>
               </a:rPr>
               <a:t>Input</a:t>
             </a:r>
@@ -35151,7 +36025,7 @@
               <a:solidFill>
                 <a:schemeClr val="tx1"/>
               </a:solidFill>
-              <a:latin typeface="Montserrat ExtraBold"/>
+              <a:latin typeface="Montserrat" panose="00000500000000000000" pitchFamily="2" charset="0"/>
               <a:ea typeface="Montserrat ExtraBold"/>
               <a:cs typeface="Montserrat ExtraBold"/>
               <a:sym typeface="Montserrat ExtraBold"/>
@@ -35247,14 +36121,15 @@
                 <a:solidFill>
                   <a:schemeClr val="tx1"/>
                 </a:solidFill>
+                <a:latin typeface="Montserrat" panose="00000500000000000000" pitchFamily="2" charset="0"/>
               </a:rPr>
-              <a:t>Engine</a:t>
+              <a:t>Model</a:t>
             </a:r>
             <a:endParaRPr sz="2200" b="1" dirty="0">
               <a:solidFill>
                 <a:schemeClr val="tx1"/>
               </a:solidFill>
-              <a:latin typeface="Montserrat ExtraBold"/>
+              <a:latin typeface="Montserrat" panose="00000500000000000000" pitchFamily="2" charset="0"/>
               <a:ea typeface="Montserrat ExtraBold"/>
               <a:cs typeface="Montserrat ExtraBold"/>
               <a:sym typeface="Montserrat ExtraBold"/>
@@ -35350,6 +36225,7 @@
                 <a:solidFill>
                   <a:schemeClr val="tx1"/>
                 </a:solidFill>
+                <a:latin typeface="Montserrat" panose="00000500000000000000" pitchFamily="2" charset="0"/>
               </a:rPr>
               <a:t>Output</a:t>
             </a:r>
@@ -35357,7 +36233,7 @@
               <a:solidFill>
                 <a:schemeClr val="tx1"/>
               </a:solidFill>
-              <a:latin typeface="Montserrat ExtraBold"/>
+              <a:latin typeface="Montserrat" panose="00000500000000000000" pitchFamily="2" charset="0"/>
               <a:ea typeface="Montserrat ExtraBold"/>
               <a:cs typeface="Montserrat ExtraBold"/>
               <a:sym typeface="Montserrat ExtraBold"/>
@@ -35401,7 +36277,7 @@
                   <a:schemeClr val="tx1"/>
                 </a:solidFill>
               </a:rPr>
-              <a:t>An optimal schedule that balances efficiency and fairness.</a:t>
+              <a:t>An efficient schedule that balances efficiency and fairness.</a:t>
             </a:r>
             <a:endParaRPr dirty="0">
               <a:solidFill>
@@ -36702,12 +37578,11 @@
 </file>
 
 <file path=customXml/item1.xml><?xml version="1.0" encoding="utf-8"?>
-<?mso-contentType ?>
-<FormTemplates xmlns="http://schemas.microsoft.com/sharepoint/v3/contenttype/forms">
-  <Display>DocumentLibraryForm</Display>
-  <Edit>DocumentLibraryForm</Edit>
-  <New>DocumentLibraryForm</New>
-</FormTemplates>
+<p:properties xmlns:p="http://schemas.microsoft.com/office/2006/metadata/properties" xmlns:xsi="http://www.w3.org/2001/XMLSchema-instance" xmlns:pc="http://schemas.microsoft.com/office/infopath/2007/PartnerControls">
+  <documentManagement>
+    <_activity xmlns="9427ba3f-bf6b-4e36-982f-401b240078b5" xsi:nil="true"/>
+  </documentManagement>
+</p:properties>
 </file>
 
 <file path=customXml/item2.xml><?xml version="1.0" encoding="utf-8"?>
@@ -36900,17 +37775,27 @@
 </file>
 
 <file path=customXml/item3.xml><?xml version="1.0" encoding="utf-8"?>
-<p:properties xmlns:p="http://schemas.microsoft.com/office/2006/metadata/properties" xmlns:xsi="http://www.w3.org/2001/XMLSchema-instance" xmlns:pc="http://schemas.microsoft.com/office/infopath/2007/PartnerControls">
-  <documentManagement>
-    <_activity xmlns="9427ba3f-bf6b-4e36-982f-401b240078b5" xsi:nil="true"/>
-  </documentManagement>
-</p:properties>
+<?mso-contentType ?>
+<FormTemplates xmlns="http://schemas.microsoft.com/sharepoint/v3/contenttype/forms">
+  <Display>DocumentLibraryForm</Display>
+  <Edit>DocumentLibraryForm</Edit>
+  <New>DocumentLibraryForm</New>
+</FormTemplates>
 </file>
 
 <file path=customXml/itemProps1.xml><?xml version="1.0" encoding="utf-8"?>
-<ds:datastoreItem xmlns:ds="http://schemas.openxmlformats.org/officeDocument/2006/customXml" ds:itemID="{4309E11F-D857-4267-A6D9-2945B8F42689}">
+<ds:datastoreItem xmlns:ds="http://schemas.openxmlformats.org/officeDocument/2006/customXml" ds:itemID="{672E6D98-677C-41B8-8A0A-E214B4F1B9ED}">
   <ds:schemaRefs>
-    <ds:schemaRef ds:uri="http://schemas.microsoft.com/sharepoint/v3/contenttype/forms"/>
+    <ds:schemaRef ds:uri="http://schemas.openxmlformats.org/package/2006/metadata/core-properties"/>
+    <ds:schemaRef ds:uri="http://purl.org/dc/dcmitype/"/>
+    <ds:schemaRef ds:uri="http://schemas.microsoft.com/office/2006/metadata/properties"/>
+    <ds:schemaRef ds:uri="http://purl.org/dc/elements/1.1/"/>
+    <ds:schemaRef ds:uri="9427ba3f-bf6b-4e36-982f-401b240078b5"/>
+    <ds:schemaRef ds:uri="http://schemas.microsoft.com/office/2006/documentManagement/types"/>
+    <ds:schemaRef ds:uri="ed82aeb9-b910-4c50-992f-22dbdd50696f"/>
+    <ds:schemaRef ds:uri="http://www.w3.org/XML/1998/namespace"/>
+    <ds:schemaRef ds:uri="http://schemas.microsoft.com/office/infopath/2007/PartnerControls"/>
+    <ds:schemaRef ds:uri="http://purl.org/dc/terms/"/>
   </ds:schemaRefs>
 </ds:datastoreItem>
 </file>
@@ -36935,18 +37820,9 @@
 </file>
 
 <file path=customXml/itemProps3.xml><?xml version="1.0" encoding="utf-8"?>
-<ds:datastoreItem xmlns:ds="http://schemas.openxmlformats.org/officeDocument/2006/customXml" ds:itemID="{672E6D98-677C-41B8-8A0A-E214B4F1B9ED}">
+<ds:datastoreItem xmlns:ds="http://schemas.openxmlformats.org/officeDocument/2006/customXml" ds:itemID="{4309E11F-D857-4267-A6D9-2945B8F42689}">
   <ds:schemaRefs>
-    <ds:schemaRef ds:uri="http://schemas.openxmlformats.org/package/2006/metadata/core-properties"/>
-    <ds:schemaRef ds:uri="http://purl.org/dc/dcmitype/"/>
-    <ds:schemaRef ds:uri="http://schemas.microsoft.com/office/2006/metadata/properties"/>
-    <ds:schemaRef ds:uri="http://purl.org/dc/elements/1.1/"/>
-    <ds:schemaRef ds:uri="9427ba3f-bf6b-4e36-982f-401b240078b5"/>
-    <ds:schemaRef ds:uri="http://schemas.microsoft.com/office/2006/documentManagement/types"/>
-    <ds:schemaRef ds:uri="ed82aeb9-b910-4c50-992f-22dbdd50696f"/>
-    <ds:schemaRef ds:uri="http://www.w3.org/XML/1998/namespace"/>
-    <ds:schemaRef ds:uri="http://schemas.microsoft.com/office/infopath/2007/PartnerControls"/>
-    <ds:schemaRef ds:uri="http://purl.org/dc/terms/"/>
+    <ds:schemaRef ds:uri="http://schemas.microsoft.com/sharepoint/v3/contenttype/forms"/>
   </ds:schemaRefs>
 </ds:datastoreItem>
 </file>
--- a/Documentations/presentation V1.pptx
+++ b/Documentations/presentation V1.pptx
@@ -13740,6 +13740,272 @@
   <p:clrMapOvr>
     <a:masterClrMapping/>
   </p:clrMapOvr>
+  <mc:AlternateContent xmlns:mc="http://schemas.openxmlformats.org/markup-compatibility/2006">
+    <mc:Choice xmlns:p14="http://schemas.microsoft.com/office/powerpoint/2010/main" Requires="p14">
+      <p:transition spd="slow" p14:dur="800">
+        <p14:flythrough/>
+      </p:transition>
+    </mc:Choice>
+    <mc:Fallback>
+      <p:transition spd="slow">
+        <p:fade/>
+      </p:transition>
+    </mc:Fallback>
+  </mc:AlternateContent>
+  <mc:AlternateContent xmlns:mc="http://schemas.openxmlformats.org/markup-compatibility/2006">
+    <mc:Choice xmlns:p14="http://schemas.microsoft.com/office/powerpoint/2010/main" Requires="p14">
+      <p:timing>
+        <p:tnLst>
+          <p:par>
+            <p:cTn id="1" dur="indefinite" restart="never" nodeType="tmRoot">
+              <p:childTnLst>
+                <p:seq concurrent="1" nextAc="seek">
+                  <p:cTn id="2" dur="indefinite" nodeType="mainSeq">
+                    <p:childTnLst>
+                      <p:par>
+                        <p:cTn id="3" fill="hold">
+                          <p:stCondLst>
+                            <p:cond delay="indefinite"/>
+                            <p:cond evt="onBegin" delay="0">
+                              <p:tn val="2"/>
+                            </p:cond>
+                          </p:stCondLst>
+                          <p:childTnLst>
+                            <p:par>
+                              <p:cTn id="4" fill="hold">
+                                <p:stCondLst>
+                                  <p:cond delay="0"/>
+                                </p:stCondLst>
+                                <p:childTnLst>
+                                  <p:par>
+                                    <p:cTn id="5" presetID="2" presetClass="entr" presetSubtype="1" accel="60000" fill="hold" nodeType="withEffect" p14:presetBounceEnd="60000">
+                                      <p:stCondLst>
+                                        <p:cond delay="0"/>
+                                      </p:stCondLst>
+                                      <p:childTnLst>
+                                        <p:set>
+                                          <p:cBhvr>
+                                            <p:cTn id="6" dur="1" fill="hold">
+                                              <p:stCondLst>
+                                                <p:cond delay="0"/>
+                                              </p:stCondLst>
+                                            </p:cTn>
+                                            <p:tgtEl>
+                                              <p:spTgt spid="6"/>
+                                            </p:tgtEl>
+                                            <p:attrNameLst>
+                                              <p:attrName>style.visibility</p:attrName>
+                                            </p:attrNameLst>
+                                          </p:cBhvr>
+                                          <p:to>
+                                            <p:strVal val="visible"/>
+                                          </p:to>
+                                        </p:set>
+                                        <p:anim calcmode="lin" valueType="num" p14:bounceEnd="60000">
+                                          <p:cBhvr additive="base">
+                                            <p:cTn id="7" dur="500" fill="hold"/>
+                                            <p:tgtEl>
+                                              <p:spTgt spid="6"/>
+                                            </p:tgtEl>
+                                            <p:attrNameLst>
+                                              <p:attrName>ppt_x</p:attrName>
+                                            </p:attrNameLst>
+                                          </p:cBhvr>
+                                          <p:tavLst>
+                                            <p:tav tm="0">
+                                              <p:val>
+                                                <p:strVal val="#ppt_x"/>
+                                              </p:val>
+                                            </p:tav>
+                                            <p:tav tm="100000">
+                                              <p:val>
+                                                <p:strVal val="#ppt_x"/>
+                                              </p:val>
+                                            </p:tav>
+                                          </p:tavLst>
+                                        </p:anim>
+                                        <p:anim calcmode="lin" valueType="num" p14:bounceEnd="60000">
+                                          <p:cBhvr additive="base">
+                                            <p:cTn id="8" dur="500" fill="hold"/>
+                                            <p:tgtEl>
+                                              <p:spTgt spid="6"/>
+                                            </p:tgtEl>
+                                            <p:attrNameLst>
+                                              <p:attrName>ppt_y</p:attrName>
+                                            </p:attrNameLst>
+                                          </p:cBhvr>
+                                          <p:tavLst>
+                                            <p:tav tm="0">
+                                              <p:val>
+                                                <p:strVal val="0-#ppt_h/2"/>
+                                              </p:val>
+                                            </p:tav>
+                                            <p:tav tm="100000">
+                                              <p:val>
+                                                <p:strVal val="#ppt_y"/>
+                                              </p:val>
+                                            </p:tav>
+                                          </p:tavLst>
+                                        </p:anim>
+                                      </p:childTnLst>
+                                    </p:cTn>
+                                  </p:par>
+                                </p:childTnLst>
+                              </p:cTn>
+                            </p:par>
+                          </p:childTnLst>
+                        </p:cTn>
+                      </p:par>
+                    </p:childTnLst>
+                  </p:cTn>
+                  <p:prevCondLst>
+                    <p:cond evt="onPrev" delay="0">
+                      <p:tgtEl>
+                        <p:sldTgt/>
+                      </p:tgtEl>
+                    </p:cond>
+                  </p:prevCondLst>
+                  <p:nextCondLst>
+                    <p:cond evt="onNext" delay="0">
+                      <p:tgtEl>
+                        <p:sldTgt/>
+                      </p:tgtEl>
+                    </p:cond>
+                  </p:nextCondLst>
+                </p:seq>
+              </p:childTnLst>
+            </p:cTn>
+          </p:par>
+        </p:tnLst>
+      </p:timing>
+    </mc:Choice>
+    <mc:Fallback>
+      <p:timing>
+        <p:tnLst>
+          <p:par>
+            <p:cTn id="1" dur="indefinite" restart="never" nodeType="tmRoot">
+              <p:childTnLst>
+                <p:seq concurrent="1" nextAc="seek">
+                  <p:cTn id="2" dur="indefinite" nodeType="mainSeq">
+                    <p:childTnLst>
+                      <p:par>
+                        <p:cTn id="3" fill="hold">
+                          <p:stCondLst>
+                            <p:cond delay="indefinite"/>
+                            <p:cond evt="onBegin" delay="0">
+                              <p:tn val="2"/>
+                            </p:cond>
+                          </p:stCondLst>
+                          <p:childTnLst>
+                            <p:par>
+                              <p:cTn id="4" fill="hold">
+                                <p:stCondLst>
+                                  <p:cond delay="0"/>
+                                </p:stCondLst>
+                                <p:childTnLst>
+                                  <p:par>
+                                    <p:cTn id="5" presetID="2" presetClass="entr" presetSubtype="1" accel="60000" fill="hold" nodeType="withEffect">
+                                      <p:stCondLst>
+                                        <p:cond delay="0"/>
+                                      </p:stCondLst>
+                                      <p:childTnLst>
+                                        <p:set>
+                                          <p:cBhvr>
+                                            <p:cTn id="6" dur="1" fill="hold">
+                                              <p:stCondLst>
+                                                <p:cond delay="0"/>
+                                              </p:stCondLst>
+                                            </p:cTn>
+                                            <p:tgtEl>
+                                              <p:spTgt spid="6"/>
+                                            </p:tgtEl>
+                                            <p:attrNameLst>
+                                              <p:attrName>style.visibility</p:attrName>
+                                            </p:attrNameLst>
+                                          </p:cBhvr>
+                                          <p:to>
+                                            <p:strVal val="visible"/>
+                                          </p:to>
+                                        </p:set>
+                                        <p:anim calcmode="lin" valueType="num">
+                                          <p:cBhvr additive="base">
+                                            <p:cTn id="7" dur="500" fill="hold"/>
+                                            <p:tgtEl>
+                                              <p:spTgt spid="6"/>
+                                            </p:tgtEl>
+                                            <p:attrNameLst>
+                                              <p:attrName>ppt_x</p:attrName>
+                                            </p:attrNameLst>
+                                          </p:cBhvr>
+                                          <p:tavLst>
+                                            <p:tav tm="0">
+                                              <p:val>
+                                                <p:strVal val="#ppt_x"/>
+                                              </p:val>
+                                            </p:tav>
+                                            <p:tav tm="100000">
+                                              <p:val>
+                                                <p:strVal val="#ppt_x"/>
+                                              </p:val>
+                                            </p:tav>
+                                          </p:tavLst>
+                                        </p:anim>
+                                        <p:anim calcmode="lin" valueType="num">
+                                          <p:cBhvr additive="base">
+                                            <p:cTn id="8" dur="500" fill="hold"/>
+                                            <p:tgtEl>
+                                              <p:spTgt spid="6"/>
+                                            </p:tgtEl>
+                                            <p:attrNameLst>
+                                              <p:attrName>ppt_y</p:attrName>
+                                            </p:attrNameLst>
+                                          </p:cBhvr>
+                                          <p:tavLst>
+                                            <p:tav tm="0">
+                                              <p:val>
+                                                <p:strVal val="0-#ppt_h/2"/>
+                                              </p:val>
+                                            </p:tav>
+                                            <p:tav tm="100000">
+                                              <p:val>
+                                                <p:strVal val="#ppt_y"/>
+                                              </p:val>
+                                            </p:tav>
+                                          </p:tavLst>
+                                        </p:anim>
+                                      </p:childTnLst>
+                                    </p:cTn>
+                                  </p:par>
+                                </p:childTnLst>
+                              </p:cTn>
+                            </p:par>
+                          </p:childTnLst>
+                        </p:cTn>
+                      </p:par>
+                    </p:childTnLst>
+                  </p:cTn>
+                  <p:prevCondLst>
+                    <p:cond evt="onPrev" delay="0">
+                      <p:tgtEl>
+                        <p:sldTgt/>
+                      </p:tgtEl>
+                    </p:cond>
+                  </p:prevCondLst>
+                  <p:nextCondLst>
+                    <p:cond evt="onNext" delay="0">
+                      <p:tgtEl>
+                        <p:sldTgt/>
+                      </p:tgtEl>
+                    </p:cond>
+                  </p:nextCondLst>
+                </p:seq>
+              </p:childTnLst>
+            </p:cTn>
+          </p:par>
+        </p:tnLst>
+      </p:timing>
+    </mc:Fallback>
+  </mc:AlternateContent>
 </p:sld>
 </file>
 
@@ -13801,7 +14067,7 @@
             <a:spLocks noGrp="1"/>
           </p:cNvSpPr>
           <p:nvPr>
-            <p:ph type="subTitle" idx="2"/>
+            <p:ph type="subTitle" idx="1"/>
           </p:nvPr>
         </p:nvSpPr>
         <p:spPr>
@@ -13897,7 +14163,7 @@
             <a:spLocks noGrp="1"/>
           </p:cNvSpPr>
           <p:nvPr>
-            <p:ph type="subTitle" idx="3"/>
+            <p:ph type="subTitle" idx="2"/>
           </p:nvPr>
         </p:nvSpPr>
         <p:spPr>
@@ -14054,7 +14320,7 @@
             <a:spLocks noGrp="1"/>
           </p:cNvSpPr>
           <p:nvPr>
-            <p:ph type="subTitle" idx="4"/>
+            <p:ph type="subTitle" idx="3"/>
           </p:nvPr>
         </p:nvSpPr>
         <p:spPr>
@@ -14088,7 +14354,7 @@
             <a:spLocks noGrp="1"/>
           </p:cNvSpPr>
           <p:nvPr>
-            <p:ph type="subTitle" idx="5"/>
+            <p:ph type="subTitle" idx="4"/>
           </p:nvPr>
         </p:nvSpPr>
         <p:spPr>
@@ -14126,7 +14392,7 @@
             <a:spLocks noGrp="1"/>
           </p:cNvSpPr>
           <p:nvPr>
-            <p:ph type="subTitle" idx="6"/>
+            <p:ph type="subTitle" idx="5"/>
           </p:nvPr>
         </p:nvSpPr>
         <p:spPr>
@@ -14371,6 +14637,18 @@
   <p:clrMapOvr>
     <a:masterClrMapping/>
   </p:clrMapOvr>
+  <mc:AlternateContent xmlns:mc="http://schemas.openxmlformats.org/markup-compatibility/2006">
+    <mc:Choice xmlns:p14="http://schemas.microsoft.com/office/powerpoint/2010/main" Requires="p14">
+      <p:transition spd="slow" p14:dur="1500">
+        <p14:window dir="vert"/>
+      </p:transition>
+    </mc:Choice>
+    <mc:Fallback>
+      <p:transition spd="slow">
+        <p:fade/>
+      </p:transition>
+    </mc:Fallback>
+  </mc:AlternateContent>
 </p:sld>
 </file>
 
@@ -14449,7 +14727,7 @@
             <a:spLocks noGrp="1"/>
           </p:cNvSpPr>
           <p:nvPr>
-            <p:ph type="subTitle" idx="2"/>
+            <p:ph type="subTitle" idx="1"/>
           </p:nvPr>
         </p:nvSpPr>
         <p:spPr>
@@ -14536,7 +14814,7 @@
             <a:spLocks noGrp="1"/>
           </p:cNvSpPr>
           <p:nvPr>
-            <p:ph type="subTitle" idx="4"/>
+            <p:ph type="subTitle" idx="2"/>
           </p:nvPr>
         </p:nvSpPr>
         <p:spPr>
@@ -14576,7 +14854,7 @@
             <a:spLocks noGrp="1"/>
           </p:cNvSpPr>
           <p:nvPr>
-            <p:ph type="subTitle" idx="5"/>
+            <p:ph type="subTitle" idx="3"/>
           </p:nvPr>
         </p:nvSpPr>
         <p:spPr>
@@ -16386,6 +16664,18 @@
   <p:clrMapOvr>
     <a:masterClrMapping/>
   </p:clrMapOvr>
+  <mc:AlternateContent xmlns:mc="http://schemas.openxmlformats.org/markup-compatibility/2006">
+    <mc:Choice xmlns:p14="http://schemas.microsoft.com/office/powerpoint/2010/main" Requires="p14">
+      <p:transition spd="slow" p14:dur="2000">
+        <p14:ferris dir="l"/>
+      </p:transition>
+    </mc:Choice>
+    <mc:Fallback>
+      <p:transition spd="slow">
+        <p:fade/>
+      </p:transition>
+    </mc:Fallback>
+  </mc:AlternateContent>
 </p:sld>
 </file>
 
@@ -16408,6 +16698,38 @@
       </p:grpSpPr>
       <p:sp>
         <p:nvSpPr>
+          <p:cNvPr id="462" name="Google Shape;462;p41"/>
+          <p:cNvSpPr txBox="1">
+            <a:spLocks noGrp="1"/>
+          </p:cNvSpPr>
+          <p:nvPr>
+            <p:ph type="title"/>
+          </p:nvPr>
+        </p:nvSpPr>
+        <p:spPr>
+          <a:xfrm>
+            <a:off x="720000" y="122266"/>
+            <a:ext cx="7704000" cy="572700"/>
+          </a:xfrm>
+          <a:prstGeom prst="rect">
+            <a:avLst/>
+          </a:prstGeom>
+        </p:spPr>
+        <p:txBody>
+          <a:bodyPr spcFirstLastPara="1" wrap="square" lIns="91425" tIns="91425" rIns="91425" bIns="91425" anchor="t" anchorCtr="0">
+            <a:noAutofit/>
+          </a:bodyPr>
+          <a:lstStyle/>
+          <a:p>
+            <a:r>
+              <a:rPr lang="en-US" dirty="0"/>
+              <a:t>Chile Case Study</a:t>
+            </a:r>
+          </a:p>
+        </p:txBody>
+      </p:sp>
+      <p:sp>
+        <p:nvSpPr>
           <p:cNvPr id="459" name="Google Shape;459;p41"/>
           <p:cNvSpPr txBox="1">
             <a:spLocks noGrp="1"/>
@@ -16418,8 +16740,8 @@
         </p:nvSpPr>
         <p:spPr>
           <a:xfrm>
-            <a:off x="4800100" y="1709165"/>
-            <a:ext cx="3858991" cy="429900"/>
+            <a:off x="4791843" y="1761977"/>
+            <a:ext cx="3859212" cy="428625"/>
           </a:xfrm>
           <a:prstGeom prst="rect">
             <a:avLst/>
@@ -16459,8 +16781,8 @@
         </p:nvSpPr>
         <p:spPr>
           <a:xfrm>
-            <a:off x="4800100" y="2817209"/>
-            <a:ext cx="4177644" cy="429900"/>
+            <a:off x="4791843" y="2800962"/>
+            <a:ext cx="4176712" cy="428625"/>
           </a:xfrm>
           <a:prstGeom prst="rect">
             <a:avLst/>
@@ -16500,8 +16822,8 @@
         </p:nvSpPr>
         <p:spPr>
           <a:xfrm>
-            <a:off x="4696191" y="3738366"/>
-            <a:ext cx="4586355" cy="836683"/>
+            <a:off x="4650919" y="3846891"/>
+            <a:ext cx="4586287" cy="836612"/>
           </a:xfrm>
           <a:prstGeom prst="rect">
             <a:avLst/>
@@ -16525,38 +16847,6 @@
       </p:sp>
       <p:sp>
         <p:nvSpPr>
-          <p:cNvPr id="462" name="Google Shape;462;p41"/>
-          <p:cNvSpPr txBox="1">
-            <a:spLocks noGrp="1"/>
-          </p:cNvSpPr>
-          <p:nvPr>
-            <p:ph type="title"/>
-          </p:nvPr>
-        </p:nvSpPr>
-        <p:spPr>
-          <a:xfrm>
-            <a:off x="720000" y="122266"/>
-            <a:ext cx="7704000" cy="572700"/>
-          </a:xfrm>
-          <a:prstGeom prst="rect">
-            <a:avLst/>
-          </a:prstGeom>
-        </p:spPr>
-        <p:txBody>
-          <a:bodyPr spcFirstLastPara="1" wrap="square" lIns="91425" tIns="91425" rIns="91425" bIns="91425" anchor="t" anchorCtr="0">
-            <a:noAutofit/>
-          </a:bodyPr>
-          <a:lstStyle/>
-          <a:p>
-            <a:r>
-              <a:rPr lang="en-US" dirty="0"/>
-              <a:t>Chile Case Study</a:t>
-            </a:r>
-          </a:p>
-        </p:txBody>
-      </p:sp>
-      <p:sp>
-        <p:nvSpPr>
           <p:cNvPr id="463" name="Google Shape;463;p41"/>
           <p:cNvSpPr txBox="1">
             <a:spLocks noGrp="1"/>
@@ -16567,8 +16857,8 @@
         </p:nvSpPr>
         <p:spPr>
           <a:xfrm>
-            <a:off x="3321500" y="1481166"/>
-            <a:ext cx="1038300" cy="784800"/>
+            <a:off x="834811" y="1481138"/>
+            <a:ext cx="1038225" cy="784225"/>
           </a:xfrm>
           <a:prstGeom prst="rect">
             <a:avLst/>
@@ -16608,13 +16898,115 @@
       </p:sp>
       <p:sp>
         <p:nvSpPr>
+          <p:cNvPr id="465" name="Google Shape;465;p41"/>
+          <p:cNvSpPr txBox="1">
+            <a:spLocks noGrp="1"/>
+          </p:cNvSpPr>
+          <p:nvPr>
+            <p:ph type="title" idx="4294967295"/>
+          </p:nvPr>
+        </p:nvSpPr>
+        <p:spPr>
+          <a:xfrm>
+            <a:off x="834811" y="2609850"/>
+            <a:ext cx="1038225" cy="784225"/>
+          </a:xfrm>
+          <a:prstGeom prst="rect">
+            <a:avLst/>
+          </a:prstGeom>
+          <a:ln w="19050" cap="flat" cmpd="sng">
+            <a:solidFill>
+              <a:schemeClr val="dk1"/>
+            </a:solidFill>
+            <a:prstDash val="solid"/>
+            <a:round/>
+            <a:headEnd type="none" w="sm" len="sm"/>
+            <a:tailEnd type="none" w="sm" len="sm"/>
+          </a:ln>
+        </p:spPr>
+        <p:txBody>
+          <a:bodyPr spcFirstLastPara="1" wrap="square" lIns="91425" tIns="91425" rIns="91425" bIns="91425" anchor="ctr" anchorCtr="0">
+            <a:noAutofit/>
+          </a:bodyPr>
+          <a:lstStyle/>
+          <a:p>
+            <a:pPr marL="0" lvl="0" indent="0" algn="ctr" rtl="0">
+              <a:spcBef>
+                <a:spcPts val="0"/>
+              </a:spcBef>
+              <a:spcAft>
+                <a:spcPts val="0"/>
+              </a:spcAft>
+              <a:buNone/>
+            </a:pPr>
+            <a:r>
+              <a:rPr lang="en" sz="2200" dirty="0"/>
+              <a:t>2x</a:t>
+            </a:r>
+            <a:endParaRPr sz="2200" dirty="0"/>
+          </a:p>
+        </p:txBody>
+      </p:sp>
+      <p:sp>
+        <p:nvSpPr>
+          <p:cNvPr id="468" name="Google Shape;468;p41"/>
+          <p:cNvSpPr txBox="1">
+            <a:spLocks noGrp="1"/>
+          </p:cNvSpPr>
+          <p:nvPr>
+            <p:ph type="title" idx="4294967295"/>
+          </p:nvPr>
+        </p:nvSpPr>
+        <p:spPr>
+          <a:xfrm>
+            <a:off x="834811" y="3738563"/>
+            <a:ext cx="1038225" cy="784225"/>
+          </a:xfrm>
+          <a:prstGeom prst="rect">
+            <a:avLst/>
+          </a:prstGeom>
+          <a:ln w="19050" cap="flat" cmpd="sng">
+            <a:solidFill>
+              <a:schemeClr val="dk1"/>
+            </a:solidFill>
+            <a:prstDash val="solid"/>
+            <a:round/>
+            <a:headEnd type="none" w="sm" len="sm"/>
+            <a:tailEnd type="none" w="sm" len="sm"/>
+          </a:ln>
+        </p:spPr>
+        <p:txBody>
+          <a:bodyPr spcFirstLastPara="1" wrap="square" lIns="91425" tIns="91425" rIns="91425" bIns="91425" anchor="ctr" anchorCtr="0">
+            <a:noAutofit/>
+          </a:bodyPr>
+          <a:lstStyle/>
+          <a:p>
+            <a:pPr marL="0" lvl="0" indent="0" algn="ctr" rtl="0">
+              <a:spcBef>
+                <a:spcPts val="0"/>
+              </a:spcBef>
+              <a:spcAft>
+                <a:spcPts val="0"/>
+              </a:spcAft>
+              <a:buNone/>
+            </a:pPr>
+            <a:r>
+              <a:rPr lang="en" sz="2200" dirty="0"/>
+              <a:t>45%</a:t>
+            </a:r>
+            <a:endParaRPr sz="2200" dirty="0"/>
+          </a:p>
+        </p:txBody>
+      </p:sp>
+      <p:sp>
+        <p:nvSpPr>
           <p:cNvPr id="464" name="Google Shape;464;p41"/>
           <p:cNvSpPr/>
           <p:nvPr/>
         </p:nvSpPr>
         <p:spPr>
           <a:xfrm>
-            <a:off x="720000" y="1481166"/>
+            <a:off x="1554811" y="1481166"/>
             <a:ext cx="2466000" cy="784800"/>
           </a:xfrm>
           <a:prstGeom prst="rect">
@@ -16657,64 +17049,13 @@
       </p:sp>
       <p:sp>
         <p:nvSpPr>
-          <p:cNvPr id="465" name="Google Shape;465;p41"/>
-          <p:cNvSpPr txBox="1">
-            <a:spLocks noGrp="1"/>
-          </p:cNvSpPr>
-          <p:nvPr>
-            <p:ph type="title" idx="4294967295"/>
-          </p:nvPr>
-        </p:nvSpPr>
-        <p:spPr>
-          <a:xfrm>
-            <a:off x="3321500" y="2609766"/>
-            <a:ext cx="1038300" cy="784800"/>
-          </a:xfrm>
-          <a:prstGeom prst="rect">
-            <a:avLst/>
-          </a:prstGeom>
-          <a:ln w="19050" cap="flat" cmpd="sng">
-            <a:solidFill>
-              <a:schemeClr val="dk1"/>
-            </a:solidFill>
-            <a:prstDash val="solid"/>
-            <a:round/>
-            <a:headEnd type="none" w="sm" len="sm"/>
-            <a:tailEnd type="none" w="sm" len="sm"/>
-          </a:ln>
-        </p:spPr>
-        <p:txBody>
-          <a:bodyPr spcFirstLastPara="1" wrap="square" lIns="91425" tIns="91425" rIns="91425" bIns="91425" anchor="ctr" anchorCtr="0">
-            <a:noAutofit/>
-          </a:bodyPr>
-          <a:lstStyle/>
-          <a:p>
-            <a:pPr marL="0" lvl="0" indent="0" algn="ctr" rtl="0">
-              <a:spcBef>
-                <a:spcPts val="0"/>
-              </a:spcBef>
-              <a:spcAft>
-                <a:spcPts val="0"/>
-              </a:spcAft>
-              <a:buNone/>
-            </a:pPr>
-            <a:r>
-              <a:rPr lang="en" sz="2200" dirty="0"/>
-              <a:t>2x</a:t>
-            </a:r>
-            <a:endParaRPr sz="2200" dirty="0"/>
-          </a:p>
-        </p:txBody>
-      </p:sp>
-      <p:sp>
-        <p:nvSpPr>
           <p:cNvPr id="466" name="Google Shape;466;p41"/>
           <p:cNvSpPr/>
           <p:nvPr/>
         </p:nvSpPr>
         <p:spPr>
           <a:xfrm>
-            <a:off x="720000" y="2609766"/>
+            <a:off x="1554811" y="2609766"/>
             <a:ext cx="2466000" cy="784800"/>
           </a:xfrm>
           <a:prstGeom prst="rect">
@@ -16763,7 +17104,7 @@
         </p:nvSpPr>
         <p:spPr>
           <a:xfrm>
-            <a:off x="720024" y="2609766"/>
+            <a:off x="1554835" y="2609766"/>
             <a:ext cx="2465975" cy="784800"/>
           </a:xfrm>
           <a:prstGeom prst="rect">
@@ -16797,63 +17138,12 @@
               </a:spcAft>
               <a:buNone/>
             </a:pPr>
-            <a:endParaRPr>
+            <a:endParaRPr dirty="0">
               <a:latin typeface="DM Sans"/>
               <a:ea typeface="DM Sans"/>
               <a:cs typeface="DM Sans"/>
               <a:sym typeface="DM Sans"/>
             </a:endParaRPr>
-          </a:p>
-        </p:txBody>
-      </p:sp>
-      <p:sp>
-        <p:nvSpPr>
-          <p:cNvPr id="468" name="Google Shape;468;p41"/>
-          <p:cNvSpPr txBox="1">
-            <a:spLocks noGrp="1"/>
-          </p:cNvSpPr>
-          <p:nvPr>
-            <p:ph type="title" idx="4294967295"/>
-          </p:nvPr>
-        </p:nvSpPr>
-        <p:spPr>
-          <a:xfrm>
-            <a:off x="3321500" y="3738366"/>
-            <a:ext cx="1038300" cy="784800"/>
-          </a:xfrm>
-          <a:prstGeom prst="rect">
-            <a:avLst/>
-          </a:prstGeom>
-          <a:ln w="19050" cap="flat" cmpd="sng">
-            <a:solidFill>
-              <a:schemeClr val="dk1"/>
-            </a:solidFill>
-            <a:prstDash val="solid"/>
-            <a:round/>
-            <a:headEnd type="none" w="sm" len="sm"/>
-            <a:tailEnd type="none" w="sm" len="sm"/>
-          </a:ln>
-        </p:spPr>
-        <p:txBody>
-          <a:bodyPr spcFirstLastPara="1" wrap="square" lIns="91425" tIns="91425" rIns="91425" bIns="91425" anchor="ctr" anchorCtr="0">
-            <a:noAutofit/>
-          </a:bodyPr>
-          <a:lstStyle/>
-          <a:p>
-            <a:pPr marL="0" lvl="0" indent="0" algn="ctr" rtl="0">
-              <a:spcBef>
-                <a:spcPts val="0"/>
-              </a:spcBef>
-              <a:spcAft>
-                <a:spcPts val="0"/>
-              </a:spcAft>
-              <a:buNone/>
-            </a:pPr>
-            <a:r>
-              <a:rPr lang="en" sz="2200" dirty="0"/>
-              <a:t>45%</a:t>
-            </a:r>
-            <a:endParaRPr sz="2200" dirty="0"/>
           </a:p>
         </p:txBody>
       </p:sp>
@@ -16865,7 +17155,7 @@
         </p:nvSpPr>
         <p:spPr>
           <a:xfrm>
-            <a:off x="720000" y="3738366"/>
+            <a:off x="1554811" y="3738366"/>
             <a:ext cx="2466000" cy="784800"/>
           </a:xfrm>
           <a:prstGeom prst="rect">
@@ -16914,7 +17204,7 @@
         </p:nvSpPr>
         <p:spPr>
           <a:xfrm>
-            <a:off x="720025" y="3738366"/>
+            <a:off x="1554836" y="3738366"/>
             <a:ext cx="1205758" cy="784800"/>
           </a:xfrm>
           <a:prstGeom prst="rect">
@@ -16965,7 +17255,7 @@
         </p:nvSpPr>
         <p:spPr>
           <a:xfrm>
-            <a:off x="720024" y="1481166"/>
+            <a:off x="1554835" y="1481166"/>
             <a:ext cx="863449" cy="784800"/>
           </a:xfrm>
           <a:prstGeom prst="rect">
@@ -17068,7 +17358,7 @@
         </p:nvSpPr>
         <p:spPr>
           <a:xfrm>
-            <a:off x="4572000" y="2780372"/>
+            <a:off x="4320485" y="2800962"/>
             <a:ext cx="330434" cy="316687"/>
           </a:xfrm>
           <a:custGeom>
@@ -17334,7 +17624,7 @@
         </p:nvSpPr>
         <p:spPr>
           <a:xfrm>
-            <a:off x="4572000" y="1709165"/>
+            <a:off x="4320485" y="1714906"/>
             <a:ext cx="330434" cy="316687"/>
           </a:xfrm>
           <a:custGeom>
@@ -17600,7 +17890,7 @@
         </p:nvSpPr>
         <p:spPr>
           <a:xfrm>
-            <a:off x="4495300" y="3888416"/>
+            <a:off x="4281903" y="3918153"/>
             <a:ext cx="369016" cy="364563"/>
           </a:xfrm>
           <a:custGeom>
@@ -17899,6 +18189,18 @@
   <p:clrMapOvr>
     <a:masterClrMapping/>
   </p:clrMapOvr>
+  <mc:AlternateContent xmlns:mc="http://schemas.openxmlformats.org/markup-compatibility/2006">
+    <mc:Choice xmlns:p14="http://schemas.microsoft.com/office/powerpoint/2010/main" Requires="p14">
+      <p:transition spd="slow" p14:dur="2000">
+        <p14:ferris dir="l"/>
+      </p:transition>
+    </mc:Choice>
+    <mc:Fallback>
+      <p:transition spd="slow">
+        <p:fade/>
+      </p:transition>
+    </mc:Fallback>
+  </mc:AlternateContent>
 </p:sld>
 </file>
 
@@ -19313,6 +19615,18 @@
   <p:clrMapOvr>
     <a:masterClrMapping/>
   </p:clrMapOvr>
+  <mc:AlternateContent xmlns:mc="http://schemas.openxmlformats.org/markup-compatibility/2006">
+    <mc:Choice xmlns:p14="http://schemas.microsoft.com/office/powerpoint/2010/main" Requires="p14">
+      <p:transition spd="slow" p14:dur="2000">
+        <p14:ferris dir="l"/>
+      </p:transition>
+    </mc:Choice>
+    <mc:Fallback>
+      <p:transition spd="slow">
+        <p:fade/>
+      </p:transition>
+    </mc:Fallback>
+  </mc:AlternateContent>
 </p:sld>
 </file>
 
@@ -19388,6 +19702,50 @@
       </p:sp>
       <p:sp>
         <p:nvSpPr>
+          <p:cNvPr id="331" name="Google Shape;331;p34">
+            <a:extLst>
+              <a:ext uri="{FF2B5EF4-FFF2-40B4-BE49-F238E27FC236}">
+                <a16:creationId xmlns:a16="http://schemas.microsoft.com/office/drawing/2014/main" id="{E5F0C864-6F26-AF8D-3218-9F9A06132189}"/>
+              </a:ext>
+            </a:extLst>
+          </p:cNvPr>
+          <p:cNvSpPr txBox="1">
+            <a:spLocks noGrp="1"/>
+          </p:cNvSpPr>
+          <p:nvPr>
+            <p:ph type="title" idx="2"/>
+          </p:nvPr>
+        </p:nvSpPr>
+        <p:spPr>
+          <a:prstGeom prst="rect">
+            <a:avLst/>
+          </a:prstGeom>
+        </p:spPr>
+        <p:txBody>
+          <a:bodyPr spcFirstLastPara="1" wrap="square" lIns="91425" tIns="91425" rIns="91425" bIns="91425" anchor="b" anchorCtr="0">
+            <a:noAutofit/>
+          </a:bodyPr>
+          <a:lstStyle/>
+          <a:p>
+            <a:pPr marL="0" lvl="0" indent="0" algn="ctr" rtl="0">
+              <a:spcBef>
+                <a:spcPts val="0"/>
+              </a:spcBef>
+              <a:spcAft>
+                <a:spcPts val="0"/>
+              </a:spcAft>
+              <a:buNone/>
+            </a:pPr>
+            <a:r>
+              <a:rPr lang="en" dirty="0"/>
+              <a:t>03</a:t>
+            </a:r>
+            <a:endParaRPr dirty="0"/>
+          </a:p>
+        </p:txBody>
+      </p:sp>
+      <p:sp>
+        <p:nvSpPr>
           <p:cNvPr id="330" name="Google Shape;330;p34">
             <a:extLst>
               <a:ext uri="{FF2B5EF4-FFF2-40B4-BE49-F238E27FC236}">
@@ -19422,54 +19780,6 @@
               <a:rPr lang="en-US" b="1" dirty="0"/>
               <a:t>Data And Preprocessing</a:t>
             </a:r>
-          </a:p>
-        </p:txBody>
-      </p:sp>
-      <p:sp>
-        <p:nvSpPr>
-          <p:cNvPr id="331" name="Google Shape;331;p34">
-            <a:extLst>
-              <a:ext uri="{FF2B5EF4-FFF2-40B4-BE49-F238E27FC236}">
-                <a16:creationId xmlns:a16="http://schemas.microsoft.com/office/drawing/2014/main" id="{E5F0C864-6F26-AF8D-3218-9F9A06132189}"/>
-              </a:ext>
-            </a:extLst>
-          </p:cNvPr>
-          <p:cNvSpPr txBox="1">
-            <a:spLocks noGrp="1"/>
-          </p:cNvSpPr>
-          <p:nvPr>
-            <p:ph type="title" idx="2"/>
-          </p:nvPr>
-        </p:nvSpPr>
-        <p:spPr>
-          <a:xfrm>
-            <a:off x="713213" y="1492050"/>
-            <a:ext cx="1194000" cy="1106700"/>
-          </a:xfrm>
-          <a:prstGeom prst="rect">
-            <a:avLst/>
-          </a:prstGeom>
-        </p:spPr>
-        <p:txBody>
-          <a:bodyPr spcFirstLastPara="1" wrap="square" lIns="91425" tIns="91425" rIns="91425" bIns="91425" anchor="b" anchorCtr="0">
-            <a:noAutofit/>
-          </a:bodyPr>
-          <a:lstStyle/>
-          <a:p>
-            <a:pPr marL="0" lvl="0" indent="0" algn="ctr" rtl="0">
-              <a:spcBef>
-                <a:spcPts val="0"/>
-              </a:spcBef>
-              <a:spcAft>
-                <a:spcPts val="0"/>
-              </a:spcAft>
-              <a:buNone/>
-            </a:pPr>
-            <a:r>
-              <a:rPr lang="en" dirty="0"/>
-              <a:t>03</a:t>
-            </a:r>
-            <a:endParaRPr dirty="0"/>
           </a:p>
         </p:txBody>
       </p:sp>
@@ -19842,6 +20152,172 @@
   <p:clrMapOvr>
     <a:masterClrMapping/>
   </p:clrMapOvr>
+  <mc:AlternateContent xmlns:mc="http://schemas.openxmlformats.org/markup-compatibility/2006">
+    <mc:Choice xmlns:p14="http://schemas.microsoft.com/office/powerpoint/2010/main" Requires="p14">
+      <p:transition spd="slow" p14:dur="1600">
+        <p14:prism isContent="1" isInverted="1"/>
+      </p:transition>
+    </mc:Choice>
+    <mc:Fallback>
+      <p:transition spd="slow">
+        <p:fade/>
+      </p:transition>
+    </mc:Fallback>
+  </mc:AlternateContent>
+  <p:timing>
+    <p:tnLst>
+      <p:par>
+        <p:cTn id="1" dur="indefinite" restart="never" nodeType="tmRoot">
+          <p:childTnLst>
+            <p:seq concurrent="1" nextAc="seek">
+              <p:cTn id="2" dur="indefinite" nodeType="mainSeq">
+                <p:childTnLst>
+                  <p:par>
+                    <p:cTn id="3" fill="hold">
+                      <p:stCondLst>
+                        <p:cond delay="indefinite"/>
+                        <p:cond evt="onBegin" delay="0">
+                          <p:tn val="2"/>
+                        </p:cond>
+                      </p:stCondLst>
+                      <p:childTnLst>
+                        <p:par>
+                          <p:cTn id="4" fill="hold">
+                            <p:stCondLst>
+                              <p:cond delay="0"/>
+                            </p:stCondLst>
+                            <p:childTnLst>
+                              <p:par>
+                                <p:cTn id="5" presetID="27" presetClass="emph" presetSubtype="0" fill="remove" grpId="0" nodeType="withEffect">
+                                  <p:stCondLst>
+                                    <p:cond delay="0"/>
+                                  </p:stCondLst>
+                                  <p:childTnLst>
+                                    <p:animClr clrSpc="rgb" dir="cw">
+                                      <p:cBhvr override="childStyle">
+                                        <p:cTn id="6" dur="250" autoRev="1" fill="remove"/>
+                                        <p:tgtEl>
+                                          <p:spTgt spid="331"/>
+                                        </p:tgtEl>
+                                        <p:attrNameLst>
+                                          <p:attrName>style.color</p:attrName>
+                                        </p:attrNameLst>
+                                      </p:cBhvr>
+                                      <p:to>
+                                        <a:schemeClr val="bg1"/>
+                                      </p:to>
+                                    </p:animClr>
+                                    <p:animClr clrSpc="rgb" dir="cw">
+                                      <p:cBhvr>
+                                        <p:cTn id="7" dur="250" autoRev="1" fill="remove"/>
+                                        <p:tgtEl>
+                                          <p:spTgt spid="331"/>
+                                        </p:tgtEl>
+                                        <p:attrNameLst>
+                                          <p:attrName>fillcolor</p:attrName>
+                                        </p:attrNameLst>
+                                      </p:cBhvr>
+                                      <p:to>
+                                        <a:schemeClr val="bg1"/>
+                                      </p:to>
+                                    </p:animClr>
+                                    <p:set>
+                                      <p:cBhvr>
+                                        <p:cTn id="8" dur="250" autoRev="1" fill="remove"/>
+                                        <p:tgtEl>
+                                          <p:spTgt spid="331"/>
+                                        </p:tgtEl>
+                                        <p:attrNameLst>
+                                          <p:attrName>fill.type</p:attrName>
+                                        </p:attrNameLst>
+                                      </p:cBhvr>
+                                      <p:to>
+                                        <p:strVal val="solid"/>
+                                      </p:to>
+                                    </p:set>
+                                    <p:set>
+                                      <p:cBhvr>
+                                        <p:cTn id="9" dur="250" autoRev="1" fill="remove"/>
+                                        <p:tgtEl>
+                                          <p:spTgt spid="331"/>
+                                        </p:tgtEl>
+                                        <p:attrNameLst>
+                                          <p:attrName>fill.on</p:attrName>
+                                        </p:attrNameLst>
+                                      </p:cBhvr>
+                                      <p:to>
+                                        <p:strVal val="true"/>
+                                      </p:to>
+                                    </p:set>
+                                  </p:childTnLst>
+                                </p:cTn>
+                              </p:par>
+                              <p:par>
+                                <p:cTn id="10" presetID="22" presetClass="entr" presetSubtype="4" fill="hold" nodeType="withEffect">
+                                  <p:stCondLst>
+                                    <p:cond delay="0"/>
+                                  </p:stCondLst>
+                                  <p:childTnLst>
+                                    <p:set>
+                                      <p:cBhvr>
+                                        <p:cTn id="11" dur="1" fill="hold">
+                                          <p:stCondLst>
+                                            <p:cond delay="0"/>
+                                          </p:stCondLst>
+                                        </p:cTn>
+                                        <p:tgtEl>
+                                          <p:spTgt spid="332"/>
+                                        </p:tgtEl>
+                                        <p:attrNameLst>
+                                          <p:attrName>style.visibility</p:attrName>
+                                        </p:attrNameLst>
+                                      </p:cBhvr>
+                                      <p:to>
+                                        <p:strVal val="visible"/>
+                                      </p:to>
+                                    </p:set>
+                                    <p:animEffect transition="in" filter="wipe(down)">
+                                      <p:cBhvr>
+                                        <p:cTn id="12" dur="500"/>
+                                        <p:tgtEl>
+                                          <p:spTgt spid="332"/>
+                                        </p:tgtEl>
+                                      </p:cBhvr>
+                                    </p:animEffect>
+                                  </p:childTnLst>
+                                </p:cTn>
+                              </p:par>
+                            </p:childTnLst>
+                          </p:cTn>
+                        </p:par>
+                      </p:childTnLst>
+                    </p:cTn>
+                  </p:par>
+                </p:childTnLst>
+              </p:cTn>
+              <p:prevCondLst>
+                <p:cond evt="onPrev" delay="0">
+                  <p:tgtEl>
+                    <p:sldTgt/>
+                  </p:tgtEl>
+                </p:cond>
+              </p:prevCondLst>
+              <p:nextCondLst>
+                <p:cond evt="onNext" delay="0">
+                  <p:tgtEl>
+                    <p:sldTgt/>
+                  </p:tgtEl>
+                </p:cond>
+              </p:nextCondLst>
+            </p:seq>
+          </p:childTnLst>
+        </p:cTn>
+      </p:par>
+    </p:tnLst>
+    <p:bldLst>
+      <p:bldP spid="331" grpId="0" animBg="1"/>
+    </p:bldLst>
+  </p:timing>
 </p:sld>
 </file>
 
@@ -19870,46 +20346,6 @@
       </p:grpSpPr>
       <p:sp>
         <p:nvSpPr>
-          <p:cNvPr id="314" name="Google Shape;314;p32">
-            <a:extLst>
-              <a:ext uri="{FF2B5EF4-FFF2-40B4-BE49-F238E27FC236}">
-                <a16:creationId xmlns:a16="http://schemas.microsoft.com/office/drawing/2014/main" id="{76102112-74AE-84C0-BC35-2FFC730E9F96}"/>
-              </a:ext>
-            </a:extLst>
-          </p:cNvPr>
-          <p:cNvSpPr txBox="1">
-            <a:spLocks noGrp="1"/>
-          </p:cNvSpPr>
-          <p:nvPr>
-            <p:ph type="title"/>
-          </p:nvPr>
-        </p:nvSpPr>
-        <p:spPr>
-          <a:xfrm>
-            <a:off x="720000" y="445025"/>
-            <a:ext cx="7704000" cy="572700"/>
-          </a:xfrm>
-          <a:prstGeom prst="rect">
-            <a:avLst/>
-          </a:prstGeom>
-        </p:spPr>
-        <p:txBody>
-          <a:bodyPr spcFirstLastPara="1" wrap="square" lIns="91425" tIns="91425" rIns="91425" bIns="91425" anchor="t" anchorCtr="0">
-            <a:noAutofit/>
-          </a:bodyPr>
-          <a:lstStyle/>
-          <a:p>
-            <a:pPr lvl="0"/>
-            <a:r>
-              <a:rPr lang="en-US" dirty="0"/>
-              <a:t>Data Collection</a:t>
-            </a:r>
-            <a:endParaRPr dirty="0"/>
-          </a:p>
-        </p:txBody>
-      </p:sp>
-      <p:sp>
-        <p:nvSpPr>
           <p:cNvPr id="3" name="Subtitle 2">
             <a:extLst>
               <a:ext uri="{FF2B5EF4-FFF2-40B4-BE49-F238E27FC236}">
@@ -19921,7 +20357,7 @@
             <a:spLocks noGrp="1" noChangeArrowheads="1"/>
           </p:cNvSpPr>
           <p:nvPr>
-            <p:ph type="subTitle" idx="2"/>
+            <p:ph type="subTitle" idx="1"/>
           </p:nvPr>
         </p:nvSpPr>
         <p:spPr bwMode="auto">
@@ -20110,6 +20546,42 @@
           </a:p>
         </p:txBody>
       </p:sp>
+      <p:sp>
+        <p:nvSpPr>
+          <p:cNvPr id="314" name="Google Shape;314;p32">
+            <a:extLst>
+              <a:ext uri="{FF2B5EF4-FFF2-40B4-BE49-F238E27FC236}">
+                <a16:creationId xmlns:a16="http://schemas.microsoft.com/office/drawing/2014/main" id="{76102112-74AE-84C0-BC35-2FFC730E9F96}"/>
+              </a:ext>
+            </a:extLst>
+          </p:cNvPr>
+          <p:cNvSpPr txBox="1">
+            <a:spLocks noGrp="1"/>
+          </p:cNvSpPr>
+          <p:nvPr>
+            <p:ph type="title"/>
+          </p:nvPr>
+        </p:nvSpPr>
+        <p:spPr>
+          <a:prstGeom prst="rect">
+            <a:avLst/>
+          </a:prstGeom>
+        </p:spPr>
+        <p:txBody>
+          <a:bodyPr spcFirstLastPara="1" wrap="square" lIns="91425" tIns="91425" rIns="91425" bIns="91425" anchor="t" anchorCtr="0">
+            <a:noAutofit/>
+          </a:bodyPr>
+          <a:lstStyle/>
+          <a:p>
+            <a:pPr lvl="0"/>
+            <a:r>
+              <a:rPr lang="en-US" dirty="0"/>
+              <a:t>Data Collection</a:t>
+            </a:r>
+            <a:endParaRPr dirty="0"/>
+          </a:p>
+        </p:txBody>
+      </p:sp>
     </p:spTree>
     <p:extLst>
       <p:ext uri="{BB962C8B-B14F-4D97-AF65-F5344CB8AC3E}">
@@ -20120,6 +20592,18 @@
   <p:clrMapOvr>
     <a:masterClrMapping/>
   </p:clrMapOvr>
+  <mc:AlternateContent xmlns:mc="http://schemas.openxmlformats.org/markup-compatibility/2006">
+    <mc:Choice xmlns:p14="http://schemas.microsoft.com/office/powerpoint/2010/main" Requires="p14">
+      <p:transition spd="slow" p14:dur="1300">
+        <p14:pan dir="u"/>
+      </p:transition>
+    </mc:Choice>
+    <mc:Fallback>
+      <p:transition spd="slow">
+        <p:fade/>
+      </p:transition>
+    </mc:Fallback>
+  </mc:AlternateContent>
 </p:sld>
 </file>
 
@@ -20140,74 +20624,6 @@
           <a:chExt cx="0" cy="0"/>
         </a:xfrm>
       </p:grpSpPr>
-      <p:sp>
-        <p:nvSpPr>
-          <p:cNvPr id="415" name="Google Shape;415;p38"/>
-          <p:cNvSpPr txBox="1">
-            <a:spLocks noGrp="1"/>
-          </p:cNvSpPr>
-          <p:nvPr>
-            <p:ph type="subTitle" idx="2"/>
-          </p:nvPr>
-        </p:nvSpPr>
-        <p:spPr>
-          <a:xfrm>
-            <a:off x="2991688" y="1933883"/>
-            <a:ext cx="2100000" cy="624000"/>
-          </a:xfrm>
-          <a:prstGeom prst="rect">
-            <a:avLst/>
-          </a:prstGeom>
-        </p:spPr>
-        <p:txBody>
-          <a:bodyPr spcFirstLastPara="1" wrap="square" lIns="91425" tIns="91425" rIns="91425" bIns="91425" anchor="t" anchorCtr="0">
-            <a:noAutofit/>
-          </a:bodyPr>
-          <a:lstStyle/>
-          <a:p>
-            <a:pPr marL="0" lvl="0" indent="0"/>
-            <a:r>
-              <a:rPr lang="en-US" dirty="0"/>
-              <a:t>Locations, Capacities &amp; Floodlight availability</a:t>
-            </a:r>
-            <a:endParaRPr dirty="0"/>
-          </a:p>
-        </p:txBody>
-      </p:sp>
-      <p:sp>
-        <p:nvSpPr>
-          <p:cNvPr id="416" name="Google Shape;416;p38"/>
-          <p:cNvSpPr txBox="1">
-            <a:spLocks noGrp="1"/>
-          </p:cNvSpPr>
-          <p:nvPr>
-            <p:ph type="subTitle" idx="5"/>
-          </p:nvPr>
-        </p:nvSpPr>
-        <p:spPr>
-          <a:xfrm>
-            <a:off x="5689060" y="1976183"/>
-            <a:ext cx="2100000" cy="624000"/>
-          </a:xfrm>
-          <a:prstGeom prst="rect">
-            <a:avLst/>
-          </a:prstGeom>
-        </p:spPr>
-        <p:txBody>
-          <a:bodyPr spcFirstLastPara="1" wrap="square" lIns="91425" tIns="91425" rIns="91425" bIns="91425" anchor="t" anchorCtr="0">
-            <a:noAutofit/>
-          </a:bodyPr>
-          <a:lstStyle/>
-          <a:p>
-            <a:pPr marL="0" lvl="0" indent="0"/>
-            <a:r>
-              <a:rPr lang="en-US" dirty="0"/>
-              <a:t>Every available "Slot" (Date + Time)</a:t>
-            </a:r>
-            <a:endParaRPr dirty="0"/>
-          </a:p>
-        </p:txBody>
-      </p:sp>
       <p:sp>
         <p:nvSpPr>
           <p:cNvPr id="417" name="Google Shape;417;p38"/>
@@ -20271,6 +20687,40 @@
             <a:r>
               <a:rPr lang="en-US" dirty="0"/>
               <a:t>Administrative details &amp; Home venues</a:t>
+            </a:r>
+            <a:endParaRPr dirty="0"/>
+          </a:p>
+        </p:txBody>
+      </p:sp>
+      <p:sp>
+        <p:nvSpPr>
+          <p:cNvPr id="415" name="Google Shape;415;p38"/>
+          <p:cNvSpPr txBox="1">
+            <a:spLocks noGrp="1"/>
+          </p:cNvSpPr>
+          <p:nvPr>
+            <p:ph type="subTitle" idx="2"/>
+          </p:nvPr>
+        </p:nvSpPr>
+        <p:spPr>
+          <a:xfrm>
+            <a:off x="2991688" y="1933883"/>
+            <a:ext cx="2100000" cy="624000"/>
+          </a:xfrm>
+          <a:prstGeom prst="rect">
+            <a:avLst/>
+          </a:prstGeom>
+        </p:spPr>
+        <p:txBody>
+          <a:bodyPr spcFirstLastPara="1" wrap="square" lIns="91425" tIns="91425" rIns="91425" bIns="91425" anchor="t" anchorCtr="0">
+            <a:noAutofit/>
+          </a:bodyPr>
+          <a:lstStyle/>
+          <a:p>
+            <a:pPr marL="0" lvl="0" indent="0"/>
+            <a:r>
+              <a:rPr lang="en-US" dirty="0"/>
+              <a:t>Locations, Capacities &amp; Floodlight availability</a:t>
             </a:r>
             <a:endParaRPr dirty="0"/>
           </a:p>
@@ -20352,6 +20802,40 @@
             <a:r>
               <a:rPr lang="en-US" dirty="0"/>
               <a:t>FIFA Days</a:t>
+            </a:r>
+            <a:endParaRPr dirty="0"/>
+          </a:p>
+        </p:txBody>
+      </p:sp>
+      <p:sp>
+        <p:nvSpPr>
+          <p:cNvPr id="416" name="Google Shape;416;p38"/>
+          <p:cNvSpPr txBox="1">
+            <a:spLocks noGrp="1"/>
+          </p:cNvSpPr>
+          <p:nvPr>
+            <p:ph type="subTitle" idx="5"/>
+          </p:nvPr>
+        </p:nvSpPr>
+        <p:spPr>
+          <a:xfrm>
+            <a:off x="5689060" y="1976183"/>
+            <a:ext cx="2100000" cy="624000"/>
+          </a:xfrm>
+          <a:prstGeom prst="rect">
+            <a:avLst/>
+          </a:prstGeom>
+        </p:spPr>
+        <p:txBody>
+          <a:bodyPr spcFirstLastPara="1" wrap="square" lIns="91425" tIns="91425" rIns="91425" bIns="91425" anchor="t" anchorCtr="0">
+            <a:noAutofit/>
+          </a:bodyPr>
+          <a:lstStyle/>
+          <a:p>
+            <a:pPr marL="0" lvl="0" indent="0"/>
+            <a:r>
+              <a:rPr lang="en-US" dirty="0"/>
+              <a:t>Every available "Slot" (Date + Time)</a:t>
             </a:r>
             <a:endParaRPr dirty="0"/>
           </a:p>
@@ -25312,6 +25796,18 @@
   <p:clrMapOvr>
     <a:masterClrMapping/>
   </p:clrMapOvr>
+  <mc:AlternateContent xmlns:mc="http://schemas.openxmlformats.org/markup-compatibility/2006">
+    <mc:Choice xmlns:p14="http://schemas.microsoft.com/office/powerpoint/2010/main" Requires="p14">
+      <p:transition spd="slow" p14:dur="1300">
+        <p14:pan dir="u"/>
+      </p:transition>
+    </mc:Choice>
+    <mc:Fallback>
+      <p:transition spd="slow">
+        <p:fade/>
+      </p:transition>
+    </mc:Fallback>
+  </mc:AlternateContent>
 </p:sld>
 </file>
 
@@ -25390,7 +25886,7 @@
             <a:spLocks noGrp="1"/>
           </p:cNvSpPr>
           <p:nvPr>
-            <p:ph type="subTitle" idx="4"/>
+            <p:ph type="subTitle" idx="1"/>
           </p:nvPr>
         </p:nvSpPr>
         <p:spPr>
@@ -26890,6 +27386,18 @@
   <p:clrMapOvr>
     <a:masterClrMapping/>
   </p:clrMapOvr>
+  <mc:AlternateContent xmlns:mc="http://schemas.openxmlformats.org/markup-compatibility/2006">
+    <mc:Choice xmlns:p14="http://schemas.microsoft.com/office/powerpoint/2010/main" Requires="p14">
+      <p:transition spd="slow" p14:dur="1300">
+        <p14:pan dir="u"/>
+      </p:transition>
+    </mc:Choice>
+    <mc:Fallback>
+      <p:transition spd="slow">
+        <p:fade/>
+      </p:transition>
+    </mc:Fallback>
+  </mc:AlternateContent>
 </p:sld>
 </file>
 
@@ -26968,7 +27476,7 @@
             <a:spLocks noGrp="1"/>
           </p:cNvSpPr>
           <p:nvPr>
-            <p:ph type="subTitle" idx="2"/>
+            <p:ph type="subTitle" idx="1"/>
           </p:nvPr>
         </p:nvSpPr>
         <p:spPr>
@@ -27055,7 +27563,7 @@
             <a:spLocks noGrp="1"/>
           </p:cNvSpPr>
           <p:nvPr>
-            <p:ph type="subTitle" idx="5"/>
+            <p:ph type="subTitle" idx="2"/>
           </p:nvPr>
         </p:nvSpPr>
         <p:spPr>
@@ -27957,6 +28465,18 @@
   <p:clrMapOvr>
     <a:masterClrMapping/>
   </p:clrMapOvr>
+  <mc:AlternateContent xmlns:mc="http://schemas.openxmlformats.org/markup-compatibility/2006">
+    <mc:Choice xmlns:p14="http://schemas.microsoft.com/office/powerpoint/2010/main" Requires="p14">
+      <p:transition spd="slow" p14:dur="1300">
+        <p14:pan dir="u"/>
+      </p:transition>
+    </mc:Choice>
+    <mc:Fallback>
+      <p:transition spd="slow">
+        <p:fade/>
+      </p:transition>
+    </mc:Fallback>
+  </mc:AlternateContent>
 </p:sld>
 </file>
 
@@ -28973,6 +29493,18 @@
   <p:clrMapOvr>
     <a:masterClrMapping/>
   </p:clrMapOvr>
+  <mc:AlternateContent xmlns:mc="http://schemas.openxmlformats.org/markup-compatibility/2006">
+    <mc:Choice xmlns:p14="http://schemas.microsoft.com/office/powerpoint/2010/main" Requires="p14">
+      <p:transition spd="slow" p14:dur="1600">
+        <p14:prism isContent="1" isInverted="1"/>
+      </p:transition>
+    </mc:Choice>
+    <mc:Fallback>
+      <p:transition spd="slow">
+        <p:fade/>
+      </p:transition>
+    </mc:Fallback>
+  </mc:AlternateContent>
 </p:sld>
 </file>
 
@@ -29037,6 +29569,44 @@
       </p:sp>
       <p:sp>
         <p:nvSpPr>
+          <p:cNvPr id="331" name="Google Shape;331;p34"/>
+          <p:cNvSpPr txBox="1">
+            <a:spLocks noGrp="1"/>
+          </p:cNvSpPr>
+          <p:nvPr>
+            <p:ph type="title" idx="2"/>
+          </p:nvPr>
+        </p:nvSpPr>
+        <p:spPr>
+          <a:prstGeom prst="rect">
+            <a:avLst/>
+          </a:prstGeom>
+        </p:spPr>
+        <p:txBody>
+          <a:bodyPr spcFirstLastPara="1" wrap="square" lIns="91425" tIns="91425" rIns="91425" bIns="91425" anchor="b" anchorCtr="0">
+            <a:noAutofit/>
+          </a:bodyPr>
+          <a:lstStyle/>
+          <a:p>
+            <a:pPr marL="0" lvl="0" indent="0" algn="ctr" rtl="0">
+              <a:spcBef>
+                <a:spcPts val="0"/>
+              </a:spcBef>
+              <a:spcAft>
+                <a:spcPts val="0"/>
+              </a:spcAft>
+              <a:buNone/>
+            </a:pPr>
+            <a:r>
+              <a:rPr lang="en" dirty="0"/>
+              <a:t>01</a:t>
+            </a:r>
+            <a:endParaRPr dirty="0"/>
+          </a:p>
+        </p:txBody>
+      </p:sp>
+      <p:sp>
+        <p:nvSpPr>
           <p:cNvPr id="330" name="Google Shape;330;p34"/>
           <p:cNvSpPr txBox="1">
             <a:spLocks noGrp="1"/>
@@ -29065,48 +29635,6 @@
               <a:rPr lang="en-US" b="1" dirty="0"/>
               <a:t>Introduction To The Project And Problem Overview </a:t>
             </a:r>
-          </a:p>
-        </p:txBody>
-      </p:sp>
-      <p:sp>
-        <p:nvSpPr>
-          <p:cNvPr id="331" name="Google Shape;331;p34"/>
-          <p:cNvSpPr txBox="1">
-            <a:spLocks noGrp="1"/>
-          </p:cNvSpPr>
-          <p:nvPr>
-            <p:ph type="title" idx="2"/>
-          </p:nvPr>
-        </p:nvSpPr>
-        <p:spPr>
-          <a:xfrm>
-            <a:off x="713213" y="1492050"/>
-            <a:ext cx="1194000" cy="1106700"/>
-          </a:xfrm>
-          <a:prstGeom prst="rect">
-            <a:avLst/>
-          </a:prstGeom>
-        </p:spPr>
-        <p:txBody>
-          <a:bodyPr spcFirstLastPara="1" wrap="square" lIns="91425" tIns="91425" rIns="91425" bIns="91425" anchor="b" anchorCtr="0">
-            <a:noAutofit/>
-          </a:bodyPr>
-          <a:lstStyle/>
-          <a:p>
-            <a:pPr marL="0" lvl="0" indent="0" algn="ctr" rtl="0">
-              <a:spcBef>
-                <a:spcPts val="0"/>
-              </a:spcBef>
-              <a:spcAft>
-                <a:spcPts val="0"/>
-              </a:spcAft>
-              <a:buNone/>
-            </a:pPr>
-            <a:r>
-              <a:rPr lang="en"/>
-              <a:t>01</a:t>
-            </a:r>
-            <a:endParaRPr/>
           </a:p>
         </p:txBody>
       </p:sp>
@@ -29444,6 +29972,172 @@
   <p:clrMapOvr>
     <a:masterClrMapping/>
   </p:clrMapOvr>
+  <mc:AlternateContent xmlns:mc="http://schemas.openxmlformats.org/markup-compatibility/2006">
+    <mc:Choice xmlns:p14="http://schemas.microsoft.com/office/powerpoint/2010/main" Requires="p14">
+      <p:transition spd="slow" p14:dur="1600">
+        <p14:conveyor dir="l"/>
+      </p:transition>
+    </mc:Choice>
+    <mc:Fallback>
+      <p:transition spd="slow">
+        <p:fade/>
+      </p:transition>
+    </mc:Fallback>
+  </mc:AlternateContent>
+  <p:timing>
+    <p:tnLst>
+      <p:par>
+        <p:cTn id="1" dur="indefinite" restart="never" nodeType="tmRoot">
+          <p:childTnLst>
+            <p:seq concurrent="1" nextAc="seek">
+              <p:cTn id="2" dur="indefinite" nodeType="mainSeq">
+                <p:childTnLst>
+                  <p:par>
+                    <p:cTn id="3" fill="hold">
+                      <p:stCondLst>
+                        <p:cond delay="indefinite"/>
+                        <p:cond evt="onBegin" delay="0">
+                          <p:tn val="2"/>
+                        </p:cond>
+                      </p:stCondLst>
+                      <p:childTnLst>
+                        <p:par>
+                          <p:cTn id="4" fill="hold">
+                            <p:stCondLst>
+                              <p:cond delay="0"/>
+                            </p:stCondLst>
+                            <p:childTnLst>
+                              <p:par>
+                                <p:cTn id="5" presetID="27" presetClass="emph" presetSubtype="0" fill="remove" grpId="0" nodeType="withEffect">
+                                  <p:stCondLst>
+                                    <p:cond delay="0"/>
+                                  </p:stCondLst>
+                                  <p:childTnLst>
+                                    <p:animClr clrSpc="rgb" dir="cw">
+                                      <p:cBhvr override="childStyle">
+                                        <p:cTn id="6" dur="250" autoRev="1" fill="remove"/>
+                                        <p:tgtEl>
+                                          <p:spTgt spid="331"/>
+                                        </p:tgtEl>
+                                        <p:attrNameLst>
+                                          <p:attrName>style.color</p:attrName>
+                                        </p:attrNameLst>
+                                      </p:cBhvr>
+                                      <p:to>
+                                        <a:schemeClr val="bg1"/>
+                                      </p:to>
+                                    </p:animClr>
+                                    <p:animClr clrSpc="rgb" dir="cw">
+                                      <p:cBhvr>
+                                        <p:cTn id="7" dur="250" autoRev="1" fill="remove"/>
+                                        <p:tgtEl>
+                                          <p:spTgt spid="331"/>
+                                        </p:tgtEl>
+                                        <p:attrNameLst>
+                                          <p:attrName>fillcolor</p:attrName>
+                                        </p:attrNameLst>
+                                      </p:cBhvr>
+                                      <p:to>
+                                        <a:schemeClr val="bg1"/>
+                                      </p:to>
+                                    </p:animClr>
+                                    <p:set>
+                                      <p:cBhvr>
+                                        <p:cTn id="8" dur="250" autoRev="1" fill="remove"/>
+                                        <p:tgtEl>
+                                          <p:spTgt spid="331"/>
+                                        </p:tgtEl>
+                                        <p:attrNameLst>
+                                          <p:attrName>fill.type</p:attrName>
+                                        </p:attrNameLst>
+                                      </p:cBhvr>
+                                      <p:to>
+                                        <p:strVal val="solid"/>
+                                      </p:to>
+                                    </p:set>
+                                    <p:set>
+                                      <p:cBhvr>
+                                        <p:cTn id="9" dur="250" autoRev="1" fill="remove"/>
+                                        <p:tgtEl>
+                                          <p:spTgt spid="331"/>
+                                        </p:tgtEl>
+                                        <p:attrNameLst>
+                                          <p:attrName>fill.on</p:attrName>
+                                        </p:attrNameLst>
+                                      </p:cBhvr>
+                                      <p:to>
+                                        <p:strVal val="true"/>
+                                      </p:to>
+                                    </p:set>
+                                  </p:childTnLst>
+                                </p:cTn>
+                              </p:par>
+                              <p:par>
+                                <p:cTn id="10" presetID="22" presetClass="entr" presetSubtype="1" fill="hold" nodeType="withEffect">
+                                  <p:stCondLst>
+                                    <p:cond delay="0"/>
+                                  </p:stCondLst>
+                                  <p:childTnLst>
+                                    <p:set>
+                                      <p:cBhvr>
+                                        <p:cTn id="11" dur="1" fill="hold">
+                                          <p:stCondLst>
+                                            <p:cond delay="0"/>
+                                          </p:stCondLst>
+                                        </p:cTn>
+                                        <p:tgtEl>
+                                          <p:spTgt spid="332"/>
+                                        </p:tgtEl>
+                                        <p:attrNameLst>
+                                          <p:attrName>style.visibility</p:attrName>
+                                        </p:attrNameLst>
+                                      </p:cBhvr>
+                                      <p:to>
+                                        <p:strVal val="visible"/>
+                                      </p:to>
+                                    </p:set>
+                                    <p:animEffect transition="in" filter="wipe(up)">
+                                      <p:cBhvr>
+                                        <p:cTn id="12" dur="500"/>
+                                        <p:tgtEl>
+                                          <p:spTgt spid="332"/>
+                                        </p:tgtEl>
+                                      </p:cBhvr>
+                                    </p:animEffect>
+                                  </p:childTnLst>
+                                </p:cTn>
+                              </p:par>
+                            </p:childTnLst>
+                          </p:cTn>
+                        </p:par>
+                      </p:childTnLst>
+                    </p:cTn>
+                  </p:par>
+                </p:childTnLst>
+              </p:cTn>
+              <p:prevCondLst>
+                <p:cond evt="onPrev" delay="0">
+                  <p:tgtEl>
+                    <p:sldTgt/>
+                  </p:tgtEl>
+                </p:cond>
+              </p:prevCondLst>
+              <p:nextCondLst>
+                <p:cond evt="onNext" delay="0">
+                  <p:tgtEl>
+                    <p:sldTgt/>
+                  </p:tgtEl>
+                </p:cond>
+              </p:nextCondLst>
+            </p:seq>
+          </p:childTnLst>
+        </p:cTn>
+      </p:par>
+    </p:tnLst>
+    <p:bldLst>
+      <p:bldP spid="331" grpId="0" animBg="1"/>
+    </p:bldLst>
+  </p:timing>
 </p:sld>
 </file>
 
@@ -29472,46 +30166,6 @@
       </p:grpSpPr>
       <p:sp>
         <p:nvSpPr>
-          <p:cNvPr id="314" name="Google Shape;314;p32">
-            <a:extLst>
-              <a:ext uri="{FF2B5EF4-FFF2-40B4-BE49-F238E27FC236}">
-                <a16:creationId xmlns:a16="http://schemas.microsoft.com/office/drawing/2014/main" id="{8D313EF3-9C7D-67D6-4260-159DA8A2DC63}"/>
-              </a:ext>
-            </a:extLst>
-          </p:cNvPr>
-          <p:cNvSpPr txBox="1">
-            <a:spLocks noGrp="1"/>
-          </p:cNvSpPr>
-          <p:nvPr>
-            <p:ph type="title"/>
-          </p:nvPr>
-        </p:nvSpPr>
-        <p:spPr>
-          <a:xfrm>
-            <a:off x="720000" y="445025"/>
-            <a:ext cx="7704000" cy="572700"/>
-          </a:xfrm>
-          <a:prstGeom prst="rect">
-            <a:avLst/>
-          </a:prstGeom>
-        </p:spPr>
-        <p:txBody>
-          <a:bodyPr spcFirstLastPara="1" wrap="square" lIns="91425" tIns="91425" rIns="91425" bIns="91425" anchor="t" anchorCtr="0">
-            <a:noAutofit/>
-          </a:bodyPr>
-          <a:lstStyle/>
-          <a:p>
-            <a:pPr lvl="0"/>
-            <a:r>
-              <a:rPr lang="en-US" dirty="0"/>
-              <a:t>Conclusion Of Phase I</a:t>
-            </a:r>
-            <a:endParaRPr dirty="0"/>
-          </a:p>
-        </p:txBody>
-      </p:sp>
-      <p:sp>
-        <p:nvSpPr>
           <p:cNvPr id="3" name="Subtitle 2">
             <a:extLst>
               <a:ext uri="{FF2B5EF4-FFF2-40B4-BE49-F238E27FC236}">
@@ -29523,7 +30177,7 @@
             <a:spLocks noGrp="1" noChangeArrowheads="1"/>
           </p:cNvSpPr>
           <p:nvPr>
-            <p:ph type="subTitle" idx="2"/>
+            <p:ph type="subTitle" idx="1"/>
           </p:nvPr>
         </p:nvSpPr>
         <p:spPr bwMode="auto">
@@ -29672,6 +30326,42 @@
           </a:p>
         </p:txBody>
       </p:sp>
+      <p:sp>
+        <p:nvSpPr>
+          <p:cNvPr id="314" name="Google Shape;314;p32">
+            <a:extLst>
+              <a:ext uri="{FF2B5EF4-FFF2-40B4-BE49-F238E27FC236}">
+                <a16:creationId xmlns:a16="http://schemas.microsoft.com/office/drawing/2014/main" id="{8D313EF3-9C7D-67D6-4260-159DA8A2DC63}"/>
+              </a:ext>
+            </a:extLst>
+          </p:cNvPr>
+          <p:cNvSpPr txBox="1">
+            <a:spLocks noGrp="1"/>
+          </p:cNvSpPr>
+          <p:nvPr>
+            <p:ph type="title"/>
+          </p:nvPr>
+        </p:nvSpPr>
+        <p:spPr>
+          <a:prstGeom prst="rect">
+            <a:avLst/>
+          </a:prstGeom>
+        </p:spPr>
+        <p:txBody>
+          <a:bodyPr spcFirstLastPara="1" wrap="square" lIns="91425" tIns="91425" rIns="91425" bIns="91425" anchor="t" anchorCtr="0">
+            <a:noAutofit/>
+          </a:bodyPr>
+          <a:lstStyle/>
+          <a:p>
+            <a:pPr lvl="0"/>
+            <a:r>
+              <a:rPr lang="en-US" dirty="0"/>
+              <a:t>Conclusion Of Phase I</a:t>
+            </a:r>
+            <a:endParaRPr dirty="0"/>
+          </a:p>
+        </p:txBody>
+      </p:sp>
     </p:spTree>
     <p:extLst>
       <p:ext uri="{BB962C8B-B14F-4D97-AF65-F5344CB8AC3E}">
@@ -29682,6 +30372,18 @@
   <p:clrMapOvr>
     <a:masterClrMapping/>
   </p:clrMapOvr>
+  <mc:AlternateContent xmlns:mc="http://schemas.openxmlformats.org/markup-compatibility/2006">
+    <mc:Choice xmlns:p14="http://schemas.microsoft.com/office/powerpoint/2010/main" Requires="p14">
+      <p:transition spd="slow" p14:dur="1600">
+        <p14:prism isContent="1" isInverted="1"/>
+      </p:transition>
+    </mc:Choice>
+    <mc:Fallback>
+      <p:transition spd="slow">
+        <p:fade/>
+      </p:transition>
+    </mc:Fallback>
+  </mc:AlternateContent>
 </p:sld>
 </file>
 
@@ -29725,10 +30427,6 @@
           </p:nvPr>
         </p:nvSpPr>
         <p:spPr>
-          <a:xfrm>
-            <a:off x="720000" y="445025"/>
-            <a:ext cx="7704000" cy="572700"/>
-          </a:xfrm>
           <a:prstGeom prst="rect">
             <a:avLst/>
           </a:prstGeom>
@@ -30466,6 +31164,18 @@
   <p:clrMapOvr>
     <a:masterClrMapping/>
   </p:clrMapOvr>
+  <mc:AlternateContent xmlns:mc="http://schemas.openxmlformats.org/markup-compatibility/2006">
+    <mc:Choice xmlns:p14="http://schemas.microsoft.com/office/powerpoint/2010/main" Requires="p14">
+      <p:transition spd="slow" p14:dur="1500">
+        <p14:window dir="vert"/>
+      </p:transition>
+    </mc:Choice>
+    <mc:Fallback>
+      <p:transition spd="slow">
+        <p:fade/>
+      </p:transition>
+    </mc:Fallback>
+  </mc:AlternateContent>
 </p:sld>
 </file>
 
@@ -30497,10 +31207,6 @@
           </p:nvPr>
         </p:nvSpPr>
         <p:spPr>
-          <a:xfrm>
-            <a:off x="720000" y="445025"/>
-            <a:ext cx="7704000" cy="572700"/>
-          </a:xfrm>
           <a:prstGeom prst="rect">
             <a:avLst/>
           </a:prstGeom>
@@ -31637,6 +32343,18 @@
   <p:clrMapOvr>
     <a:masterClrMapping/>
   </p:clrMapOvr>
+  <mc:AlternateContent xmlns:mc="http://schemas.openxmlformats.org/markup-compatibility/2006">
+    <mc:Choice xmlns:p14="http://schemas.microsoft.com/office/powerpoint/2010/main" Requires="p14">
+      <p:transition spd="slow" p14:dur="1500">
+        <p14:window dir="vert"/>
+      </p:transition>
+    </mc:Choice>
+    <mc:Fallback>
+      <p:transition spd="slow">
+        <p:fade/>
+      </p:transition>
+    </mc:Fallback>
+  </mc:AlternateContent>
 </p:sld>
 </file>
 
@@ -31781,6 +32499,189 @@
   <p:clrMapOvr>
     <a:masterClrMapping/>
   </p:clrMapOvr>
+  <mc:AlternateContent xmlns:mc="http://schemas.openxmlformats.org/markup-compatibility/2006">
+    <mc:Choice xmlns:p14="http://schemas.microsoft.com/office/powerpoint/2010/main" Requires="p14">
+      <p:transition spd="slow" p14:dur="1500">
+        <p14:window dir="vert"/>
+      </p:transition>
+    </mc:Choice>
+    <mc:Fallback>
+      <p:transition spd="slow">
+        <p:fade/>
+      </p:transition>
+    </mc:Fallback>
+  </mc:AlternateContent>
+  <p:timing>
+    <p:tnLst>
+      <p:par>
+        <p:cTn id="1" dur="indefinite" restart="never" nodeType="tmRoot">
+          <p:childTnLst>
+            <p:seq concurrent="1" nextAc="seek">
+              <p:cTn id="2" dur="indefinite" nodeType="mainSeq">
+                <p:childTnLst>
+                  <p:par>
+                    <p:cTn id="3" fill="hold">
+                      <p:stCondLst>
+                        <p:cond delay="indefinite"/>
+                      </p:stCondLst>
+                      <p:childTnLst>
+                        <p:par>
+                          <p:cTn id="4" fill="hold">
+                            <p:stCondLst>
+                              <p:cond delay="0"/>
+                            </p:stCondLst>
+                            <p:childTnLst>
+                              <p:par>
+                                <p:cTn id="5" presetID="34" presetClass="emph" presetSubtype="0" fill="hold" nodeType="clickEffect">
+                                  <p:stCondLst>
+                                    <p:cond delay="0"/>
+                                  </p:stCondLst>
+                                  <p:iterate type="lt">
+                                    <p:tmPct val="10000"/>
+                                  </p:iterate>
+                                  <p:childTnLst>
+                                    <p:animMotion origin="layout" path="M 0.0 0.0 L 0.0 -0.07213" pathEditMode="relative" ptsTypes="">
+                                      <p:cBhvr>
+                                        <p:cTn id="6" dur="250" accel="50000" decel="50000" autoRev="1" fill="hold">
+                                          <p:stCondLst>
+                                            <p:cond delay="0"/>
+                                          </p:stCondLst>
+                                        </p:cTn>
+                                        <p:tgtEl>
+                                          <p:spTgt spid="281"/>
+                                        </p:tgtEl>
+                                        <p:attrNameLst>
+                                          <p:attrName>ppt_x</p:attrName>
+                                          <p:attrName>ppt_y</p:attrName>
+                                        </p:attrNameLst>
+                                      </p:cBhvr>
+                                    </p:animMotion>
+                                    <p:animRot by="1500000">
+                                      <p:cBhvr>
+                                        <p:cTn id="7" dur="125" fill="hold">
+                                          <p:stCondLst>
+                                            <p:cond delay="0"/>
+                                          </p:stCondLst>
+                                        </p:cTn>
+                                        <p:tgtEl>
+                                          <p:spTgt spid="281"/>
+                                        </p:tgtEl>
+                                        <p:attrNameLst>
+                                          <p:attrName>r</p:attrName>
+                                        </p:attrNameLst>
+                                      </p:cBhvr>
+                                    </p:animRot>
+                                    <p:animRot by="-1500000">
+                                      <p:cBhvr>
+                                        <p:cTn id="8" dur="125" fill="hold">
+                                          <p:stCondLst>
+                                            <p:cond delay="125"/>
+                                          </p:stCondLst>
+                                        </p:cTn>
+                                        <p:tgtEl>
+                                          <p:spTgt spid="281"/>
+                                        </p:tgtEl>
+                                        <p:attrNameLst>
+                                          <p:attrName>r</p:attrName>
+                                        </p:attrNameLst>
+                                      </p:cBhvr>
+                                    </p:animRot>
+                                    <p:animRot by="-1500000">
+                                      <p:cBhvr>
+                                        <p:cTn id="9" dur="125" fill="hold">
+                                          <p:stCondLst>
+                                            <p:cond delay="250"/>
+                                          </p:stCondLst>
+                                        </p:cTn>
+                                        <p:tgtEl>
+                                          <p:spTgt spid="281"/>
+                                        </p:tgtEl>
+                                        <p:attrNameLst>
+                                          <p:attrName>r</p:attrName>
+                                        </p:attrNameLst>
+                                      </p:cBhvr>
+                                    </p:animRot>
+                                    <p:animRot by="1500000">
+                                      <p:cBhvr>
+                                        <p:cTn id="10" dur="125" fill="hold">
+                                          <p:stCondLst>
+                                            <p:cond delay="375"/>
+                                          </p:stCondLst>
+                                        </p:cTn>
+                                        <p:tgtEl>
+                                          <p:spTgt spid="281"/>
+                                        </p:tgtEl>
+                                        <p:attrNameLst>
+                                          <p:attrName>r</p:attrName>
+                                        </p:attrNameLst>
+                                      </p:cBhvr>
+                                    </p:animRot>
+                                  </p:childTnLst>
+                                </p:cTn>
+                              </p:par>
+                              <p:par>
+                                <p:cTn id="11" presetID="22" presetClass="entr" presetSubtype="8" fill="hold" nodeType="withEffect">
+                                  <p:stCondLst>
+                                    <p:cond delay="0"/>
+                                  </p:stCondLst>
+                                  <p:childTnLst>
+                                    <p:set>
+                                      <p:cBhvr>
+                                        <p:cTn id="12" dur="1" fill="hold">
+                                          <p:stCondLst>
+                                            <p:cond delay="0"/>
+                                          </p:stCondLst>
+                                        </p:cTn>
+                                        <p:tgtEl>
+                                          <p:spTgt spid="283"/>
+                                        </p:tgtEl>
+                                        <p:attrNameLst>
+                                          <p:attrName>style.visibility</p:attrName>
+                                        </p:attrNameLst>
+                                      </p:cBhvr>
+                                      <p:to>
+                                        <p:strVal val="visible"/>
+                                      </p:to>
+                                    </p:set>
+                                    <p:animEffect transition="in" filter="wipe(left)">
+                                      <p:cBhvr>
+                                        <p:cTn id="13" dur="500"/>
+                                        <p:tgtEl>
+                                          <p:spTgt spid="283"/>
+                                        </p:tgtEl>
+                                      </p:cBhvr>
+                                    </p:animEffect>
+                                  </p:childTnLst>
+                                </p:cTn>
+                              </p:par>
+                            </p:childTnLst>
+                          </p:cTn>
+                        </p:par>
+                      </p:childTnLst>
+                    </p:cTn>
+                  </p:par>
+                </p:childTnLst>
+              </p:cTn>
+              <p:prevCondLst>
+                <p:cond evt="onPrev" delay="0">
+                  <p:tgtEl>
+                    <p:sldTgt/>
+                  </p:tgtEl>
+                </p:cond>
+              </p:prevCondLst>
+              <p:nextCondLst>
+                <p:cond evt="onNext" delay="0">
+                  <p:tgtEl>
+                    <p:sldTgt/>
+                  </p:tgtEl>
+                </p:cond>
+              </p:nextCondLst>
+            </p:seq>
+          </p:childTnLst>
+        </p:cTn>
+      </p:par>
+    </p:tnLst>
+  </p:timing>
 </p:sld>
 </file>
 
@@ -31803,40 +32704,6 @@
       </p:grpSpPr>
       <p:sp>
         <p:nvSpPr>
-          <p:cNvPr id="314" name="Google Shape;314;p32"/>
-          <p:cNvSpPr txBox="1">
-            <a:spLocks noGrp="1"/>
-          </p:cNvSpPr>
-          <p:nvPr>
-            <p:ph type="title"/>
-          </p:nvPr>
-        </p:nvSpPr>
-        <p:spPr>
-          <a:xfrm>
-            <a:off x="720000" y="445025"/>
-            <a:ext cx="7704000" cy="572700"/>
-          </a:xfrm>
-          <a:prstGeom prst="rect">
-            <a:avLst/>
-          </a:prstGeom>
-        </p:spPr>
-        <p:txBody>
-          <a:bodyPr spcFirstLastPara="1" wrap="square" lIns="91425" tIns="91425" rIns="91425" bIns="91425" anchor="t" anchorCtr="0">
-            <a:noAutofit/>
-          </a:bodyPr>
-          <a:lstStyle/>
-          <a:p>
-            <a:pPr lvl="0"/>
-            <a:r>
-              <a:rPr lang="en-US" dirty="0"/>
-              <a:t>The origin of the story </a:t>
-            </a:r>
-            <a:endParaRPr dirty="0"/>
-          </a:p>
-        </p:txBody>
-      </p:sp>
-      <p:sp>
-        <p:nvSpPr>
           <p:cNvPr id="3" name="Subtitle 2">
             <a:extLst>
               <a:ext uri="{FF2B5EF4-FFF2-40B4-BE49-F238E27FC236}">
@@ -31848,7 +32715,7 @@
             <a:spLocks noGrp="1" noChangeArrowheads="1"/>
           </p:cNvSpPr>
           <p:nvPr>
-            <p:ph type="subTitle" idx="2"/>
+            <p:ph type="subTitle" idx="1"/>
           </p:nvPr>
         </p:nvSpPr>
         <p:spPr bwMode="auto">
@@ -32115,11 +32982,53 @@
           </a:p>
         </p:txBody>
       </p:sp>
+      <p:sp>
+        <p:nvSpPr>
+          <p:cNvPr id="314" name="Google Shape;314;p32"/>
+          <p:cNvSpPr txBox="1">
+            <a:spLocks noGrp="1"/>
+          </p:cNvSpPr>
+          <p:nvPr>
+            <p:ph type="title"/>
+          </p:nvPr>
+        </p:nvSpPr>
+        <p:spPr>
+          <a:prstGeom prst="rect">
+            <a:avLst/>
+          </a:prstGeom>
+        </p:spPr>
+        <p:txBody>
+          <a:bodyPr spcFirstLastPara="1" wrap="square" lIns="91425" tIns="91425" rIns="91425" bIns="91425" anchor="t" anchorCtr="0">
+            <a:noAutofit/>
+          </a:bodyPr>
+          <a:lstStyle/>
+          <a:p>
+            <a:pPr lvl="0"/>
+            <a:r>
+              <a:rPr lang="en-US" dirty="0"/>
+              <a:t>The origin of the story </a:t>
+            </a:r>
+            <a:endParaRPr dirty="0"/>
+          </a:p>
+        </p:txBody>
+      </p:sp>
     </p:spTree>
   </p:cSld>
   <p:clrMapOvr>
     <a:masterClrMapping/>
   </p:clrMapOvr>
+  <mc:AlternateContent xmlns:mc="http://schemas.openxmlformats.org/markup-compatibility/2006">
+    <mc:Choice xmlns:p14="http://schemas.microsoft.com/office/powerpoint/2010/main" Requires="p14">
+      <p:transition spd="slow" p14:dur="2000">
+        <p14:ferris dir="l"/>
+      </p:transition>
+    </mc:Choice>
+    <mc:Fallback>
+      <p:transition spd="slow">
+        <p:fade/>
+      </p:transition>
+    </mc:Fallback>
+  </mc:AlternateContent>
 </p:sld>
 </file>
 
@@ -32142,39 +33051,6 @@
       </p:grpSpPr>
       <p:sp>
         <p:nvSpPr>
-          <p:cNvPr id="314" name="Google Shape;314;p32"/>
-          <p:cNvSpPr txBox="1">
-            <a:spLocks noGrp="1"/>
-          </p:cNvSpPr>
-          <p:nvPr>
-            <p:ph type="title"/>
-          </p:nvPr>
-        </p:nvSpPr>
-        <p:spPr>
-          <a:xfrm>
-            <a:off x="720000" y="445025"/>
-            <a:ext cx="7704000" cy="572700"/>
-          </a:xfrm>
-          <a:prstGeom prst="rect">
-            <a:avLst/>
-          </a:prstGeom>
-        </p:spPr>
-        <p:txBody>
-          <a:bodyPr spcFirstLastPara="1" wrap="square" lIns="91425" tIns="91425" rIns="91425" bIns="91425" anchor="t" anchorCtr="0">
-            <a:noAutofit/>
-          </a:bodyPr>
-          <a:lstStyle/>
-          <a:p>
-            <a:pPr lvl="0"/>
-            <a:r>
-              <a:rPr lang="en-US" dirty="0"/>
-              <a:t>The Aggravator (COVID-19)</a:t>
-            </a:r>
-          </a:p>
-        </p:txBody>
-      </p:sp>
-      <p:sp>
-        <p:nvSpPr>
           <p:cNvPr id="3" name="Subtitle 2">
             <a:extLst>
               <a:ext uri="{FF2B5EF4-FFF2-40B4-BE49-F238E27FC236}">
@@ -32186,7 +33062,7 @@
             <a:spLocks noGrp="1" noChangeArrowheads="1"/>
           </p:cNvSpPr>
           <p:nvPr>
-            <p:ph type="subTitle" idx="2"/>
+            <p:ph type="subTitle" idx="1"/>
           </p:nvPr>
         </p:nvSpPr>
         <p:spPr bwMode="auto">
@@ -32603,6 +33479,35 @@
           </a:p>
         </p:txBody>
       </p:sp>
+      <p:sp>
+        <p:nvSpPr>
+          <p:cNvPr id="314" name="Google Shape;314;p32"/>
+          <p:cNvSpPr txBox="1">
+            <a:spLocks noGrp="1"/>
+          </p:cNvSpPr>
+          <p:nvPr>
+            <p:ph type="title"/>
+          </p:nvPr>
+        </p:nvSpPr>
+        <p:spPr>
+          <a:prstGeom prst="rect">
+            <a:avLst/>
+          </a:prstGeom>
+        </p:spPr>
+        <p:txBody>
+          <a:bodyPr spcFirstLastPara="1" wrap="square" lIns="91425" tIns="91425" rIns="91425" bIns="91425" anchor="t" anchorCtr="0">
+            <a:noAutofit/>
+          </a:bodyPr>
+          <a:lstStyle/>
+          <a:p>
+            <a:pPr lvl="0"/>
+            <a:r>
+              <a:rPr lang="en-US" dirty="0"/>
+              <a:t>The Aggravator (COVID-19)</a:t>
+            </a:r>
+          </a:p>
+        </p:txBody>
+      </p:sp>
     </p:spTree>
     <p:extLst>
       <p:ext uri="{BB962C8B-B14F-4D97-AF65-F5344CB8AC3E}">
@@ -32613,6 +33518,18 @@
   <p:clrMapOvr>
     <a:masterClrMapping/>
   </p:clrMapOvr>
+  <mc:AlternateContent xmlns:mc="http://schemas.openxmlformats.org/markup-compatibility/2006">
+    <mc:Choice xmlns:p14="http://schemas.microsoft.com/office/powerpoint/2010/main" Requires="p14">
+      <p:transition spd="slow" p14:dur="2000">
+        <p14:ferris dir="l"/>
+      </p:transition>
+    </mc:Choice>
+    <mc:Fallback>
+      <p:transition spd="slow">
+        <p:fade/>
+      </p:transition>
+    </mc:Fallback>
+  </mc:AlternateContent>
 </p:sld>
 </file>
 
@@ -32895,6 +33812,18 @@
   <p:clrMapOvr>
     <a:masterClrMapping/>
   </p:clrMapOvr>
+  <mc:AlternateContent xmlns:mc="http://schemas.openxmlformats.org/markup-compatibility/2006">
+    <mc:Choice xmlns:p14="http://schemas.microsoft.com/office/powerpoint/2010/main" Requires="p14">
+      <p:transition spd="slow" p14:dur="2000">
+        <p14:ferris dir="l"/>
+      </p:transition>
+    </mc:Choice>
+    <mc:Fallback>
+      <p:transition spd="slow">
+        <p:fade/>
+      </p:transition>
+    </mc:Fallback>
+  </mc:AlternateContent>
 </p:sld>
 </file>
 
@@ -33093,6 +34022,18 @@
   <p:clrMapOvr>
     <a:masterClrMapping/>
   </p:clrMapOvr>
+  <mc:AlternateContent xmlns:mc="http://schemas.openxmlformats.org/markup-compatibility/2006">
+    <mc:Choice xmlns:p14="http://schemas.microsoft.com/office/powerpoint/2010/main" Requires="p14">
+      <p:transition spd="slow" p14:dur="2000">
+        <p14:ferris dir="l"/>
+      </p:transition>
+    </mc:Choice>
+    <mc:Fallback>
+      <p:transition spd="slow">
+        <p:fade/>
+      </p:transition>
+    </mc:Fallback>
+  </mc:AlternateContent>
 </p:sld>
 </file>
 
@@ -33119,6 +34060,242 @@
           <a:chExt cx="0" cy="0"/>
         </a:xfrm>
       </p:grpSpPr>
+      <p:sp>
+        <p:nvSpPr>
+          <p:cNvPr id="5" name="Rectangle 1">
+            <a:extLst>
+              <a:ext uri="{FF2B5EF4-FFF2-40B4-BE49-F238E27FC236}">
+                <a16:creationId xmlns:a16="http://schemas.microsoft.com/office/drawing/2014/main" id="{9CD9A0B5-2820-A567-93F8-01E335C0BBE5}"/>
+              </a:ext>
+            </a:extLst>
+          </p:cNvPr>
+          <p:cNvSpPr>
+            <a:spLocks noGrp="1" noChangeArrowheads="1"/>
+          </p:cNvSpPr>
+          <p:nvPr>
+            <p:ph type="subTitle" idx="1"/>
+          </p:nvPr>
+        </p:nvSpPr>
+        <p:spPr bwMode="auto">
+          <a:xfrm>
+            <a:off x="986308" y="1433714"/>
+            <a:ext cx="7963080" cy="3000821"/>
+          </a:xfrm>
+          <a:prstGeom prst="rect">
+            <a:avLst/>
+          </a:prstGeom>
+          <a:noFill/>
+          <a:ln>
+            <a:noFill/>
+          </a:ln>
+          <a:effectLst/>
+          <a:extLst>
+            <a:ext uri="{909E8E84-426E-40DD-AFC4-6F175D3DCCD1}">
+              <a14:hiddenFill xmlns:a14="http://schemas.microsoft.com/office/drawing/2010/main">
+                <a:solidFill>
+                  <a:schemeClr val="accent1"/>
+                </a:solidFill>
+              </a14:hiddenFill>
+            </a:ext>
+            <a:ext uri="{91240B29-F687-4F45-9708-019B960494DF}">
+              <a14:hiddenLine xmlns:a14="http://schemas.microsoft.com/office/drawing/2010/main" w="9525">
+                <a:solidFill>
+                  <a:schemeClr val="tx1"/>
+                </a:solidFill>
+                <a:miter lim="800000"/>
+                <a:headEnd/>
+                <a:tailEnd/>
+              </a14:hiddenLine>
+            </a:ext>
+            <a:ext uri="{AF507438-7753-43E0-B8FC-AC1667EBCBE1}">
+              <a14:hiddenEffects xmlns:a14="http://schemas.microsoft.com/office/drawing/2010/main">
+                <a:effectLst>
+                  <a:outerShdw dist="35921" dir="2700000" algn="ctr" rotWithShape="0">
+                    <a:schemeClr val="bg2"/>
+                  </a:outerShdw>
+                </a:effectLst>
+              </a14:hiddenEffects>
+            </a:ext>
+          </a:extLst>
+        </p:spPr>
+        <p:txBody>
+          <a:bodyPr vert="horz" wrap="square" lIns="91440" tIns="45720" rIns="91440" bIns="45720" numCol="1" anchor="ctr" anchorCtr="0" compatLnSpc="1">
+            <a:prstTxWarp prst="textNoShape">
+              <a:avLst/>
+            </a:prstTxWarp>
+            <a:spAutoFit/>
+          </a:bodyPr>
+          <a:lstStyle/>
+          <a:p>
+            <a:pPr marL="0" marR="0" lvl="0" indent="0" algn="l" defTabSz="914400" rtl="0" eaLnBrk="0" fontAlgn="base" latinLnBrk="0" hangingPunct="0">
+              <a:lnSpc>
+                <a:spcPct val="150000"/>
+              </a:lnSpc>
+              <a:spcBef>
+                <a:spcPct val="0"/>
+              </a:spcBef>
+              <a:spcAft>
+                <a:spcPct val="0"/>
+              </a:spcAft>
+              <a:buClrTx/>
+              <a:buSzTx/>
+              <a:tabLst/>
+            </a:pPr>
+            <a:r>
+              <a:rPr kumimoji="0" lang="en-US" altLang="en-US" sz="1800" b="1" i="0" u="none" strike="noStrike" cap="none" normalizeH="0" baseline="0" dirty="0">
+                <a:ln>
+                  <a:noFill/>
+                </a:ln>
+                <a:solidFill>
+                  <a:schemeClr val="tx1"/>
+                </a:solidFill>
+                <a:effectLst/>
+                <a:latin typeface="DM Sans" pitchFamily="2" charset="0"/>
+              </a:rPr>
+              <a:t>Structured Framework:</a:t>
+            </a:r>
+            <a:r>
+              <a:rPr kumimoji="0" lang="en-US" altLang="en-US" sz="1800" b="0" i="0" u="none" strike="noStrike" cap="none" normalizeH="0" baseline="0" dirty="0">
+                <a:ln>
+                  <a:noFill/>
+                </a:ln>
+                <a:solidFill>
+                  <a:schemeClr val="tx1"/>
+                </a:solidFill>
+                <a:effectLst/>
+                <a:latin typeface="DM Sans" pitchFamily="2" charset="0"/>
+              </a:rPr>
+              <a:t> Model the league using Integer Linear Programming (ILP).</a:t>
+            </a:r>
+          </a:p>
+          <a:p>
+            <a:pPr marL="0" marR="0" lvl="0" indent="0" algn="l" defTabSz="914400" rtl="0" eaLnBrk="0" fontAlgn="base" latinLnBrk="0" hangingPunct="0">
+              <a:lnSpc>
+                <a:spcPct val="150000"/>
+              </a:lnSpc>
+              <a:spcBef>
+                <a:spcPct val="0"/>
+              </a:spcBef>
+              <a:spcAft>
+                <a:spcPct val="0"/>
+              </a:spcAft>
+              <a:buClrTx/>
+              <a:buSzTx/>
+              <a:tabLst/>
+            </a:pPr>
+            <a:r>
+              <a:rPr kumimoji="0" lang="en-US" altLang="en-US" sz="1800" b="1" i="0" u="none" strike="noStrike" cap="none" normalizeH="0" baseline="0" dirty="0">
+                <a:ln>
+                  <a:noFill/>
+                </a:ln>
+                <a:solidFill>
+                  <a:schemeClr val="tx1"/>
+                </a:solidFill>
+                <a:effectLst/>
+                <a:latin typeface="DM Sans" pitchFamily="2" charset="0"/>
+              </a:rPr>
+              <a:t>Time Management:</a:t>
+            </a:r>
+            <a:r>
+              <a:rPr kumimoji="0" lang="en-US" altLang="en-US" sz="1800" b="0" i="0" u="none" strike="noStrike" cap="none" normalizeH="0" baseline="0" dirty="0">
+                <a:ln>
+                  <a:noFill/>
+                </a:ln>
+                <a:solidFill>
+                  <a:schemeClr val="tx1"/>
+                </a:solidFill>
+                <a:effectLst/>
+                <a:latin typeface="DM Sans" pitchFamily="2" charset="0"/>
+              </a:rPr>
+              <a:t> Fit the standard 34-round season strictly between August and May.</a:t>
+            </a:r>
+          </a:p>
+          <a:p>
+            <a:pPr marL="0" marR="0" lvl="0" indent="0" algn="l" defTabSz="914400" rtl="0" eaLnBrk="0" fontAlgn="base" latinLnBrk="0" hangingPunct="0">
+              <a:lnSpc>
+                <a:spcPct val="150000"/>
+              </a:lnSpc>
+              <a:spcBef>
+                <a:spcPct val="0"/>
+              </a:spcBef>
+              <a:spcAft>
+                <a:spcPct val="0"/>
+              </a:spcAft>
+              <a:buClrTx/>
+              <a:buSzTx/>
+              <a:tabLst/>
+            </a:pPr>
+            <a:r>
+              <a:rPr kumimoji="0" lang="en-US" altLang="en-US" sz="1800" b="1" i="0" u="none" strike="noStrike" cap="none" normalizeH="0" baseline="0" dirty="0">
+                <a:ln>
+                  <a:noFill/>
+                </a:ln>
+                <a:solidFill>
+                  <a:schemeClr val="tx1"/>
+                </a:solidFill>
+                <a:effectLst/>
+                <a:latin typeface="DM Sans" pitchFamily="2" charset="0"/>
+              </a:rPr>
+              <a:t>Constraint Satisfaction:</a:t>
+            </a:r>
+            <a:r>
+              <a:rPr kumimoji="0" lang="en-US" altLang="en-US" sz="1800" b="0" i="0" u="none" strike="noStrike" cap="none" normalizeH="0" baseline="0" dirty="0">
+                <a:ln>
+                  <a:noFill/>
+                </a:ln>
+                <a:solidFill>
+                  <a:schemeClr val="tx1"/>
+                </a:solidFill>
+                <a:effectLst/>
+                <a:latin typeface="DM Sans" pitchFamily="2" charset="0"/>
+              </a:rPr>
+              <a:t> Respect CAF commitments, Security refusals, and FIFA breaks.</a:t>
+            </a:r>
+          </a:p>
+          <a:p>
+            <a:pPr marL="0" marR="0" lvl="0" indent="0" algn="l" defTabSz="914400" rtl="0" eaLnBrk="0" fontAlgn="base" latinLnBrk="0" hangingPunct="0">
+              <a:lnSpc>
+                <a:spcPct val="150000"/>
+              </a:lnSpc>
+              <a:spcBef>
+                <a:spcPct val="0"/>
+              </a:spcBef>
+              <a:spcAft>
+                <a:spcPct val="0"/>
+              </a:spcAft>
+              <a:buClrTx/>
+              <a:buSzTx/>
+              <a:tabLst/>
+            </a:pPr>
+            <a:r>
+              <a:rPr kumimoji="0" lang="en-US" altLang="en-US" sz="1800" b="1" i="0" u="none" strike="noStrike" cap="none" normalizeH="0" baseline="0" dirty="0">
+                <a:ln>
+                  <a:noFill/>
+                </a:ln>
+                <a:solidFill>
+                  <a:schemeClr val="tx1"/>
+                </a:solidFill>
+                <a:effectLst/>
+                <a:latin typeface="DM Sans" pitchFamily="2" charset="0"/>
+              </a:rPr>
+              <a:t>Fairness:</a:t>
+            </a:r>
+            <a:r>
+              <a:rPr kumimoji="0" lang="en-US" altLang="en-US" sz="1800" b="0" i="0" u="none" strike="noStrike" cap="none" normalizeH="0" baseline="0" dirty="0">
+                <a:ln>
+                  <a:noFill/>
+                </a:ln>
+                <a:solidFill>
+                  <a:schemeClr val="tx1"/>
+                </a:solidFill>
+                <a:effectLst/>
+                <a:latin typeface="DM Sans" pitchFamily="2" charset="0"/>
+              </a:rPr>
+              <a:t> Balance Home/Away streaks and travel distances.</a:t>
+            </a:r>
+          </a:p>
+        </p:txBody>
+      </p:sp>
       <p:sp>
         <p:nvSpPr>
           <p:cNvPr id="314" name="Google Shape;314;p32">
@@ -33439,242 +34616,6 @@
           </a:lstStyle>
           <a:p>
             <a:endParaRPr lang="en-US" sz="2400" dirty="0"/>
-          </a:p>
-        </p:txBody>
-      </p:sp>
-      <p:sp>
-        <p:nvSpPr>
-          <p:cNvPr id="5" name="Rectangle 1">
-            <a:extLst>
-              <a:ext uri="{FF2B5EF4-FFF2-40B4-BE49-F238E27FC236}">
-                <a16:creationId xmlns:a16="http://schemas.microsoft.com/office/drawing/2014/main" id="{9CD9A0B5-2820-A567-93F8-01E335C0BBE5}"/>
-              </a:ext>
-            </a:extLst>
-          </p:cNvPr>
-          <p:cNvSpPr>
-            <a:spLocks noGrp="1" noChangeArrowheads="1"/>
-          </p:cNvSpPr>
-          <p:nvPr>
-            <p:ph type="subTitle" idx="2"/>
-          </p:nvPr>
-        </p:nvSpPr>
-        <p:spPr bwMode="auto">
-          <a:xfrm>
-            <a:off x="986308" y="1433714"/>
-            <a:ext cx="7963080" cy="3000821"/>
-          </a:xfrm>
-          <a:prstGeom prst="rect">
-            <a:avLst/>
-          </a:prstGeom>
-          <a:noFill/>
-          <a:ln>
-            <a:noFill/>
-          </a:ln>
-          <a:effectLst/>
-          <a:extLst>
-            <a:ext uri="{909E8E84-426E-40DD-AFC4-6F175D3DCCD1}">
-              <a14:hiddenFill xmlns:a14="http://schemas.microsoft.com/office/drawing/2010/main">
-                <a:solidFill>
-                  <a:schemeClr val="accent1"/>
-                </a:solidFill>
-              </a14:hiddenFill>
-            </a:ext>
-            <a:ext uri="{91240B29-F687-4F45-9708-019B960494DF}">
-              <a14:hiddenLine xmlns:a14="http://schemas.microsoft.com/office/drawing/2010/main" w="9525">
-                <a:solidFill>
-                  <a:schemeClr val="tx1"/>
-                </a:solidFill>
-                <a:miter lim="800000"/>
-                <a:headEnd/>
-                <a:tailEnd/>
-              </a14:hiddenLine>
-            </a:ext>
-            <a:ext uri="{AF507438-7753-43E0-B8FC-AC1667EBCBE1}">
-              <a14:hiddenEffects xmlns:a14="http://schemas.microsoft.com/office/drawing/2010/main">
-                <a:effectLst>
-                  <a:outerShdw dist="35921" dir="2700000" algn="ctr" rotWithShape="0">
-                    <a:schemeClr val="bg2"/>
-                  </a:outerShdw>
-                </a:effectLst>
-              </a14:hiddenEffects>
-            </a:ext>
-          </a:extLst>
-        </p:spPr>
-        <p:txBody>
-          <a:bodyPr vert="horz" wrap="square" lIns="91440" tIns="45720" rIns="91440" bIns="45720" numCol="1" anchor="ctr" anchorCtr="0" compatLnSpc="1">
-            <a:prstTxWarp prst="textNoShape">
-              <a:avLst/>
-            </a:prstTxWarp>
-            <a:spAutoFit/>
-          </a:bodyPr>
-          <a:lstStyle/>
-          <a:p>
-            <a:pPr marL="0" marR="0" lvl="0" indent="0" algn="l" defTabSz="914400" rtl="0" eaLnBrk="0" fontAlgn="base" latinLnBrk="0" hangingPunct="0">
-              <a:lnSpc>
-                <a:spcPct val="150000"/>
-              </a:lnSpc>
-              <a:spcBef>
-                <a:spcPct val="0"/>
-              </a:spcBef>
-              <a:spcAft>
-                <a:spcPct val="0"/>
-              </a:spcAft>
-              <a:buClrTx/>
-              <a:buSzTx/>
-              <a:tabLst/>
-            </a:pPr>
-            <a:r>
-              <a:rPr kumimoji="0" lang="en-US" altLang="en-US" sz="1800" b="1" i="0" u="none" strike="noStrike" cap="none" normalizeH="0" baseline="0" dirty="0">
-                <a:ln>
-                  <a:noFill/>
-                </a:ln>
-                <a:solidFill>
-                  <a:schemeClr val="tx1"/>
-                </a:solidFill>
-                <a:effectLst/>
-                <a:latin typeface="DM Sans" pitchFamily="2" charset="0"/>
-              </a:rPr>
-              <a:t>Structured Framework:</a:t>
-            </a:r>
-            <a:r>
-              <a:rPr kumimoji="0" lang="en-US" altLang="en-US" sz="1800" b="0" i="0" u="none" strike="noStrike" cap="none" normalizeH="0" baseline="0" dirty="0">
-                <a:ln>
-                  <a:noFill/>
-                </a:ln>
-                <a:solidFill>
-                  <a:schemeClr val="tx1"/>
-                </a:solidFill>
-                <a:effectLst/>
-                <a:latin typeface="DM Sans" pitchFamily="2" charset="0"/>
-              </a:rPr>
-              <a:t> Model the league using Integer Linear Programming (ILP).</a:t>
-            </a:r>
-          </a:p>
-          <a:p>
-            <a:pPr marL="0" marR="0" lvl="0" indent="0" algn="l" defTabSz="914400" rtl="0" eaLnBrk="0" fontAlgn="base" latinLnBrk="0" hangingPunct="0">
-              <a:lnSpc>
-                <a:spcPct val="150000"/>
-              </a:lnSpc>
-              <a:spcBef>
-                <a:spcPct val="0"/>
-              </a:spcBef>
-              <a:spcAft>
-                <a:spcPct val="0"/>
-              </a:spcAft>
-              <a:buClrTx/>
-              <a:buSzTx/>
-              <a:tabLst/>
-            </a:pPr>
-            <a:r>
-              <a:rPr kumimoji="0" lang="en-US" altLang="en-US" sz="1800" b="1" i="0" u="none" strike="noStrike" cap="none" normalizeH="0" baseline="0" dirty="0">
-                <a:ln>
-                  <a:noFill/>
-                </a:ln>
-                <a:solidFill>
-                  <a:schemeClr val="tx1"/>
-                </a:solidFill>
-                <a:effectLst/>
-                <a:latin typeface="DM Sans" pitchFamily="2" charset="0"/>
-              </a:rPr>
-              <a:t>Time Management:</a:t>
-            </a:r>
-            <a:r>
-              <a:rPr kumimoji="0" lang="en-US" altLang="en-US" sz="1800" b="0" i="0" u="none" strike="noStrike" cap="none" normalizeH="0" baseline="0" dirty="0">
-                <a:ln>
-                  <a:noFill/>
-                </a:ln>
-                <a:solidFill>
-                  <a:schemeClr val="tx1"/>
-                </a:solidFill>
-                <a:effectLst/>
-                <a:latin typeface="DM Sans" pitchFamily="2" charset="0"/>
-              </a:rPr>
-              <a:t> Fit the standard 34-round season strictly between August and May.</a:t>
-            </a:r>
-          </a:p>
-          <a:p>
-            <a:pPr marL="0" marR="0" lvl="0" indent="0" algn="l" defTabSz="914400" rtl="0" eaLnBrk="0" fontAlgn="base" latinLnBrk="0" hangingPunct="0">
-              <a:lnSpc>
-                <a:spcPct val="150000"/>
-              </a:lnSpc>
-              <a:spcBef>
-                <a:spcPct val="0"/>
-              </a:spcBef>
-              <a:spcAft>
-                <a:spcPct val="0"/>
-              </a:spcAft>
-              <a:buClrTx/>
-              <a:buSzTx/>
-              <a:tabLst/>
-            </a:pPr>
-            <a:r>
-              <a:rPr kumimoji="0" lang="en-US" altLang="en-US" sz="1800" b="1" i="0" u="none" strike="noStrike" cap="none" normalizeH="0" baseline="0" dirty="0">
-                <a:ln>
-                  <a:noFill/>
-                </a:ln>
-                <a:solidFill>
-                  <a:schemeClr val="tx1"/>
-                </a:solidFill>
-                <a:effectLst/>
-                <a:latin typeface="DM Sans" pitchFamily="2" charset="0"/>
-              </a:rPr>
-              <a:t>Constraint Satisfaction:</a:t>
-            </a:r>
-            <a:r>
-              <a:rPr kumimoji="0" lang="en-US" altLang="en-US" sz="1800" b="0" i="0" u="none" strike="noStrike" cap="none" normalizeH="0" baseline="0" dirty="0">
-                <a:ln>
-                  <a:noFill/>
-                </a:ln>
-                <a:solidFill>
-                  <a:schemeClr val="tx1"/>
-                </a:solidFill>
-                <a:effectLst/>
-                <a:latin typeface="DM Sans" pitchFamily="2" charset="0"/>
-              </a:rPr>
-              <a:t> Respect CAF commitments, Security refusals, and FIFA breaks.</a:t>
-            </a:r>
-          </a:p>
-          <a:p>
-            <a:pPr marL="0" marR="0" lvl="0" indent="0" algn="l" defTabSz="914400" rtl="0" eaLnBrk="0" fontAlgn="base" latinLnBrk="0" hangingPunct="0">
-              <a:lnSpc>
-                <a:spcPct val="150000"/>
-              </a:lnSpc>
-              <a:spcBef>
-                <a:spcPct val="0"/>
-              </a:spcBef>
-              <a:spcAft>
-                <a:spcPct val="0"/>
-              </a:spcAft>
-              <a:buClrTx/>
-              <a:buSzTx/>
-              <a:tabLst/>
-            </a:pPr>
-            <a:r>
-              <a:rPr kumimoji="0" lang="en-US" altLang="en-US" sz="1800" b="1" i="0" u="none" strike="noStrike" cap="none" normalizeH="0" baseline="0" dirty="0">
-                <a:ln>
-                  <a:noFill/>
-                </a:ln>
-                <a:solidFill>
-                  <a:schemeClr val="tx1"/>
-                </a:solidFill>
-                <a:effectLst/>
-                <a:latin typeface="DM Sans" pitchFamily="2" charset="0"/>
-              </a:rPr>
-              <a:t>Fairness:</a:t>
-            </a:r>
-            <a:r>
-              <a:rPr kumimoji="0" lang="en-US" altLang="en-US" sz="1800" b="0" i="0" u="none" strike="noStrike" cap="none" normalizeH="0" baseline="0" dirty="0">
-                <a:ln>
-                  <a:noFill/>
-                </a:ln>
-                <a:solidFill>
-                  <a:schemeClr val="tx1"/>
-                </a:solidFill>
-                <a:effectLst/>
-                <a:latin typeface="DM Sans" pitchFamily="2" charset="0"/>
-              </a:rPr>
-              <a:t> Balance Home/Away streaks and travel distances.</a:t>
-            </a:r>
           </a:p>
         </p:txBody>
       </p:sp>
@@ -35873,6 +36814,752 @@
   <p:clrMapOvr>
     <a:masterClrMapping/>
   </p:clrMapOvr>
+  <mc:AlternateContent xmlns:mc="http://schemas.openxmlformats.org/markup-compatibility/2006">
+    <mc:Choice xmlns:p14="http://schemas.microsoft.com/office/powerpoint/2010/main" Requires="p14">
+      <p:transition spd="slow" p14:dur="1300">
+        <p14:pan dir="u"/>
+      </p:transition>
+    </mc:Choice>
+    <mc:Fallback>
+      <p:transition spd="slow">
+        <p:fade/>
+      </p:transition>
+    </mc:Fallback>
+  </mc:AlternateContent>
+  <p:timing>
+    <p:tnLst>
+      <p:par>
+        <p:cTn id="1" dur="indefinite" restart="never" nodeType="tmRoot">
+          <p:childTnLst>
+            <p:seq concurrent="1" nextAc="seek">
+              <p:cTn id="2" dur="indefinite" nodeType="mainSeq">
+                <p:childTnLst>
+                  <p:par>
+                    <p:cTn id="3" fill="hold">
+                      <p:stCondLst>
+                        <p:cond delay="indefinite"/>
+                      </p:stCondLst>
+                      <p:childTnLst>
+                        <p:par>
+                          <p:cTn id="4" fill="hold">
+                            <p:stCondLst>
+                              <p:cond delay="0"/>
+                            </p:stCondLst>
+                            <p:childTnLst>
+                              <p:par>
+                                <p:cTn id="5" presetID="2" presetClass="entr" presetSubtype="8" fill="hold" nodeType="clickEffect">
+                                  <p:stCondLst>
+                                    <p:cond delay="0"/>
+                                  </p:stCondLst>
+                                  <p:childTnLst>
+                                    <p:set>
+                                      <p:cBhvr>
+                                        <p:cTn id="6" dur="1" fill="hold">
+                                          <p:stCondLst>
+                                            <p:cond delay="0"/>
+                                          </p:stCondLst>
+                                        </p:cTn>
+                                        <p:tgtEl>
+                                          <p:spTgt spid="5">
+                                            <p:txEl>
+                                              <p:pRg st="0" end="0"/>
+                                            </p:txEl>
+                                          </p:spTgt>
+                                        </p:tgtEl>
+                                        <p:attrNameLst>
+                                          <p:attrName>style.visibility</p:attrName>
+                                        </p:attrNameLst>
+                                      </p:cBhvr>
+                                      <p:to>
+                                        <p:strVal val="visible"/>
+                                      </p:to>
+                                    </p:set>
+                                    <p:anim calcmode="lin" valueType="num">
+                                      <p:cBhvr additive="base">
+                                        <p:cTn id="7" dur="500" fill="hold"/>
+                                        <p:tgtEl>
+                                          <p:spTgt spid="5">
+                                            <p:txEl>
+                                              <p:pRg st="0" end="0"/>
+                                            </p:txEl>
+                                          </p:spTgt>
+                                        </p:tgtEl>
+                                        <p:attrNameLst>
+                                          <p:attrName>ppt_x</p:attrName>
+                                        </p:attrNameLst>
+                                      </p:cBhvr>
+                                      <p:tavLst>
+                                        <p:tav tm="0">
+                                          <p:val>
+                                            <p:strVal val="0-#ppt_w/2"/>
+                                          </p:val>
+                                        </p:tav>
+                                        <p:tav tm="100000">
+                                          <p:val>
+                                            <p:strVal val="#ppt_x"/>
+                                          </p:val>
+                                        </p:tav>
+                                      </p:tavLst>
+                                    </p:anim>
+                                    <p:anim calcmode="lin" valueType="num">
+                                      <p:cBhvr additive="base">
+                                        <p:cTn id="8" dur="500" fill="hold"/>
+                                        <p:tgtEl>
+                                          <p:spTgt spid="5">
+                                            <p:txEl>
+                                              <p:pRg st="0" end="0"/>
+                                            </p:txEl>
+                                          </p:spTgt>
+                                        </p:tgtEl>
+                                        <p:attrNameLst>
+                                          <p:attrName>ppt_y</p:attrName>
+                                        </p:attrNameLst>
+                                      </p:cBhvr>
+                                      <p:tavLst>
+                                        <p:tav tm="0">
+                                          <p:val>
+                                            <p:strVal val="#ppt_y"/>
+                                          </p:val>
+                                        </p:tav>
+                                        <p:tav tm="100000">
+                                          <p:val>
+                                            <p:strVal val="#ppt_y"/>
+                                          </p:val>
+                                        </p:tav>
+                                      </p:tavLst>
+                                    </p:anim>
+                                  </p:childTnLst>
+                                </p:cTn>
+                              </p:par>
+                              <p:par>
+                                <p:cTn id="9" presetID="2" presetClass="entr" presetSubtype="8" fill="hold" nodeType="withEffect">
+                                  <p:stCondLst>
+                                    <p:cond delay="0"/>
+                                  </p:stCondLst>
+                                  <p:childTnLst>
+                                    <p:set>
+                                      <p:cBhvr>
+                                        <p:cTn id="10" dur="1" fill="hold">
+                                          <p:stCondLst>
+                                            <p:cond delay="0"/>
+                                          </p:stCondLst>
+                                        </p:cTn>
+                                        <p:tgtEl>
+                                          <p:spTgt spid="34"/>
+                                        </p:tgtEl>
+                                        <p:attrNameLst>
+                                          <p:attrName>style.visibility</p:attrName>
+                                        </p:attrNameLst>
+                                      </p:cBhvr>
+                                      <p:to>
+                                        <p:strVal val="visible"/>
+                                      </p:to>
+                                    </p:set>
+                                    <p:anim calcmode="lin" valueType="num">
+                                      <p:cBhvr additive="base">
+                                        <p:cTn id="11" dur="500" fill="hold"/>
+                                        <p:tgtEl>
+                                          <p:spTgt spid="34"/>
+                                        </p:tgtEl>
+                                        <p:attrNameLst>
+                                          <p:attrName>ppt_x</p:attrName>
+                                        </p:attrNameLst>
+                                      </p:cBhvr>
+                                      <p:tavLst>
+                                        <p:tav tm="0">
+                                          <p:val>
+                                            <p:strVal val="0-#ppt_w/2"/>
+                                          </p:val>
+                                        </p:tav>
+                                        <p:tav tm="100000">
+                                          <p:val>
+                                            <p:strVal val="#ppt_x"/>
+                                          </p:val>
+                                        </p:tav>
+                                      </p:tavLst>
+                                    </p:anim>
+                                    <p:anim calcmode="lin" valueType="num">
+                                      <p:cBhvr additive="base">
+                                        <p:cTn id="12" dur="500" fill="hold"/>
+                                        <p:tgtEl>
+                                          <p:spTgt spid="34"/>
+                                        </p:tgtEl>
+                                        <p:attrNameLst>
+                                          <p:attrName>ppt_y</p:attrName>
+                                        </p:attrNameLst>
+                                      </p:cBhvr>
+                                      <p:tavLst>
+                                        <p:tav tm="0">
+                                          <p:val>
+                                            <p:strVal val="#ppt_y"/>
+                                          </p:val>
+                                        </p:tav>
+                                        <p:tav tm="100000">
+                                          <p:val>
+                                            <p:strVal val="#ppt_y"/>
+                                          </p:val>
+                                        </p:tav>
+                                      </p:tavLst>
+                                    </p:anim>
+                                  </p:childTnLst>
+                                </p:cTn>
+                              </p:par>
+                            </p:childTnLst>
+                          </p:cTn>
+                        </p:par>
+                      </p:childTnLst>
+                    </p:cTn>
+                  </p:par>
+                  <p:par>
+                    <p:cTn id="13" fill="hold">
+                      <p:stCondLst>
+                        <p:cond delay="indefinite"/>
+                      </p:stCondLst>
+                      <p:childTnLst>
+                        <p:par>
+                          <p:cTn id="14" fill="hold">
+                            <p:stCondLst>
+                              <p:cond delay="0"/>
+                            </p:stCondLst>
+                            <p:childTnLst>
+                              <p:par>
+                                <p:cTn id="15" presetID="2" presetClass="entr" presetSubtype="8" fill="hold" nodeType="clickEffect">
+                                  <p:stCondLst>
+                                    <p:cond delay="0"/>
+                                  </p:stCondLst>
+                                  <p:childTnLst>
+                                    <p:set>
+                                      <p:cBhvr>
+                                        <p:cTn id="16" dur="1" fill="hold">
+                                          <p:stCondLst>
+                                            <p:cond delay="0"/>
+                                          </p:stCondLst>
+                                        </p:cTn>
+                                        <p:tgtEl>
+                                          <p:spTgt spid="5">
+                                            <p:txEl>
+                                              <p:pRg st="1" end="1"/>
+                                            </p:txEl>
+                                          </p:spTgt>
+                                        </p:tgtEl>
+                                        <p:attrNameLst>
+                                          <p:attrName>style.visibility</p:attrName>
+                                        </p:attrNameLst>
+                                      </p:cBhvr>
+                                      <p:to>
+                                        <p:strVal val="visible"/>
+                                      </p:to>
+                                    </p:set>
+                                    <p:anim calcmode="lin" valueType="num">
+                                      <p:cBhvr additive="base">
+                                        <p:cTn id="17" dur="500" fill="hold"/>
+                                        <p:tgtEl>
+                                          <p:spTgt spid="5">
+                                            <p:txEl>
+                                              <p:pRg st="1" end="1"/>
+                                            </p:txEl>
+                                          </p:spTgt>
+                                        </p:tgtEl>
+                                        <p:attrNameLst>
+                                          <p:attrName>ppt_x</p:attrName>
+                                        </p:attrNameLst>
+                                      </p:cBhvr>
+                                      <p:tavLst>
+                                        <p:tav tm="0">
+                                          <p:val>
+                                            <p:strVal val="0-#ppt_w/2"/>
+                                          </p:val>
+                                        </p:tav>
+                                        <p:tav tm="100000">
+                                          <p:val>
+                                            <p:strVal val="#ppt_x"/>
+                                          </p:val>
+                                        </p:tav>
+                                      </p:tavLst>
+                                    </p:anim>
+                                    <p:anim calcmode="lin" valueType="num">
+                                      <p:cBhvr additive="base">
+                                        <p:cTn id="18" dur="500" fill="hold"/>
+                                        <p:tgtEl>
+                                          <p:spTgt spid="5">
+                                            <p:txEl>
+                                              <p:pRg st="1" end="1"/>
+                                            </p:txEl>
+                                          </p:spTgt>
+                                        </p:tgtEl>
+                                        <p:attrNameLst>
+                                          <p:attrName>ppt_y</p:attrName>
+                                        </p:attrNameLst>
+                                      </p:cBhvr>
+                                      <p:tavLst>
+                                        <p:tav tm="0">
+                                          <p:val>
+                                            <p:strVal val="#ppt_y"/>
+                                          </p:val>
+                                        </p:tav>
+                                        <p:tav tm="100000">
+                                          <p:val>
+                                            <p:strVal val="#ppt_y"/>
+                                          </p:val>
+                                        </p:tav>
+                                      </p:tavLst>
+                                    </p:anim>
+                                  </p:childTnLst>
+                                </p:cTn>
+                              </p:par>
+                              <p:par>
+                                <p:cTn id="19" presetID="2" presetClass="entr" presetSubtype="8" fill="hold" nodeType="withEffect">
+                                  <p:stCondLst>
+                                    <p:cond delay="0"/>
+                                  </p:stCondLst>
+                                  <p:childTnLst>
+                                    <p:set>
+                                      <p:cBhvr>
+                                        <p:cTn id="20" dur="1" fill="hold">
+                                          <p:stCondLst>
+                                            <p:cond delay="0"/>
+                                          </p:stCondLst>
+                                        </p:cTn>
+                                        <p:tgtEl>
+                                          <p:spTgt spid="10"/>
+                                        </p:tgtEl>
+                                        <p:attrNameLst>
+                                          <p:attrName>style.visibility</p:attrName>
+                                        </p:attrNameLst>
+                                      </p:cBhvr>
+                                      <p:to>
+                                        <p:strVal val="visible"/>
+                                      </p:to>
+                                    </p:set>
+                                    <p:anim calcmode="lin" valueType="num">
+                                      <p:cBhvr additive="base">
+                                        <p:cTn id="21" dur="500" fill="hold"/>
+                                        <p:tgtEl>
+                                          <p:spTgt spid="10"/>
+                                        </p:tgtEl>
+                                        <p:attrNameLst>
+                                          <p:attrName>ppt_x</p:attrName>
+                                        </p:attrNameLst>
+                                      </p:cBhvr>
+                                      <p:tavLst>
+                                        <p:tav tm="0">
+                                          <p:val>
+                                            <p:strVal val="0-#ppt_w/2"/>
+                                          </p:val>
+                                        </p:tav>
+                                        <p:tav tm="100000">
+                                          <p:val>
+                                            <p:strVal val="#ppt_x"/>
+                                          </p:val>
+                                        </p:tav>
+                                      </p:tavLst>
+                                    </p:anim>
+                                    <p:anim calcmode="lin" valueType="num">
+                                      <p:cBhvr additive="base">
+                                        <p:cTn id="22" dur="500" fill="hold"/>
+                                        <p:tgtEl>
+                                          <p:spTgt spid="10"/>
+                                        </p:tgtEl>
+                                        <p:attrNameLst>
+                                          <p:attrName>ppt_y</p:attrName>
+                                        </p:attrNameLst>
+                                      </p:cBhvr>
+                                      <p:tavLst>
+                                        <p:tav tm="0">
+                                          <p:val>
+                                            <p:strVal val="#ppt_y"/>
+                                          </p:val>
+                                        </p:tav>
+                                        <p:tav tm="100000">
+                                          <p:val>
+                                            <p:strVal val="#ppt_y"/>
+                                          </p:val>
+                                        </p:tav>
+                                      </p:tavLst>
+                                    </p:anim>
+                                  </p:childTnLst>
+                                </p:cTn>
+                              </p:par>
+                            </p:childTnLst>
+                          </p:cTn>
+                        </p:par>
+                      </p:childTnLst>
+                    </p:cTn>
+                  </p:par>
+                  <p:par>
+                    <p:cTn id="23" fill="hold">
+                      <p:stCondLst>
+                        <p:cond delay="indefinite"/>
+                      </p:stCondLst>
+                      <p:childTnLst>
+                        <p:par>
+                          <p:cTn id="24" fill="hold">
+                            <p:stCondLst>
+                              <p:cond delay="0"/>
+                            </p:stCondLst>
+                            <p:childTnLst>
+                              <p:par>
+                                <p:cTn id="25" presetID="2" presetClass="entr" presetSubtype="8" fill="hold" nodeType="clickEffect">
+                                  <p:stCondLst>
+                                    <p:cond delay="0"/>
+                                  </p:stCondLst>
+                                  <p:childTnLst>
+                                    <p:set>
+                                      <p:cBhvr>
+                                        <p:cTn id="26" dur="1" fill="hold">
+                                          <p:stCondLst>
+                                            <p:cond delay="0"/>
+                                          </p:stCondLst>
+                                        </p:cTn>
+                                        <p:tgtEl>
+                                          <p:spTgt spid="5">
+                                            <p:txEl>
+                                              <p:pRg st="2" end="2"/>
+                                            </p:txEl>
+                                          </p:spTgt>
+                                        </p:tgtEl>
+                                        <p:attrNameLst>
+                                          <p:attrName>style.visibility</p:attrName>
+                                        </p:attrNameLst>
+                                      </p:cBhvr>
+                                      <p:to>
+                                        <p:strVal val="visible"/>
+                                      </p:to>
+                                    </p:set>
+                                    <p:anim calcmode="lin" valueType="num">
+                                      <p:cBhvr additive="base">
+                                        <p:cTn id="27" dur="500" fill="hold"/>
+                                        <p:tgtEl>
+                                          <p:spTgt spid="5">
+                                            <p:txEl>
+                                              <p:pRg st="2" end="2"/>
+                                            </p:txEl>
+                                          </p:spTgt>
+                                        </p:tgtEl>
+                                        <p:attrNameLst>
+                                          <p:attrName>ppt_x</p:attrName>
+                                        </p:attrNameLst>
+                                      </p:cBhvr>
+                                      <p:tavLst>
+                                        <p:tav tm="0">
+                                          <p:val>
+                                            <p:strVal val="0-#ppt_w/2"/>
+                                          </p:val>
+                                        </p:tav>
+                                        <p:tav tm="100000">
+                                          <p:val>
+                                            <p:strVal val="#ppt_x"/>
+                                          </p:val>
+                                        </p:tav>
+                                      </p:tavLst>
+                                    </p:anim>
+                                    <p:anim calcmode="lin" valueType="num">
+                                      <p:cBhvr additive="base">
+                                        <p:cTn id="28" dur="500" fill="hold"/>
+                                        <p:tgtEl>
+                                          <p:spTgt spid="5">
+                                            <p:txEl>
+                                              <p:pRg st="2" end="2"/>
+                                            </p:txEl>
+                                          </p:spTgt>
+                                        </p:tgtEl>
+                                        <p:attrNameLst>
+                                          <p:attrName>ppt_y</p:attrName>
+                                        </p:attrNameLst>
+                                      </p:cBhvr>
+                                      <p:tavLst>
+                                        <p:tav tm="0">
+                                          <p:val>
+                                            <p:strVal val="#ppt_y"/>
+                                          </p:val>
+                                        </p:tav>
+                                        <p:tav tm="100000">
+                                          <p:val>
+                                            <p:strVal val="#ppt_y"/>
+                                          </p:val>
+                                        </p:tav>
+                                      </p:tavLst>
+                                    </p:anim>
+                                  </p:childTnLst>
+                                </p:cTn>
+                              </p:par>
+                              <p:par>
+                                <p:cTn id="29" presetID="2" presetClass="entr" presetSubtype="8" fill="hold" nodeType="withEffect">
+                                  <p:stCondLst>
+                                    <p:cond delay="0"/>
+                                  </p:stCondLst>
+                                  <p:childTnLst>
+                                    <p:set>
+                                      <p:cBhvr>
+                                        <p:cTn id="30" dur="1" fill="hold">
+                                          <p:stCondLst>
+                                            <p:cond delay="0"/>
+                                          </p:stCondLst>
+                                        </p:cTn>
+                                        <p:tgtEl>
+                                          <p:spTgt spid="17"/>
+                                        </p:tgtEl>
+                                        <p:attrNameLst>
+                                          <p:attrName>style.visibility</p:attrName>
+                                        </p:attrNameLst>
+                                      </p:cBhvr>
+                                      <p:to>
+                                        <p:strVal val="visible"/>
+                                      </p:to>
+                                    </p:set>
+                                    <p:anim calcmode="lin" valueType="num">
+                                      <p:cBhvr additive="base">
+                                        <p:cTn id="31" dur="500" fill="hold"/>
+                                        <p:tgtEl>
+                                          <p:spTgt spid="17"/>
+                                        </p:tgtEl>
+                                        <p:attrNameLst>
+                                          <p:attrName>ppt_x</p:attrName>
+                                        </p:attrNameLst>
+                                      </p:cBhvr>
+                                      <p:tavLst>
+                                        <p:tav tm="0">
+                                          <p:val>
+                                            <p:strVal val="0-#ppt_w/2"/>
+                                          </p:val>
+                                        </p:tav>
+                                        <p:tav tm="100000">
+                                          <p:val>
+                                            <p:strVal val="#ppt_x"/>
+                                          </p:val>
+                                        </p:tav>
+                                      </p:tavLst>
+                                    </p:anim>
+                                    <p:anim calcmode="lin" valueType="num">
+                                      <p:cBhvr additive="base">
+                                        <p:cTn id="32" dur="500" fill="hold"/>
+                                        <p:tgtEl>
+                                          <p:spTgt spid="17"/>
+                                        </p:tgtEl>
+                                        <p:attrNameLst>
+                                          <p:attrName>ppt_y</p:attrName>
+                                        </p:attrNameLst>
+                                      </p:cBhvr>
+                                      <p:tavLst>
+                                        <p:tav tm="0">
+                                          <p:val>
+                                            <p:strVal val="#ppt_y"/>
+                                          </p:val>
+                                        </p:tav>
+                                        <p:tav tm="100000">
+                                          <p:val>
+                                            <p:strVal val="#ppt_y"/>
+                                          </p:val>
+                                        </p:tav>
+                                      </p:tavLst>
+                                    </p:anim>
+                                  </p:childTnLst>
+                                </p:cTn>
+                              </p:par>
+                            </p:childTnLst>
+                          </p:cTn>
+                        </p:par>
+                      </p:childTnLst>
+                    </p:cTn>
+                  </p:par>
+                  <p:par>
+                    <p:cTn id="33" fill="hold">
+                      <p:stCondLst>
+                        <p:cond delay="indefinite"/>
+                      </p:stCondLst>
+                      <p:childTnLst>
+                        <p:par>
+                          <p:cTn id="34" fill="hold">
+                            <p:stCondLst>
+                              <p:cond delay="0"/>
+                            </p:stCondLst>
+                            <p:childTnLst>
+                              <p:par>
+                                <p:cTn id="35" presetID="2" presetClass="entr" presetSubtype="8" fill="hold" nodeType="clickEffect">
+                                  <p:stCondLst>
+                                    <p:cond delay="0"/>
+                                  </p:stCondLst>
+                                  <p:childTnLst>
+                                    <p:set>
+                                      <p:cBhvr>
+                                        <p:cTn id="36" dur="1" fill="hold">
+                                          <p:stCondLst>
+                                            <p:cond delay="0"/>
+                                          </p:stCondLst>
+                                        </p:cTn>
+                                        <p:tgtEl>
+                                          <p:spTgt spid="5">
+                                            <p:txEl>
+                                              <p:pRg st="3" end="3"/>
+                                            </p:txEl>
+                                          </p:spTgt>
+                                        </p:tgtEl>
+                                        <p:attrNameLst>
+                                          <p:attrName>style.visibility</p:attrName>
+                                        </p:attrNameLst>
+                                      </p:cBhvr>
+                                      <p:to>
+                                        <p:strVal val="visible"/>
+                                      </p:to>
+                                    </p:set>
+                                    <p:anim calcmode="lin" valueType="num">
+                                      <p:cBhvr additive="base">
+                                        <p:cTn id="37" dur="500" fill="hold"/>
+                                        <p:tgtEl>
+                                          <p:spTgt spid="5">
+                                            <p:txEl>
+                                              <p:pRg st="3" end="3"/>
+                                            </p:txEl>
+                                          </p:spTgt>
+                                        </p:tgtEl>
+                                        <p:attrNameLst>
+                                          <p:attrName>ppt_x</p:attrName>
+                                        </p:attrNameLst>
+                                      </p:cBhvr>
+                                      <p:tavLst>
+                                        <p:tav tm="0">
+                                          <p:val>
+                                            <p:strVal val="0-#ppt_w/2"/>
+                                          </p:val>
+                                        </p:tav>
+                                        <p:tav tm="100000">
+                                          <p:val>
+                                            <p:strVal val="#ppt_x"/>
+                                          </p:val>
+                                        </p:tav>
+                                      </p:tavLst>
+                                    </p:anim>
+                                    <p:anim calcmode="lin" valueType="num">
+                                      <p:cBhvr additive="base">
+                                        <p:cTn id="38" dur="500" fill="hold"/>
+                                        <p:tgtEl>
+                                          <p:spTgt spid="5">
+                                            <p:txEl>
+                                              <p:pRg st="3" end="3"/>
+                                            </p:txEl>
+                                          </p:spTgt>
+                                        </p:tgtEl>
+                                        <p:attrNameLst>
+                                          <p:attrName>ppt_y</p:attrName>
+                                        </p:attrNameLst>
+                                      </p:cBhvr>
+                                      <p:tavLst>
+                                        <p:tav tm="0">
+                                          <p:val>
+                                            <p:strVal val="#ppt_y"/>
+                                          </p:val>
+                                        </p:tav>
+                                        <p:tav tm="100000">
+                                          <p:val>
+                                            <p:strVal val="#ppt_y"/>
+                                          </p:val>
+                                        </p:tav>
+                                      </p:tavLst>
+                                    </p:anim>
+                                  </p:childTnLst>
+                                </p:cTn>
+                              </p:par>
+                              <p:par>
+                                <p:cTn id="39" presetID="2" presetClass="entr" presetSubtype="8" fill="hold" nodeType="withEffect">
+                                  <p:stCondLst>
+                                    <p:cond delay="0"/>
+                                  </p:stCondLst>
+                                  <p:childTnLst>
+                                    <p:set>
+                                      <p:cBhvr>
+                                        <p:cTn id="40" dur="1" fill="hold">
+                                          <p:stCondLst>
+                                            <p:cond delay="0"/>
+                                          </p:stCondLst>
+                                        </p:cTn>
+                                        <p:tgtEl>
+                                          <p:spTgt spid="14"/>
+                                        </p:tgtEl>
+                                        <p:attrNameLst>
+                                          <p:attrName>style.visibility</p:attrName>
+                                        </p:attrNameLst>
+                                      </p:cBhvr>
+                                      <p:to>
+                                        <p:strVal val="visible"/>
+                                      </p:to>
+                                    </p:set>
+                                    <p:anim calcmode="lin" valueType="num">
+                                      <p:cBhvr additive="base">
+                                        <p:cTn id="41" dur="500" fill="hold"/>
+                                        <p:tgtEl>
+                                          <p:spTgt spid="14"/>
+                                        </p:tgtEl>
+                                        <p:attrNameLst>
+                                          <p:attrName>ppt_x</p:attrName>
+                                        </p:attrNameLst>
+                                      </p:cBhvr>
+                                      <p:tavLst>
+                                        <p:tav tm="0">
+                                          <p:val>
+                                            <p:strVal val="0-#ppt_w/2"/>
+                                          </p:val>
+                                        </p:tav>
+                                        <p:tav tm="100000">
+                                          <p:val>
+                                            <p:strVal val="#ppt_x"/>
+                                          </p:val>
+                                        </p:tav>
+                                      </p:tavLst>
+                                    </p:anim>
+                                    <p:anim calcmode="lin" valueType="num">
+                                      <p:cBhvr additive="base">
+                                        <p:cTn id="42" dur="500" fill="hold"/>
+                                        <p:tgtEl>
+                                          <p:spTgt spid="14"/>
+                                        </p:tgtEl>
+                                        <p:attrNameLst>
+                                          <p:attrName>ppt_y</p:attrName>
+                                        </p:attrNameLst>
+                                      </p:cBhvr>
+                                      <p:tavLst>
+                                        <p:tav tm="0">
+                                          <p:val>
+                                            <p:strVal val="#ppt_y"/>
+                                          </p:val>
+                                        </p:tav>
+                                        <p:tav tm="100000">
+                                          <p:val>
+                                            <p:strVal val="#ppt_y"/>
+                                          </p:val>
+                                        </p:tav>
+                                      </p:tavLst>
+                                    </p:anim>
+                                  </p:childTnLst>
+                                </p:cTn>
+                              </p:par>
+                            </p:childTnLst>
+                          </p:cTn>
+                        </p:par>
+                      </p:childTnLst>
+                    </p:cTn>
+                  </p:par>
+                </p:childTnLst>
+              </p:cTn>
+              <p:prevCondLst>
+                <p:cond evt="onPrev" delay="0">
+                  <p:tgtEl>
+                    <p:sldTgt/>
+                  </p:tgtEl>
+                </p:cond>
+              </p:prevCondLst>
+              <p:nextCondLst>
+                <p:cond evt="onNext" delay="0">
+                  <p:tgtEl>
+                    <p:sldTgt/>
+                  </p:tgtEl>
+                </p:cond>
+              </p:nextCondLst>
+            </p:seq>
+          </p:childTnLst>
+        </p:cTn>
+      </p:par>
+    </p:tnLst>
+  </p:timing>
 </p:sld>
 </file>
 
@@ -35904,10 +37591,6 @@
           </p:nvPr>
         </p:nvSpPr>
         <p:spPr>
-          <a:xfrm>
-            <a:off x="720000" y="445025"/>
-            <a:ext cx="7704000" cy="572700"/>
-          </a:xfrm>
           <a:prstGeom prst="rect">
             <a:avLst/>
           </a:prstGeom>
@@ -36360,14 +38043,12 @@
           <p:cNvPr id="353" name="Google Shape;353;p35"/>
           <p:cNvCxnSpPr>
             <a:cxnSpLocks/>
-            <a:stCxn id="342" idx="1"/>
-            <a:endCxn id="347" idx="1"/>
           </p:cNvCxnSpPr>
           <p:nvPr/>
         </p:nvCxnSpPr>
         <p:spPr>
           <a:xfrm rot="10800000" flipH="1" flipV="1">
-            <a:off x="1024796" y="1660349"/>
+            <a:off x="1024796" y="1671862"/>
             <a:ext cx="498926" cy="1799775"/>
           </a:xfrm>
           <a:prstGeom prst="bentConnector3">
@@ -36457,7 +38138,7 @@
         </p:nvCxnSpPr>
         <p:spPr>
           <a:xfrm>
-            <a:off x="2739082" y="3487600"/>
+            <a:off x="2776252" y="3495034"/>
             <a:ext cx="671700" cy="600"/>
           </a:xfrm>
           <a:prstGeom prst="bentConnector3">
@@ -36482,6 +38163,638 @@
   <p:clrMapOvr>
     <a:masterClrMapping/>
   </p:clrMapOvr>
+  <mc:AlternateContent xmlns:mc="http://schemas.openxmlformats.org/markup-compatibility/2006">
+    <mc:Choice xmlns:p14="http://schemas.microsoft.com/office/powerpoint/2010/main" Requires="p14">
+      <p:transition spd="slow" p14:dur="1300">
+        <p14:pan dir="u"/>
+      </p:transition>
+    </mc:Choice>
+    <mc:Fallback>
+      <p:transition spd="slow">
+        <p:fade/>
+      </p:transition>
+    </mc:Fallback>
+  </mc:AlternateContent>
+  <p:timing>
+    <p:tnLst>
+      <p:par>
+        <p:cTn id="1" dur="indefinite" restart="never" nodeType="tmRoot">
+          <p:childTnLst>
+            <p:seq concurrent="1" nextAc="seek">
+              <p:cTn id="2" dur="indefinite" nodeType="mainSeq">
+                <p:childTnLst>
+                  <p:par>
+                    <p:cTn id="3" fill="hold">
+                      <p:stCondLst>
+                        <p:cond delay="indefinite"/>
+                      </p:stCondLst>
+                      <p:childTnLst>
+                        <p:par>
+                          <p:cTn id="4" fill="hold">
+                            <p:stCondLst>
+                              <p:cond delay="0"/>
+                            </p:stCondLst>
+                            <p:childTnLst>
+                              <p:par>
+                                <p:cTn id="5" presetID="22" presetClass="entr" presetSubtype="8" fill="hold" nodeType="clickEffect">
+                                  <p:stCondLst>
+                                    <p:cond delay="0"/>
+                                  </p:stCondLst>
+                                  <p:childTnLst>
+                                    <p:set>
+                                      <p:cBhvr>
+                                        <p:cTn id="6" dur="1" fill="hold">
+                                          <p:stCondLst>
+                                            <p:cond delay="0"/>
+                                          </p:stCondLst>
+                                        </p:cTn>
+                                        <p:tgtEl>
+                                          <p:spTgt spid="351"/>
+                                        </p:tgtEl>
+                                        <p:attrNameLst>
+                                          <p:attrName>style.visibility</p:attrName>
+                                        </p:attrNameLst>
+                                      </p:cBhvr>
+                                      <p:to>
+                                        <p:strVal val="visible"/>
+                                      </p:to>
+                                    </p:set>
+                                    <p:animEffect transition="in" filter="wipe(left)">
+                                      <p:cBhvr>
+                                        <p:cTn id="7" dur="500"/>
+                                        <p:tgtEl>
+                                          <p:spTgt spid="351"/>
+                                        </p:tgtEl>
+                                      </p:cBhvr>
+                                    </p:animEffect>
+                                  </p:childTnLst>
+                                </p:cTn>
+                              </p:par>
+                              <p:par>
+                                <p:cTn id="8" presetID="10" presetClass="entr" presetSubtype="0" fill="hold" grpId="0" nodeType="withEffect">
+                                  <p:stCondLst>
+                                    <p:cond delay="0"/>
+                                  </p:stCondLst>
+                                  <p:childTnLst>
+                                    <p:set>
+                                      <p:cBhvr>
+                                        <p:cTn id="9" dur="1" fill="hold">
+                                          <p:stCondLst>
+                                            <p:cond delay="0"/>
+                                          </p:stCondLst>
+                                        </p:cTn>
+                                        <p:tgtEl>
+                                          <p:spTgt spid="343"/>
+                                        </p:tgtEl>
+                                        <p:attrNameLst>
+                                          <p:attrName>style.visibility</p:attrName>
+                                        </p:attrNameLst>
+                                      </p:cBhvr>
+                                      <p:to>
+                                        <p:strVal val="visible"/>
+                                      </p:to>
+                                    </p:set>
+                                    <p:animEffect transition="in" filter="fade">
+                                      <p:cBhvr>
+                                        <p:cTn id="10" dur="500"/>
+                                        <p:tgtEl>
+                                          <p:spTgt spid="343"/>
+                                        </p:tgtEl>
+                                      </p:cBhvr>
+                                    </p:animEffect>
+                                  </p:childTnLst>
+                                </p:cTn>
+                              </p:par>
+                            </p:childTnLst>
+                          </p:cTn>
+                        </p:par>
+                      </p:childTnLst>
+                    </p:cTn>
+                  </p:par>
+                  <p:par>
+                    <p:cTn id="11" fill="hold">
+                      <p:stCondLst>
+                        <p:cond delay="indefinite"/>
+                      </p:stCondLst>
+                      <p:childTnLst>
+                        <p:par>
+                          <p:cTn id="12" fill="hold">
+                            <p:stCondLst>
+                              <p:cond delay="0"/>
+                            </p:stCondLst>
+                            <p:childTnLst>
+                              <p:par>
+                                <p:cTn id="13" presetID="10" presetClass="entr" presetSubtype="0" fill="hold" nodeType="clickEffect">
+                                  <p:stCondLst>
+                                    <p:cond delay="0"/>
+                                  </p:stCondLst>
+                                  <p:childTnLst>
+                                    <p:set>
+                                      <p:cBhvr>
+                                        <p:cTn id="14" dur="1" fill="hold">
+                                          <p:stCondLst>
+                                            <p:cond delay="0"/>
+                                          </p:stCondLst>
+                                        </p:cTn>
+                                        <p:tgtEl>
+                                          <p:spTgt spid="355"/>
+                                        </p:tgtEl>
+                                        <p:attrNameLst>
+                                          <p:attrName>style.visibility</p:attrName>
+                                        </p:attrNameLst>
+                                      </p:cBhvr>
+                                      <p:to>
+                                        <p:strVal val="visible"/>
+                                      </p:to>
+                                    </p:set>
+                                    <p:animEffect transition="in" filter="fade">
+                                      <p:cBhvr>
+                                        <p:cTn id="15" dur="500"/>
+                                        <p:tgtEl>
+                                          <p:spTgt spid="355"/>
+                                        </p:tgtEl>
+                                      </p:cBhvr>
+                                    </p:animEffect>
+                                  </p:childTnLst>
+                                </p:cTn>
+                              </p:par>
+                            </p:childTnLst>
+                          </p:cTn>
+                        </p:par>
+                      </p:childTnLst>
+                    </p:cTn>
+                  </p:par>
+                  <p:par>
+                    <p:cTn id="16" fill="hold">
+                      <p:stCondLst>
+                        <p:cond delay="indefinite"/>
+                      </p:stCondLst>
+                      <p:childTnLst>
+                        <p:par>
+                          <p:cTn id="17" fill="hold">
+                            <p:stCondLst>
+                              <p:cond delay="0"/>
+                            </p:stCondLst>
+                            <p:childTnLst>
+                              <p:par>
+                                <p:cTn id="18" presetID="22" presetClass="entr" presetSubtype="8" fill="hold" grpId="0" nodeType="clickEffect">
+                                  <p:stCondLst>
+                                    <p:cond delay="0"/>
+                                  </p:stCondLst>
+                                  <p:childTnLst>
+                                    <p:set>
+                                      <p:cBhvr>
+                                        <p:cTn id="19" dur="1" fill="hold">
+                                          <p:stCondLst>
+                                            <p:cond delay="0"/>
+                                          </p:stCondLst>
+                                        </p:cTn>
+                                        <p:tgtEl>
+                                          <p:spTgt spid="344"/>
+                                        </p:tgtEl>
+                                        <p:attrNameLst>
+                                          <p:attrName>style.visibility</p:attrName>
+                                        </p:attrNameLst>
+                                      </p:cBhvr>
+                                      <p:to>
+                                        <p:strVal val="visible"/>
+                                      </p:to>
+                                    </p:set>
+                                    <p:animEffect transition="in" filter="wipe(left)">
+                                      <p:cBhvr>
+                                        <p:cTn id="20" dur="500"/>
+                                        <p:tgtEl>
+                                          <p:spTgt spid="344"/>
+                                        </p:tgtEl>
+                                      </p:cBhvr>
+                                    </p:animEffect>
+                                  </p:childTnLst>
+                                </p:cTn>
+                              </p:par>
+                            </p:childTnLst>
+                          </p:cTn>
+                        </p:par>
+                      </p:childTnLst>
+                    </p:cTn>
+                  </p:par>
+                  <p:par>
+                    <p:cTn id="21" fill="hold">
+                      <p:stCondLst>
+                        <p:cond delay="indefinite"/>
+                      </p:stCondLst>
+                      <p:childTnLst>
+                        <p:par>
+                          <p:cTn id="22" fill="hold">
+                            <p:stCondLst>
+                              <p:cond delay="0"/>
+                            </p:stCondLst>
+                            <p:childTnLst>
+                              <p:par>
+                                <p:cTn id="23" presetID="22" presetClass="entr" presetSubtype="8" fill="hold" nodeType="clickEffect">
+                                  <p:stCondLst>
+                                    <p:cond delay="0"/>
+                                  </p:stCondLst>
+                                  <p:childTnLst>
+                                    <p:set>
+                                      <p:cBhvr>
+                                        <p:cTn id="24" dur="1" fill="hold">
+                                          <p:stCondLst>
+                                            <p:cond delay="0"/>
+                                          </p:stCondLst>
+                                        </p:cTn>
+                                        <p:tgtEl>
+                                          <p:spTgt spid="352"/>
+                                        </p:tgtEl>
+                                        <p:attrNameLst>
+                                          <p:attrName>style.visibility</p:attrName>
+                                        </p:attrNameLst>
+                                      </p:cBhvr>
+                                      <p:to>
+                                        <p:strVal val="visible"/>
+                                      </p:to>
+                                    </p:set>
+                                    <p:animEffect transition="in" filter="wipe(left)">
+                                      <p:cBhvr>
+                                        <p:cTn id="25" dur="500"/>
+                                        <p:tgtEl>
+                                          <p:spTgt spid="352"/>
+                                        </p:tgtEl>
+                                      </p:cBhvr>
+                                    </p:animEffect>
+                                  </p:childTnLst>
+                                </p:cTn>
+                              </p:par>
+                              <p:par>
+                                <p:cTn id="26" presetID="10" presetClass="entr" presetSubtype="0" fill="hold" grpId="0" nodeType="withEffect">
+                                  <p:stCondLst>
+                                    <p:cond delay="0"/>
+                                  </p:stCondLst>
+                                  <p:childTnLst>
+                                    <p:set>
+                                      <p:cBhvr>
+                                        <p:cTn id="27" dur="1" fill="hold">
+                                          <p:stCondLst>
+                                            <p:cond delay="0"/>
+                                          </p:stCondLst>
+                                        </p:cTn>
+                                        <p:tgtEl>
+                                          <p:spTgt spid="345"/>
+                                        </p:tgtEl>
+                                        <p:attrNameLst>
+                                          <p:attrName>style.visibility</p:attrName>
+                                        </p:attrNameLst>
+                                      </p:cBhvr>
+                                      <p:to>
+                                        <p:strVal val="visible"/>
+                                      </p:to>
+                                    </p:set>
+                                    <p:animEffect transition="in" filter="fade">
+                                      <p:cBhvr>
+                                        <p:cTn id="28" dur="500"/>
+                                        <p:tgtEl>
+                                          <p:spTgt spid="345"/>
+                                        </p:tgtEl>
+                                      </p:cBhvr>
+                                    </p:animEffect>
+                                  </p:childTnLst>
+                                </p:cTn>
+                              </p:par>
+                            </p:childTnLst>
+                          </p:cTn>
+                        </p:par>
+                      </p:childTnLst>
+                    </p:cTn>
+                  </p:par>
+                  <p:par>
+                    <p:cTn id="29" fill="hold">
+                      <p:stCondLst>
+                        <p:cond delay="indefinite"/>
+                      </p:stCondLst>
+                      <p:childTnLst>
+                        <p:par>
+                          <p:cTn id="30" fill="hold">
+                            <p:stCondLst>
+                              <p:cond delay="0"/>
+                            </p:stCondLst>
+                            <p:childTnLst>
+                              <p:par>
+                                <p:cTn id="31" presetID="22" presetClass="entr" presetSubtype="8" fill="hold" nodeType="clickEffect">
+                                  <p:stCondLst>
+                                    <p:cond delay="0"/>
+                                  </p:stCondLst>
+                                  <p:childTnLst>
+                                    <p:set>
+                                      <p:cBhvr>
+                                        <p:cTn id="32" dur="1" fill="hold">
+                                          <p:stCondLst>
+                                            <p:cond delay="0"/>
+                                          </p:stCondLst>
+                                        </p:cTn>
+                                        <p:tgtEl>
+                                          <p:spTgt spid="356"/>
+                                        </p:tgtEl>
+                                        <p:attrNameLst>
+                                          <p:attrName>style.visibility</p:attrName>
+                                        </p:attrNameLst>
+                                      </p:cBhvr>
+                                      <p:to>
+                                        <p:strVal val="visible"/>
+                                      </p:to>
+                                    </p:set>
+                                    <p:animEffect transition="in" filter="wipe(left)">
+                                      <p:cBhvr>
+                                        <p:cTn id="33" dur="500"/>
+                                        <p:tgtEl>
+                                          <p:spTgt spid="356"/>
+                                        </p:tgtEl>
+                                      </p:cBhvr>
+                                    </p:animEffect>
+                                  </p:childTnLst>
+                                </p:cTn>
+                              </p:par>
+                            </p:childTnLst>
+                          </p:cTn>
+                        </p:par>
+                      </p:childTnLst>
+                    </p:cTn>
+                  </p:par>
+                  <p:par>
+                    <p:cTn id="34" fill="hold">
+                      <p:stCondLst>
+                        <p:cond delay="indefinite"/>
+                      </p:stCondLst>
+                      <p:childTnLst>
+                        <p:par>
+                          <p:cTn id="35" fill="hold">
+                            <p:stCondLst>
+                              <p:cond delay="0"/>
+                            </p:stCondLst>
+                            <p:childTnLst>
+                              <p:par>
+                                <p:cTn id="36" presetID="22" presetClass="entr" presetSubtype="8" fill="hold" grpId="0" nodeType="clickEffect">
+                                  <p:stCondLst>
+                                    <p:cond delay="0"/>
+                                  </p:stCondLst>
+                                  <p:childTnLst>
+                                    <p:set>
+                                      <p:cBhvr>
+                                        <p:cTn id="37" dur="1" fill="hold">
+                                          <p:stCondLst>
+                                            <p:cond delay="0"/>
+                                          </p:stCondLst>
+                                        </p:cTn>
+                                        <p:tgtEl>
+                                          <p:spTgt spid="346"/>
+                                        </p:tgtEl>
+                                        <p:attrNameLst>
+                                          <p:attrName>style.visibility</p:attrName>
+                                        </p:attrNameLst>
+                                      </p:cBhvr>
+                                      <p:to>
+                                        <p:strVal val="visible"/>
+                                      </p:to>
+                                    </p:set>
+                                    <p:animEffect transition="in" filter="wipe(left)">
+                                      <p:cBhvr>
+                                        <p:cTn id="38" dur="500"/>
+                                        <p:tgtEl>
+                                          <p:spTgt spid="346"/>
+                                        </p:tgtEl>
+                                      </p:cBhvr>
+                                    </p:animEffect>
+                                  </p:childTnLst>
+                                </p:cTn>
+                              </p:par>
+                            </p:childTnLst>
+                          </p:cTn>
+                        </p:par>
+                      </p:childTnLst>
+                    </p:cTn>
+                  </p:par>
+                  <p:par>
+                    <p:cTn id="39" fill="hold">
+                      <p:stCondLst>
+                        <p:cond delay="indefinite"/>
+                      </p:stCondLst>
+                      <p:childTnLst>
+                        <p:par>
+                          <p:cTn id="40" fill="hold">
+                            <p:stCondLst>
+                              <p:cond delay="0"/>
+                            </p:stCondLst>
+                            <p:childTnLst>
+                              <p:par>
+                                <p:cTn id="41" presetID="22" presetClass="entr" presetSubtype="8" fill="hold" nodeType="clickEffect">
+                                  <p:stCondLst>
+                                    <p:cond delay="0"/>
+                                  </p:stCondLst>
+                                  <p:childTnLst>
+                                    <p:set>
+                                      <p:cBhvr>
+                                        <p:cTn id="42" dur="1" fill="hold">
+                                          <p:stCondLst>
+                                            <p:cond delay="0"/>
+                                          </p:stCondLst>
+                                        </p:cTn>
+                                        <p:tgtEl>
+                                          <p:spTgt spid="353"/>
+                                        </p:tgtEl>
+                                        <p:attrNameLst>
+                                          <p:attrName>style.visibility</p:attrName>
+                                        </p:attrNameLst>
+                                      </p:cBhvr>
+                                      <p:to>
+                                        <p:strVal val="visible"/>
+                                      </p:to>
+                                    </p:set>
+                                    <p:animEffect transition="in" filter="wipe(left)">
+                                      <p:cBhvr>
+                                        <p:cTn id="43" dur="500"/>
+                                        <p:tgtEl>
+                                          <p:spTgt spid="353"/>
+                                        </p:tgtEl>
+                                      </p:cBhvr>
+                                    </p:animEffect>
+                                  </p:childTnLst>
+                                </p:cTn>
+                              </p:par>
+                              <p:par>
+                                <p:cTn id="44" presetID="10" presetClass="entr" presetSubtype="0" fill="hold" grpId="0" nodeType="withEffect">
+                                  <p:stCondLst>
+                                    <p:cond delay="0"/>
+                                  </p:stCondLst>
+                                  <p:childTnLst>
+                                    <p:set>
+                                      <p:cBhvr>
+                                        <p:cTn id="45" dur="1" fill="hold">
+                                          <p:stCondLst>
+                                            <p:cond delay="0"/>
+                                          </p:stCondLst>
+                                        </p:cTn>
+                                        <p:tgtEl>
+                                          <p:spTgt spid="347"/>
+                                        </p:tgtEl>
+                                        <p:attrNameLst>
+                                          <p:attrName>style.visibility</p:attrName>
+                                        </p:attrNameLst>
+                                      </p:cBhvr>
+                                      <p:to>
+                                        <p:strVal val="visible"/>
+                                      </p:to>
+                                    </p:set>
+                                    <p:animEffect transition="in" filter="fade">
+                                      <p:cBhvr>
+                                        <p:cTn id="46" dur="500"/>
+                                        <p:tgtEl>
+                                          <p:spTgt spid="347"/>
+                                        </p:tgtEl>
+                                      </p:cBhvr>
+                                    </p:animEffect>
+                                  </p:childTnLst>
+                                </p:cTn>
+                              </p:par>
+                            </p:childTnLst>
+                          </p:cTn>
+                        </p:par>
+                      </p:childTnLst>
+                    </p:cTn>
+                  </p:par>
+                  <p:par>
+                    <p:cTn id="47" fill="hold">
+                      <p:stCondLst>
+                        <p:cond delay="indefinite"/>
+                      </p:stCondLst>
+                      <p:childTnLst>
+                        <p:par>
+                          <p:cTn id="48" fill="hold">
+                            <p:stCondLst>
+                              <p:cond delay="0"/>
+                            </p:stCondLst>
+                            <p:childTnLst>
+                              <p:par>
+                                <p:cTn id="49" presetID="22" presetClass="entr" presetSubtype="8" fill="hold" nodeType="clickEffect">
+                                  <p:stCondLst>
+                                    <p:cond delay="0"/>
+                                  </p:stCondLst>
+                                  <p:childTnLst>
+                                    <p:set>
+                                      <p:cBhvr>
+                                        <p:cTn id="50" dur="1" fill="hold">
+                                          <p:stCondLst>
+                                            <p:cond delay="0"/>
+                                          </p:stCondLst>
+                                        </p:cTn>
+                                        <p:tgtEl>
+                                          <p:spTgt spid="357"/>
+                                        </p:tgtEl>
+                                        <p:attrNameLst>
+                                          <p:attrName>style.visibility</p:attrName>
+                                        </p:attrNameLst>
+                                      </p:cBhvr>
+                                      <p:to>
+                                        <p:strVal val="visible"/>
+                                      </p:to>
+                                    </p:set>
+                                    <p:animEffect transition="in" filter="wipe(left)">
+                                      <p:cBhvr>
+                                        <p:cTn id="51" dur="500"/>
+                                        <p:tgtEl>
+                                          <p:spTgt spid="357"/>
+                                        </p:tgtEl>
+                                      </p:cBhvr>
+                                    </p:animEffect>
+                                  </p:childTnLst>
+                                </p:cTn>
+                              </p:par>
+                            </p:childTnLst>
+                          </p:cTn>
+                        </p:par>
+                      </p:childTnLst>
+                    </p:cTn>
+                  </p:par>
+                  <p:par>
+                    <p:cTn id="52" fill="hold">
+                      <p:stCondLst>
+                        <p:cond delay="indefinite"/>
+                      </p:stCondLst>
+                      <p:childTnLst>
+                        <p:par>
+                          <p:cTn id="53" fill="hold">
+                            <p:stCondLst>
+                              <p:cond delay="0"/>
+                            </p:stCondLst>
+                            <p:childTnLst>
+                              <p:par>
+                                <p:cTn id="54" presetID="22" presetClass="entr" presetSubtype="8" fill="hold" grpId="0" nodeType="clickEffect">
+                                  <p:stCondLst>
+                                    <p:cond delay="0"/>
+                                  </p:stCondLst>
+                                  <p:childTnLst>
+                                    <p:set>
+                                      <p:cBhvr>
+                                        <p:cTn id="55" dur="1" fill="hold">
+                                          <p:stCondLst>
+                                            <p:cond delay="0"/>
+                                          </p:stCondLst>
+                                        </p:cTn>
+                                        <p:tgtEl>
+                                          <p:spTgt spid="348"/>
+                                        </p:tgtEl>
+                                        <p:attrNameLst>
+                                          <p:attrName>style.visibility</p:attrName>
+                                        </p:attrNameLst>
+                                      </p:cBhvr>
+                                      <p:to>
+                                        <p:strVal val="visible"/>
+                                      </p:to>
+                                    </p:set>
+                                    <p:animEffect transition="in" filter="wipe(left)">
+                                      <p:cBhvr>
+                                        <p:cTn id="56" dur="500"/>
+                                        <p:tgtEl>
+                                          <p:spTgt spid="348"/>
+                                        </p:tgtEl>
+                                      </p:cBhvr>
+                                    </p:animEffect>
+                                  </p:childTnLst>
+                                </p:cTn>
+                              </p:par>
+                            </p:childTnLst>
+                          </p:cTn>
+                        </p:par>
+                      </p:childTnLst>
+                    </p:cTn>
+                  </p:par>
+                </p:childTnLst>
+              </p:cTn>
+              <p:prevCondLst>
+                <p:cond evt="onPrev" delay="0">
+                  <p:tgtEl>
+                    <p:sldTgt/>
+                  </p:tgtEl>
+                </p:cond>
+              </p:prevCondLst>
+              <p:nextCondLst>
+                <p:cond evt="onNext" delay="0">
+                  <p:tgtEl>
+                    <p:sldTgt/>
+                  </p:tgtEl>
+                </p:cond>
+              </p:nextCondLst>
+            </p:seq>
+          </p:childTnLst>
+        </p:cTn>
+      </p:par>
+    </p:tnLst>
+    <p:bldLst>
+      <p:bldP spid="343" grpId="0"/>
+      <p:bldP spid="344" grpId="0"/>
+      <p:bldP spid="345" grpId="0"/>
+      <p:bldP spid="346" grpId="0"/>
+      <p:bldP spid="347" grpId="0"/>
+      <p:bldP spid="348" grpId="0"/>
+    </p:bldLst>
+  </p:timing>
 </p:sld>
 </file>
 
@@ -36558,6 +38871,50 @@
       </p:sp>
       <p:sp>
         <p:nvSpPr>
+          <p:cNvPr id="331" name="Google Shape;331;p34">
+            <a:extLst>
+              <a:ext uri="{FF2B5EF4-FFF2-40B4-BE49-F238E27FC236}">
+                <a16:creationId xmlns:a16="http://schemas.microsoft.com/office/drawing/2014/main" id="{98945EFF-B046-F0BB-4DFD-4FF7CD683054}"/>
+              </a:ext>
+            </a:extLst>
+          </p:cNvPr>
+          <p:cNvSpPr txBox="1">
+            <a:spLocks noGrp="1"/>
+          </p:cNvSpPr>
+          <p:nvPr>
+            <p:ph type="title" idx="2"/>
+          </p:nvPr>
+        </p:nvSpPr>
+        <p:spPr>
+          <a:prstGeom prst="rect">
+            <a:avLst/>
+          </a:prstGeom>
+        </p:spPr>
+        <p:txBody>
+          <a:bodyPr spcFirstLastPara="1" wrap="square" lIns="91425" tIns="91425" rIns="91425" bIns="91425" anchor="b" anchorCtr="0">
+            <a:noAutofit/>
+          </a:bodyPr>
+          <a:lstStyle/>
+          <a:p>
+            <a:pPr marL="0" lvl="0" indent="0" algn="ctr" rtl="0">
+              <a:spcBef>
+                <a:spcPts val="0"/>
+              </a:spcBef>
+              <a:spcAft>
+                <a:spcPts val="0"/>
+              </a:spcAft>
+              <a:buNone/>
+            </a:pPr>
+            <a:r>
+              <a:rPr lang="en" dirty="0"/>
+              <a:t>02</a:t>
+            </a:r>
+            <a:endParaRPr dirty="0"/>
+          </a:p>
+        </p:txBody>
+      </p:sp>
+      <p:sp>
+        <p:nvSpPr>
           <p:cNvPr id="330" name="Google Shape;330;p34">
             <a:extLst>
               <a:ext uri="{FF2B5EF4-FFF2-40B4-BE49-F238E27FC236}">
@@ -36592,54 +38949,6 @@
               <a:rPr lang="en-US" b="1" dirty="0"/>
               <a:t>Background And Existing Work</a:t>
             </a:r>
-          </a:p>
-        </p:txBody>
-      </p:sp>
-      <p:sp>
-        <p:nvSpPr>
-          <p:cNvPr id="331" name="Google Shape;331;p34">
-            <a:extLst>
-              <a:ext uri="{FF2B5EF4-FFF2-40B4-BE49-F238E27FC236}">
-                <a16:creationId xmlns:a16="http://schemas.microsoft.com/office/drawing/2014/main" id="{98945EFF-B046-F0BB-4DFD-4FF7CD683054}"/>
-              </a:ext>
-            </a:extLst>
-          </p:cNvPr>
-          <p:cNvSpPr txBox="1">
-            <a:spLocks noGrp="1"/>
-          </p:cNvSpPr>
-          <p:nvPr>
-            <p:ph type="title" idx="2"/>
-          </p:nvPr>
-        </p:nvSpPr>
-        <p:spPr>
-          <a:xfrm>
-            <a:off x="713213" y="1492050"/>
-            <a:ext cx="1194000" cy="1106700"/>
-          </a:xfrm>
-          <a:prstGeom prst="rect">
-            <a:avLst/>
-          </a:prstGeom>
-        </p:spPr>
-        <p:txBody>
-          <a:bodyPr spcFirstLastPara="1" wrap="square" lIns="91425" tIns="91425" rIns="91425" bIns="91425" anchor="b" anchorCtr="0">
-            <a:noAutofit/>
-          </a:bodyPr>
-          <a:lstStyle/>
-          <a:p>
-            <a:pPr marL="0" lvl="0" indent="0" algn="ctr" rtl="0">
-              <a:spcBef>
-                <a:spcPts val="0"/>
-              </a:spcBef>
-              <a:spcAft>
-                <a:spcPts val="0"/>
-              </a:spcAft>
-              <a:buNone/>
-            </a:pPr>
-            <a:r>
-              <a:rPr lang="en" dirty="0"/>
-              <a:t>02</a:t>
-            </a:r>
-            <a:endParaRPr dirty="0"/>
           </a:p>
         </p:txBody>
       </p:sp>
@@ -37012,6 +39321,172 @@
   <p:clrMapOvr>
     <a:masterClrMapping/>
   </p:clrMapOvr>
+  <mc:AlternateContent xmlns:mc="http://schemas.openxmlformats.org/markup-compatibility/2006">
+    <mc:Choice xmlns:p14="http://schemas.microsoft.com/office/powerpoint/2010/main" Requires="p14">
+      <p:transition spd="slow" p14:dur="1600">
+        <p14:prism isContent="1" isInverted="1"/>
+      </p:transition>
+    </mc:Choice>
+    <mc:Fallback>
+      <p:transition spd="slow">
+        <p:fade/>
+      </p:transition>
+    </mc:Fallback>
+  </mc:AlternateContent>
+  <p:timing>
+    <p:tnLst>
+      <p:par>
+        <p:cTn id="1" dur="indefinite" restart="never" nodeType="tmRoot">
+          <p:childTnLst>
+            <p:seq concurrent="1" nextAc="seek">
+              <p:cTn id="2" dur="indefinite" nodeType="mainSeq">
+                <p:childTnLst>
+                  <p:par>
+                    <p:cTn id="3" fill="hold">
+                      <p:stCondLst>
+                        <p:cond delay="indefinite"/>
+                        <p:cond evt="onBegin" delay="0">
+                          <p:tn val="2"/>
+                        </p:cond>
+                      </p:stCondLst>
+                      <p:childTnLst>
+                        <p:par>
+                          <p:cTn id="4" fill="hold">
+                            <p:stCondLst>
+                              <p:cond delay="0"/>
+                            </p:stCondLst>
+                            <p:childTnLst>
+                              <p:par>
+                                <p:cTn id="5" presetID="27" presetClass="emph" presetSubtype="0" fill="remove" grpId="0" nodeType="withEffect">
+                                  <p:stCondLst>
+                                    <p:cond delay="0"/>
+                                  </p:stCondLst>
+                                  <p:childTnLst>
+                                    <p:animClr clrSpc="rgb" dir="cw">
+                                      <p:cBhvr override="childStyle">
+                                        <p:cTn id="6" dur="250" autoRev="1" fill="remove"/>
+                                        <p:tgtEl>
+                                          <p:spTgt spid="331"/>
+                                        </p:tgtEl>
+                                        <p:attrNameLst>
+                                          <p:attrName>style.color</p:attrName>
+                                        </p:attrNameLst>
+                                      </p:cBhvr>
+                                      <p:to>
+                                        <a:schemeClr val="bg1"/>
+                                      </p:to>
+                                    </p:animClr>
+                                    <p:animClr clrSpc="rgb" dir="cw">
+                                      <p:cBhvr>
+                                        <p:cTn id="7" dur="250" autoRev="1" fill="remove"/>
+                                        <p:tgtEl>
+                                          <p:spTgt spid="331"/>
+                                        </p:tgtEl>
+                                        <p:attrNameLst>
+                                          <p:attrName>fillcolor</p:attrName>
+                                        </p:attrNameLst>
+                                      </p:cBhvr>
+                                      <p:to>
+                                        <a:schemeClr val="bg1"/>
+                                      </p:to>
+                                    </p:animClr>
+                                    <p:set>
+                                      <p:cBhvr>
+                                        <p:cTn id="8" dur="250" autoRev="1" fill="remove"/>
+                                        <p:tgtEl>
+                                          <p:spTgt spid="331"/>
+                                        </p:tgtEl>
+                                        <p:attrNameLst>
+                                          <p:attrName>fill.type</p:attrName>
+                                        </p:attrNameLst>
+                                      </p:cBhvr>
+                                      <p:to>
+                                        <p:strVal val="solid"/>
+                                      </p:to>
+                                    </p:set>
+                                    <p:set>
+                                      <p:cBhvr>
+                                        <p:cTn id="9" dur="250" autoRev="1" fill="remove"/>
+                                        <p:tgtEl>
+                                          <p:spTgt spid="331"/>
+                                        </p:tgtEl>
+                                        <p:attrNameLst>
+                                          <p:attrName>fill.on</p:attrName>
+                                        </p:attrNameLst>
+                                      </p:cBhvr>
+                                      <p:to>
+                                        <p:strVal val="true"/>
+                                      </p:to>
+                                    </p:set>
+                                  </p:childTnLst>
+                                </p:cTn>
+                              </p:par>
+                              <p:par>
+                                <p:cTn id="10" presetID="22" presetClass="entr" presetSubtype="4" fill="hold" nodeType="withEffect">
+                                  <p:stCondLst>
+                                    <p:cond delay="0"/>
+                                  </p:stCondLst>
+                                  <p:childTnLst>
+                                    <p:set>
+                                      <p:cBhvr>
+                                        <p:cTn id="11" dur="1" fill="hold">
+                                          <p:stCondLst>
+                                            <p:cond delay="0"/>
+                                          </p:stCondLst>
+                                        </p:cTn>
+                                        <p:tgtEl>
+                                          <p:spTgt spid="332"/>
+                                        </p:tgtEl>
+                                        <p:attrNameLst>
+                                          <p:attrName>style.visibility</p:attrName>
+                                        </p:attrNameLst>
+                                      </p:cBhvr>
+                                      <p:to>
+                                        <p:strVal val="visible"/>
+                                      </p:to>
+                                    </p:set>
+                                    <p:animEffect transition="in" filter="wipe(down)">
+                                      <p:cBhvr>
+                                        <p:cTn id="12" dur="500"/>
+                                        <p:tgtEl>
+                                          <p:spTgt spid="332"/>
+                                        </p:tgtEl>
+                                      </p:cBhvr>
+                                    </p:animEffect>
+                                  </p:childTnLst>
+                                </p:cTn>
+                              </p:par>
+                            </p:childTnLst>
+                          </p:cTn>
+                        </p:par>
+                      </p:childTnLst>
+                    </p:cTn>
+                  </p:par>
+                </p:childTnLst>
+              </p:cTn>
+              <p:prevCondLst>
+                <p:cond evt="onPrev" delay="0">
+                  <p:tgtEl>
+                    <p:sldTgt/>
+                  </p:tgtEl>
+                </p:cond>
+              </p:prevCondLst>
+              <p:nextCondLst>
+                <p:cond evt="onNext" delay="0">
+                  <p:tgtEl>
+                    <p:sldTgt/>
+                  </p:tgtEl>
+                </p:cond>
+              </p:nextCondLst>
+            </p:seq>
+          </p:childTnLst>
+        </p:cTn>
+      </p:par>
+    </p:tnLst>
+    <p:bldLst>
+      <p:bldP spid="331" grpId="0" animBg="1"/>
+    </p:bldLst>
+  </p:timing>
 </p:sld>
 </file>
 
@@ -37578,11 +40053,12 @@
 </file>
 
 <file path=customXml/item1.xml><?xml version="1.0" encoding="utf-8"?>
-<p:properties xmlns:p="http://schemas.microsoft.com/office/2006/metadata/properties" xmlns:xsi="http://www.w3.org/2001/XMLSchema-instance" xmlns:pc="http://schemas.microsoft.com/office/infopath/2007/PartnerControls">
-  <documentManagement>
-    <_activity xmlns="9427ba3f-bf6b-4e36-982f-401b240078b5" xsi:nil="true"/>
-  </documentManagement>
-</p:properties>
+<?mso-contentType ?>
+<FormTemplates xmlns="http://schemas.microsoft.com/sharepoint/v3/contenttype/forms">
+  <Display>DocumentLibraryForm</Display>
+  <Edit>DocumentLibraryForm</Edit>
+  <New>DocumentLibraryForm</New>
+</FormTemplates>
 </file>
 
 <file path=customXml/item2.xml><?xml version="1.0" encoding="utf-8"?>
@@ -37775,27 +40251,17 @@
 </file>
 
 <file path=customXml/item3.xml><?xml version="1.0" encoding="utf-8"?>
-<?mso-contentType ?>
-<FormTemplates xmlns="http://schemas.microsoft.com/sharepoint/v3/contenttype/forms">
-  <Display>DocumentLibraryForm</Display>
-  <Edit>DocumentLibraryForm</Edit>
-  <New>DocumentLibraryForm</New>
-</FormTemplates>
+<p:properties xmlns:p="http://schemas.microsoft.com/office/2006/metadata/properties" xmlns:xsi="http://www.w3.org/2001/XMLSchema-instance" xmlns:pc="http://schemas.microsoft.com/office/infopath/2007/PartnerControls">
+  <documentManagement>
+    <_activity xmlns="9427ba3f-bf6b-4e36-982f-401b240078b5" xsi:nil="true"/>
+  </documentManagement>
+</p:properties>
 </file>
 
 <file path=customXml/itemProps1.xml><?xml version="1.0" encoding="utf-8"?>
-<ds:datastoreItem xmlns:ds="http://schemas.openxmlformats.org/officeDocument/2006/customXml" ds:itemID="{672E6D98-677C-41B8-8A0A-E214B4F1B9ED}">
+<ds:datastoreItem xmlns:ds="http://schemas.openxmlformats.org/officeDocument/2006/customXml" ds:itemID="{4309E11F-D857-4267-A6D9-2945B8F42689}">
   <ds:schemaRefs>
-    <ds:schemaRef ds:uri="http://schemas.openxmlformats.org/package/2006/metadata/core-properties"/>
-    <ds:schemaRef ds:uri="http://purl.org/dc/dcmitype/"/>
-    <ds:schemaRef ds:uri="http://schemas.microsoft.com/office/2006/metadata/properties"/>
-    <ds:schemaRef ds:uri="http://purl.org/dc/elements/1.1/"/>
-    <ds:schemaRef ds:uri="9427ba3f-bf6b-4e36-982f-401b240078b5"/>
-    <ds:schemaRef ds:uri="http://schemas.microsoft.com/office/2006/documentManagement/types"/>
-    <ds:schemaRef ds:uri="ed82aeb9-b910-4c50-992f-22dbdd50696f"/>
-    <ds:schemaRef ds:uri="http://www.w3.org/XML/1998/namespace"/>
-    <ds:schemaRef ds:uri="http://schemas.microsoft.com/office/infopath/2007/PartnerControls"/>
-    <ds:schemaRef ds:uri="http://purl.org/dc/terms/"/>
+    <ds:schemaRef ds:uri="http://schemas.microsoft.com/sharepoint/v3/contenttype/forms"/>
   </ds:schemaRefs>
 </ds:datastoreItem>
 </file>
@@ -37820,9 +40286,18 @@
 </file>
 
 <file path=customXml/itemProps3.xml><?xml version="1.0" encoding="utf-8"?>
-<ds:datastoreItem xmlns:ds="http://schemas.openxmlformats.org/officeDocument/2006/customXml" ds:itemID="{4309E11F-D857-4267-A6D9-2945B8F42689}">
+<ds:datastoreItem xmlns:ds="http://schemas.openxmlformats.org/officeDocument/2006/customXml" ds:itemID="{672E6D98-677C-41B8-8A0A-E214B4F1B9ED}">
   <ds:schemaRefs>
-    <ds:schemaRef ds:uri="http://schemas.microsoft.com/sharepoint/v3/contenttype/forms"/>
+    <ds:schemaRef ds:uri="http://schemas.openxmlformats.org/package/2006/metadata/core-properties"/>
+    <ds:schemaRef ds:uri="http://purl.org/dc/dcmitype/"/>
+    <ds:schemaRef ds:uri="http://schemas.microsoft.com/office/2006/metadata/properties"/>
+    <ds:schemaRef ds:uri="http://purl.org/dc/elements/1.1/"/>
+    <ds:schemaRef ds:uri="9427ba3f-bf6b-4e36-982f-401b240078b5"/>
+    <ds:schemaRef ds:uri="http://schemas.microsoft.com/office/2006/documentManagement/types"/>
+    <ds:schemaRef ds:uri="ed82aeb9-b910-4c50-992f-22dbdd50696f"/>
+    <ds:schemaRef ds:uri="http://www.w3.org/XML/1998/namespace"/>
+    <ds:schemaRef ds:uri="http://schemas.microsoft.com/office/infopath/2007/PartnerControls"/>
+    <ds:schemaRef ds:uri="http://purl.org/dc/terms/"/>
   </ds:schemaRefs>
 </ds:datastoreItem>
 </file>